--- a/zanyatiya/Zanyatie_02_Praktika1_Slaydy.pptx
+++ b/zanyatiya/Zanyatie_02_Praktika1_Slaydy.pptx
@@ -15,9 +15,10 @@
     <p:sldId id="263" r:id="rId9"/>
     <p:sldId id="264" r:id="rId10"/>
     <p:sldId id="265" r:id="rId11"/>
+    <p:sldId id="266" r:id="rId12"/>
   </p:sldIdLst>
   <p:notesMasterIdLst>
-    <p:notesMasterId r:id="rId12"/>
+    <p:notesMasterId r:id="rId13"/>
   </p:notesMasterIdLst>
   <p:sldSz cx="9144000" cy="5143500"/>
   <p:notesSz cx="5143500" cy="9144000"/>
@@ -599,7 +600,7 @@
           <a:p>
             <a:r>
               <a:rPr lang="en-US" dirty="0"/>
-              <a:t>Продиктовать и убедиться, что записали.</a:t>
+              <a:t>Пять минут на поиск, пять на устный разбор в паре.</a:t>
             </a:r>
             <a:endParaRPr lang="en-US" dirty="0"/>
           </a:p>
@@ -623,6 +624,94 @@
             <a:fld id="{F7021451-1387-4CA6-816F-3879F97B5CBC}" type="slidenum">
               <a:rPr lang="en-US"/>
               <a:t>10</a:t>
+            </a:fld>
+            <a:endParaRPr lang="en-US"/>
+          </a:p>
+        </p:txBody>
+      </p:sp>
+    </p:spTree>
+    <p:extLst>
+      <p:ext uri="{BB962C8B-B14F-4D97-AF65-F5344CB8AC3E}">
+        <p14:creationId xmlns:p14="http://schemas.microsoft.com/office/powerpoint/2010/main" val="1024086991"/>
+      </p:ext>
+    </p:extLst>
+  </p:cSld>
+  <p:clrMapOvr>
+    <a:masterClrMapping/>
+  </p:clrMapOvr>
+</p:notes>
+</file>
+
+<file path=ppt/notesSlides/notesSlide11.xml><?xml version="1.0" encoding="utf-8"?>
+<p:notes xmlns:a="http://schemas.openxmlformats.org/drawingml/2006/main" xmlns:r="http://schemas.openxmlformats.org/officeDocument/2006/relationships" xmlns:p="http://schemas.openxmlformats.org/presentationml/2006/main">
+  <p:cSld>
+    <p:spTree>
+      <p:nvGrpSpPr>
+        <p:cNvPr id="1" name=""/>
+        <p:cNvGrpSpPr/>
+        <p:nvPr/>
+      </p:nvGrpSpPr>
+      <p:grpSpPr>
+        <a:xfrm>
+          <a:off x="0" y="0"/>
+          <a:ext cx="0" cy="0"/>
+          <a:chOff x="0" y="0"/>
+          <a:chExt cx="0" cy="0"/>
+        </a:xfrm>
+      </p:grpSpPr>
+      <p:sp>
+        <p:nvSpPr>
+          <p:cNvPr id="2" name="Slide Image Placeholder 1"/>
+          <p:cNvSpPr>
+            <a:spLocks noGrp="1" noRot="1" noChangeAspect="1"/>
+          </p:cNvSpPr>
+          <p:nvPr>
+            <p:ph type="sldImg"/>
+          </p:nvPr>
+        </p:nvSpPr>
+        <p:spPr/>
+      </p:sp>
+      <p:sp>
+        <p:nvSpPr>
+          <p:cNvPr id="3" name="Notes Placeholder 2"/>
+          <p:cNvSpPr>
+            <a:spLocks noGrp="1"/>
+          </p:cNvSpPr>
+          <p:nvPr>
+            <p:ph type="body" idx="1"/>
+          </p:nvPr>
+        </p:nvSpPr>
+        <p:spPr/>
+        <p:txBody>
+          <a:bodyPr/>
+          <a:lstStyle/>
+          <a:p>
+            <a:r>
+              <a:rPr lang="en-US" dirty="0"/>
+              <a:t>Продиктовать и убедиться, что записали.</a:t>
+            </a:r>
+            <a:endParaRPr lang="en-US" dirty="0"/>
+          </a:p>
+        </p:txBody>
+      </p:sp>
+      <p:sp>
+        <p:nvSpPr>
+          <p:cNvPr id="4" name="Slide Number Placeholder 3"/>
+          <p:cNvSpPr>
+            <a:spLocks noGrp="1"/>
+          </p:cNvSpPr>
+          <p:nvPr>
+            <p:ph type="sldNum" sz="quarter" idx="10"/>
+          </p:nvPr>
+        </p:nvSpPr>
+        <p:spPr/>
+        <p:txBody>
+          <a:bodyPr/>
+          <a:lstStyle/>
+          <a:p>
+            <a:fld id="{F7021451-1387-4CA6-816F-3879F97B5CBC}" type="slidenum">
+              <a:rPr lang="en-US"/>
+              <a:t>11</a:t>
             </a:fld>
             <a:endParaRPr lang="en-US"/>
           </a:p>
@@ -1215,7 +1304,7 @@
           <a:p>
             <a:r>
               <a:rPr lang="en-US" dirty="0"/>
-              <a:t>Не сокращать. Единственный блок, дающий итоговый артефакт занятия.</a:t>
+              <a:t>Число в M обязательно, даже условное. Ноль лучше не оставлять — приблизительное число можно уточнить позже, отсутствие числа нельзя проверить никогда.</a:t>
             </a:r>
             <a:endParaRPr lang="en-US" dirty="0"/>
           </a:p>
@@ -1303,7 +1392,7 @@
           <a:p>
             <a:r>
               <a:rPr lang="en-US" dirty="0"/>
-              <a:t>Пять минут на поиск, пять на устный разбор в паре.</a:t>
+              <a:t>Не сокращать. Единственный блок, дающий итоговый артефакт занятия.</a:t>
             </a:r>
             <a:endParaRPr lang="en-US" dirty="0"/>
           </a:p>
@@ -1903,6 +1992,224 @@
                 <a:ea typeface="Arial" pitchFamily="34" charset="-122"/>
                 <a:cs typeface="Arial" pitchFamily="34" charset="-120"/>
               </a:rPr>
+              <a:t>75–85 МИН</a:t>
+            </a:r>
+            <a:endParaRPr lang="en-US" sz="1100" dirty="0"/>
+          </a:p>
+        </p:txBody>
+      </p:sp>
+      <p:sp>
+        <p:nvSpPr>
+          <p:cNvPr id="3" name="Text 1"/>
+          <p:cNvSpPr txBox="1"/>
+          <p:nvPr/>
+        </p:nvSpPr>
+        <p:spPr>
+          <a:xfrm>
+            <a:off x="502920" y="365760"/>
+            <a:ext cx="8138160" cy="640080"/>
+          </a:xfrm>
+          <a:prstGeom prst="rect">
+            <a:avLst/>
+          </a:prstGeom>
+          <a:noFill/>
+          <a:ln/>
+        </p:spPr>
+        <p:txBody>
+          <a:bodyPr wrap="square" lIns="0" tIns="0" rIns="0" bIns="0" rtlCol="0" anchor="ctr"/>
+          <a:lstStyle/>
+          <a:p>
+            <a:pPr indent="0" marL="0">
+              <a:buNone/>
+            </a:pPr>
+            <a:r>
+              <a:rPr lang="en-US" sz="2700" b="1" dirty="0">
+                <a:solidFill>
+                  <a:srgbClr val="005AAA"/>
+                </a:solidFill>
+                <a:latin typeface="Arial" pitchFamily="34" charset="0"/>
+                <a:ea typeface="Arial" pitchFamily="34" charset="-122"/>
+                <a:cs typeface="Arial" pitchFamily="34" charset="-120"/>
+              </a:rPr>
+              <a:t>Соседняя команда ищет слабое место</a:t>
+            </a:r>
+            <a:endParaRPr lang="en-US" sz="2700" dirty="0"/>
+          </a:p>
+        </p:txBody>
+      </p:sp>
+      <p:sp>
+        <p:nvSpPr>
+          <p:cNvPr id="4" name="Shape 2"/>
+          <p:cNvSpPr/>
+          <p:nvPr/>
+        </p:nvSpPr>
+        <p:spPr>
+          <a:xfrm>
+            <a:off x="502920" y="1463040"/>
+            <a:ext cx="8138160" cy="1554480"/>
+          </a:xfrm>
+          <a:prstGeom prst="roundRect">
+            <a:avLst>
+              <a:gd name="adj" fmla="val 2941"/>
+            </a:avLst>
+          </a:prstGeom>
+          <a:solidFill>
+            <a:srgbClr val="F5F7FA"/>
+          </a:solidFill>
+          <a:ln w="9525">
+            <a:solidFill>
+              <a:srgbClr val="D8DEE6"/>
+            </a:solidFill>
+            <a:prstDash val="solid"/>
+          </a:ln>
+        </p:spPr>
+      </p:sp>
+      <p:sp>
+        <p:nvSpPr>
+          <p:cNvPr id="5" name="Text 3"/>
+          <p:cNvSpPr txBox="1"/>
+          <p:nvPr/>
+        </p:nvSpPr>
+        <p:spPr>
+          <a:xfrm>
+            <a:off x="777240" y="1737360"/>
+            <a:ext cx="7589520" cy="1005840"/>
+          </a:xfrm>
+          <a:prstGeom prst="rect">
+            <a:avLst/>
+          </a:prstGeom>
+          <a:noFill/>
+          <a:ln/>
+        </p:spPr>
+        <p:txBody>
+          <a:bodyPr wrap="square" lIns="0" tIns="0" rIns="0" bIns="0" rtlCol="0" anchor="ctr"/>
+          <a:lstStyle/>
+          <a:p>
+            <a:pPr indent="0" marL="0">
+              <a:lnSpc>
+                <a:spcPts val="2400"/>
+              </a:lnSpc>
+              <a:buNone/>
+            </a:pPr>
+            <a:r>
+              <a:rPr lang="en-US" sz="1600" dirty="0">
+                <a:solidFill>
+                  <a:srgbClr val="1E293B"/>
+                </a:solidFill>
+                <a:latin typeface="Arial" pitchFamily="34" charset="0"/>
+                <a:ea typeface="Arial" pitchFamily="34" charset="-122"/>
+                <a:cs typeface="Arial" pitchFamily="34" charset="-120"/>
+              </a:rPr>
+              <a:t>Обменяйтесь листом 2. Найдите ОДНУ букву SMART, которая на самом деле не выполнена, и напишите почему.</a:t>
+            </a:r>
+            <a:endParaRPr lang="en-US" sz="1600" dirty="0"/>
+          </a:p>
+        </p:txBody>
+      </p:sp>
+      <p:sp>
+        <p:nvSpPr>
+          <p:cNvPr id="6" name="Text 4"/>
+          <p:cNvSpPr txBox="1"/>
+          <p:nvPr/>
+        </p:nvSpPr>
+        <p:spPr>
+          <a:xfrm>
+            <a:off x="502920" y="3246120"/>
+            <a:ext cx="8138160" cy="457200"/>
+          </a:xfrm>
+          <a:prstGeom prst="rect">
+            <a:avLst/>
+          </a:prstGeom>
+          <a:noFill/>
+          <a:ln/>
+        </p:spPr>
+        <p:txBody>
+          <a:bodyPr wrap="square" lIns="0" tIns="0" rIns="0" bIns="0" rtlCol="0" anchor="ctr"/>
+          <a:lstStyle/>
+          <a:p>
+            <a:pPr indent="0" marL="0">
+              <a:buNone/>
+            </a:pPr>
+            <a:r>
+              <a:rPr lang="en-US" sz="1300" i="1" dirty="0">
+                <a:solidFill>
+                  <a:srgbClr val="64748B"/>
+                </a:solidFill>
+                <a:latin typeface="Arial" pitchFamily="34" charset="0"/>
+                <a:ea typeface="Arial" pitchFamily="34" charset="-122"/>
+                <a:cs typeface="Arial" pitchFamily="34" charset="-120"/>
+              </a:rPr>
+              <a:t>Найти слабое место в чужой цели — услуга, а не критика. В следующий раз то же самое сделают с вашей.</a:t>
+            </a:r>
+            <a:endParaRPr lang="en-US" sz="1300" dirty="0"/>
+          </a:p>
+        </p:txBody>
+      </p:sp>
+    </p:spTree>
+  </p:cSld>
+  <p:clrMapOvr>
+    <a:masterClrMapping/>
+  </p:clrMapOvr>
+</p:sld>
+</file>
+
+<file path=ppt/slides/slide11.xml><?xml version="1.0" encoding="utf-8"?>
+<p:sld xmlns:a="http://schemas.openxmlformats.org/drawingml/2006/main" xmlns:r="http://schemas.openxmlformats.org/officeDocument/2006/relationships" xmlns:p="http://schemas.openxmlformats.org/presentationml/2006/main">
+  <p:cSld name="Slide 11">
+    <p:bg>
+      <p:bgPr>
+        <a:solidFill>
+          <a:srgbClr val="FFFFFF"/>
+        </a:solidFill>
+      </p:bgPr>
+    </p:bg>
+    <p:spTree>
+      <p:nvGrpSpPr>
+        <p:cNvPr id="1" name=""/>
+        <p:cNvGrpSpPr/>
+        <p:nvPr/>
+      </p:nvGrpSpPr>
+      <p:grpSpPr>
+        <a:xfrm>
+          <a:off x="0" y="0"/>
+          <a:ext cx="0" cy="0"/>
+          <a:chOff x="0" y="0"/>
+          <a:chExt cx="0" cy="0"/>
+        </a:xfrm>
+      </p:grpSpPr>
+      <p:sp>
+        <p:nvSpPr>
+          <p:cNvPr id="2" name="Text 0"/>
+          <p:cNvSpPr txBox="1"/>
+          <p:nvPr/>
+        </p:nvSpPr>
+        <p:spPr>
+          <a:xfrm>
+            <a:off x="502920" y="182880"/>
+            <a:ext cx="8138160" cy="219456"/>
+          </a:xfrm>
+          <a:prstGeom prst="rect">
+            <a:avLst/>
+          </a:prstGeom>
+          <a:noFill/>
+          <a:ln/>
+        </p:spPr>
+        <p:txBody>
+          <a:bodyPr wrap="square" lIns="0" tIns="0" rIns="0" bIns="0" rtlCol="0" anchor="ctr"/>
+          <a:lstStyle/>
+          <a:p>
+            <a:pPr indent="0" marL="0">
+              <a:buNone/>
+            </a:pPr>
+            <a:r>
+              <a:rPr lang="en-US" sz="1100" spc="150" kern="0" dirty="0">
+                <a:solidFill>
+                  <a:srgbClr val="64748B"/>
+                </a:solidFill>
+                <a:latin typeface="Arial" pitchFamily="34" charset="0"/>
+                <a:ea typeface="Arial" pitchFamily="34" charset="-122"/>
+                <a:cs typeface="Arial" pitchFamily="34" charset="-120"/>
+              </a:rPr>
               <a:t>К ПРАКТИКЕ 2 · 19 СЕНТЯБРЯ</a:t>
             </a:r>
             <a:endParaRPr lang="en-US" sz="1100" dirty="0"/>
@@ -6494,7 +6801,7 @@
                 <a:ea typeface="Arial" pitchFamily="34" charset="-122"/>
                 <a:cs typeface="Arial" pitchFamily="34" charset="-120"/>
               </a:rPr>
-              <a:t>ЛИСТ 2 · 20 МИНУТ</a:t>
+              <a:t>РАЗБОР НА ДОСКЕ</a:t>
             </a:r>
             <a:endParaRPr lang="en-US" sz="1100" dirty="0"/>
           </a:p>
@@ -6508,8 +6815,8 @@
         </p:nvSpPr>
         <p:spPr>
           <a:xfrm>
-            <a:off x="502920" y="365760"/>
-            <a:ext cx="8138160" cy="640080"/>
+            <a:off x="502920" y="384048"/>
+            <a:ext cx="8138160" cy="502920"/>
           </a:xfrm>
           <a:prstGeom prst="rect">
             <a:avLst/>
@@ -6525,7 +6832,7 @@
               <a:buNone/>
             </a:pPr>
             <a:r>
-              <a:rPr lang="en-US" sz="2700" b="1" dirty="0">
+              <a:rPr lang="en-US" sz="2400" b="1" dirty="0">
                 <a:solidFill>
                   <a:srgbClr val="005AAA"/>
                 </a:solidFill>
@@ -6533,65 +6840,1051 @@
                 <a:ea typeface="Arial" pitchFamily="34" charset="-122"/>
                 <a:cs typeface="Arial" pitchFamily="34" charset="-120"/>
               </a:rPr>
-              <a:t>Разверните SMART-цель</a:t>
+              <a:t>SMART без числа — не SMART</a:t>
             </a:r>
-            <a:endParaRPr lang="en-US" sz="2700" dirty="0"/>
-          </a:p>
-        </p:txBody>
-      </p:sp>
-      <p:sp>
-        <p:nvSpPr>
-          <p:cNvPr id="4" name="Text 2"/>
-          <p:cNvSpPr txBox="1"/>
+            <a:endParaRPr lang="en-US" sz="2400" dirty="0"/>
+          </a:p>
+        </p:txBody>
+      </p:sp>
+      <p:graphicFrame>
+        <p:nvGraphicFramePr>
+          <p:cNvPr id="9" name="Table 0"/>
+          <p:cNvGraphicFramePr>
+            <a:graphicFrameLocks noGrp="1"/>
+          </p:cNvGraphicFramePr>
+          <p:nvPr>
+            <p:extLst>
+              <p:ext uri="{D42A27DB-BD31-4B8C-83A1-F6EECF244321}">
+                <p14:modId xmlns:p14="http://schemas.microsoft.com/office/powerpoint/2010/main" val="1579011935"/>
+              </p:ext>
+            </p:extLst>
+          </p:nvPr>
+        </p:nvGraphicFramePr>
+        <p:xfrm>
+          <a:off x="502920" y="1051560"/>
+          <a:ext cx="8138160" cy="914400"/>
+        </p:xfrm>
+        <a:graphic>
+          <a:graphicData uri="http://schemas.openxmlformats.org/drawingml/2006/table">
+            <a:tbl>
+              <a:tblPr/>
+              <a:tblGrid>
+                <a:gridCol w="1005840"/>
+                <a:gridCol w="3611880"/>
+                <a:gridCol w="3611880"/>
+              </a:tblGrid>
+              <a:tr h="566928">
+                <a:tc>
+                  <a:txBody>
+                    <a:bodyPr/>
+                    <a:lstStyle/>
+                    <a:p>
+                      <a:pPr algn="ctr" indent="0" marL="0">
+                        <a:buNone/>
+                      </a:pPr>
+                      <a:r>
+                        <a:rPr lang="en-US" sz="1150" b="1" dirty="0">
+                          <a:solidFill>
+                            <a:srgbClr val="FFFFFF"/>
+                          </a:solidFill>
+                          <a:latin typeface="Arial" pitchFamily="34" charset="0"/>
+                          <a:ea typeface="Arial" pitchFamily="34" charset="-122"/>
+                          <a:cs typeface="Arial" pitchFamily="34" charset="-120"/>
+                        </a:rPr>
+                        <a:t>Буква</a:t>
+                      </a:r>
+                      <a:endParaRPr lang="en-US" sz="1150" dirty="0">
+                        <a:latin typeface="Arial" charset="0"/>
+                        <a:ea typeface="Arial" charset="0"/>
+                        <a:cs typeface="Arial" charset="0"/>
+                      </a:endParaRPr>
+                    </a:p>
+                  </a:txBody>
+                  <a:tcPr marL="91440" marR="91440" marT="45720" marB="45720" anchor="ctr">
+                    <a:lnL w="6350" cap="flat" cmpd="sng" algn="ctr">
+                      <a:solidFill>
+                        <a:srgbClr val="D8DEE6"/>
+                      </a:solidFill>
+                      <a:prstDash val="solid"/>
+                      <a:round/>
+                      <a:headEnd type="none" w="med" len="med"/>
+                      <a:tailEnd type="none" w="med" len="med"/>
+                    </a:lnL>
+                    <a:lnR w="6350" cap="flat" cmpd="sng" algn="ctr">
+                      <a:solidFill>
+                        <a:srgbClr val="D8DEE6"/>
+                      </a:solidFill>
+                      <a:prstDash val="solid"/>
+                      <a:round/>
+                      <a:headEnd type="none" w="med" len="med"/>
+                      <a:tailEnd type="none" w="med" len="med"/>
+                    </a:lnR>
+                    <a:lnT w="6350" cap="flat" cmpd="sng" algn="ctr">
+                      <a:solidFill>
+                        <a:srgbClr val="D8DEE6"/>
+                      </a:solidFill>
+                      <a:prstDash val="solid"/>
+                      <a:round/>
+                      <a:headEnd type="none" w="med" len="med"/>
+                      <a:tailEnd type="none" w="med" len="med"/>
+                    </a:lnT>
+                    <a:lnB w="6350" cap="flat" cmpd="sng" algn="ctr">
+                      <a:solidFill>
+                        <a:srgbClr val="D8DEE6"/>
+                      </a:solidFill>
+                      <a:prstDash val="solid"/>
+                      <a:round/>
+                      <a:headEnd type="none" w="med" len="med"/>
+                      <a:tailEnd type="none" w="med" len="med"/>
+                    </a:lnB>
+                    <a:solidFill>
+                      <a:srgbClr val="1E4270"/>
+                    </a:solidFill>
+                  </a:tcPr>
+                </a:tc>
+                <a:tc>
+                  <a:txBody>
+                    <a:bodyPr/>
+                    <a:lstStyle/>
+                    <a:p>
+                      <a:pPr indent="0" marL="0">
+                        <a:buNone/>
+                      </a:pPr>
+                      <a:r>
+                        <a:rPr lang="en-US" sz="1150" b="1" dirty="0">
+                          <a:solidFill>
+                            <a:srgbClr val="FFFFFF"/>
+                          </a:solidFill>
+                          <a:latin typeface="Arial" pitchFamily="34" charset="0"/>
+                          <a:ea typeface="Arial" pitchFamily="34" charset="-122"/>
+                          <a:cs typeface="Arial" pitchFamily="34" charset="-120"/>
+                        </a:rPr>
+                        <a:t>Наивно</a:t>
+                      </a:r>
+                      <a:endParaRPr lang="en-US" sz="1150" dirty="0">
+                        <a:latin typeface="Arial" charset="0"/>
+                        <a:ea typeface="Arial" charset="0"/>
+                        <a:cs typeface="Arial" charset="0"/>
+                      </a:endParaRPr>
+                    </a:p>
+                  </a:txBody>
+                  <a:tcPr marL="91440" marR="91440" marT="45720" marB="45720" anchor="ctr">
+                    <a:lnL w="6350" cap="flat" cmpd="sng" algn="ctr">
+                      <a:solidFill>
+                        <a:srgbClr val="D8DEE6"/>
+                      </a:solidFill>
+                      <a:prstDash val="solid"/>
+                      <a:round/>
+                      <a:headEnd type="none" w="med" len="med"/>
+                      <a:tailEnd type="none" w="med" len="med"/>
+                    </a:lnL>
+                    <a:lnR w="6350" cap="flat" cmpd="sng" algn="ctr">
+                      <a:solidFill>
+                        <a:srgbClr val="D8DEE6"/>
+                      </a:solidFill>
+                      <a:prstDash val="solid"/>
+                      <a:round/>
+                      <a:headEnd type="none" w="med" len="med"/>
+                      <a:tailEnd type="none" w="med" len="med"/>
+                    </a:lnR>
+                    <a:lnT w="6350" cap="flat" cmpd="sng" algn="ctr">
+                      <a:solidFill>
+                        <a:srgbClr val="D8DEE6"/>
+                      </a:solidFill>
+                      <a:prstDash val="solid"/>
+                      <a:round/>
+                      <a:headEnd type="none" w="med" len="med"/>
+                      <a:tailEnd type="none" w="med" len="med"/>
+                    </a:lnT>
+                    <a:lnB w="6350" cap="flat" cmpd="sng" algn="ctr">
+                      <a:solidFill>
+                        <a:srgbClr val="D8DEE6"/>
+                      </a:solidFill>
+                      <a:prstDash val="solid"/>
+                      <a:round/>
+                      <a:headEnd type="none" w="med" len="med"/>
+                      <a:tailEnd type="none" w="med" len="med"/>
+                    </a:lnB>
+                    <a:solidFill>
+                      <a:srgbClr val="1E4270"/>
+                    </a:solidFill>
+                  </a:tcPr>
+                </a:tc>
+                <a:tc>
+                  <a:txBody>
+                    <a:bodyPr/>
+                    <a:lstStyle/>
+                    <a:p>
+                      <a:pPr indent="0" marL="0">
+                        <a:buNone/>
+                      </a:pPr>
+                      <a:r>
+                        <a:rPr lang="en-US" sz="1150" b="1" dirty="0">
+                          <a:solidFill>
+                            <a:srgbClr val="FFFFFF"/>
+                          </a:solidFill>
+                          <a:latin typeface="Arial" pitchFamily="34" charset="0"/>
+                          <a:ea typeface="Arial" pitchFamily="34" charset="-122"/>
+                          <a:cs typeface="Arial" pitchFamily="34" charset="-120"/>
+                        </a:rPr>
+                        <a:t>Дописано</a:t>
+                      </a:r>
+                      <a:endParaRPr lang="en-US" sz="1150" dirty="0">
+                        <a:latin typeface="Arial" charset="0"/>
+                        <a:ea typeface="Arial" charset="0"/>
+                        <a:cs typeface="Arial" charset="0"/>
+                      </a:endParaRPr>
+                    </a:p>
+                  </a:txBody>
+                  <a:tcPr marL="91440" marR="91440" marT="45720" marB="45720" anchor="ctr">
+                    <a:lnL w="6350" cap="flat" cmpd="sng" algn="ctr">
+                      <a:solidFill>
+                        <a:srgbClr val="D8DEE6"/>
+                      </a:solidFill>
+                      <a:prstDash val="solid"/>
+                      <a:round/>
+                      <a:headEnd type="none" w="med" len="med"/>
+                      <a:tailEnd type="none" w="med" len="med"/>
+                    </a:lnL>
+                    <a:lnR w="6350" cap="flat" cmpd="sng" algn="ctr">
+                      <a:solidFill>
+                        <a:srgbClr val="D8DEE6"/>
+                      </a:solidFill>
+                      <a:prstDash val="solid"/>
+                      <a:round/>
+                      <a:headEnd type="none" w="med" len="med"/>
+                      <a:tailEnd type="none" w="med" len="med"/>
+                    </a:lnR>
+                    <a:lnT w="6350" cap="flat" cmpd="sng" algn="ctr">
+                      <a:solidFill>
+                        <a:srgbClr val="D8DEE6"/>
+                      </a:solidFill>
+                      <a:prstDash val="solid"/>
+                      <a:round/>
+                      <a:headEnd type="none" w="med" len="med"/>
+                      <a:tailEnd type="none" w="med" len="med"/>
+                    </a:lnT>
+                    <a:lnB w="6350" cap="flat" cmpd="sng" algn="ctr">
+                      <a:solidFill>
+                        <a:srgbClr val="D8DEE6"/>
+                      </a:solidFill>
+                      <a:prstDash val="solid"/>
+                      <a:round/>
+                      <a:headEnd type="none" w="med" len="med"/>
+                      <a:tailEnd type="none" w="med" len="med"/>
+                    </a:lnB>
+                    <a:solidFill>
+                      <a:srgbClr val="1E4270"/>
+                    </a:solidFill>
+                  </a:tcPr>
+                </a:tc>
+              </a:tr>
+              <a:tr h="566928">
+                <a:tc>
+                  <a:txBody>
+                    <a:bodyPr/>
+                    <a:lstStyle/>
+                    <a:p>
+                      <a:pPr indent="0" marL="0">
+                        <a:buNone/>
+                      </a:pPr>
+                      <a:r>
+                        <a:rPr lang="en-US" sz="1150" dirty="0">
+                          <a:solidFill>
+                            <a:srgbClr val="1E293B"/>
+                          </a:solidFill>
+                          <a:latin typeface="Arial" pitchFamily="34" charset="0"/>
+                          <a:ea typeface="Arial" pitchFamily="34" charset="-122"/>
+                          <a:cs typeface="Arial" pitchFamily="34" charset="-120"/>
+                        </a:rPr>
+                        <a:t>S</a:t>
+                      </a:r>
+                      <a:endParaRPr lang="en-US" sz="1150" dirty="0">
+                        <a:latin typeface="Arial" charset="0"/>
+                        <a:ea typeface="Arial" charset="0"/>
+                        <a:cs typeface="Arial" charset="0"/>
+                      </a:endParaRPr>
+                    </a:p>
+                  </a:txBody>
+                  <a:tcPr marL="91440" marR="91440" marT="45720" marB="45720" anchor="ctr">
+                    <a:lnL w="6350" cap="flat" cmpd="sng" algn="ctr">
+                      <a:solidFill>
+                        <a:srgbClr val="D8DEE6"/>
+                      </a:solidFill>
+                      <a:prstDash val="solid"/>
+                      <a:round/>
+                      <a:headEnd type="none" w="med" len="med"/>
+                      <a:tailEnd type="none" w="med" len="med"/>
+                    </a:lnL>
+                    <a:lnR w="6350" cap="flat" cmpd="sng" algn="ctr">
+                      <a:solidFill>
+                        <a:srgbClr val="D8DEE6"/>
+                      </a:solidFill>
+                      <a:prstDash val="solid"/>
+                      <a:round/>
+                      <a:headEnd type="none" w="med" len="med"/>
+                      <a:tailEnd type="none" w="med" len="med"/>
+                    </a:lnR>
+                    <a:lnT w="6350" cap="flat" cmpd="sng" algn="ctr">
+                      <a:solidFill>
+                        <a:srgbClr val="D8DEE6"/>
+                      </a:solidFill>
+                      <a:prstDash val="solid"/>
+                      <a:round/>
+                      <a:headEnd type="none" w="med" len="med"/>
+                      <a:tailEnd type="none" w="med" len="med"/>
+                    </a:lnT>
+                    <a:lnB w="6350" cap="flat" cmpd="sng" algn="ctr">
+                      <a:solidFill>
+                        <a:srgbClr val="D8DEE6"/>
+                      </a:solidFill>
+                      <a:prstDash val="solid"/>
+                      <a:round/>
+                      <a:headEnd type="none" w="med" len="med"/>
+                      <a:tailEnd type="none" w="med" len="med"/>
+                    </a:lnB>
+                  </a:tcPr>
+                </a:tc>
+                <a:tc>
+                  <a:txBody>
+                    <a:bodyPr/>
+                    <a:lstStyle/>
+                    <a:p>
+                      <a:pPr indent="0" marL="0">
+                        <a:buNone/>
+                      </a:pPr>
+                      <a:r>
+                        <a:rPr lang="en-US" sz="1150" dirty="0">
+                          <a:solidFill>
+                            <a:srgbClr val="1E293B"/>
+                          </a:solidFill>
+                          <a:latin typeface="Arial" pitchFamily="34" charset="0"/>
+                          <a:ea typeface="Arial" pitchFamily="34" charset="-122"/>
+                          <a:cs typeface="Arial" pitchFamily="34" charset="-120"/>
+                        </a:rPr>
+                        <a:t>«Сделать систему контроля влажности»</a:t>
+                      </a:r>
+                      <a:endParaRPr lang="en-US" sz="1150" dirty="0">
+                        <a:latin typeface="Arial" charset="0"/>
+                        <a:ea typeface="Arial" charset="0"/>
+                        <a:cs typeface="Arial" charset="0"/>
+                      </a:endParaRPr>
+                    </a:p>
+                  </a:txBody>
+                  <a:tcPr marL="91440" marR="91440" marT="45720" marB="45720" anchor="ctr">
+                    <a:lnL w="6350" cap="flat" cmpd="sng" algn="ctr">
+                      <a:solidFill>
+                        <a:srgbClr val="D8DEE6"/>
+                      </a:solidFill>
+                      <a:prstDash val="solid"/>
+                      <a:round/>
+                      <a:headEnd type="none" w="med" len="med"/>
+                      <a:tailEnd type="none" w="med" len="med"/>
+                    </a:lnL>
+                    <a:lnR w="6350" cap="flat" cmpd="sng" algn="ctr">
+                      <a:solidFill>
+                        <a:srgbClr val="D8DEE6"/>
+                      </a:solidFill>
+                      <a:prstDash val="solid"/>
+                      <a:round/>
+                      <a:headEnd type="none" w="med" len="med"/>
+                      <a:tailEnd type="none" w="med" len="med"/>
+                    </a:lnR>
+                    <a:lnT w="6350" cap="flat" cmpd="sng" algn="ctr">
+                      <a:solidFill>
+                        <a:srgbClr val="D8DEE6"/>
+                      </a:solidFill>
+                      <a:prstDash val="solid"/>
+                      <a:round/>
+                      <a:headEnd type="none" w="med" len="med"/>
+                      <a:tailEnd type="none" w="med" len="med"/>
+                    </a:lnT>
+                    <a:lnB w="6350" cap="flat" cmpd="sng" algn="ctr">
+                      <a:solidFill>
+                        <a:srgbClr val="D8DEE6"/>
+                      </a:solidFill>
+                      <a:prstDash val="solid"/>
+                      <a:round/>
+                      <a:headEnd type="none" w="med" len="med"/>
+                      <a:tailEnd type="none" w="med" len="med"/>
+                    </a:lnB>
+                  </a:tcPr>
+                </a:tc>
+                <a:tc>
+                  <a:txBody>
+                    <a:bodyPr/>
+                    <a:lstStyle/>
+                    <a:p>
+                      <a:pPr indent="0" marL="0">
+                        <a:buNone/>
+                      </a:pPr>
+                      <a:r>
+                        <a:rPr lang="en-US" sz="1150" dirty="0">
+                          <a:solidFill>
+                            <a:srgbClr val="1E293B"/>
+                          </a:solidFill>
+                          <a:latin typeface="Arial" pitchFamily="34" charset="0"/>
+                          <a:ea typeface="Arial" pitchFamily="34" charset="-122"/>
+                          <a:cs typeface="Arial" pitchFamily="34" charset="-120"/>
+                        </a:rPr>
+                        <a:t>Датчик в теплице, показания — в Telegram ответственному</a:t>
+                      </a:r>
+                      <a:endParaRPr lang="en-US" sz="1150" dirty="0">
+                        <a:latin typeface="Arial" charset="0"/>
+                        <a:ea typeface="Arial" charset="0"/>
+                        <a:cs typeface="Arial" charset="0"/>
+                      </a:endParaRPr>
+                    </a:p>
+                  </a:txBody>
+                  <a:tcPr marL="91440" marR="91440" marT="45720" marB="45720" anchor="ctr">
+                    <a:lnL w="6350" cap="flat" cmpd="sng" algn="ctr">
+                      <a:solidFill>
+                        <a:srgbClr val="D8DEE6"/>
+                      </a:solidFill>
+                      <a:prstDash val="solid"/>
+                      <a:round/>
+                      <a:headEnd type="none" w="med" len="med"/>
+                      <a:tailEnd type="none" w="med" len="med"/>
+                    </a:lnL>
+                    <a:lnR w="6350" cap="flat" cmpd="sng" algn="ctr">
+                      <a:solidFill>
+                        <a:srgbClr val="D8DEE6"/>
+                      </a:solidFill>
+                      <a:prstDash val="solid"/>
+                      <a:round/>
+                      <a:headEnd type="none" w="med" len="med"/>
+                      <a:tailEnd type="none" w="med" len="med"/>
+                    </a:lnR>
+                    <a:lnT w="6350" cap="flat" cmpd="sng" algn="ctr">
+                      <a:solidFill>
+                        <a:srgbClr val="D8DEE6"/>
+                      </a:solidFill>
+                      <a:prstDash val="solid"/>
+                      <a:round/>
+                      <a:headEnd type="none" w="med" len="med"/>
+                      <a:tailEnd type="none" w="med" len="med"/>
+                    </a:lnT>
+                    <a:lnB w="6350" cap="flat" cmpd="sng" algn="ctr">
+                      <a:solidFill>
+                        <a:srgbClr val="D8DEE6"/>
+                      </a:solidFill>
+                      <a:prstDash val="solid"/>
+                      <a:round/>
+                      <a:headEnd type="none" w="med" len="med"/>
+                      <a:tailEnd type="none" w="med" len="med"/>
+                    </a:lnB>
+                  </a:tcPr>
+                </a:tc>
+              </a:tr>
+              <a:tr h="566928">
+                <a:tc>
+                  <a:txBody>
+                    <a:bodyPr/>
+                    <a:lstStyle/>
+                    <a:p>
+                      <a:pPr indent="0" marL="0">
+                        <a:buNone/>
+                      </a:pPr>
+                      <a:r>
+                        <a:rPr lang="en-US" sz="1150" dirty="0">
+                          <a:solidFill>
+                            <a:srgbClr val="1E293B"/>
+                          </a:solidFill>
+                          <a:latin typeface="Arial" pitchFamily="34" charset="0"/>
+                          <a:ea typeface="Arial" pitchFamily="34" charset="-122"/>
+                          <a:cs typeface="Arial" pitchFamily="34" charset="-120"/>
+                        </a:rPr>
+                        <a:t>M</a:t>
+                      </a:r>
+                      <a:endParaRPr lang="en-US" sz="1150" dirty="0">
+                        <a:latin typeface="Arial" charset="0"/>
+                        <a:ea typeface="Arial" charset="0"/>
+                        <a:cs typeface="Arial" charset="0"/>
+                      </a:endParaRPr>
+                    </a:p>
+                  </a:txBody>
+                  <a:tcPr marL="91440" marR="91440" marT="45720" marB="45720" anchor="ctr">
+                    <a:lnL w="6350" cap="flat" cmpd="sng" algn="ctr">
+                      <a:solidFill>
+                        <a:srgbClr val="D8DEE6"/>
+                      </a:solidFill>
+                      <a:prstDash val="solid"/>
+                      <a:round/>
+                      <a:headEnd type="none" w="med" len="med"/>
+                      <a:tailEnd type="none" w="med" len="med"/>
+                    </a:lnL>
+                    <a:lnR w="6350" cap="flat" cmpd="sng" algn="ctr">
+                      <a:solidFill>
+                        <a:srgbClr val="D8DEE6"/>
+                      </a:solidFill>
+                      <a:prstDash val="solid"/>
+                      <a:round/>
+                      <a:headEnd type="none" w="med" len="med"/>
+                      <a:tailEnd type="none" w="med" len="med"/>
+                    </a:lnR>
+                    <a:lnT w="6350" cap="flat" cmpd="sng" algn="ctr">
+                      <a:solidFill>
+                        <a:srgbClr val="D8DEE6"/>
+                      </a:solidFill>
+                      <a:prstDash val="solid"/>
+                      <a:round/>
+                      <a:headEnd type="none" w="med" len="med"/>
+                      <a:tailEnd type="none" w="med" len="med"/>
+                    </a:lnT>
+                    <a:lnB w="6350" cap="flat" cmpd="sng" algn="ctr">
+                      <a:solidFill>
+                        <a:srgbClr val="D8DEE6"/>
+                      </a:solidFill>
+                      <a:prstDash val="solid"/>
+                      <a:round/>
+                      <a:headEnd type="none" w="med" len="med"/>
+                      <a:tailEnd type="none" w="med" len="med"/>
+                    </a:lnB>
+                  </a:tcPr>
+                </a:tc>
+                <a:tc>
+                  <a:txBody>
+                    <a:bodyPr/>
+                    <a:lstStyle/>
+                    <a:p>
+                      <a:pPr indent="0" marL="0">
+                        <a:buNone/>
+                      </a:pPr>
+                      <a:r>
+                        <a:rPr lang="en-US" sz="1150" dirty="0">
+                          <a:solidFill>
+                            <a:srgbClr val="1E293B"/>
+                          </a:solidFill>
+                          <a:latin typeface="Arial" pitchFamily="34" charset="0"/>
+                          <a:ea typeface="Arial" pitchFamily="34" charset="-122"/>
+                          <a:cs typeface="Arial" pitchFamily="34" charset="-120"/>
+                        </a:rPr>
+                        <a:t>«Чтобы работало хорошо»</a:t>
+                      </a:r>
+                      <a:endParaRPr lang="en-US" sz="1150" dirty="0">
+                        <a:latin typeface="Arial" charset="0"/>
+                        <a:ea typeface="Arial" charset="0"/>
+                        <a:cs typeface="Arial" charset="0"/>
+                      </a:endParaRPr>
+                    </a:p>
+                  </a:txBody>
+                  <a:tcPr marL="91440" marR="91440" marT="45720" marB="45720" anchor="ctr">
+                    <a:lnL w="6350" cap="flat" cmpd="sng" algn="ctr">
+                      <a:solidFill>
+                        <a:srgbClr val="D8DEE6"/>
+                      </a:solidFill>
+                      <a:prstDash val="solid"/>
+                      <a:round/>
+                      <a:headEnd type="none" w="med" len="med"/>
+                      <a:tailEnd type="none" w="med" len="med"/>
+                    </a:lnL>
+                    <a:lnR w="6350" cap="flat" cmpd="sng" algn="ctr">
+                      <a:solidFill>
+                        <a:srgbClr val="D8DEE6"/>
+                      </a:solidFill>
+                      <a:prstDash val="solid"/>
+                      <a:round/>
+                      <a:headEnd type="none" w="med" len="med"/>
+                      <a:tailEnd type="none" w="med" len="med"/>
+                    </a:lnR>
+                    <a:lnT w="6350" cap="flat" cmpd="sng" algn="ctr">
+                      <a:solidFill>
+                        <a:srgbClr val="D8DEE6"/>
+                      </a:solidFill>
+                      <a:prstDash val="solid"/>
+                      <a:round/>
+                      <a:headEnd type="none" w="med" len="med"/>
+                      <a:tailEnd type="none" w="med" len="med"/>
+                    </a:lnT>
+                    <a:lnB w="6350" cap="flat" cmpd="sng" algn="ctr">
+                      <a:solidFill>
+                        <a:srgbClr val="D8DEE6"/>
+                      </a:solidFill>
+                      <a:prstDash val="solid"/>
+                      <a:round/>
+                      <a:headEnd type="none" w="med" len="med"/>
+                      <a:tailEnd type="none" w="med" len="med"/>
+                    </a:lnB>
+                  </a:tcPr>
+                </a:tc>
+                <a:tc>
+                  <a:txBody>
+                    <a:bodyPr/>
+                    <a:lstStyle/>
+                    <a:p>
+                      <a:pPr indent="0" marL="0">
+                        <a:buNone/>
+                      </a:pPr>
+                      <a:r>
+                        <a:rPr lang="en-US" sz="1150" dirty="0">
+                          <a:solidFill>
+                            <a:srgbClr val="1E293B"/>
+                          </a:solidFill>
+                          <a:latin typeface="Arial" pitchFamily="34" charset="0"/>
+                          <a:ea typeface="Arial" pitchFamily="34" charset="-122"/>
+                          <a:cs typeface="Arial" pitchFamily="34" charset="-120"/>
+                        </a:rPr>
+                        <a:t>Раз в час; точность ±5% от контрольного измерения</a:t>
+                      </a:r>
+                      <a:endParaRPr lang="en-US" sz="1150" dirty="0">
+                        <a:latin typeface="Arial" charset="0"/>
+                        <a:ea typeface="Arial" charset="0"/>
+                        <a:cs typeface="Arial" charset="0"/>
+                      </a:endParaRPr>
+                    </a:p>
+                  </a:txBody>
+                  <a:tcPr marL="91440" marR="91440" marT="45720" marB="45720" anchor="ctr">
+                    <a:lnL w="6350" cap="flat" cmpd="sng" algn="ctr">
+                      <a:solidFill>
+                        <a:srgbClr val="D8DEE6"/>
+                      </a:solidFill>
+                      <a:prstDash val="solid"/>
+                      <a:round/>
+                      <a:headEnd type="none" w="med" len="med"/>
+                      <a:tailEnd type="none" w="med" len="med"/>
+                    </a:lnL>
+                    <a:lnR w="6350" cap="flat" cmpd="sng" algn="ctr">
+                      <a:solidFill>
+                        <a:srgbClr val="D8DEE6"/>
+                      </a:solidFill>
+                      <a:prstDash val="solid"/>
+                      <a:round/>
+                      <a:headEnd type="none" w="med" len="med"/>
+                      <a:tailEnd type="none" w="med" len="med"/>
+                    </a:lnR>
+                    <a:lnT w="6350" cap="flat" cmpd="sng" algn="ctr">
+                      <a:solidFill>
+                        <a:srgbClr val="D8DEE6"/>
+                      </a:solidFill>
+                      <a:prstDash val="solid"/>
+                      <a:round/>
+                      <a:headEnd type="none" w="med" len="med"/>
+                      <a:tailEnd type="none" w="med" len="med"/>
+                    </a:lnT>
+                    <a:lnB w="6350" cap="flat" cmpd="sng" algn="ctr">
+                      <a:solidFill>
+                        <a:srgbClr val="D8DEE6"/>
+                      </a:solidFill>
+                      <a:prstDash val="solid"/>
+                      <a:round/>
+                      <a:headEnd type="none" w="med" len="med"/>
+                      <a:tailEnd type="none" w="med" len="med"/>
+                    </a:lnB>
+                  </a:tcPr>
+                </a:tc>
+              </a:tr>
+              <a:tr h="566928">
+                <a:tc>
+                  <a:txBody>
+                    <a:bodyPr/>
+                    <a:lstStyle/>
+                    <a:p>
+                      <a:pPr indent="0" marL="0">
+                        <a:buNone/>
+                      </a:pPr>
+                      <a:r>
+                        <a:rPr lang="en-US" sz="1150" dirty="0">
+                          <a:solidFill>
+                            <a:srgbClr val="1E293B"/>
+                          </a:solidFill>
+                          <a:latin typeface="Arial" pitchFamily="34" charset="0"/>
+                          <a:ea typeface="Arial" pitchFamily="34" charset="-122"/>
+                          <a:cs typeface="Arial" pitchFamily="34" charset="-120"/>
+                        </a:rPr>
+                        <a:t>A / R</a:t>
+                      </a:r>
+                      <a:endParaRPr lang="en-US" sz="1150" dirty="0">
+                        <a:latin typeface="Arial" charset="0"/>
+                        <a:ea typeface="Arial" charset="0"/>
+                        <a:cs typeface="Arial" charset="0"/>
+                      </a:endParaRPr>
+                    </a:p>
+                  </a:txBody>
+                  <a:tcPr marL="91440" marR="91440" marT="45720" marB="45720" anchor="ctr">
+                    <a:lnL w="6350" cap="flat" cmpd="sng" algn="ctr">
+                      <a:solidFill>
+                        <a:srgbClr val="D8DEE6"/>
+                      </a:solidFill>
+                      <a:prstDash val="solid"/>
+                      <a:round/>
+                      <a:headEnd type="none" w="med" len="med"/>
+                      <a:tailEnd type="none" w="med" len="med"/>
+                    </a:lnL>
+                    <a:lnR w="6350" cap="flat" cmpd="sng" algn="ctr">
+                      <a:solidFill>
+                        <a:srgbClr val="D8DEE6"/>
+                      </a:solidFill>
+                      <a:prstDash val="solid"/>
+                      <a:round/>
+                      <a:headEnd type="none" w="med" len="med"/>
+                      <a:tailEnd type="none" w="med" len="med"/>
+                    </a:lnR>
+                    <a:lnT w="6350" cap="flat" cmpd="sng" algn="ctr">
+                      <a:solidFill>
+                        <a:srgbClr val="D8DEE6"/>
+                      </a:solidFill>
+                      <a:prstDash val="solid"/>
+                      <a:round/>
+                      <a:headEnd type="none" w="med" len="med"/>
+                      <a:tailEnd type="none" w="med" len="med"/>
+                    </a:lnT>
+                    <a:lnB w="6350" cap="flat" cmpd="sng" algn="ctr">
+                      <a:solidFill>
+                        <a:srgbClr val="D8DEE6"/>
+                      </a:solidFill>
+                      <a:prstDash val="solid"/>
+                      <a:round/>
+                      <a:headEnd type="none" w="med" len="med"/>
+                      <a:tailEnd type="none" w="med" len="med"/>
+                    </a:lnB>
+                  </a:tcPr>
+                </a:tc>
+                <a:tc>
+                  <a:txBody>
+                    <a:bodyPr/>
+                    <a:lstStyle/>
+                    <a:p>
+                      <a:pPr indent="0" marL="0">
+                        <a:buNone/>
+                      </a:pPr>
+                      <a:r>
+                        <a:rPr lang="en-US" sz="1150" dirty="0">
+                          <a:solidFill>
+                            <a:srgbClr val="1E293B"/>
+                          </a:solidFill>
+                          <a:latin typeface="Arial" pitchFamily="34" charset="0"/>
+                          <a:ea typeface="Arial" pitchFamily="34" charset="-122"/>
+                          <a:cs typeface="Arial" pitchFamily="34" charset="-120"/>
+                        </a:rPr>
+                        <a:t>не проверяются вовсе</a:t>
+                      </a:r>
+                      <a:endParaRPr lang="en-US" sz="1150" dirty="0">
+                        <a:latin typeface="Arial" charset="0"/>
+                        <a:ea typeface="Arial" charset="0"/>
+                        <a:cs typeface="Arial" charset="0"/>
+                      </a:endParaRPr>
+                    </a:p>
+                  </a:txBody>
+                  <a:tcPr marL="91440" marR="91440" marT="45720" marB="45720" anchor="ctr">
+                    <a:lnL w="6350" cap="flat" cmpd="sng" algn="ctr">
+                      <a:solidFill>
+                        <a:srgbClr val="D8DEE6"/>
+                      </a:solidFill>
+                      <a:prstDash val="solid"/>
+                      <a:round/>
+                      <a:headEnd type="none" w="med" len="med"/>
+                      <a:tailEnd type="none" w="med" len="med"/>
+                    </a:lnL>
+                    <a:lnR w="6350" cap="flat" cmpd="sng" algn="ctr">
+                      <a:solidFill>
+                        <a:srgbClr val="D8DEE6"/>
+                      </a:solidFill>
+                      <a:prstDash val="solid"/>
+                      <a:round/>
+                      <a:headEnd type="none" w="med" len="med"/>
+                      <a:tailEnd type="none" w="med" len="med"/>
+                    </a:lnR>
+                    <a:lnT w="6350" cap="flat" cmpd="sng" algn="ctr">
+                      <a:solidFill>
+                        <a:srgbClr val="D8DEE6"/>
+                      </a:solidFill>
+                      <a:prstDash val="solid"/>
+                      <a:round/>
+                      <a:headEnd type="none" w="med" len="med"/>
+                      <a:tailEnd type="none" w="med" len="med"/>
+                    </a:lnT>
+                    <a:lnB w="6350" cap="flat" cmpd="sng" algn="ctr">
+                      <a:solidFill>
+                        <a:srgbClr val="D8DEE6"/>
+                      </a:solidFill>
+                      <a:prstDash val="solid"/>
+                      <a:round/>
+                      <a:headEnd type="none" w="med" len="med"/>
+                      <a:tailEnd type="none" w="med" len="med"/>
+                    </a:lnB>
+                  </a:tcPr>
+                </a:tc>
+                <a:tc>
+                  <a:txBody>
+                    <a:bodyPr/>
+                    <a:lstStyle/>
+                    <a:p>
+                      <a:pPr indent="0" marL="0">
+                        <a:buNone/>
+                      </a:pPr>
+                      <a:r>
+                        <a:rPr lang="en-US" sz="1150" dirty="0">
+                          <a:solidFill>
+                            <a:srgbClr val="1E293B"/>
+                          </a:solidFill>
+                          <a:latin typeface="Arial" pitchFamily="34" charset="0"/>
+                          <a:ea typeface="Arial" pitchFamily="34" charset="-122"/>
+                          <a:cs typeface="Arial" pitchFamily="34" charset="-120"/>
+                        </a:rPr>
+                        <a:t>3–4 человека, доступное оборудование; закрывает названную проблему</a:t>
+                      </a:r>
+                      <a:endParaRPr lang="en-US" sz="1150" dirty="0">
+                        <a:latin typeface="Arial" charset="0"/>
+                        <a:ea typeface="Arial" charset="0"/>
+                        <a:cs typeface="Arial" charset="0"/>
+                      </a:endParaRPr>
+                    </a:p>
+                  </a:txBody>
+                  <a:tcPr marL="91440" marR="91440" marT="45720" marB="45720" anchor="ctr">
+                    <a:lnL w="6350" cap="flat" cmpd="sng" algn="ctr">
+                      <a:solidFill>
+                        <a:srgbClr val="D8DEE6"/>
+                      </a:solidFill>
+                      <a:prstDash val="solid"/>
+                      <a:round/>
+                      <a:headEnd type="none" w="med" len="med"/>
+                      <a:tailEnd type="none" w="med" len="med"/>
+                    </a:lnL>
+                    <a:lnR w="6350" cap="flat" cmpd="sng" algn="ctr">
+                      <a:solidFill>
+                        <a:srgbClr val="D8DEE6"/>
+                      </a:solidFill>
+                      <a:prstDash val="solid"/>
+                      <a:round/>
+                      <a:headEnd type="none" w="med" len="med"/>
+                      <a:tailEnd type="none" w="med" len="med"/>
+                    </a:lnR>
+                    <a:lnT w="6350" cap="flat" cmpd="sng" algn="ctr">
+                      <a:solidFill>
+                        <a:srgbClr val="D8DEE6"/>
+                      </a:solidFill>
+                      <a:prstDash val="solid"/>
+                      <a:round/>
+                      <a:headEnd type="none" w="med" len="med"/>
+                      <a:tailEnd type="none" w="med" len="med"/>
+                    </a:lnT>
+                    <a:lnB w="6350" cap="flat" cmpd="sng" algn="ctr">
+                      <a:solidFill>
+                        <a:srgbClr val="D8DEE6"/>
+                      </a:solidFill>
+                      <a:prstDash val="solid"/>
+                      <a:round/>
+                      <a:headEnd type="none" w="med" len="med"/>
+                      <a:tailEnd type="none" w="med" len="med"/>
+                    </a:lnB>
+                  </a:tcPr>
+                </a:tc>
+              </a:tr>
+              <a:tr h="566928">
+                <a:tc>
+                  <a:txBody>
+                    <a:bodyPr/>
+                    <a:lstStyle/>
+                    <a:p>
+                      <a:pPr indent="0" marL="0">
+                        <a:buNone/>
+                      </a:pPr>
+                      <a:r>
+                        <a:rPr lang="en-US" sz="1150" dirty="0">
+                          <a:solidFill>
+                            <a:srgbClr val="1E293B"/>
+                          </a:solidFill>
+                          <a:latin typeface="Arial" pitchFamily="34" charset="0"/>
+                          <a:ea typeface="Arial" pitchFamily="34" charset="-122"/>
+                          <a:cs typeface="Arial" pitchFamily="34" charset="-120"/>
+                        </a:rPr>
+                        <a:t>T</a:t>
+                      </a:r>
+                      <a:endParaRPr lang="en-US" sz="1150" dirty="0">
+                        <a:latin typeface="Arial" charset="0"/>
+                        <a:ea typeface="Arial" charset="0"/>
+                        <a:cs typeface="Arial" charset="0"/>
+                      </a:endParaRPr>
+                    </a:p>
+                  </a:txBody>
+                  <a:tcPr marL="91440" marR="91440" marT="45720" marB="45720" anchor="ctr">
+                    <a:lnL w="6350" cap="flat" cmpd="sng" algn="ctr">
+                      <a:solidFill>
+                        <a:srgbClr val="D8DEE6"/>
+                      </a:solidFill>
+                      <a:prstDash val="solid"/>
+                      <a:round/>
+                      <a:headEnd type="none" w="med" len="med"/>
+                      <a:tailEnd type="none" w="med" len="med"/>
+                    </a:lnL>
+                    <a:lnR w="6350" cap="flat" cmpd="sng" algn="ctr">
+                      <a:solidFill>
+                        <a:srgbClr val="D8DEE6"/>
+                      </a:solidFill>
+                      <a:prstDash val="solid"/>
+                      <a:round/>
+                      <a:headEnd type="none" w="med" len="med"/>
+                      <a:tailEnd type="none" w="med" len="med"/>
+                    </a:lnR>
+                    <a:lnT w="6350" cap="flat" cmpd="sng" algn="ctr">
+                      <a:solidFill>
+                        <a:srgbClr val="D8DEE6"/>
+                      </a:solidFill>
+                      <a:prstDash val="solid"/>
+                      <a:round/>
+                      <a:headEnd type="none" w="med" len="med"/>
+                      <a:tailEnd type="none" w="med" len="med"/>
+                    </a:lnT>
+                    <a:lnB w="6350" cap="flat" cmpd="sng" algn="ctr">
+                      <a:solidFill>
+                        <a:srgbClr val="D8DEE6"/>
+                      </a:solidFill>
+                      <a:prstDash val="solid"/>
+                      <a:round/>
+                      <a:headEnd type="none" w="med" len="med"/>
+                      <a:tailEnd type="none" w="med" len="med"/>
+                    </a:lnB>
+                  </a:tcPr>
+                </a:tc>
+                <a:tc>
+                  <a:txBody>
+                    <a:bodyPr/>
+                    <a:lstStyle/>
+                    <a:p>
+                      <a:pPr indent="0" marL="0">
+                        <a:buNone/>
+                      </a:pPr>
+                      <a:r>
+                        <a:rPr lang="en-US" sz="1150" dirty="0">
+                          <a:solidFill>
+                            <a:srgbClr val="1E293B"/>
+                          </a:solidFill>
+                          <a:latin typeface="Arial" pitchFamily="34" charset="0"/>
+                          <a:ea typeface="Arial" pitchFamily="34" charset="-122"/>
+                          <a:cs typeface="Arial" pitchFamily="34" charset="-120"/>
+                        </a:rPr>
+                        <a:t>«В течение семестра»</a:t>
+                      </a:r>
+                      <a:endParaRPr lang="en-US" sz="1150" dirty="0">
+                        <a:latin typeface="Arial" charset="0"/>
+                        <a:ea typeface="Arial" charset="0"/>
+                        <a:cs typeface="Arial" charset="0"/>
+                      </a:endParaRPr>
+                    </a:p>
+                  </a:txBody>
+                  <a:tcPr marL="91440" marR="91440" marT="45720" marB="45720" anchor="ctr">
+                    <a:lnL w="6350" cap="flat" cmpd="sng" algn="ctr">
+                      <a:solidFill>
+                        <a:srgbClr val="D8DEE6"/>
+                      </a:solidFill>
+                      <a:prstDash val="solid"/>
+                      <a:round/>
+                      <a:headEnd type="none" w="med" len="med"/>
+                      <a:tailEnd type="none" w="med" len="med"/>
+                    </a:lnL>
+                    <a:lnR w="6350" cap="flat" cmpd="sng" algn="ctr">
+                      <a:solidFill>
+                        <a:srgbClr val="D8DEE6"/>
+                      </a:solidFill>
+                      <a:prstDash val="solid"/>
+                      <a:round/>
+                      <a:headEnd type="none" w="med" len="med"/>
+                      <a:tailEnd type="none" w="med" len="med"/>
+                    </a:lnR>
+                    <a:lnT w="6350" cap="flat" cmpd="sng" algn="ctr">
+                      <a:solidFill>
+                        <a:srgbClr val="D8DEE6"/>
+                      </a:solidFill>
+                      <a:prstDash val="solid"/>
+                      <a:round/>
+                      <a:headEnd type="none" w="med" len="med"/>
+                      <a:tailEnd type="none" w="med" len="med"/>
+                    </a:lnT>
+                    <a:lnB w="6350" cap="flat" cmpd="sng" algn="ctr">
+                      <a:solidFill>
+                        <a:srgbClr val="D8DEE6"/>
+                      </a:solidFill>
+                      <a:prstDash val="solid"/>
+                      <a:round/>
+                      <a:headEnd type="none" w="med" len="med"/>
+                      <a:tailEnd type="none" w="med" len="med"/>
+                    </a:lnB>
+                  </a:tcPr>
+                </a:tc>
+                <a:tc>
+                  <a:txBody>
+                    <a:bodyPr/>
+                    <a:lstStyle/>
+                    <a:p>
+                      <a:pPr indent="0" marL="0">
+                        <a:buNone/>
+                      </a:pPr>
+                      <a:r>
+                        <a:rPr lang="en-US" sz="1150" dirty="0">
+                          <a:solidFill>
+                            <a:srgbClr val="1E293B"/>
+                          </a:solidFill>
+                          <a:latin typeface="Arial" pitchFamily="34" charset="0"/>
+                          <a:ea typeface="Arial" pitchFamily="34" charset="-122"/>
+                          <a:cs typeface="Arial" pitchFamily="34" charset="-120"/>
+                        </a:rPr>
+                        <a:t>Прототип — к 21.11, итог и отчёт — к 26.12</a:t>
+                      </a:r>
+                      <a:endParaRPr lang="en-US" sz="1150" dirty="0">
+                        <a:latin typeface="Arial" charset="0"/>
+                        <a:ea typeface="Arial" charset="0"/>
+                        <a:cs typeface="Arial" charset="0"/>
+                      </a:endParaRPr>
+                    </a:p>
+                  </a:txBody>
+                  <a:tcPr marL="91440" marR="91440" marT="45720" marB="45720" anchor="ctr">
+                    <a:lnL w="6350" cap="flat" cmpd="sng" algn="ctr">
+                      <a:solidFill>
+                        <a:srgbClr val="D8DEE6"/>
+                      </a:solidFill>
+                      <a:prstDash val="solid"/>
+                      <a:round/>
+                      <a:headEnd type="none" w="med" len="med"/>
+                      <a:tailEnd type="none" w="med" len="med"/>
+                    </a:lnL>
+                    <a:lnR w="6350" cap="flat" cmpd="sng" algn="ctr">
+                      <a:solidFill>
+                        <a:srgbClr val="D8DEE6"/>
+                      </a:solidFill>
+                      <a:prstDash val="solid"/>
+                      <a:round/>
+                      <a:headEnd type="none" w="med" len="med"/>
+                      <a:tailEnd type="none" w="med" len="med"/>
+                    </a:lnR>
+                    <a:lnT w="6350" cap="flat" cmpd="sng" algn="ctr">
+                      <a:solidFill>
+                        <a:srgbClr val="D8DEE6"/>
+                      </a:solidFill>
+                      <a:prstDash val="solid"/>
+                      <a:round/>
+                      <a:headEnd type="none" w="med" len="med"/>
+                      <a:tailEnd type="none" w="med" len="med"/>
+                    </a:lnT>
+                    <a:lnB w="6350" cap="flat" cmpd="sng" algn="ctr">
+                      <a:solidFill>
+                        <a:srgbClr val="D8DEE6"/>
+                      </a:solidFill>
+                      <a:prstDash val="solid"/>
+                      <a:round/>
+                      <a:headEnd type="none" w="med" len="med"/>
+                      <a:tailEnd type="none" w="med" len="med"/>
+                    </a:lnB>
+                  </a:tcPr>
+                </a:tc>
+              </a:tr>
+            </a:tbl>
+          </a:graphicData>
+        </a:graphic>
+      </p:graphicFrame>
+      <p:sp>
+        <p:nvSpPr>
+          <p:cNvPr id="5" name="Shape 2"/>
+          <p:cNvSpPr/>
           <p:nvPr/>
         </p:nvSpPr>
         <p:spPr>
           <a:xfrm>
-            <a:off x="502920" y="1371600"/>
-            <a:ext cx="8138160" cy="365760"/>
-          </a:xfrm>
-          <a:prstGeom prst="rect">
-            <a:avLst/>
-          </a:prstGeom>
-          <a:noFill/>
-          <a:ln/>
-        </p:spPr>
-        <p:txBody>
-          <a:bodyPr wrap="square" lIns="0" tIns="0" rIns="0" bIns="0" rtlCol="0" anchor="ctr"/>
-          <a:lstStyle/>
-          <a:p>
-            <a:pPr indent="0" marL="0">
-              <a:buNone/>
-            </a:pPr>
-            <a:r>
-              <a:rPr lang="en-US" sz="1500" dirty="0">
-                <a:solidFill>
-                  <a:srgbClr val="1E293B"/>
-                </a:solidFill>
-                <a:latin typeface="Arial" pitchFamily="34" charset="0"/>
-                <a:ea typeface="Arial" pitchFamily="34" charset="-122"/>
-                <a:cs typeface="Arial" pitchFamily="34" charset="-120"/>
-              </a:rPr>
-              <a:t>Каждая буква — отдельная строка, конкретно. Не общей фразой на весь акроним.</a:t>
-            </a:r>
-            <a:endParaRPr lang="en-US" sz="1500" dirty="0"/>
-          </a:p>
-        </p:txBody>
-      </p:sp>
-      <p:sp>
-        <p:nvSpPr>
-          <p:cNvPr id="5" name="Shape 3"/>
-          <p:cNvSpPr/>
-          <p:nvPr/>
-        </p:nvSpPr>
-        <p:spPr>
-          <a:xfrm>
-            <a:off x="502920" y="1920240"/>
-            <a:ext cx="8138160" cy="2011680"/>
+            <a:off x="502920" y="3703320"/>
+            <a:ext cx="8138160" cy="685800"/>
           </a:xfrm>
           <a:prstGeom prst="roundRect">
             <a:avLst>
-              <a:gd name="adj" fmla="val 2273"/>
+              <a:gd name="adj" fmla="val 6667"/>
             </a:avLst>
           </a:prstGeom>
           <a:solidFill>
@@ -6607,14 +7900,14 @@
       </p:sp>
       <p:sp>
         <p:nvSpPr>
-          <p:cNvPr id="6" name="Text 4"/>
+          <p:cNvPr id="6" name="Text 3"/>
           <p:cNvSpPr txBox="1"/>
           <p:nvPr/>
         </p:nvSpPr>
         <p:spPr>
           <a:xfrm>
-            <a:off x="822960" y="2194560"/>
-            <a:ext cx="7498080" cy="1371600"/>
+            <a:off x="731520" y="3822192"/>
+            <a:ext cx="7680960" cy="457200"/>
           </a:xfrm>
           <a:prstGeom prst="rect">
             <a:avLst/>
@@ -6628,12 +7921,12 @@
           <a:p>
             <a:pPr indent="0" marL="0">
               <a:lnSpc>
-                <a:spcPts val="2600"/>
+                <a:spcPts val="1600"/>
               </a:lnSpc>
               <a:buNone/>
             </a:pPr>
             <a:r>
-              <a:rPr lang="en-US" sz="1600" b="1" dirty="0">
+              <a:rPr lang="en-US" sz="1250" b="1" dirty="0">
                 <a:solidFill>
                   <a:srgbClr val="FFFFFF"/>
                 </a:solidFill>
@@ -6641,68 +7934,9 @@
                 <a:ea typeface="Arial" pitchFamily="34" charset="-122"/>
                 <a:cs typeface="Arial" pitchFamily="34" charset="-120"/>
               </a:rPr>
-              <a:t>Итог блока — одна фраза с датой:</a:t>
+              <a:t>К 26.12 — датчик влажности почвы с оповещением в Telegram, без сбоев 14 дней подряд, точность ±5% — прототип к 21.11</a:t>
             </a:r>
-            <a:endParaRPr lang="en-US" sz="1600" dirty="0"/>
-          </a:p>
-          <a:p>
-            <a:pPr indent="0" marL="0">
-              <a:lnSpc>
-                <a:spcPts val="2600"/>
-              </a:lnSpc>
-              <a:buNone/>
-            </a:pPr>
-            <a:r>
-              <a:rPr lang="en-US" sz="1600" b="1" dirty="0">
-                <a:solidFill>
-                  <a:srgbClr val="FFFFFF"/>
-                </a:solidFill>
-                <a:latin typeface="Arial" pitchFamily="34" charset="0"/>
-                <a:ea typeface="Arial" pitchFamily="34" charset="-122"/>
-                <a:cs typeface="Arial" pitchFamily="34" charset="-120"/>
-              </a:rPr>
-              <a:t>«К [дата] мы получим [измеримый результат], проверяемый [способ проверки]»</a:t>
-            </a:r>
-            <a:endParaRPr lang="en-US" sz="1600" dirty="0"/>
-          </a:p>
-        </p:txBody>
-      </p:sp>
-      <p:sp>
-        <p:nvSpPr>
-          <p:cNvPr id="7" name="Text 5"/>
-          <p:cNvSpPr txBox="1"/>
-          <p:nvPr/>
-        </p:nvSpPr>
-        <p:spPr>
-          <a:xfrm>
-            <a:off x="502920" y="4160520"/>
-            <a:ext cx="8138160" cy="548640"/>
-          </a:xfrm>
-          <a:prstGeom prst="rect">
-            <a:avLst/>
-          </a:prstGeom>
-          <a:noFill/>
-          <a:ln/>
-        </p:spPr>
-        <p:txBody>
-          <a:bodyPr wrap="square" lIns="0" tIns="0" rIns="0" bIns="0" rtlCol="0" anchor="ctr"/>
-          <a:lstStyle/>
-          <a:p>
-            <a:pPr indent="0" marL="0">
-              <a:buNone/>
-            </a:pPr>
-            <a:r>
-              <a:rPr lang="en-US" sz="1200" i="1" dirty="0">
-                <a:solidFill>
-                  <a:srgbClr val="64748B"/>
-                </a:solidFill>
-                <a:latin typeface="Arial" pitchFamily="34" charset="0"/>
-                <a:ea typeface="Arial" pitchFamily="34" charset="-122"/>
-                <a:cs typeface="Arial" pitchFamily="34" charset="-120"/>
-              </a:rPr>
-              <a:t>💡 Цель без даты или «в конце семестра» — не Time-bound. Требуйте число.</a:t>
-            </a:r>
-            <a:endParaRPr lang="en-US" sz="1200" dirty="0"/>
+            <a:endParaRPr lang="en-US" sz="1250" dirty="0"/>
           </a:p>
         </p:txBody>
       </p:sp>
@@ -6771,7 +8005,7 @@
                 <a:ea typeface="Arial" pitchFamily="34" charset="-122"/>
                 <a:cs typeface="Arial" pitchFamily="34" charset="-120"/>
               </a:rPr>
-              <a:t>75–85 МИН</a:t>
+              <a:t>ЛИСТ 2 · 20 МИНУТ</a:t>
             </a:r>
             <a:endParaRPr lang="en-US" sz="1100" dirty="0"/>
           </a:p>
@@ -6810,7 +8044,7 @@
                 <a:ea typeface="Arial" pitchFamily="34" charset="-122"/>
                 <a:cs typeface="Arial" pitchFamily="34" charset="-120"/>
               </a:rPr>
-              <a:t>Соседняя команда ищет слабое место</a:t>
+              <a:t>Разверните SMART-цель</a:t>
             </a:r>
             <a:endParaRPr lang="en-US" sz="2700" dirty="0"/>
           </a:p>
@@ -6818,22 +8052,61 @@
       </p:sp>
       <p:sp>
         <p:nvSpPr>
-          <p:cNvPr id="4" name="Shape 2"/>
+          <p:cNvPr id="4" name="Text 2"/>
+          <p:cNvSpPr txBox="1"/>
+          <p:nvPr/>
+        </p:nvSpPr>
+        <p:spPr>
+          <a:xfrm>
+            <a:off x="502920" y="1371600"/>
+            <a:ext cx="8138160" cy="365760"/>
+          </a:xfrm>
+          <a:prstGeom prst="rect">
+            <a:avLst/>
+          </a:prstGeom>
+          <a:noFill/>
+          <a:ln/>
+        </p:spPr>
+        <p:txBody>
+          <a:bodyPr wrap="square" lIns="0" tIns="0" rIns="0" bIns="0" rtlCol="0" anchor="ctr"/>
+          <a:lstStyle/>
+          <a:p>
+            <a:pPr indent="0" marL="0">
+              <a:buNone/>
+            </a:pPr>
+            <a:r>
+              <a:rPr lang="en-US" sz="1500" dirty="0">
+                <a:solidFill>
+                  <a:srgbClr val="1E293B"/>
+                </a:solidFill>
+                <a:latin typeface="Arial" pitchFamily="34" charset="0"/>
+                <a:ea typeface="Arial" pitchFamily="34" charset="-122"/>
+                <a:cs typeface="Arial" pitchFamily="34" charset="-120"/>
+              </a:rPr>
+              <a:t>Каждая буква — отдельная строка, конкретно. Не общей фразой на весь акроним.</a:t>
+            </a:r>
+            <a:endParaRPr lang="en-US" sz="1500" dirty="0"/>
+          </a:p>
+        </p:txBody>
+      </p:sp>
+      <p:sp>
+        <p:nvSpPr>
+          <p:cNvPr id="5" name="Shape 3"/>
           <p:cNvSpPr/>
           <p:nvPr/>
         </p:nvSpPr>
         <p:spPr>
           <a:xfrm>
-            <a:off x="502920" y="1463040"/>
-            <a:ext cx="8138160" cy="1554480"/>
+            <a:off x="502920" y="1920240"/>
+            <a:ext cx="8138160" cy="2011680"/>
           </a:xfrm>
           <a:prstGeom prst="roundRect">
             <a:avLst>
-              <a:gd name="adj" fmla="val 2941"/>
+              <a:gd name="adj" fmla="val 2273"/>
             </a:avLst>
           </a:prstGeom>
           <a:solidFill>
-            <a:srgbClr val="F5F7FA"/>
+            <a:srgbClr val="1E4270"/>
           </a:solidFill>
           <a:ln w="9525">
             <a:solidFill>
@@ -6845,14 +8118,14 @@
       </p:sp>
       <p:sp>
         <p:nvSpPr>
-          <p:cNvPr id="5" name="Text 3"/>
+          <p:cNvPr id="6" name="Text 4"/>
           <p:cNvSpPr txBox="1"/>
           <p:nvPr/>
         </p:nvSpPr>
         <p:spPr>
           <a:xfrm>
-            <a:off x="777240" y="1737360"/>
-            <a:ext cx="7589520" cy="1005840"/>
+            <a:off x="822960" y="2194560"/>
+            <a:ext cx="7498080" cy="1371600"/>
           </a:xfrm>
           <a:prstGeom prst="rect">
             <a:avLst/>
@@ -6866,35 +8139,55 @@
           <a:p>
             <a:pPr indent="0" marL="0">
               <a:lnSpc>
-                <a:spcPts val="2400"/>
+                <a:spcPts val="2600"/>
               </a:lnSpc>
               <a:buNone/>
             </a:pPr>
             <a:r>
-              <a:rPr lang="en-US" sz="1600" dirty="0">
+              <a:rPr lang="en-US" sz="1600" b="1" dirty="0">
                 <a:solidFill>
-                  <a:srgbClr val="1E293B"/>
+                  <a:srgbClr val="FFFFFF"/>
                 </a:solidFill>
                 <a:latin typeface="Arial" pitchFamily="34" charset="0"/>
                 <a:ea typeface="Arial" pitchFamily="34" charset="-122"/>
                 <a:cs typeface="Arial" pitchFamily="34" charset="-120"/>
               </a:rPr>
-              <a:t>Обменяйтесь листом 2. Найдите ОДНУ букву SMART, которая на самом деле не выполнена, и напишите почему.</a:t>
+              <a:t>Итог блока — одна фраза с датой:</a:t>
             </a:r>
             <a:endParaRPr lang="en-US" sz="1600" dirty="0"/>
           </a:p>
-        </p:txBody>
-      </p:sp>
-      <p:sp>
-        <p:nvSpPr>
-          <p:cNvPr id="6" name="Text 4"/>
+          <a:p>
+            <a:pPr indent="0" marL="0">
+              <a:lnSpc>
+                <a:spcPts val="2600"/>
+              </a:lnSpc>
+              <a:buNone/>
+            </a:pPr>
+            <a:r>
+              <a:rPr lang="en-US" sz="1600" b="1" dirty="0">
+                <a:solidFill>
+                  <a:srgbClr val="FFFFFF"/>
+                </a:solidFill>
+                <a:latin typeface="Arial" pitchFamily="34" charset="0"/>
+                <a:ea typeface="Arial" pitchFamily="34" charset="-122"/>
+                <a:cs typeface="Arial" pitchFamily="34" charset="-120"/>
+              </a:rPr>
+              <a:t>«К [дата] мы получим [измеримый результат], проверяемый [способ проверки]»</a:t>
+            </a:r>
+            <a:endParaRPr lang="en-US" sz="1600" dirty="0"/>
+          </a:p>
+        </p:txBody>
+      </p:sp>
+      <p:sp>
+        <p:nvSpPr>
+          <p:cNvPr id="7" name="Text 5"/>
           <p:cNvSpPr txBox="1"/>
           <p:nvPr/>
         </p:nvSpPr>
         <p:spPr>
           <a:xfrm>
-            <a:off x="502920" y="3246120"/>
-            <a:ext cx="8138160" cy="457200"/>
+            <a:off x="502920" y="4160520"/>
+            <a:ext cx="8138160" cy="548640"/>
           </a:xfrm>
           <a:prstGeom prst="rect">
             <a:avLst/>
@@ -6910,7 +8203,7 @@
               <a:buNone/>
             </a:pPr>
             <a:r>
-              <a:rPr lang="en-US" sz="1300" i="1" dirty="0">
+              <a:rPr lang="en-US" sz="1200" i="1" dirty="0">
                 <a:solidFill>
                   <a:srgbClr val="64748B"/>
                 </a:solidFill>
@@ -6918,9 +8211,9 @@
                 <a:ea typeface="Arial" pitchFamily="34" charset="-122"/>
                 <a:cs typeface="Arial" pitchFamily="34" charset="-120"/>
               </a:rPr>
-              <a:t>Найти слабое место в чужой цели — услуга, а не критика. В следующий раз то же самое сделают с вашей.</a:t>
+              <a:t>💡 Цель без даты или «в конце семестра» — не Time-bound. Требуйте число.</a:t>
             </a:r>
-            <a:endParaRPr lang="en-US" sz="1300" dirty="0"/>
+            <a:endParaRPr lang="en-US" sz="1200" dirty="0"/>
           </a:p>
         </p:txBody>
       </p:sp>

--- a/zanyatiya/Zanyatie_02_Praktika1_Slaydy.pptx
+++ b/zanyatiya/Zanyatie_02_Praktika1_Slaydy.pptx
@@ -16,9 +16,10 @@
     <p:sldId id="264" r:id="rId10"/>
     <p:sldId id="265" r:id="rId11"/>
     <p:sldId id="266" r:id="rId12"/>
+    <p:sldId id="267" r:id="rId13"/>
   </p:sldIdLst>
   <p:notesMasterIdLst>
-    <p:notesMasterId r:id="rId13"/>
+    <p:notesMasterId r:id="rId14"/>
   </p:notesMasterIdLst>
   <p:sldSz cx="9144000" cy="5143500"/>
   <p:notesSz cx="5143500" cy="9144000"/>
@@ -600,7 +601,7 @@
           <a:p>
             <a:r>
               <a:rPr lang="en-US" dirty="0"/>
-              <a:t>Пять минут на поиск, пять на устный разбор в паре.</a:t>
+              <a:t>Не сокращать. Единственный блок, дающий итоговый артефакт занятия.</a:t>
             </a:r>
             <a:endParaRPr lang="en-US" dirty="0"/>
           </a:p>
@@ -688,7 +689,7 @@
           <a:p>
             <a:r>
               <a:rPr lang="en-US" dirty="0"/>
-              <a:t>Продиктовать и убедиться, что записали.</a:t>
+              <a:t>Пять минут на поиск, пять на устный разбор в паре.</a:t>
             </a:r>
             <a:endParaRPr lang="en-US" dirty="0"/>
           </a:p>
@@ -712,6 +713,94 @@
             <a:fld id="{F7021451-1387-4CA6-816F-3879F97B5CBC}" type="slidenum">
               <a:rPr lang="en-US"/>
               <a:t>11</a:t>
+            </a:fld>
+            <a:endParaRPr lang="en-US"/>
+          </a:p>
+        </p:txBody>
+      </p:sp>
+    </p:spTree>
+    <p:extLst>
+      <p:ext uri="{BB962C8B-B14F-4D97-AF65-F5344CB8AC3E}">
+        <p14:creationId xmlns:p14="http://schemas.microsoft.com/office/powerpoint/2010/main" val="1024086991"/>
+      </p:ext>
+    </p:extLst>
+  </p:cSld>
+  <p:clrMapOvr>
+    <a:masterClrMapping/>
+  </p:clrMapOvr>
+</p:notes>
+</file>
+
+<file path=ppt/notesSlides/notesSlide12.xml><?xml version="1.0" encoding="utf-8"?>
+<p:notes xmlns:a="http://schemas.openxmlformats.org/drawingml/2006/main" xmlns:r="http://schemas.openxmlformats.org/officeDocument/2006/relationships" xmlns:p="http://schemas.openxmlformats.org/presentationml/2006/main">
+  <p:cSld>
+    <p:spTree>
+      <p:nvGrpSpPr>
+        <p:cNvPr id="1" name=""/>
+        <p:cNvGrpSpPr/>
+        <p:nvPr/>
+      </p:nvGrpSpPr>
+      <p:grpSpPr>
+        <a:xfrm>
+          <a:off x="0" y="0"/>
+          <a:ext cx="0" cy="0"/>
+          <a:chOff x="0" y="0"/>
+          <a:chExt cx="0" cy="0"/>
+        </a:xfrm>
+      </p:grpSpPr>
+      <p:sp>
+        <p:nvSpPr>
+          <p:cNvPr id="2" name="Slide Image Placeholder 1"/>
+          <p:cNvSpPr>
+            <a:spLocks noGrp="1" noRot="1" noChangeAspect="1"/>
+          </p:cNvSpPr>
+          <p:nvPr>
+            <p:ph type="sldImg"/>
+          </p:nvPr>
+        </p:nvSpPr>
+        <p:spPr/>
+      </p:sp>
+      <p:sp>
+        <p:nvSpPr>
+          <p:cNvPr id="3" name="Notes Placeholder 2"/>
+          <p:cNvSpPr>
+            <a:spLocks noGrp="1"/>
+          </p:cNvSpPr>
+          <p:nvPr>
+            <p:ph type="body" idx="1"/>
+          </p:nvPr>
+        </p:nvSpPr>
+        <p:spPr/>
+        <p:txBody>
+          <a:bodyPr/>
+          <a:lstStyle/>
+          <a:p>
+            <a:r>
+              <a:rPr lang="en-US" dirty="0"/>
+              <a:t>Продиктовать и убедиться, что записали.</a:t>
+            </a:r>
+            <a:endParaRPr lang="en-US" dirty="0"/>
+          </a:p>
+        </p:txBody>
+      </p:sp>
+      <p:sp>
+        <p:nvSpPr>
+          <p:cNvPr id="4" name="Slide Number Placeholder 3"/>
+          <p:cNvSpPr>
+            <a:spLocks noGrp="1"/>
+          </p:cNvSpPr>
+          <p:nvPr>
+            <p:ph type="sldNum" sz="quarter" idx="10"/>
+          </p:nvPr>
+        </p:nvSpPr>
+        <p:spPr/>
+        <p:txBody>
+          <a:bodyPr/>
+          <a:lstStyle/>
+          <a:p>
+            <a:fld id="{F7021451-1387-4CA6-816F-3879F97B5CBC}" type="slidenum">
+              <a:rPr lang="en-US"/>
+              <a:t>12</a:t>
             </a:fld>
             <a:endParaRPr lang="en-US"/>
           </a:p>
@@ -952,7 +1041,7 @@
           <a:p>
             <a:r>
               <a:rPr lang="en-US" dirty="0"/>
-              <a:t>Второй пример — для 2 курса заменить на лабораторный/грантовый контекст.</a:t>
+              <a:t>Это пример преподавателя — озвучить как «вот моя идея», не выдавать за студенческую. Тот же пример вернётся дальше при разборе ЧИСТО.</a:t>
             </a:r>
             <a:endParaRPr lang="en-US" dirty="0"/>
           </a:p>
@@ -1216,7 +1305,7 @@
           <a:p>
             <a:r>
               <a:rPr lang="en-US" dirty="0"/>
-              <a:t>Это не новый инструмент — тот же треугольник, применённый к своей цели.</a:t>
+              <a:t>Порядок букв ЧИСТО не совпадает с порядком SMART — это нормально, важны все пять проверок, а не порядок.</a:t>
             </a:r>
             <a:endParaRPr lang="en-US" dirty="0"/>
           </a:p>
@@ -1304,7 +1393,7 @@
           <a:p>
             <a:r>
               <a:rPr lang="en-US" dirty="0"/>
-              <a:t>Число в M обязательно, даже условное. Ноль лучше не оставлять — приблизительное число можно уточнить позже, отсутствие числа нельзя проверить никогда.</a:t>
+              <a:t>Это не новый инструмент — тот же треугольник и та же ресурсная граница, применённые к своей цели.</a:t>
             </a:r>
             <a:endParaRPr lang="en-US" dirty="0"/>
           </a:p>
@@ -1392,7 +1481,7 @@
           <a:p>
             <a:r>
               <a:rPr lang="en-US" dirty="0"/>
-              <a:t>Не сокращать. Единственный блок, дающий итоговый артефакт занятия.</a:t>
+              <a:t>Число в букве И обязательно, даже условное. Ноль лучше не оставлять — приблизительное число можно уточнить позже, отсутствие числа нельзя проверить никогда.</a:t>
             </a:r>
             <a:endParaRPr lang="en-US" dirty="0"/>
           </a:p>
@@ -1992,7 +2081,7 @@
                 <a:ea typeface="Arial" pitchFamily="34" charset="-122"/>
                 <a:cs typeface="Arial" pitchFamily="34" charset="-120"/>
               </a:rPr>
-              <a:t>75–85 МИН</a:t>
+              <a:t>ЛИСТ 2 · 20 МИНУТ</a:t>
             </a:r>
             <a:endParaRPr lang="en-US" sz="1100" dirty="0"/>
           </a:p>
@@ -2031,7 +2120,7 @@
                 <a:ea typeface="Arial" pitchFamily="34" charset="-122"/>
                 <a:cs typeface="Arial" pitchFamily="34" charset="-120"/>
               </a:rPr>
-              <a:t>Соседняя команда ищет слабое место</a:t>
+              <a:t>Разверните SMART-цель</a:t>
             </a:r>
             <a:endParaRPr lang="en-US" sz="2700" dirty="0"/>
           </a:p>
@@ -2039,22 +2128,61 @@
       </p:sp>
       <p:sp>
         <p:nvSpPr>
-          <p:cNvPr id="4" name="Shape 2"/>
+          <p:cNvPr id="4" name="Text 2"/>
+          <p:cNvSpPr txBox="1"/>
+          <p:nvPr/>
+        </p:nvSpPr>
+        <p:spPr>
+          <a:xfrm>
+            <a:off x="502920" y="1371600"/>
+            <a:ext cx="8138160" cy="365760"/>
+          </a:xfrm>
+          <a:prstGeom prst="rect">
+            <a:avLst/>
+          </a:prstGeom>
+          <a:noFill/>
+          <a:ln/>
+        </p:spPr>
+        <p:txBody>
+          <a:bodyPr wrap="square" lIns="0" tIns="0" rIns="0" bIns="0" rtlCol="0" anchor="ctr"/>
+          <a:lstStyle/>
+          <a:p>
+            <a:pPr indent="0" marL="0">
+              <a:buNone/>
+            </a:pPr>
+            <a:r>
+              <a:rPr lang="en-US" sz="1500" dirty="0">
+                <a:solidFill>
+                  <a:srgbClr val="1E293B"/>
+                </a:solidFill>
+                <a:latin typeface="Arial" pitchFamily="34" charset="0"/>
+                <a:ea typeface="Arial" pitchFamily="34" charset="-122"/>
+                <a:cs typeface="Arial" pitchFamily="34" charset="-120"/>
+              </a:rPr>
+              <a:t>Каждая буква — отдельная строка, конкретно. Не общей фразой на весь акроним.</a:t>
+            </a:r>
+            <a:endParaRPr lang="en-US" sz="1500" dirty="0"/>
+          </a:p>
+        </p:txBody>
+      </p:sp>
+      <p:sp>
+        <p:nvSpPr>
+          <p:cNvPr id="5" name="Shape 3"/>
           <p:cNvSpPr/>
           <p:nvPr/>
         </p:nvSpPr>
         <p:spPr>
           <a:xfrm>
-            <a:off x="502920" y="1463040"/>
-            <a:ext cx="8138160" cy="1554480"/>
+            <a:off x="502920" y="1920240"/>
+            <a:ext cx="8138160" cy="2011680"/>
           </a:xfrm>
           <a:prstGeom prst="roundRect">
             <a:avLst>
-              <a:gd name="adj" fmla="val 2941"/>
+              <a:gd name="adj" fmla="val 2273"/>
             </a:avLst>
           </a:prstGeom>
           <a:solidFill>
-            <a:srgbClr val="F5F7FA"/>
+            <a:srgbClr val="1E4270"/>
           </a:solidFill>
           <a:ln w="9525">
             <a:solidFill>
@@ -2066,14 +2194,14 @@
       </p:sp>
       <p:sp>
         <p:nvSpPr>
-          <p:cNvPr id="5" name="Text 3"/>
+          <p:cNvPr id="6" name="Text 4"/>
           <p:cNvSpPr txBox="1"/>
           <p:nvPr/>
         </p:nvSpPr>
         <p:spPr>
           <a:xfrm>
-            <a:off x="777240" y="1737360"/>
-            <a:ext cx="7589520" cy="1005840"/>
+            <a:off x="822960" y="2194560"/>
+            <a:ext cx="7498080" cy="1371600"/>
           </a:xfrm>
           <a:prstGeom prst="rect">
             <a:avLst/>
@@ -2087,35 +2215,55 @@
           <a:p>
             <a:pPr indent="0" marL="0">
               <a:lnSpc>
-                <a:spcPts val="2400"/>
+                <a:spcPts val="2600"/>
               </a:lnSpc>
               <a:buNone/>
             </a:pPr>
             <a:r>
-              <a:rPr lang="en-US" sz="1600" dirty="0">
+              <a:rPr lang="en-US" sz="1600" b="1" dirty="0">
                 <a:solidFill>
-                  <a:srgbClr val="1E293B"/>
+                  <a:srgbClr val="FFFFFF"/>
                 </a:solidFill>
                 <a:latin typeface="Arial" pitchFamily="34" charset="0"/>
                 <a:ea typeface="Arial" pitchFamily="34" charset="-122"/>
                 <a:cs typeface="Arial" pitchFamily="34" charset="-120"/>
               </a:rPr>
-              <a:t>Обменяйтесь листом 2. Найдите ОДНУ букву SMART, которая на самом деле не выполнена, и напишите почему.</a:t>
+              <a:t>Итог блока — одна фраза с датой:</a:t>
             </a:r>
             <a:endParaRPr lang="en-US" sz="1600" dirty="0"/>
           </a:p>
-        </p:txBody>
-      </p:sp>
-      <p:sp>
-        <p:nvSpPr>
-          <p:cNvPr id="6" name="Text 4"/>
+          <a:p>
+            <a:pPr indent="0" marL="0">
+              <a:lnSpc>
+                <a:spcPts val="2600"/>
+              </a:lnSpc>
+              <a:buNone/>
+            </a:pPr>
+            <a:r>
+              <a:rPr lang="en-US" sz="1600" b="1" dirty="0">
+                <a:solidFill>
+                  <a:srgbClr val="FFFFFF"/>
+                </a:solidFill>
+                <a:latin typeface="Arial" pitchFamily="34" charset="0"/>
+                <a:ea typeface="Arial" pitchFamily="34" charset="-122"/>
+                <a:cs typeface="Arial" pitchFamily="34" charset="-120"/>
+              </a:rPr>
+              <a:t>«К [дата] мы получим [измеримый результат], проверяемый [способ проверки]»</a:t>
+            </a:r>
+            <a:endParaRPr lang="en-US" sz="1600" dirty="0"/>
+          </a:p>
+        </p:txBody>
+      </p:sp>
+      <p:sp>
+        <p:nvSpPr>
+          <p:cNvPr id="7" name="Text 5"/>
           <p:cNvSpPr txBox="1"/>
           <p:nvPr/>
         </p:nvSpPr>
         <p:spPr>
           <a:xfrm>
-            <a:off x="502920" y="3246120"/>
-            <a:ext cx="8138160" cy="457200"/>
+            <a:off x="502920" y="4160520"/>
+            <a:ext cx="8138160" cy="548640"/>
           </a:xfrm>
           <a:prstGeom prst="rect">
             <a:avLst/>
@@ -2131,7 +2279,7 @@
               <a:buNone/>
             </a:pPr>
             <a:r>
-              <a:rPr lang="en-US" sz="1300" i="1" dirty="0">
+              <a:rPr lang="en-US" sz="1200" i="1" dirty="0">
                 <a:solidFill>
                   <a:srgbClr val="64748B"/>
                 </a:solidFill>
@@ -2139,9 +2287,9 @@
                 <a:ea typeface="Arial" pitchFamily="34" charset="-122"/>
                 <a:cs typeface="Arial" pitchFamily="34" charset="-120"/>
               </a:rPr>
-              <a:t>Найти слабое место в чужой цели — услуга, а не критика. В следующий раз то же самое сделают с вашей.</a:t>
+              <a:t>💡 Цель без даты или «в конце семестра» — не Time-bound. Требуйте число.</a:t>
             </a:r>
-            <a:endParaRPr lang="en-US" sz="1300" dirty="0"/>
+            <a:endParaRPr lang="en-US" sz="1200" dirty="0"/>
           </a:p>
         </p:txBody>
       </p:sp>
@@ -2210,6 +2358,224 @@
                 <a:ea typeface="Arial" pitchFamily="34" charset="-122"/>
                 <a:cs typeface="Arial" pitchFamily="34" charset="-120"/>
               </a:rPr>
+              <a:t>75–85 МИН</a:t>
+            </a:r>
+            <a:endParaRPr lang="en-US" sz="1100" dirty="0"/>
+          </a:p>
+        </p:txBody>
+      </p:sp>
+      <p:sp>
+        <p:nvSpPr>
+          <p:cNvPr id="3" name="Text 1"/>
+          <p:cNvSpPr txBox="1"/>
+          <p:nvPr/>
+        </p:nvSpPr>
+        <p:spPr>
+          <a:xfrm>
+            <a:off x="502920" y="365760"/>
+            <a:ext cx="8138160" cy="640080"/>
+          </a:xfrm>
+          <a:prstGeom prst="rect">
+            <a:avLst/>
+          </a:prstGeom>
+          <a:noFill/>
+          <a:ln/>
+        </p:spPr>
+        <p:txBody>
+          <a:bodyPr wrap="square" lIns="0" tIns="0" rIns="0" bIns="0" rtlCol="0" anchor="ctr"/>
+          <a:lstStyle/>
+          <a:p>
+            <a:pPr indent="0" marL="0">
+              <a:buNone/>
+            </a:pPr>
+            <a:r>
+              <a:rPr lang="en-US" sz="2700" b="1" dirty="0">
+                <a:solidFill>
+                  <a:srgbClr val="005AAA"/>
+                </a:solidFill>
+                <a:latin typeface="Arial" pitchFamily="34" charset="0"/>
+                <a:ea typeface="Arial" pitchFamily="34" charset="-122"/>
+                <a:cs typeface="Arial" pitchFamily="34" charset="-120"/>
+              </a:rPr>
+              <a:t>Соседняя команда ищет слабое место</a:t>
+            </a:r>
+            <a:endParaRPr lang="en-US" sz="2700" dirty="0"/>
+          </a:p>
+        </p:txBody>
+      </p:sp>
+      <p:sp>
+        <p:nvSpPr>
+          <p:cNvPr id="4" name="Shape 2"/>
+          <p:cNvSpPr/>
+          <p:nvPr/>
+        </p:nvSpPr>
+        <p:spPr>
+          <a:xfrm>
+            <a:off x="502920" y="1463040"/>
+            <a:ext cx="8138160" cy="1554480"/>
+          </a:xfrm>
+          <a:prstGeom prst="roundRect">
+            <a:avLst>
+              <a:gd name="adj" fmla="val 2941"/>
+            </a:avLst>
+          </a:prstGeom>
+          <a:solidFill>
+            <a:srgbClr val="F5F7FA"/>
+          </a:solidFill>
+          <a:ln w="9525">
+            <a:solidFill>
+              <a:srgbClr val="D8DEE6"/>
+            </a:solidFill>
+            <a:prstDash val="solid"/>
+          </a:ln>
+        </p:spPr>
+      </p:sp>
+      <p:sp>
+        <p:nvSpPr>
+          <p:cNvPr id="5" name="Text 3"/>
+          <p:cNvSpPr txBox="1"/>
+          <p:nvPr/>
+        </p:nvSpPr>
+        <p:spPr>
+          <a:xfrm>
+            <a:off x="777240" y="1737360"/>
+            <a:ext cx="7589520" cy="1005840"/>
+          </a:xfrm>
+          <a:prstGeom prst="rect">
+            <a:avLst/>
+          </a:prstGeom>
+          <a:noFill/>
+          <a:ln/>
+        </p:spPr>
+        <p:txBody>
+          <a:bodyPr wrap="square" lIns="0" tIns="0" rIns="0" bIns="0" rtlCol="0" anchor="ctr"/>
+          <a:lstStyle/>
+          <a:p>
+            <a:pPr indent="0" marL="0">
+              <a:lnSpc>
+                <a:spcPts val="2400"/>
+              </a:lnSpc>
+              <a:buNone/>
+            </a:pPr>
+            <a:r>
+              <a:rPr lang="en-US" sz="1600" dirty="0">
+                <a:solidFill>
+                  <a:srgbClr val="1E293B"/>
+                </a:solidFill>
+                <a:latin typeface="Arial" pitchFamily="34" charset="0"/>
+                <a:ea typeface="Arial" pitchFamily="34" charset="-122"/>
+                <a:cs typeface="Arial" pitchFamily="34" charset="-120"/>
+              </a:rPr>
+              <a:t>Обменяйтесь листом 2. Найдите ОДНУ букву ЧИСТО, которая на самом деле не выполнена, и напишите почему.</a:t>
+            </a:r>
+            <a:endParaRPr lang="en-US" sz="1600" dirty="0"/>
+          </a:p>
+        </p:txBody>
+      </p:sp>
+      <p:sp>
+        <p:nvSpPr>
+          <p:cNvPr id="6" name="Text 4"/>
+          <p:cNvSpPr txBox="1"/>
+          <p:nvPr/>
+        </p:nvSpPr>
+        <p:spPr>
+          <a:xfrm>
+            <a:off x="502920" y="3246120"/>
+            <a:ext cx="8138160" cy="457200"/>
+          </a:xfrm>
+          <a:prstGeom prst="rect">
+            <a:avLst/>
+          </a:prstGeom>
+          <a:noFill/>
+          <a:ln/>
+        </p:spPr>
+        <p:txBody>
+          <a:bodyPr wrap="square" lIns="0" tIns="0" rIns="0" bIns="0" rtlCol="0" anchor="ctr"/>
+          <a:lstStyle/>
+          <a:p>
+            <a:pPr indent="0" marL="0">
+              <a:buNone/>
+            </a:pPr>
+            <a:r>
+              <a:rPr lang="en-US" sz="1300" i="1" dirty="0">
+                <a:solidFill>
+                  <a:srgbClr val="64748B"/>
+                </a:solidFill>
+                <a:latin typeface="Arial" pitchFamily="34" charset="0"/>
+                <a:ea typeface="Arial" pitchFamily="34" charset="-122"/>
+                <a:cs typeface="Arial" pitchFamily="34" charset="-120"/>
+              </a:rPr>
+              <a:t>Найти слабое место в чужой цели — услуга, а не критика. В следующий раз то же самое сделают с вашей.</a:t>
+            </a:r>
+            <a:endParaRPr lang="en-US" sz="1300" dirty="0"/>
+          </a:p>
+        </p:txBody>
+      </p:sp>
+    </p:spTree>
+  </p:cSld>
+  <p:clrMapOvr>
+    <a:masterClrMapping/>
+  </p:clrMapOvr>
+</p:sld>
+</file>
+
+<file path=ppt/slides/slide12.xml><?xml version="1.0" encoding="utf-8"?>
+<p:sld xmlns:a="http://schemas.openxmlformats.org/drawingml/2006/main" xmlns:r="http://schemas.openxmlformats.org/officeDocument/2006/relationships" xmlns:p="http://schemas.openxmlformats.org/presentationml/2006/main">
+  <p:cSld name="Slide 12">
+    <p:bg>
+      <p:bgPr>
+        <a:solidFill>
+          <a:srgbClr val="FFFFFF"/>
+        </a:solidFill>
+      </p:bgPr>
+    </p:bg>
+    <p:spTree>
+      <p:nvGrpSpPr>
+        <p:cNvPr id="1" name=""/>
+        <p:cNvGrpSpPr/>
+        <p:nvPr/>
+      </p:nvGrpSpPr>
+      <p:grpSpPr>
+        <a:xfrm>
+          <a:off x="0" y="0"/>
+          <a:ext cx="0" cy="0"/>
+          <a:chOff x="0" y="0"/>
+          <a:chExt cx="0" cy="0"/>
+        </a:xfrm>
+      </p:grpSpPr>
+      <p:sp>
+        <p:nvSpPr>
+          <p:cNvPr id="2" name="Text 0"/>
+          <p:cNvSpPr txBox="1"/>
+          <p:nvPr/>
+        </p:nvSpPr>
+        <p:spPr>
+          <a:xfrm>
+            <a:off x="502920" y="182880"/>
+            <a:ext cx="8138160" cy="219456"/>
+          </a:xfrm>
+          <a:prstGeom prst="rect">
+            <a:avLst/>
+          </a:prstGeom>
+          <a:noFill/>
+          <a:ln/>
+        </p:spPr>
+        <p:txBody>
+          <a:bodyPr wrap="square" lIns="0" tIns="0" rIns="0" bIns="0" rtlCol="0" anchor="ctr"/>
+          <a:lstStyle/>
+          <a:p>
+            <a:pPr indent="0" marL="0">
+              <a:buNone/>
+            </a:pPr>
+            <a:r>
+              <a:rPr lang="en-US" sz="1100" spc="150" kern="0" dirty="0">
+                <a:solidFill>
+                  <a:srgbClr val="64748B"/>
+                </a:solidFill>
+                <a:latin typeface="Arial" pitchFamily="34" charset="0"/>
+                <a:ea typeface="Arial" pitchFamily="34" charset="-122"/>
+                <a:cs typeface="Arial" pitchFamily="34" charset="-120"/>
+              </a:rPr>
               <a:t>К ПРАКТИКЕ 2 · 19 СЕНТЯБРЯ</a:t>
             </a:r>
             <a:endParaRPr lang="en-US" sz="1100" dirty="0"/>
@@ -3754,7 +4120,7 @@
                 <a:ea typeface="Arial" pitchFamily="34" charset="-122"/>
                 <a:cs typeface="Arial" pitchFamily="34" charset="-120"/>
               </a:rPr>
-              <a:t>РАЗБОР НА ДОСКЕ</a:t>
+              <a:t>ПРИМЕР ОТ ПРЕПОДАВАТЕЛЯ</a:t>
             </a:r>
             <a:endParaRPr lang="en-US" sz="1100" dirty="0"/>
           </a:p>
@@ -3801,18 +4167,57 @@
       </p:sp>
       <p:sp>
         <p:nvSpPr>
-          <p:cNvPr id="4" name="Shape 2"/>
+          <p:cNvPr id="4" name="Text 2"/>
+          <p:cNvSpPr txBox="1"/>
+          <p:nvPr/>
+        </p:nvSpPr>
+        <p:spPr>
+          <a:xfrm>
+            <a:off x="502920" y="960120"/>
+            <a:ext cx="8138160" cy="274320"/>
+          </a:xfrm>
+          <a:prstGeom prst="rect">
+            <a:avLst/>
+          </a:prstGeom>
+          <a:noFill/>
+          <a:ln/>
+        </p:spPr>
+        <p:txBody>
+          <a:bodyPr wrap="square" lIns="0" tIns="0" rIns="0" bIns="0" rtlCol="0" anchor="ctr"/>
+          <a:lstStyle/>
+          <a:p>
+            <a:pPr indent="0" marL="0">
+              <a:buNone/>
+            </a:pPr>
+            <a:r>
+              <a:rPr lang="en-US" sz="1300" i="1" dirty="0">
+                <a:solidFill>
+                  <a:srgbClr val="64748B"/>
+                </a:solidFill>
+                <a:latin typeface="Arial" pitchFamily="34" charset="0"/>
+                <a:ea typeface="Arial" pitchFamily="34" charset="-122"/>
+                <a:cs typeface="Arial" pitchFamily="34" charset="-120"/>
+              </a:rPr>
+              <a:t>Вектор А: умный горшок для растений</a:t>
+            </a:r>
+            <a:endParaRPr lang="en-US" sz="1300" dirty="0"/>
+          </a:p>
+        </p:txBody>
+      </p:sp>
+      <p:sp>
+        <p:nvSpPr>
+          <p:cNvPr id="5" name="Shape 3"/>
           <p:cNvSpPr/>
           <p:nvPr/>
         </p:nvSpPr>
         <p:spPr>
           <a:xfrm>
-            <a:off x="502920" y="1234440"/>
-            <a:ext cx="8138160" cy="868680"/>
+            <a:off x="502920" y="1325880"/>
+            <a:ext cx="8138160" cy="777240"/>
           </a:xfrm>
           <a:prstGeom prst="roundRect">
             <a:avLst>
-              <a:gd name="adj" fmla="val 5263"/>
+              <a:gd name="adj" fmla="val 5882"/>
             </a:avLst>
           </a:prstGeom>
           <a:solidFill>
@@ -3828,13 +4233,13 @@
       </p:sp>
       <p:sp>
         <p:nvSpPr>
-          <p:cNvPr id="5" name="Text 3"/>
+          <p:cNvPr id="6" name="Text 4"/>
           <p:cNvSpPr txBox="1"/>
           <p:nvPr/>
         </p:nvSpPr>
         <p:spPr>
           <a:xfrm>
-            <a:off x="777240" y="1417320"/>
+            <a:off x="777240" y="1481328"/>
             <a:ext cx="7589520" cy="320040"/>
           </a:xfrm>
           <a:prstGeom prst="rect">
@@ -3859,7 +4264,7 @@
                 <a:ea typeface="Arial" pitchFamily="34" charset="-122"/>
                 <a:cs typeface="Arial" pitchFamily="34" charset="-120"/>
               </a:rPr>
-              <a:t>«Сделаем сессию удобнее для первокурсников»</a:t>
+              <a:t>«Сделать умный горшок для растений»</a:t>
             </a:r>
             <a:endParaRPr lang="en-US" sz="1500" dirty="0"/>
           </a:p>
@@ -3867,13 +4272,13 @@
       </p:sp>
       <p:sp>
         <p:nvSpPr>
-          <p:cNvPr id="6" name="Text 4"/>
+          <p:cNvPr id="7" name="Text 5"/>
           <p:cNvSpPr txBox="1"/>
           <p:nvPr/>
         </p:nvSpPr>
         <p:spPr>
           <a:xfrm>
-            <a:off x="777240" y="1783080"/>
+            <a:off x="777240" y="1828800"/>
             <a:ext cx="7589520" cy="274320"/>
           </a:xfrm>
           <a:prstGeom prst="rect">
@@ -3898,7 +4303,7 @@
                 <a:ea typeface="Arial" pitchFamily="34" charset="-122"/>
                 <a:cs typeface="Arial" pitchFamily="34" charset="-120"/>
               </a:rPr>
-              <a:t>Общие слова. Кто именно, насколько удобнее, по сравнению с чем — не сказано</a:t>
+              <a:t>Общие слова. Кто именно, что за горшок, какая выгода, по сравнению с чем — не сказано</a:t>
             </a:r>
             <a:endParaRPr lang="en-US" sz="1200" dirty="0"/>
           </a:p>
@@ -3906,18 +4311,18 @@
       </p:sp>
       <p:sp>
         <p:nvSpPr>
-          <p:cNvPr id="7" name="Shape 5"/>
+          <p:cNvPr id="8" name="Shape 6"/>
           <p:cNvSpPr/>
           <p:nvPr/>
         </p:nvSpPr>
         <p:spPr>
           <a:xfrm>
             <a:off x="502920" y="2286000"/>
-            <a:ext cx="8138160" cy="1234440"/>
+            <a:ext cx="8138160" cy="1417320"/>
           </a:xfrm>
           <a:prstGeom prst="roundRect">
             <a:avLst>
-              <a:gd name="adj" fmla="val 3704"/>
+              <a:gd name="adj" fmla="val 3226"/>
             </a:avLst>
           </a:prstGeom>
           <a:solidFill>
@@ -3933,14 +4338,14 @@
       </p:sp>
       <p:sp>
         <p:nvSpPr>
-          <p:cNvPr id="8" name="Text 6"/>
+          <p:cNvPr id="9" name="Text 7"/>
           <p:cNvSpPr txBox="1"/>
           <p:nvPr/>
         </p:nvSpPr>
         <p:spPr>
           <a:xfrm>
             <a:off x="777240" y="2450592"/>
-            <a:ext cx="7589520" cy="914400"/>
+            <a:ext cx="7589520" cy="1143000"/>
           </a:xfrm>
           <a:prstGeom prst="rect">
             <a:avLst/>
@@ -3954,12 +4359,12 @@
           <a:p>
             <a:pPr indent="0" marL="0">
               <a:lnSpc>
-                <a:spcPts val="2000"/>
+                <a:spcPts val="1800"/>
               </a:lnSpc>
               <a:buNone/>
             </a:pPr>
             <a:r>
-              <a:rPr lang="en-US" sz="1400" dirty="0">
+              <a:rPr lang="en-US" sz="1300" dirty="0">
                 <a:solidFill>
                   <a:srgbClr val="FFFFFF"/>
                 </a:solidFill>
@@ -3967,21 +4372,21 @@
                 <a:ea typeface="Arial" pitchFamily="34" charset="-122"/>
                 <a:cs typeface="Arial" pitchFamily="34" charset="-120"/>
               </a:rPr>
-              <a:t>«Для команд 1 курса без опыта планирования мы делаем чек-лист подготовки к сессии, который сокращает время на организацию с трёх часов до тридцати минут — в отличие от разрозненных советов в чатах, которые никто не сверяет»</a:t>
+              <a:t>«Для людей без опыта ухода за растениями, которые поливают на глаз и часто заливают или пересушивают землю, мы делаем горшок со встроенным датчиком влажности и световым индикатором — что снижает случаи гибели растений от неправильного полива — в отличие от полива на глаз, где ошибка видна только тогда, когда растение уже завяло»</a:t>
             </a:r>
-            <a:endParaRPr lang="en-US" sz="1400" dirty="0"/>
-          </a:p>
-        </p:txBody>
-      </p:sp>
-      <p:sp>
-        <p:nvSpPr>
-          <p:cNvPr id="9" name="Text 7"/>
+            <a:endParaRPr lang="en-US" sz="1300" dirty="0"/>
+          </a:p>
+        </p:txBody>
+      </p:sp>
+      <p:sp>
+        <p:nvSpPr>
+          <p:cNvPr id="10" name="Text 8"/>
           <p:cNvSpPr txBox="1"/>
           <p:nvPr/>
         </p:nvSpPr>
         <p:spPr>
           <a:xfrm>
-            <a:off x="502920" y="3794760"/>
+            <a:off x="502920" y="3886200"/>
             <a:ext cx="8138160" cy="548640"/>
           </a:xfrm>
           <a:prstGeom prst="rect">
@@ -5812,7 +6217,7 @@
     <p:bg>
       <p:bgPr>
         <a:solidFill>
-          <a:srgbClr val="FFFFFF"/>
+          <a:srgbClr val="1E4270"/>
         </a:solidFill>
       </p:bgPr>
     </p:bg>
@@ -5857,13 +6262,13 @@
             <a:r>
               <a:rPr lang="en-US" sz="1100" spc="150" kern="0" dirty="0">
                 <a:solidFill>
-                  <a:srgbClr val="64748B"/>
+                  <a:srgbClr val="B9CBDE"/>
                 </a:solidFill>
                 <a:latin typeface="Arial" pitchFamily="34" charset="0"/>
                 <a:ea typeface="Arial" pitchFamily="34" charset="-122"/>
                 <a:cs typeface="Arial" pitchFamily="34" charset="-120"/>
               </a:rPr>
-              <a:t>ИНСТРУМЕНТ, НЕ ПОВТОР</a:t>
+              <a:t>СВОЙ СПОСОБ ЗАПОМНИТЬ</a:t>
             </a:r>
             <a:endParaRPr lang="en-US" sz="1100" dirty="0"/>
           </a:p>
@@ -5877,8 +6282,8 @@
         </p:nvSpPr>
         <p:spPr>
           <a:xfrm>
-            <a:off x="502920" y="365760"/>
-            <a:ext cx="8138160" cy="640080"/>
+            <a:off x="502920" y="1005840"/>
+            <a:ext cx="8138160" cy="457200"/>
           </a:xfrm>
           <a:prstGeom prst="rect">
             <a:avLst/>
@@ -5894,848 +6299,101 @@
               <a:buNone/>
             </a:pPr>
             <a:r>
-              <a:rPr lang="en-US" sz="2700" b="1" dirty="0">
+              <a:rPr lang="en-US" sz="2000" dirty="0">
                 <a:solidFill>
-                  <a:srgbClr val="005AAA"/>
+                  <a:srgbClr val="DCE6F0"/>
                 </a:solidFill>
                 <a:latin typeface="Arial" pitchFamily="34" charset="0"/>
                 <a:ea typeface="Arial" pitchFamily="34" charset="-122"/>
                 <a:cs typeface="Arial" pitchFamily="34" charset="-120"/>
               </a:rPr>
-              <a:t>SMART — та же цена, что и раньше</a:t>
+              <a:t>Цель должна быть</a:t>
             </a:r>
-            <a:endParaRPr lang="en-US" sz="2700" dirty="0"/>
-          </a:p>
-        </p:txBody>
-      </p:sp>
-      <p:graphicFrame>
-        <p:nvGraphicFramePr>
-          <p:cNvPr id="8" name="Table 0"/>
-          <p:cNvGraphicFramePr>
-            <a:graphicFrameLocks noGrp="1"/>
-          </p:cNvGraphicFramePr>
-          <p:nvPr>
-            <p:extLst>
-              <p:ext uri="{D42A27DB-BD31-4B8C-83A1-F6EECF244321}">
-                <p14:modId xmlns:p14="http://schemas.microsoft.com/office/powerpoint/2010/main" val="1579011935"/>
-              </p:ext>
-            </p:extLst>
-          </p:nvPr>
-        </p:nvGraphicFramePr>
-        <p:xfrm>
-          <a:off x="502920" y="1325880"/>
-          <a:ext cx="8138160" cy="914400"/>
-        </p:xfrm>
-        <a:graphic>
-          <a:graphicData uri="http://schemas.openxmlformats.org/drawingml/2006/table">
-            <a:tbl>
-              <a:tblPr/>
-              <a:tblGrid>
-                <a:gridCol w="2011680"/>
-                <a:gridCol w="6217920"/>
-              </a:tblGrid>
-              <a:tr h="475488">
-                <a:tc>
-                  <a:txBody>
-                    <a:bodyPr/>
-                    <a:lstStyle/>
-                    <a:p>
-                      <a:pPr algn="ctr" indent="0" marL="0">
-                        <a:buNone/>
-                      </a:pPr>
-                      <a:r>
-                        <a:rPr lang="en-US" sz="1300" b="1" dirty="0">
-                          <a:solidFill>
-                            <a:srgbClr val="FFFFFF"/>
-                          </a:solidFill>
-                          <a:latin typeface="Arial" pitchFamily="34" charset="0"/>
-                          <a:ea typeface="Arial" pitchFamily="34" charset="-122"/>
-                          <a:cs typeface="Arial" pitchFamily="34" charset="-120"/>
-                        </a:rPr>
-                        <a:t>Буква</a:t>
-                      </a:r>
-                      <a:endParaRPr lang="en-US" sz="1300" dirty="0">
-                        <a:latin typeface="Arial" charset="0"/>
-                        <a:ea typeface="Arial" charset="0"/>
-                        <a:cs typeface="Arial" charset="0"/>
-                      </a:endParaRPr>
-                    </a:p>
-                  </a:txBody>
-                  <a:tcPr marL="91440" marR="91440" marT="45720" marB="45720" anchor="ctr">
-                    <a:lnL w="6350" cap="flat" cmpd="sng" algn="ctr">
-                      <a:solidFill>
-                        <a:srgbClr val="D8DEE6"/>
-                      </a:solidFill>
-                      <a:prstDash val="solid"/>
-                      <a:round/>
-                      <a:headEnd type="none" w="med" len="med"/>
-                      <a:tailEnd type="none" w="med" len="med"/>
-                    </a:lnL>
-                    <a:lnR w="6350" cap="flat" cmpd="sng" algn="ctr">
-                      <a:solidFill>
-                        <a:srgbClr val="D8DEE6"/>
-                      </a:solidFill>
-                      <a:prstDash val="solid"/>
-                      <a:round/>
-                      <a:headEnd type="none" w="med" len="med"/>
-                      <a:tailEnd type="none" w="med" len="med"/>
-                    </a:lnR>
-                    <a:lnT w="6350" cap="flat" cmpd="sng" algn="ctr">
-                      <a:solidFill>
-                        <a:srgbClr val="D8DEE6"/>
-                      </a:solidFill>
-                      <a:prstDash val="solid"/>
-                      <a:round/>
-                      <a:headEnd type="none" w="med" len="med"/>
-                      <a:tailEnd type="none" w="med" len="med"/>
-                    </a:lnT>
-                    <a:lnB w="6350" cap="flat" cmpd="sng" algn="ctr">
-                      <a:solidFill>
-                        <a:srgbClr val="D8DEE6"/>
-                      </a:solidFill>
-                      <a:prstDash val="solid"/>
-                      <a:round/>
-                      <a:headEnd type="none" w="med" len="med"/>
-                      <a:tailEnd type="none" w="med" len="med"/>
-                    </a:lnB>
-                    <a:solidFill>
-                      <a:srgbClr val="1E4270"/>
-                    </a:solidFill>
-                  </a:tcPr>
-                </a:tc>
-                <a:tc>
-                  <a:txBody>
-                    <a:bodyPr/>
-                    <a:lstStyle/>
-                    <a:p>
-                      <a:pPr indent="0" marL="0">
-                        <a:buNone/>
-                      </a:pPr>
-                      <a:r>
-                        <a:rPr lang="en-US" sz="1300" b="1" dirty="0">
-                          <a:solidFill>
-                            <a:srgbClr val="FFFFFF"/>
-                          </a:solidFill>
-                          <a:latin typeface="Arial" pitchFamily="34" charset="0"/>
-                          <a:ea typeface="Arial" pitchFamily="34" charset="-122"/>
-                          <a:cs typeface="Arial" pitchFamily="34" charset="-120"/>
-                        </a:rPr>
-                        <a:t>Проверяется через уже известное</a:t>
-                      </a:r>
-                      <a:endParaRPr lang="en-US" sz="1300" dirty="0">
-                        <a:latin typeface="Arial" charset="0"/>
-                        <a:ea typeface="Arial" charset="0"/>
-                        <a:cs typeface="Arial" charset="0"/>
-                      </a:endParaRPr>
-                    </a:p>
-                  </a:txBody>
-                  <a:tcPr marL="91440" marR="91440" marT="45720" marB="45720" anchor="ctr">
-                    <a:lnL w="6350" cap="flat" cmpd="sng" algn="ctr">
-                      <a:solidFill>
-                        <a:srgbClr val="D8DEE6"/>
-                      </a:solidFill>
-                      <a:prstDash val="solid"/>
-                      <a:round/>
-                      <a:headEnd type="none" w="med" len="med"/>
-                      <a:tailEnd type="none" w="med" len="med"/>
-                    </a:lnL>
-                    <a:lnR w="6350" cap="flat" cmpd="sng" algn="ctr">
-                      <a:solidFill>
-                        <a:srgbClr val="D8DEE6"/>
-                      </a:solidFill>
-                      <a:prstDash val="solid"/>
-                      <a:round/>
-                      <a:headEnd type="none" w="med" len="med"/>
-                      <a:tailEnd type="none" w="med" len="med"/>
-                    </a:lnR>
-                    <a:lnT w="6350" cap="flat" cmpd="sng" algn="ctr">
-                      <a:solidFill>
-                        <a:srgbClr val="D8DEE6"/>
-                      </a:solidFill>
-                      <a:prstDash val="solid"/>
-                      <a:round/>
-                      <a:headEnd type="none" w="med" len="med"/>
-                      <a:tailEnd type="none" w="med" len="med"/>
-                    </a:lnT>
-                    <a:lnB w="6350" cap="flat" cmpd="sng" algn="ctr">
-                      <a:solidFill>
-                        <a:srgbClr val="D8DEE6"/>
-                      </a:solidFill>
-                      <a:prstDash val="solid"/>
-                      <a:round/>
-                      <a:headEnd type="none" w="med" len="med"/>
-                      <a:tailEnd type="none" w="med" len="med"/>
-                    </a:lnB>
-                    <a:solidFill>
-                      <a:srgbClr val="1E4270"/>
-                    </a:solidFill>
-                  </a:tcPr>
-                </a:tc>
-              </a:tr>
-              <a:tr h="475488">
-                <a:tc>
-                  <a:txBody>
-                    <a:bodyPr/>
-                    <a:lstStyle/>
-                    <a:p>
-                      <a:pPr indent="0" marL="0">
-                        <a:buNone/>
-                      </a:pPr>
-                      <a:r>
-                        <a:rPr lang="en-US" sz="1300" dirty="0">
-                          <a:solidFill>
-                            <a:srgbClr val="1E293B"/>
-                          </a:solidFill>
-                          <a:latin typeface="Arial" pitchFamily="34" charset="0"/>
-                          <a:ea typeface="Arial" pitchFamily="34" charset="-122"/>
-                          <a:cs typeface="Arial" pitchFamily="34" charset="-120"/>
-                        </a:rPr>
-                        <a:t>S · Specific</a:t>
-                      </a:r>
-                      <a:endParaRPr lang="en-US" sz="1300" dirty="0">
-                        <a:latin typeface="Arial" charset="0"/>
-                        <a:ea typeface="Arial" charset="0"/>
-                        <a:cs typeface="Arial" charset="0"/>
-                      </a:endParaRPr>
-                    </a:p>
-                  </a:txBody>
-                  <a:tcPr marL="91440" marR="91440" marT="45720" marB="45720" anchor="ctr">
-                    <a:lnL w="6350" cap="flat" cmpd="sng" algn="ctr">
-                      <a:solidFill>
-                        <a:srgbClr val="D8DEE6"/>
-                      </a:solidFill>
-                      <a:prstDash val="solid"/>
-                      <a:round/>
-                      <a:headEnd type="none" w="med" len="med"/>
-                      <a:tailEnd type="none" w="med" len="med"/>
-                    </a:lnL>
-                    <a:lnR w="6350" cap="flat" cmpd="sng" algn="ctr">
-                      <a:solidFill>
-                        <a:srgbClr val="D8DEE6"/>
-                      </a:solidFill>
-                      <a:prstDash val="solid"/>
-                      <a:round/>
-                      <a:headEnd type="none" w="med" len="med"/>
-                      <a:tailEnd type="none" w="med" len="med"/>
-                    </a:lnR>
-                    <a:lnT w="6350" cap="flat" cmpd="sng" algn="ctr">
-                      <a:solidFill>
-                        <a:srgbClr val="D8DEE6"/>
-                      </a:solidFill>
-                      <a:prstDash val="solid"/>
-                      <a:round/>
-                      <a:headEnd type="none" w="med" len="med"/>
-                      <a:tailEnd type="none" w="med" len="med"/>
-                    </a:lnT>
-                    <a:lnB w="6350" cap="flat" cmpd="sng" algn="ctr">
-                      <a:solidFill>
-                        <a:srgbClr val="D8DEE6"/>
-                      </a:solidFill>
-                      <a:prstDash val="solid"/>
-                      <a:round/>
-                      <a:headEnd type="none" w="med" len="med"/>
-                      <a:tailEnd type="none" w="med" len="med"/>
-                    </a:lnB>
-                  </a:tcPr>
-                </a:tc>
-                <a:tc>
-                  <a:txBody>
-                    <a:bodyPr/>
-                    <a:lstStyle/>
-                    <a:p>
-                      <a:pPr indent="0" marL="0">
-                        <a:buNone/>
-                      </a:pPr>
-                      <a:r>
-                        <a:rPr lang="en-US" sz="1300" dirty="0">
-                          <a:solidFill>
-                            <a:srgbClr val="1E293B"/>
-                          </a:solidFill>
-                          <a:latin typeface="Arial" pitchFamily="34" charset="0"/>
-                          <a:ea typeface="Arial" pitchFamily="34" charset="-122"/>
-                          <a:cs typeface="Arial" pitchFamily="34" charset="-120"/>
-                        </a:rPr>
-                        <a:t>Целевая направленность (слайд 6): чёткий, верифицируемый результат</a:t>
-                      </a:r>
-                      <a:endParaRPr lang="en-US" sz="1300" dirty="0">
-                        <a:latin typeface="Arial" charset="0"/>
-                        <a:ea typeface="Arial" charset="0"/>
-                        <a:cs typeface="Arial" charset="0"/>
-                      </a:endParaRPr>
-                    </a:p>
-                  </a:txBody>
-                  <a:tcPr marL="91440" marR="91440" marT="45720" marB="45720" anchor="ctr">
-                    <a:lnL w="6350" cap="flat" cmpd="sng" algn="ctr">
-                      <a:solidFill>
-                        <a:srgbClr val="D8DEE6"/>
-                      </a:solidFill>
-                      <a:prstDash val="solid"/>
-                      <a:round/>
-                      <a:headEnd type="none" w="med" len="med"/>
-                      <a:tailEnd type="none" w="med" len="med"/>
-                    </a:lnL>
-                    <a:lnR w="6350" cap="flat" cmpd="sng" algn="ctr">
-                      <a:solidFill>
-                        <a:srgbClr val="D8DEE6"/>
-                      </a:solidFill>
-                      <a:prstDash val="solid"/>
-                      <a:round/>
-                      <a:headEnd type="none" w="med" len="med"/>
-                      <a:tailEnd type="none" w="med" len="med"/>
-                    </a:lnR>
-                    <a:lnT w="6350" cap="flat" cmpd="sng" algn="ctr">
-                      <a:solidFill>
-                        <a:srgbClr val="D8DEE6"/>
-                      </a:solidFill>
-                      <a:prstDash val="solid"/>
-                      <a:round/>
-                      <a:headEnd type="none" w="med" len="med"/>
-                      <a:tailEnd type="none" w="med" len="med"/>
-                    </a:lnT>
-                    <a:lnB w="6350" cap="flat" cmpd="sng" algn="ctr">
-                      <a:solidFill>
-                        <a:srgbClr val="D8DEE6"/>
-                      </a:solidFill>
-                      <a:prstDash val="solid"/>
-                      <a:round/>
-                      <a:headEnd type="none" w="med" len="med"/>
-                      <a:tailEnd type="none" w="med" len="med"/>
-                    </a:lnB>
-                  </a:tcPr>
-                </a:tc>
-              </a:tr>
-              <a:tr h="475488">
-                <a:tc>
-                  <a:txBody>
-                    <a:bodyPr/>
-                    <a:lstStyle/>
-                    <a:p>
-                      <a:pPr indent="0" marL="0">
-                        <a:buNone/>
-                      </a:pPr>
-                      <a:r>
-                        <a:rPr lang="en-US" sz="1300" dirty="0">
-                          <a:solidFill>
-                            <a:srgbClr val="1E293B"/>
-                          </a:solidFill>
-                          <a:latin typeface="Arial" pitchFamily="34" charset="0"/>
-                          <a:ea typeface="Arial" pitchFamily="34" charset="-122"/>
-                          <a:cs typeface="Arial" pitchFamily="34" charset="-120"/>
-                        </a:rPr>
-                        <a:t>M · Measurable</a:t>
-                      </a:r>
-                      <a:endParaRPr lang="en-US" sz="1300" dirty="0">
-                        <a:latin typeface="Arial" charset="0"/>
-                        <a:ea typeface="Arial" charset="0"/>
-                        <a:cs typeface="Arial" charset="0"/>
-                      </a:endParaRPr>
-                    </a:p>
-                  </a:txBody>
-                  <a:tcPr marL="91440" marR="91440" marT="45720" marB="45720" anchor="ctr">
-                    <a:lnL w="6350" cap="flat" cmpd="sng" algn="ctr">
-                      <a:solidFill>
-                        <a:srgbClr val="D8DEE6"/>
-                      </a:solidFill>
-                      <a:prstDash val="solid"/>
-                      <a:round/>
-                      <a:headEnd type="none" w="med" len="med"/>
-                      <a:tailEnd type="none" w="med" len="med"/>
-                    </a:lnL>
-                    <a:lnR w="6350" cap="flat" cmpd="sng" algn="ctr">
-                      <a:solidFill>
-                        <a:srgbClr val="D8DEE6"/>
-                      </a:solidFill>
-                      <a:prstDash val="solid"/>
-                      <a:round/>
-                      <a:headEnd type="none" w="med" len="med"/>
-                      <a:tailEnd type="none" w="med" len="med"/>
-                    </a:lnR>
-                    <a:lnT w="6350" cap="flat" cmpd="sng" algn="ctr">
-                      <a:solidFill>
-                        <a:srgbClr val="D8DEE6"/>
-                      </a:solidFill>
-                      <a:prstDash val="solid"/>
-                      <a:round/>
-                      <a:headEnd type="none" w="med" len="med"/>
-                      <a:tailEnd type="none" w="med" len="med"/>
-                    </a:lnT>
-                    <a:lnB w="6350" cap="flat" cmpd="sng" algn="ctr">
-                      <a:solidFill>
-                        <a:srgbClr val="D8DEE6"/>
-                      </a:solidFill>
-                      <a:prstDash val="solid"/>
-                      <a:round/>
-                      <a:headEnd type="none" w="med" len="med"/>
-                      <a:tailEnd type="none" w="med" len="med"/>
-                    </a:lnB>
-                  </a:tcPr>
-                </a:tc>
-                <a:tc>
-                  <a:txBody>
-                    <a:bodyPr/>
-                    <a:lstStyle/>
-                    <a:p>
-                      <a:pPr indent="0" marL="0">
-                        <a:buNone/>
-                      </a:pPr>
-                      <a:r>
-                        <a:rPr lang="en-US" sz="1300" dirty="0">
-                          <a:solidFill>
-                            <a:srgbClr val="1E293B"/>
-                          </a:solidFill>
-                          <a:latin typeface="Arial" pitchFamily="34" charset="0"/>
-                          <a:ea typeface="Arial" pitchFamily="34" charset="-122"/>
-                          <a:cs typeface="Arial" pitchFamily="34" charset="-120"/>
-                        </a:rPr>
-                        <a:t>То же — измерить и проверить объективно</a:t>
-                      </a:r>
-                      <a:endParaRPr lang="en-US" sz="1300" dirty="0">
-                        <a:latin typeface="Arial" charset="0"/>
-                        <a:ea typeface="Arial" charset="0"/>
-                        <a:cs typeface="Arial" charset="0"/>
-                      </a:endParaRPr>
-                    </a:p>
-                  </a:txBody>
-                  <a:tcPr marL="91440" marR="91440" marT="45720" marB="45720" anchor="ctr">
-                    <a:lnL w="6350" cap="flat" cmpd="sng" algn="ctr">
-                      <a:solidFill>
-                        <a:srgbClr val="D8DEE6"/>
-                      </a:solidFill>
-                      <a:prstDash val="solid"/>
-                      <a:round/>
-                      <a:headEnd type="none" w="med" len="med"/>
-                      <a:tailEnd type="none" w="med" len="med"/>
-                    </a:lnL>
-                    <a:lnR w="6350" cap="flat" cmpd="sng" algn="ctr">
-                      <a:solidFill>
-                        <a:srgbClr val="D8DEE6"/>
-                      </a:solidFill>
-                      <a:prstDash val="solid"/>
-                      <a:round/>
-                      <a:headEnd type="none" w="med" len="med"/>
-                      <a:tailEnd type="none" w="med" len="med"/>
-                    </a:lnR>
-                    <a:lnT w="6350" cap="flat" cmpd="sng" algn="ctr">
-                      <a:solidFill>
-                        <a:srgbClr val="D8DEE6"/>
-                      </a:solidFill>
-                      <a:prstDash val="solid"/>
-                      <a:round/>
-                      <a:headEnd type="none" w="med" len="med"/>
-                      <a:tailEnd type="none" w="med" len="med"/>
-                    </a:lnT>
-                    <a:lnB w="6350" cap="flat" cmpd="sng" algn="ctr">
-                      <a:solidFill>
-                        <a:srgbClr val="D8DEE6"/>
-                      </a:solidFill>
-                      <a:prstDash val="solid"/>
-                      <a:round/>
-                      <a:headEnd type="none" w="med" len="med"/>
-                      <a:tailEnd type="none" w="med" len="med"/>
-                    </a:lnB>
-                  </a:tcPr>
-                </a:tc>
-              </a:tr>
-              <a:tr h="475488">
-                <a:tc>
-                  <a:txBody>
-                    <a:bodyPr/>
-                    <a:lstStyle/>
-                    <a:p>
-                      <a:pPr indent="0" marL="0">
-                        <a:buNone/>
-                      </a:pPr>
-                      <a:r>
-                        <a:rPr lang="en-US" sz="1300" dirty="0">
-                          <a:solidFill>
-                            <a:srgbClr val="1E293B"/>
-                          </a:solidFill>
-                          <a:latin typeface="Arial" pitchFamily="34" charset="0"/>
-                          <a:ea typeface="Arial" pitchFamily="34" charset="-122"/>
-                          <a:cs typeface="Arial" pitchFamily="34" charset="-120"/>
-                        </a:rPr>
-                        <a:t>A · Achievable</a:t>
-                      </a:r>
-                      <a:endParaRPr lang="en-US" sz="1300" dirty="0">
-                        <a:latin typeface="Arial" charset="0"/>
-                        <a:ea typeface="Arial" charset="0"/>
-                        <a:cs typeface="Arial" charset="0"/>
-                      </a:endParaRPr>
-                    </a:p>
-                  </a:txBody>
-                  <a:tcPr marL="91440" marR="91440" marT="45720" marB="45720" anchor="ctr">
-                    <a:lnL w="6350" cap="flat" cmpd="sng" algn="ctr">
-                      <a:solidFill>
-                        <a:srgbClr val="D8DEE6"/>
-                      </a:solidFill>
-                      <a:prstDash val="solid"/>
-                      <a:round/>
-                      <a:headEnd type="none" w="med" len="med"/>
-                      <a:tailEnd type="none" w="med" len="med"/>
-                    </a:lnL>
-                    <a:lnR w="6350" cap="flat" cmpd="sng" algn="ctr">
-                      <a:solidFill>
-                        <a:srgbClr val="D8DEE6"/>
-                      </a:solidFill>
-                      <a:prstDash val="solid"/>
-                      <a:round/>
-                      <a:headEnd type="none" w="med" len="med"/>
-                      <a:tailEnd type="none" w="med" len="med"/>
-                    </a:lnR>
-                    <a:lnT w="6350" cap="flat" cmpd="sng" algn="ctr">
-                      <a:solidFill>
-                        <a:srgbClr val="D8DEE6"/>
-                      </a:solidFill>
-                      <a:prstDash val="solid"/>
-                      <a:round/>
-                      <a:headEnd type="none" w="med" len="med"/>
-                      <a:tailEnd type="none" w="med" len="med"/>
-                    </a:lnT>
-                    <a:lnB w="6350" cap="flat" cmpd="sng" algn="ctr">
-                      <a:solidFill>
-                        <a:srgbClr val="D8DEE6"/>
-                      </a:solidFill>
-                      <a:prstDash val="solid"/>
-                      <a:round/>
-                      <a:headEnd type="none" w="med" len="med"/>
-                      <a:tailEnd type="none" w="med" len="med"/>
-                    </a:lnB>
-                  </a:tcPr>
-                </a:tc>
-                <a:tc>
-                  <a:txBody>
-                    <a:bodyPr/>
-                    <a:lstStyle/>
-                    <a:p>
-                      <a:pPr indent="0" marL="0">
-                        <a:buNone/>
-                      </a:pPr>
-                      <a:r>
-                        <a:rPr lang="en-US" sz="1300" dirty="0">
-                          <a:solidFill>
-                            <a:srgbClr val="1E293B"/>
-                          </a:solidFill>
-                          <a:latin typeface="Arial" pitchFamily="34" charset="0"/>
-                          <a:ea typeface="Arial" pitchFamily="34" charset="-122"/>
-                          <a:cs typeface="Arial" pitchFamily="34" charset="-120"/>
-                        </a:rPr>
-                        <a:t>Ресурсный лимит: реально силами 3–4 человек</a:t>
-                      </a:r>
-                      <a:endParaRPr lang="en-US" sz="1300" dirty="0">
-                        <a:latin typeface="Arial" charset="0"/>
-                        <a:ea typeface="Arial" charset="0"/>
-                        <a:cs typeface="Arial" charset="0"/>
-                      </a:endParaRPr>
-                    </a:p>
-                  </a:txBody>
-                  <a:tcPr marL="91440" marR="91440" marT="45720" marB="45720" anchor="ctr">
-                    <a:lnL w="6350" cap="flat" cmpd="sng" algn="ctr">
-                      <a:solidFill>
-                        <a:srgbClr val="D8DEE6"/>
-                      </a:solidFill>
-                      <a:prstDash val="solid"/>
-                      <a:round/>
-                      <a:headEnd type="none" w="med" len="med"/>
-                      <a:tailEnd type="none" w="med" len="med"/>
-                    </a:lnL>
-                    <a:lnR w="6350" cap="flat" cmpd="sng" algn="ctr">
-                      <a:solidFill>
-                        <a:srgbClr val="D8DEE6"/>
-                      </a:solidFill>
-                      <a:prstDash val="solid"/>
-                      <a:round/>
-                      <a:headEnd type="none" w="med" len="med"/>
-                      <a:tailEnd type="none" w="med" len="med"/>
-                    </a:lnR>
-                    <a:lnT w="6350" cap="flat" cmpd="sng" algn="ctr">
-                      <a:solidFill>
-                        <a:srgbClr val="D8DEE6"/>
-                      </a:solidFill>
-                      <a:prstDash val="solid"/>
-                      <a:round/>
-                      <a:headEnd type="none" w="med" len="med"/>
-                      <a:tailEnd type="none" w="med" len="med"/>
-                    </a:lnT>
-                    <a:lnB w="6350" cap="flat" cmpd="sng" algn="ctr">
-                      <a:solidFill>
-                        <a:srgbClr val="D8DEE6"/>
-                      </a:solidFill>
-                      <a:prstDash val="solid"/>
-                      <a:round/>
-                      <a:headEnd type="none" w="med" len="med"/>
-                      <a:tailEnd type="none" w="med" len="med"/>
-                    </a:lnB>
-                  </a:tcPr>
-                </a:tc>
-              </a:tr>
-              <a:tr h="475488">
-                <a:tc>
-                  <a:txBody>
-                    <a:bodyPr/>
-                    <a:lstStyle/>
-                    <a:p>
-                      <a:pPr indent="0" marL="0">
-                        <a:buNone/>
-                      </a:pPr>
-                      <a:r>
-                        <a:rPr lang="en-US" sz="1300" dirty="0">
-                          <a:solidFill>
-                            <a:srgbClr val="1E293B"/>
-                          </a:solidFill>
-                          <a:latin typeface="Arial" pitchFamily="34" charset="0"/>
-                          <a:ea typeface="Arial" pitchFamily="34" charset="-122"/>
-                          <a:cs typeface="Arial" pitchFamily="34" charset="-120"/>
-                        </a:rPr>
-                        <a:t>R · Relevant</a:t>
-                      </a:r>
-                      <a:endParaRPr lang="en-US" sz="1300" dirty="0">
-                        <a:latin typeface="Arial" charset="0"/>
-                        <a:ea typeface="Arial" charset="0"/>
-                        <a:cs typeface="Arial" charset="0"/>
-                      </a:endParaRPr>
-                    </a:p>
-                  </a:txBody>
-                  <a:tcPr marL="91440" marR="91440" marT="45720" marB="45720" anchor="ctr">
-                    <a:lnL w="6350" cap="flat" cmpd="sng" algn="ctr">
-                      <a:solidFill>
-                        <a:srgbClr val="D8DEE6"/>
-                      </a:solidFill>
-                      <a:prstDash val="solid"/>
-                      <a:round/>
-                      <a:headEnd type="none" w="med" len="med"/>
-                      <a:tailEnd type="none" w="med" len="med"/>
-                    </a:lnL>
-                    <a:lnR w="6350" cap="flat" cmpd="sng" algn="ctr">
-                      <a:solidFill>
-                        <a:srgbClr val="D8DEE6"/>
-                      </a:solidFill>
-                      <a:prstDash val="solid"/>
-                      <a:round/>
-                      <a:headEnd type="none" w="med" len="med"/>
-                      <a:tailEnd type="none" w="med" len="med"/>
-                    </a:lnR>
-                    <a:lnT w="6350" cap="flat" cmpd="sng" algn="ctr">
-                      <a:solidFill>
-                        <a:srgbClr val="D8DEE6"/>
-                      </a:solidFill>
-                      <a:prstDash val="solid"/>
-                      <a:round/>
-                      <a:headEnd type="none" w="med" len="med"/>
-                      <a:tailEnd type="none" w="med" len="med"/>
-                    </a:lnT>
-                    <a:lnB w="6350" cap="flat" cmpd="sng" algn="ctr">
-                      <a:solidFill>
-                        <a:srgbClr val="D8DEE6"/>
-                      </a:solidFill>
-                      <a:prstDash val="solid"/>
-                      <a:round/>
-                      <a:headEnd type="none" w="med" len="med"/>
-                      <a:tailEnd type="none" w="med" len="med"/>
-                    </a:lnB>
-                  </a:tcPr>
-                </a:tc>
-                <a:tc>
-                  <a:txBody>
-                    <a:bodyPr/>
-                    <a:lstStyle/>
-                    <a:p>
-                      <a:pPr indent="0" marL="0">
-                        <a:buNone/>
-                      </a:pPr>
-                      <a:r>
-                        <a:rPr lang="en-US" sz="1300" dirty="0">
-                          <a:solidFill>
-                            <a:srgbClr val="1E293B"/>
-                          </a:solidFill>
-                          <a:latin typeface="Arial" pitchFamily="34" charset="0"/>
-                          <a:ea typeface="Arial" pitchFamily="34" charset="-122"/>
-                          <a:cs typeface="Arial" pitchFamily="34" charset="-120"/>
-                        </a:rPr>
-                        <a:t>Связь с ценностным предложением, написанным выше</a:t>
-                      </a:r>
-                      <a:endParaRPr lang="en-US" sz="1300" dirty="0">
-                        <a:latin typeface="Arial" charset="0"/>
-                        <a:ea typeface="Arial" charset="0"/>
-                        <a:cs typeface="Arial" charset="0"/>
-                      </a:endParaRPr>
-                    </a:p>
-                  </a:txBody>
-                  <a:tcPr marL="91440" marR="91440" marT="45720" marB="45720" anchor="ctr">
-                    <a:lnL w="6350" cap="flat" cmpd="sng" algn="ctr">
-                      <a:solidFill>
-                        <a:srgbClr val="D8DEE6"/>
-                      </a:solidFill>
-                      <a:prstDash val="solid"/>
-                      <a:round/>
-                      <a:headEnd type="none" w="med" len="med"/>
-                      <a:tailEnd type="none" w="med" len="med"/>
-                    </a:lnL>
-                    <a:lnR w="6350" cap="flat" cmpd="sng" algn="ctr">
-                      <a:solidFill>
-                        <a:srgbClr val="D8DEE6"/>
-                      </a:solidFill>
-                      <a:prstDash val="solid"/>
-                      <a:round/>
-                      <a:headEnd type="none" w="med" len="med"/>
-                      <a:tailEnd type="none" w="med" len="med"/>
-                    </a:lnR>
-                    <a:lnT w="6350" cap="flat" cmpd="sng" algn="ctr">
-                      <a:solidFill>
-                        <a:srgbClr val="D8DEE6"/>
-                      </a:solidFill>
-                      <a:prstDash val="solid"/>
-                      <a:round/>
-                      <a:headEnd type="none" w="med" len="med"/>
-                      <a:tailEnd type="none" w="med" len="med"/>
-                    </a:lnT>
-                    <a:lnB w="6350" cap="flat" cmpd="sng" algn="ctr">
-                      <a:solidFill>
-                        <a:srgbClr val="D8DEE6"/>
-                      </a:solidFill>
-                      <a:prstDash val="solid"/>
-                      <a:round/>
-                      <a:headEnd type="none" w="med" len="med"/>
-                      <a:tailEnd type="none" w="med" len="med"/>
-                    </a:lnB>
-                  </a:tcPr>
-                </a:tc>
-              </a:tr>
-              <a:tr h="475488">
-                <a:tc>
-                  <a:txBody>
-                    <a:bodyPr/>
-                    <a:lstStyle/>
-                    <a:p>
-                      <a:pPr indent="0" marL="0">
-                        <a:buNone/>
-                      </a:pPr>
-                      <a:r>
-                        <a:rPr lang="en-US" sz="1300" dirty="0">
-                          <a:solidFill>
-                            <a:srgbClr val="1E293B"/>
-                          </a:solidFill>
-                          <a:latin typeface="Arial" pitchFamily="34" charset="0"/>
-                          <a:ea typeface="Arial" pitchFamily="34" charset="-122"/>
-                          <a:cs typeface="Arial" pitchFamily="34" charset="-120"/>
-                        </a:rPr>
-                        <a:t>T · Time-bound</a:t>
-                      </a:r>
-                      <a:endParaRPr lang="en-US" sz="1300" dirty="0">
-                        <a:latin typeface="Arial" charset="0"/>
-                        <a:ea typeface="Arial" charset="0"/>
-                        <a:cs typeface="Arial" charset="0"/>
-                      </a:endParaRPr>
-                    </a:p>
-                  </a:txBody>
-                  <a:tcPr marL="91440" marR="91440" marT="45720" marB="45720" anchor="ctr">
-                    <a:lnL w="6350" cap="flat" cmpd="sng" algn="ctr">
-                      <a:solidFill>
-                        <a:srgbClr val="D8DEE6"/>
-                      </a:solidFill>
-                      <a:prstDash val="solid"/>
-                      <a:round/>
-                      <a:headEnd type="none" w="med" len="med"/>
-                      <a:tailEnd type="none" w="med" len="med"/>
-                    </a:lnL>
-                    <a:lnR w="6350" cap="flat" cmpd="sng" algn="ctr">
-                      <a:solidFill>
-                        <a:srgbClr val="D8DEE6"/>
-                      </a:solidFill>
-                      <a:prstDash val="solid"/>
-                      <a:round/>
-                      <a:headEnd type="none" w="med" len="med"/>
-                      <a:tailEnd type="none" w="med" len="med"/>
-                    </a:lnR>
-                    <a:lnT w="6350" cap="flat" cmpd="sng" algn="ctr">
-                      <a:solidFill>
-                        <a:srgbClr val="D8DEE6"/>
-                      </a:solidFill>
-                      <a:prstDash val="solid"/>
-                      <a:round/>
-                      <a:headEnd type="none" w="med" len="med"/>
-                      <a:tailEnd type="none" w="med" len="med"/>
-                    </a:lnT>
-                    <a:lnB w="6350" cap="flat" cmpd="sng" algn="ctr">
-                      <a:solidFill>
-                        <a:srgbClr val="D8DEE6"/>
-                      </a:solidFill>
-                      <a:prstDash val="solid"/>
-                      <a:round/>
-                      <a:headEnd type="none" w="med" len="med"/>
-                      <a:tailEnd type="none" w="med" len="med"/>
-                    </a:lnB>
-                  </a:tcPr>
-                </a:tc>
-                <a:tc>
-                  <a:txBody>
-                    <a:bodyPr/>
-                    <a:lstStyle/>
-                    <a:p>
-                      <a:pPr indent="0" marL="0">
-                        <a:buNone/>
-                      </a:pPr>
-                      <a:r>
-                        <a:rPr lang="en-US" sz="1300" dirty="0">
-                          <a:solidFill>
-                            <a:srgbClr val="1E293B"/>
-                          </a:solidFill>
-                          <a:latin typeface="Arial" pitchFamily="34" charset="0"/>
-                          <a:ea typeface="Arial" pitchFamily="34" charset="-122"/>
-                          <a:cs typeface="Arial" pitchFamily="34" charset="-120"/>
-                        </a:rPr>
-                        <a:t>Треугольник (слайд 7): дата — 21.11 чекпоинт или 26.12 защита</a:t>
-                      </a:r>
-                      <a:endParaRPr lang="en-US" sz="1300" dirty="0">
-                        <a:latin typeface="Arial" charset="0"/>
-                        <a:ea typeface="Arial" charset="0"/>
-                        <a:cs typeface="Arial" charset="0"/>
-                      </a:endParaRPr>
-                    </a:p>
-                  </a:txBody>
-                  <a:tcPr marL="91440" marR="91440" marT="45720" marB="45720" anchor="ctr">
-                    <a:lnL w="6350" cap="flat" cmpd="sng" algn="ctr">
-                      <a:solidFill>
-                        <a:srgbClr val="D8DEE6"/>
-                      </a:solidFill>
-                      <a:prstDash val="solid"/>
-                      <a:round/>
-                      <a:headEnd type="none" w="med" len="med"/>
-                      <a:tailEnd type="none" w="med" len="med"/>
-                    </a:lnL>
-                    <a:lnR w="6350" cap="flat" cmpd="sng" algn="ctr">
-                      <a:solidFill>
-                        <a:srgbClr val="D8DEE6"/>
-                      </a:solidFill>
-                      <a:prstDash val="solid"/>
-                      <a:round/>
-                      <a:headEnd type="none" w="med" len="med"/>
-                      <a:tailEnd type="none" w="med" len="med"/>
-                    </a:lnR>
-                    <a:lnT w="6350" cap="flat" cmpd="sng" algn="ctr">
-                      <a:solidFill>
-                        <a:srgbClr val="D8DEE6"/>
-                      </a:solidFill>
-                      <a:prstDash val="solid"/>
-                      <a:round/>
-                      <a:headEnd type="none" w="med" len="med"/>
-                      <a:tailEnd type="none" w="med" len="med"/>
-                    </a:lnT>
-                    <a:lnB w="6350" cap="flat" cmpd="sng" algn="ctr">
-                      <a:solidFill>
-                        <a:srgbClr val="D8DEE6"/>
-                      </a:solidFill>
-                      <a:prstDash val="solid"/>
-                      <a:round/>
-                      <a:headEnd type="none" w="med" len="med"/>
-                      <a:tailEnd type="none" w="med" len="med"/>
-                    </a:lnB>
-                  </a:tcPr>
-                </a:tc>
-              </a:tr>
-            </a:tbl>
-          </a:graphicData>
-        </a:graphic>
-      </p:graphicFrame>
+            <a:endParaRPr lang="en-US" sz="2000" dirty="0"/>
+          </a:p>
+        </p:txBody>
+      </p:sp>
+      <p:sp>
+        <p:nvSpPr>
+          <p:cNvPr id="4" name="Text 2"/>
+          <p:cNvSpPr txBox="1"/>
+          <p:nvPr/>
+        </p:nvSpPr>
+        <p:spPr>
+          <a:xfrm>
+            <a:off x="502920" y="1417320"/>
+            <a:ext cx="8138160" cy="1005840"/>
+          </a:xfrm>
+          <a:prstGeom prst="rect">
+            <a:avLst/>
+          </a:prstGeom>
+          <a:noFill/>
+          <a:ln/>
+        </p:spPr>
+        <p:txBody>
+          <a:bodyPr wrap="square" lIns="0" tIns="0" rIns="0" bIns="0" rtlCol="0" anchor="ctr"/>
+          <a:lstStyle/>
+          <a:p>
+            <a:pPr indent="0" marL="0">
+              <a:buNone/>
+            </a:pPr>
+            <a:r>
+              <a:rPr lang="en-US" sz="6400" b="1" spc="600" kern="0" dirty="0">
+                <a:solidFill>
+                  <a:srgbClr val="FFFFFF"/>
+                </a:solidFill>
+                <a:latin typeface="Arial" pitchFamily="34" charset="0"/>
+                <a:ea typeface="Arial" pitchFamily="34" charset="-122"/>
+                <a:cs typeface="Arial" pitchFamily="34" charset="-120"/>
+              </a:rPr>
+              <a:t>ЧИСТО</a:t>
+            </a:r>
+            <a:endParaRPr lang="en-US" sz="6400" dirty="0"/>
+          </a:p>
+        </p:txBody>
+      </p:sp>
+      <p:sp>
+        <p:nvSpPr>
+          <p:cNvPr id="5" name="Text 3"/>
+          <p:cNvSpPr txBox="1"/>
+          <p:nvPr/>
+        </p:nvSpPr>
+        <p:spPr>
+          <a:xfrm>
+            <a:off x="502920" y="2606040"/>
+            <a:ext cx="8138160" cy="822960"/>
+          </a:xfrm>
+          <a:prstGeom prst="rect">
+            <a:avLst/>
+          </a:prstGeom>
+          <a:noFill/>
+          <a:ln/>
+        </p:spPr>
+        <p:txBody>
+          <a:bodyPr wrap="square" lIns="0" tIns="0" rIns="0" bIns="0" rtlCol="0" anchor="ctr"/>
+          <a:lstStyle/>
+          <a:p>
+            <a:pPr indent="0" marL="0">
+              <a:lnSpc>
+                <a:spcPts val="1900"/>
+              </a:lnSpc>
+              <a:buNone/>
+            </a:pPr>
+            <a:r>
+              <a:rPr lang="en-US" sz="1300" dirty="0">
+                <a:solidFill>
+                  <a:srgbClr val="B9CBDE"/>
+                </a:solidFill>
+                <a:latin typeface="Arial" pitchFamily="34" charset="0"/>
+                <a:ea typeface="Arial" pitchFamily="34" charset="-122"/>
+                <a:cs typeface="Arial" pitchFamily="34" charset="-120"/>
+              </a:rPr>
+              <a:t>По-английски то же самое называется SMART — оба термина нужно знать: SMART встретится в заявках на гранты и в резюме, ЧИСТО — чтобы не забыть последовательность под давлением времени на паре.</a:t>
+            </a:r>
+            <a:endParaRPr lang="en-US" sz="1300" dirty="0"/>
+          </a:p>
+        </p:txBody>
+      </p:sp>
     </p:spTree>
   </p:cSld>
   <p:clrMapOvr>
@@ -6801,7 +6459,7 @@
                 <a:ea typeface="Arial" pitchFamily="34" charset="-122"/>
                 <a:cs typeface="Arial" pitchFamily="34" charset="-120"/>
               </a:rPr>
-              <a:t>РАЗБОР НА ДОСКЕ</a:t>
+              <a:t>ИНСТРУМЕНТ, НЕ ПОВТОР</a:t>
             </a:r>
             <a:endParaRPr lang="en-US" sz="1100" dirty="0"/>
           </a:p>
@@ -6815,8 +6473,8 @@
         </p:nvSpPr>
         <p:spPr>
           <a:xfrm>
-            <a:off x="502920" y="384048"/>
-            <a:ext cx="8138160" cy="502920"/>
+            <a:off x="502920" y="365760"/>
+            <a:ext cx="8138160" cy="640080"/>
           </a:xfrm>
           <a:prstGeom prst="rect">
             <a:avLst/>
@@ -6832,7 +6490,7 @@
               <a:buNone/>
             </a:pPr>
             <a:r>
-              <a:rPr lang="en-US" sz="2400" b="1" dirty="0">
+              <a:rPr lang="en-US" sz="2700" b="1" dirty="0">
                 <a:solidFill>
                   <a:srgbClr val="005AAA"/>
                 </a:solidFill>
@@ -6840,9 +6498,9 @@
                 <a:ea typeface="Arial" pitchFamily="34" charset="-122"/>
                 <a:cs typeface="Arial" pitchFamily="34" charset="-120"/>
               </a:rPr>
-              <a:t>SMART без числа — не SMART</a:t>
+              <a:t>ЧИСТО — та же проверка, что и раньше</a:t>
             </a:r>
-            <a:endParaRPr lang="en-US" sz="2400" dirty="0"/>
+            <a:endParaRPr lang="en-US" sz="2700" dirty="0"/>
           </a:p>
         </p:txBody>
       </p:sp>
@@ -6861,7 +6519,1378 @@
           </p:nvPr>
         </p:nvGraphicFramePr>
         <p:xfrm>
-          <a:off x="502920" y="1051560"/>
+          <a:off x="502920" y="1325880"/>
+          <a:ext cx="8138160" cy="914400"/>
+        </p:xfrm>
+        <a:graphic>
+          <a:graphicData uri="http://schemas.openxmlformats.org/drawingml/2006/table">
+            <a:tbl>
+              <a:tblPr/>
+              <a:tblGrid>
+                <a:gridCol w="1920240"/>
+                <a:gridCol w="5212080"/>
+                <a:gridCol w="1097280"/>
+              </a:tblGrid>
+              <a:tr h="475488">
+                <a:tc>
+                  <a:txBody>
+                    <a:bodyPr/>
+                    <a:lstStyle/>
+                    <a:p>
+                      <a:pPr algn="ctr" indent="0" marL="0">
+                        <a:buNone/>
+                      </a:pPr>
+                      <a:r>
+                        <a:rPr lang="en-US" sz="1250" b="1" dirty="0">
+                          <a:solidFill>
+                            <a:srgbClr val="FFFFFF"/>
+                          </a:solidFill>
+                          <a:latin typeface="Arial" pitchFamily="34" charset="0"/>
+                          <a:ea typeface="Arial" pitchFamily="34" charset="-122"/>
+                          <a:cs typeface="Arial" pitchFamily="34" charset="-120"/>
+                        </a:rPr>
+                        <a:t>ЧИСТО</a:t>
+                      </a:r>
+                      <a:endParaRPr lang="en-US" sz="1250" dirty="0">
+                        <a:latin typeface="Arial" charset="0"/>
+                        <a:ea typeface="Arial" charset="0"/>
+                        <a:cs typeface="Arial" charset="0"/>
+                      </a:endParaRPr>
+                    </a:p>
+                  </a:txBody>
+                  <a:tcPr marL="91440" marR="91440" marT="45720" marB="45720" anchor="ctr">
+                    <a:lnL w="6350" cap="flat" cmpd="sng" algn="ctr">
+                      <a:solidFill>
+                        <a:srgbClr val="D8DEE6"/>
+                      </a:solidFill>
+                      <a:prstDash val="solid"/>
+                      <a:round/>
+                      <a:headEnd type="none" w="med" len="med"/>
+                      <a:tailEnd type="none" w="med" len="med"/>
+                    </a:lnL>
+                    <a:lnR w="6350" cap="flat" cmpd="sng" algn="ctr">
+                      <a:solidFill>
+                        <a:srgbClr val="D8DEE6"/>
+                      </a:solidFill>
+                      <a:prstDash val="solid"/>
+                      <a:round/>
+                      <a:headEnd type="none" w="med" len="med"/>
+                      <a:tailEnd type="none" w="med" len="med"/>
+                    </a:lnR>
+                    <a:lnT w="6350" cap="flat" cmpd="sng" algn="ctr">
+                      <a:solidFill>
+                        <a:srgbClr val="D8DEE6"/>
+                      </a:solidFill>
+                      <a:prstDash val="solid"/>
+                      <a:round/>
+                      <a:headEnd type="none" w="med" len="med"/>
+                      <a:tailEnd type="none" w="med" len="med"/>
+                    </a:lnT>
+                    <a:lnB w="6350" cap="flat" cmpd="sng" algn="ctr">
+                      <a:solidFill>
+                        <a:srgbClr val="D8DEE6"/>
+                      </a:solidFill>
+                      <a:prstDash val="solid"/>
+                      <a:round/>
+                      <a:headEnd type="none" w="med" len="med"/>
+                      <a:tailEnd type="none" w="med" len="med"/>
+                    </a:lnB>
+                    <a:solidFill>
+                      <a:srgbClr val="1E4270"/>
+                    </a:solidFill>
+                  </a:tcPr>
+                </a:tc>
+                <a:tc>
+                  <a:txBody>
+                    <a:bodyPr/>
+                    <a:lstStyle/>
+                    <a:p>
+                      <a:pPr indent="0" marL="0">
+                        <a:buNone/>
+                      </a:pPr>
+                      <a:r>
+                        <a:rPr lang="en-US" sz="1250" b="1" dirty="0">
+                          <a:solidFill>
+                            <a:srgbClr val="FFFFFF"/>
+                          </a:solidFill>
+                          <a:latin typeface="Arial" pitchFamily="34" charset="0"/>
+                          <a:ea typeface="Arial" pitchFamily="34" charset="-122"/>
+                          <a:cs typeface="Arial" pitchFamily="34" charset="-120"/>
+                        </a:rPr>
+                        <a:t>Значит</a:t>
+                      </a:r>
+                      <a:endParaRPr lang="en-US" sz="1250" dirty="0">
+                        <a:latin typeface="Arial" charset="0"/>
+                        <a:ea typeface="Arial" charset="0"/>
+                        <a:cs typeface="Arial" charset="0"/>
+                      </a:endParaRPr>
+                    </a:p>
+                  </a:txBody>
+                  <a:tcPr marL="91440" marR="91440" marT="45720" marB="45720" anchor="ctr">
+                    <a:lnL w="6350" cap="flat" cmpd="sng" algn="ctr">
+                      <a:solidFill>
+                        <a:srgbClr val="D8DEE6"/>
+                      </a:solidFill>
+                      <a:prstDash val="solid"/>
+                      <a:round/>
+                      <a:headEnd type="none" w="med" len="med"/>
+                      <a:tailEnd type="none" w="med" len="med"/>
+                    </a:lnL>
+                    <a:lnR w="6350" cap="flat" cmpd="sng" algn="ctr">
+                      <a:solidFill>
+                        <a:srgbClr val="D8DEE6"/>
+                      </a:solidFill>
+                      <a:prstDash val="solid"/>
+                      <a:round/>
+                      <a:headEnd type="none" w="med" len="med"/>
+                      <a:tailEnd type="none" w="med" len="med"/>
+                    </a:lnR>
+                    <a:lnT w="6350" cap="flat" cmpd="sng" algn="ctr">
+                      <a:solidFill>
+                        <a:srgbClr val="D8DEE6"/>
+                      </a:solidFill>
+                      <a:prstDash val="solid"/>
+                      <a:round/>
+                      <a:headEnd type="none" w="med" len="med"/>
+                      <a:tailEnd type="none" w="med" len="med"/>
+                    </a:lnT>
+                    <a:lnB w="6350" cap="flat" cmpd="sng" algn="ctr">
+                      <a:solidFill>
+                        <a:srgbClr val="D8DEE6"/>
+                      </a:solidFill>
+                      <a:prstDash val="solid"/>
+                      <a:round/>
+                      <a:headEnd type="none" w="med" len="med"/>
+                      <a:tailEnd type="none" w="med" len="med"/>
+                    </a:lnB>
+                    <a:solidFill>
+                      <a:srgbClr val="1E4270"/>
+                    </a:solidFill>
+                  </a:tcPr>
+                </a:tc>
+                <a:tc>
+                  <a:txBody>
+                    <a:bodyPr/>
+                    <a:lstStyle/>
+                    <a:p>
+                      <a:pPr algn="ctr" indent="0" marL="0">
+                        <a:buNone/>
+                      </a:pPr>
+                      <a:r>
+                        <a:rPr lang="en-US" sz="1250" b="1" dirty="0">
+                          <a:solidFill>
+                            <a:srgbClr val="FFFFFF"/>
+                          </a:solidFill>
+                          <a:latin typeface="Arial" pitchFamily="34" charset="0"/>
+                          <a:ea typeface="Arial" pitchFamily="34" charset="-122"/>
+                          <a:cs typeface="Arial" pitchFamily="34" charset="-120"/>
+                        </a:rPr>
+                        <a:t>= SMART</a:t>
+                      </a:r>
+                      <a:endParaRPr lang="en-US" sz="1250" dirty="0">
+                        <a:latin typeface="Arial" charset="0"/>
+                        <a:ea typeface="Arial" charset="0"/>
+                        <a:cs typeface="Arial" charset="0"/>
+                      </a:endParaRPr>
+                    </a:p>
+                  </a:txBody>
+                  <a:tcPr marL="91440" marR="91440" marT="45720" marB="45720" anchor="ctr">
+                    <a:lnL w="6350" cap="flat" cmpd="sng" algn="ctr">
+                      <a:solidFill>
+                        <a:srgbClr val="D8DEE6"/>
+                      </a:solidFill>
+                      <a:prstDash val="solid"/>
+                      <a:round/>
+                      <a:headEnd type="none" w="med" len="med"/>
+                      <a:tailEnd type="none" w="med" len="med"/>
+                    </a:lnL>
+                    <a:lnR w="6350" cap="flat" cmpd="sng" algn="ctr">
+                      <a:solidFill>
+                        <a:srgbClr val="D8DEE6"/>
+                      </a:solidFill>
+                      <a:prstDash val="solid"/>
+                      <a:round/>
+                      <a:headEnd type="none" w="med" len="med"/>
+                      <a:tailEnd type="none" w="med" len="med"/>
+                    </a:lnR>
+                    <a:lnT w="6350" cap="flat" cmpd="sng" algn="ctr">
+                      <a:solidFill>
+                        <a:srgbClr val="D8DEE6"/>
+                      </a:solidFill>
+                      <a:prstDash val="solid"/>
+                      <a:round/>
+                      <a:headEnd type="none" w="med" len="med"/>
+                      <a:tailEnd type="none" w="med" len="med"/>
+                    </a:lnT>
+                    <a:lnB w="6350" cap="flat" cmpd="sng" algn="ctr">
+                      <a:solidFill>
+                        <a:srgbClr val="D8DEE6"/>
+                      </a:solidFill>
+                      <a:prstDash val="solid"/>
+                      <a:round/>
+                      <a:headEnd type="none" w="med" len="med"/>
+                      <a:tailEnd type="none" w="med" len="med"/>
+                    </a:lnB>
+                    <a:solidFill>
+                      <a:srgbClr val="1E4270"/>
+                    </a:solidFill>
+                  </a:tcPr>
+                </a:tc>
+              </a:tr>
+              <a:tr h="475488">
+                <a:tc>
+                  <a:txBody>
+                    <a:bodyPr/>
+                    <a:lstStyle/>
+                    <a:p>
+                      <a:pPr indent="0" marL="0">
+                        <a:buNone/>
+                      </a:pPr>
+                      <a:r>
+                        <a:rPr lang="en-US" sz="1250" dirty="0">
+                          <a:solidFill>
+                            <a:srgbClr val="1E293B"/>
+                          </a:solidFill>
+                          <a:latin typeface="Arial" pitchFamily="34" charset="0"/>
+                          <a:ea typeface="Arial" pitchFamily="34" charset="-122"/>
+                          <a:cs typeface="Arial" pitchFamily="34" charset="-120"/>
+                        </a:rPr>
+                        <a:t>Ч — Чёткая</a:t>
+                      </a:r>
+                      <a:endParaRPr lang="en-US" sz="1250" dirty="0">
+                        <a:latin typeface="Arial" charset="0"/>
+                        <a:ea typeface="Arial" charset="0"/>
+                        <a:cs typeface="Arial" charset="0"/>
+                      </a:endParaRPr>
+                    </a:p>
+                  </a:txBody>
+                  <a:tcPr marL="91440" marR="91440" marT="45720" marB="45720" anchor="ctr">
+                    <a:lnL w="6350" cap="flat" cmpd="sng" algn="ctr">
+                      <a:solidFill>
+                        <a:srgbClr val="D8DEE6"/>
+                      </a:solidFill>
+                      <a:prstDash val="solid"/>
+                      <a:round/>
+                      <a:headEnd type="none" w="med" len="med"/>
+                      <a:tailEnd type="none" w="med" len="med"/>
+                    </a:lnL>
+                    <a:lnR w="6350" cap="flat" cmpd="sng" algn="ctr">
+                      <a:solidFill>
+                        <a:srgbClr val="D8DEE6"/>
+                      </a:solidFill>
+                      <a:prstDash val="solid"/>
+                      <a:round/>
+                      <a:headEnd type="none" w="med" len="med"/>
+                      <a:tailEnd type="none" w="med" len="med"/>
+                    </a:lnR>
+                    <a:lnT w="6350" cap="flat" cmpd="sng" algn="ctr">
+                      <a:solidFill>
+                        <a:srgbClr val="D8DEE6"/>
+                      </a:solidFill>
+                      <a:prstDash val="solid"/>
+                      <a:round/>
+                      <a:headEnd type="none" w="med" len="med"/>
+                      <a:tailEnd type="none" w="med" len="med"/>
+                    </a:lnT>
+                    <a:lnB w="6350" cap="flat" cmpd="sng" algn="ctr">
+                      <a:solidFill>
+                        <a:srgbClr val="D8DEE6"/>
+                      </a:solidFill>
+                      <a:prstDash val="solid"/>
+                      <a:round/>
+                      <a:headEnd type="none" w="med" len="med"/>
+                      <a:tailEnd type="none" w="med" len="med"/>
+                    </a:lnB>
+                  </a:tcPr>
+                </a:tc>
+                <a:tc>
+                  <a:txBody>
+                    <a:bodyPr/>
+                    <a:lstStyle/>
+                    <a:p>
+                      <a:pPr indent="0" marL="0">
+                        <a:buNone/>
+                      </a:pPr>
+                      <a:r>
+                        <a:rPr lang="en-US" sz="1250" dirty="0">
+                          <a:solidFill>
+                            <a:srgbClr val="1E293B"/>
+                          </a:solidFill>
+                          <a:latin typeface="Arial" pitchFamily="34" charset="0"/>
+                          <a:ea typeface="Arial" pitchFamily="34" charset="-122"/>
+                          <a:cs typeface="Arial" pitchFamily="34" charset="-120"/>
+                        </a:rPr>
+                        <a:t>Образ результата, а не процесс (слайд 6: целевая направленность)</a:t>
+                      </a:r>
+                      <a:endParaRPr lang="en-US" sz="1250" dirty="0">
+                        <a:latin typeface="Arial" charset="0"/>
+                        <a:ea typeface="Arial" charset="0"/>
+                        <a:cs typeface="Arial" charset="0"/>
+                      </a:endParaRPr>
+                    </a:p>
+                  </a:txBody>
+                  <a:tcPr marL="91440" marR="91440" marT="45720" marB="45720" anchor="ctr">
+                    <a:lnL w="6350" cap="flat" cmpd="sng" algn="ctr">
+                      <a:solidFill>
+                        <a:srgbClr val="D8DEE6"/>
+                      </a:solidFill>
+                      <a:prstDash val="solid"/>
+                      <a:round/>
+                      <a:headEnd type="none" w="med" len="med"/>
+                      <a:tailEnd type="none" w="med" len="med"/>
+                    </a:lnL>
+                    <a:lnR w="6350" cap="flat" cmpd="sng" algn="ctr">
+                      <a:solidFill>
+                        <a:srgbClr val="D8DEE6"/>
+                      </a:solidFill>
+                      <a:prstDash val="solid"/>
+                      <a:round/>
+                      <a:headEnd type="none" w="med" len="med"/>
+                      <a:tailEnd type="none" w="med" len="med"/>
+                    </a:lnR>
+                    <a:lnT w="6350" cap="flat" cmpd="sng" algn="ctr">
+                      <a:solidFill>
+                        <a:srgbClr val="D8DEE6"/>
+                      </a:solidFill>
+                      <a:prstDash val="solid"/>
+                      <a:round/>
+                      <a:headEnd type="none" w="med" len="med"/>
+                      <a:tailEnd type="none" w="med" len="med"/>
+                    </a:lnT>
+                    <a:lnB w="6350" cap="flat" cmpd="sng" algn="ctr">
+                      <a:solidFill>
+                        <a:srgbClr val="D8DEE6"/>
+                      </a:solidFill>
+                      <a:prstDash val="solid"/>
+                      <a:round/>
+                      <a:headEnd type="none" w="med" len="med"/>
+                      <a:tailEnd type="none" w="med" len="med"/>
+                    </a:lnB>
+                  </a:tcPr>
+                </a:tc>
+                <a:tc>
+                  <a:txBody>
+                    <a:bodyPr/>
+                    <a:lstStyle/>
+                    <a:p>
+                      <a:pPr indent="0" marL="0">
+                        <a:buNone/>
+                      </a:pPr>
+                      <a:r>
+                        <a:rPr lang="en-US" sz="1250" dirty="0">
+                          <a:solidFill>
+                            <a:srgbClr val="1E293B"/>
+                          </a:solidFill>
+                          <a:latin typeface="Arial" pitchFamily="34" charset="0"/>
+                          <a:ea typeface="Arial" pitchFamily="34" charset="-122"/>
+                          <a:cs typeface="Arial" pitchFamily="34" charset="-120"/>
+                        </a:rPr>
+                        <a:t>S</a:t>
+                      </a:r>
+                      <a:endParaRPr lang="en-US" sz="1250" dirty="0">
+                        <a:latin typeface="Arial" charset="0"/>
+                        <a:ea typeface="Arial" charset="0"/>
+                        <a:cs typeface="Arial" charset="0"/>
+                      </a:endParaRPr>
+                    </a:p>
+                  </a:txBody>
+                  <a:tcPr marL="91440" marR="91440" marT="45720" marB="45720" anchor="ctr">
+                    <a:lnL w="6350" cap="flat" cmpd="sng" algn="ctr">
+                      <a:solidFill>
+                        <a:srgbClr val="D8DEE6"/>
+                      </a:solidFill>
+                      <a:prstDash val="solid"/>
+                      <a:round/>
+                      <a:headEnd type="none" w="med" len="med"/>
+                      <a:tailEnd type="none" w="med" len="med"/>
+                    </a:lnL>
+                    <a:lnR w="6350" cap="flat" cmpd="sng" algn="ctr">
+                      <a:solidFill>
+                        <a:srgbClr val="D8DEE6"/>
+                      </a:solidFill>
+                      <a:prstDash val="solid"/>
+                      <a:round/>
+                      <a:headEnd type="none" w="med" len="med"/>
+                      <a:tailEnd type="none" w="med" len="med"/>
+                    </a:lnR>
+                    <a:lnT w="6350" cap="flat" cmpd="sng" algn="ctr">
+                      <a:solidFill>
+                        <a:srgbClr val="D8DEE6"/>
+                      </a:solidFill>
+                      <a:prstDash val="solid"/>
+                      <a:round/>
+                      <a:headEnd type="none" w="med" len="med"/>
+                      <a:tailEnd type="none" w="med" len="med"/>
+                    </a:lnT>
+                    <a:lnB w="6350" cap="flat" cmpd="sng" algn="ctr">
+                      <a:solidFill>
+                        <a:srgbClr val="D8DEE6"/>
+                      </a:solidFill>
+                      <a:prstDash val="solid"/>
+                      <a:round/>
+                      <a:headEnd type="none" w="med" len="med"/>
+                      <a:tailEnd type="none" w="med" len="med"/>
+                    </a:lnB>
+                  </a:tcPr>
+                </a:tc>
+              </a:tr>
+              <a:tr h="475488">
+                <a:tc>
+                  <a:txBody>
+                    <a:bodyPr/>
+                    <a:lstStyle/>
+                    <a:p>
+                      <a:pPr indent="0" marL="0">
+                        <a:buNone/>
+                      </a:pPr>
+                      <a:r>
+                        <a:rPr lang="en-US" sz="1250" dirty="0">
+                          <a:solidFill>
+                            <a:srgbClr val="1E293B"/>
+                          </a:solidFill>
+                          <a:latin typeface="Arial" pitchFamily="34" charset="0"/>
+                          <a:ea typeface="Arial" pitchFamily="34" charset="-122"/>
+                          <a:cs typeface="Arial" pitchFamily="34" charset="-120"/>
+                        </a:rPr>
+                        <a:t>И — Измеримая</a:t>
+                      </a:r>
+                      <a:endParaRPr lang="en-US" sz="1250" dirty="0">
+                        <a:latin typeface="Arial" charset="0"/>
+                        <a:ea typeface="Arial" charset="0"/>
+                        <a:cs typeface="Arial" charset="0"/>
+                      </a:endParaRPr>
+                    </a:p>
+                  </a:txBody>
+                  <a:tcPr marL="91440" marR="91440" marT="45720" marB="45720" anchor="ctr">
+                    <a:lnL w="6350" cap="flat" cmpd="sng" algn="ctr">
+                      <a:solidFill>
+                        <a:srgbClr val="D8DEE6"/>
+                      </a:solidFill>
+                      <a:prstDash val="solid"/>
+                      <a:round/>
+                      <a:headEnd type="none" w="med" len="med"/>
+                      <a:tailEnd type="none" w="med" len="med"/>
+                    </a:lnL>
+                    <a:lnR w="6350" cap="flat" cmpd="sng" algn="ctr">
+                      <a:solidFill>
+                        <a:srgbClr val="D8DEE6"/>
+                      </a:solidFill>
+                      <a:prstDash val="solid"/>
+                      <a:round/>
+                      <a:headEnd type="none" w="med" len="med"/>
+                      <a:tailEnd type="none" w="med" len="med"/>
+                    </a:lnR>
+                    <a:lnT w="6350" cap="flat" cmpd="sng" algn="ctr">
+                      <a:solidFill>
+                        <a:srgbClr val="D8DEE6"/>
+                      </a:solidFill>
+                      <a:prstDash val="solid"/>
+                      <a:round/>
+                      <a:headEnd type="none" w="med" len="med"/>
+                      <a:tailEnd type="none" w="med" len="med"/>
+                    </a:lnT>
+                    <a:lnB w="6350" cap="flat" cmpd="sng" algn="ctr">
+                      <a:solidFill>
+                        <a:srgbClr val="D8DEE6"/>
+                      </a:solidFill>
+                      <a:prstDash val="solid"/>
+                      <a:round/>
+                      <a:headEnd type="none" w="med" len="med"/>
+                      <a:tailEnd type="none" w="med" len="med"/>
+                    </a:lnB>
+                  </a:tcPr>
+                </a:tc>
+                <a:tc>
+                  <a:txBody>
+                    <a:bodyPr/>
+                    <a:lstStyle/>
+                    <a:p>
+                      <a:pPr indent="0" marL="0">
+                        <a:buNone/>
+                      </a:pPr>
+                      <a:r>
+                        <a:rPr lang="en-US" sz="1250" dirty="0">
+                          <a:solidFill>
+                            <a:srgbClr val="1E293B"/>
+                          </a:solidFill>
+                          <a:latin typeface="Arial" pitchFamily="34" charset="0"/>
+                          <a:ea typeface="Arial" pitchFamily="34" charset="-122"/>
+                          <a:cs typeface="Arial" pitchFamily="34" charset="-120"/>
+                        </a:rPr>
+                        <a:t>Проверяется числом, а не словом «хорошо»</a:t>
+                      </a:r>
+                      <a:endParaRPr lang="en-US" sz="1250" dirty="0">
+                        <a:latin typeface="Arial" charset="0"/>
+                        <a:ea typeface="Arial" charset="0"/>
+                        <a:cs typeface="Arial" charset="0"/>
+                      </a:endParaRPr>
+                    </a:p>
+                  </a:txBody>
+                  <a:tcPr marL="91440" marR="91440" marT="45720" marB="45720" anchor="ctr">
+                    <a:lnL w="6350" cap="flat" cmpd="sng" algn="ctr">
+                      <a:solidFill>
+                        <a:srgbClr val="D8DEE6"/>
+                      </a:solidFill>
+                      <a:prstDash val="solid"/>
+                      <a:round/>
+                      <a:headEnd type="none" w="med" len="med"/>
+                      <a:tailEnd type="none" w="med" len="med"/>
+                    </a:lnL>
+                    <a:lnR w="6350" cap="flat" cmpd="sng" algn="ctr">
+                      <a:solidFill>
+                        <a:srgbClr val="D8DEE6"/>
+                      </a:solidFill>
+                      <a:prstDash val="solid"/>
+                      <a:round/>
+                      <a:headEnd type="none" w="med" len="med"/>
+                      <a:tailEnd type="none" w="med" len="med"/>
+                    </a:lnR>
+                    <a:lnT w="6350" cap="flat" cmpd="sng" algn="ctr">
+                      <a:solidFill>
+                        <a:srgbClr val="D8DEE6"/>
+                      </a:solidFill>
+                      <a:prstDash val="solid"/>
+                      <a:round/>
+                      <a:headEnd type="none" w="med" len="med"/>
+                      <a:tailEnd type="none" w="med" len="med"/>
+                    </a:lnT>
+                    <a:lnB w="6350" cap="flat" cmpd="sng" algn="ctr">
+                      <a:solidFill>
+                        <a:srgbClr val="D8DEE6"/>
+                      </a:solidFill>
+                      <a:prstDash val="solid"/>
+                      <a:round/>
+                      <a:headEnd type="none" w="med" len="med"/>
+                      <a:tailEnd type="none" w="med" len="med"/>
+                    </a:lnB>
+                  </a:tcPr>
+                </a:tc>
+                <a:tc>
+                  <a:txBody>
+                    <a:bodyPr/>
+                    <a:lstStyle/>
+                    <a:p>
+                      <a:pPr indent="0" marL="0">
+                        <a:buNone/>
+                      </a:pPr>
+                      <a:r>
+                        <a:rPr lang="en-US" sz="1250" dirty="0">
+                          <a:solidFill>
+                            <a:srgbClr val="1E293B"/>
+                          </a:solidFill>
+                          <a:latin typeface="Arial" pitchFamily="34" charset="0"/>
+                          <a:ea typeface="Arial" pitchFamily="34" charset="-122"/>
+                          <a:cs typeface="Arial" pitchFamily="34" charset="-120"/>
+                        </a:rPr>
+                        <a:t>M</a:t>
+                      </a:r>
+                      <a:endParaRPr lang="en-US" sz="1250" dirty="0">
+                        <a:latin typeface="Arial" charset="0"/>
+                        <a:ea typeface="Arial" charset="0"/>
+                        <a:cs typeface="Arial" charset="0"/>
+                      </a:endParaRPr>
+                    </a:p>
+                  </a:txBody>
+                  <a:tcPr marL="91440" marR="91440" marT="45720" marB="45720" anchor="ctr">
+                    <a:lnL w="6350" cap="flat" cmpd="sng" algn="ctr">
+                      <a:solidFill>
+                        <a:srgbClr val="D8DEE6"/>
+                      </a:solidFill>
+                      <a:prstDash val="solid"/>
+                      <a:round/>
+                      <a:headEnd type="none" w="med" len="med"/>
+                      <a:tailEnd type="none" w="med" len="med"/>
+                    </a:lnL>
+                    <a:lnR w="6350" cap="flat" cmpd="sng" algn="ctr">
+                      <a:solidFill>
+                        <a:srgbClr val="D8DEE6"/>
+                      </a:solidFill>
+                      <a:prstDash val="solid"/>
+                      <a:round/>
+                      <a:headEnd type="none" w="med" len="med"/>
+                      <a:tailEnd type="none" w="med" len="med"/>
+                    </a:lnR>
+                    <a:lnT w="6350" cap="flat" cmpd="sng" algn="ctr">
+                      <a:solidFill>
+                        <a:srgbClr val="D8DEE6"/>
+                      </a:solidFill>
+                      <a:prstDash val="solid"/>
+                      <a:round/>
+                      <a:headEnd type="none" w="med" len="med"/>
+                      <a:tailEnd type="none" w="med" len="med"/>
+                    </a:lnT>
+                    <a:lnB w="6350" cap="flat" cmpd="sng" algn="ctr">
+                      <a:solidFill>
+                        <a:srgbClr val="D8DEE6"/>
+                      </a:solidFill>
+                      <a:prstDash val="solid"/>
+                      <a:round/>
+                      <a:headEnd type="none" w="med" len="med"/>
+                      <a:tailEnd type="none" w="med" len="med"/>
+                    </a:lnB>
+                  </a:tcPr>
+                </a:tc>
+              </a:tr>
+              <a:tr h="475488">
+                <a:tc>
+                  <a:txBody>
+                    <a:bodyPr/>
+                    <a:lstStyle/>
+                    <a:p>
+                      <a:pPr indent="0" marL="0">
+                        <a:buNone/>
+                      </a:pPr>
+                      <a:r>
+                        <a:rPr lang="en-US" sz="1250" dirty="0">
+                          <a:solidFill>
+                            <a:srgbClr val="1E293B"/>
+                          </a:solidFill>
+                          <a:latin typeface="Arial" pitchFamily="34" charset="0"/>
+                          <a:ea typeface="Arial" pitchFamily="34" charset="-122"/>
+                          <a:cs typeface="Arial" pitchFamily="34" charset="-120"/>
+                        </a:rPr>
+                        <a:t>С — Со сроком</a:t>
+                      </a:r>
+                      <a:endParaRPr lang="en-US" sz="1250" dirty="0">
+                        <a:latin typeface="Arial" charset="0"/>
+                        <a:ea typeface="Arial" charset="0"/>
+                        <a:cs typeface="Arial" charset="0"/>
+                      </a:endParaRPr>
+                    </a:p>
+                  </a:txBody>
+                  <a:tcPr marL="91440" marR="91440" marT="45720" marB="45720" anchor="ctr">
+                    <a:lnL w="6350" cap="flat" cmpd="sng" algn="ctr">
+                      <a:solidFill>
+                        <a:srgbClr val="D8DEE6"/>
+                      </a:solidFill>
+                      <a:prstDash val="solid"/>
+                      <a:round/>
+                      <a:headEnd type="none" w="med" len="med"/>
+                      <a:tailEnd type="none" w="med" len="med"/>
+                    </a:lnL>
+                    <a:lnR w="6350" cap="flat" cmpd="sng" algn="ctr">
+                      <a:solidFill>
+                        <a:srgbClr val="D8DEE6"/>
+                      </a:solidFill>
+                      <a:prstDash val="solid"/>
+                      <a:round/>
+                      <a:headEnd type="none" w="med" len="med"/>
+                      <a:tailEnd type="none" w="med" len="med"/>
+                    </a:lnR>
+                    <a:lnT w="6350" cap="flat" cmpd="sng" algn="ctr">
+                      <a:solidFill>
+                        <a:srgbClr val="D8DEE6"/>
+                      </a:solidFill>
+                      <a:prstDash val="solid"/>
+                      <a:round/>
+                      <a:headEnd type="none" w="med" len="med"/>
+                      <a:tailEnd type="none" w="med" len="med"/>
+                    </a:lnT>
+                    <a:lnB w="6350" cap="flat" cmpd="sng" algn="ctr">
+                      <a:solidFill>
+                        <a:srgbClr val="D8DEE6"/>
+                      </a:solidFill>
+                      <a:prstDash val="solid"/>
+                      <a:round/>
+                      <a:headEnd type="none" w="med" len="med"/>
+                      <a:tailEnd type="none" w="med" len="med"/>
+                    </a:lnB>
+                  </a:tcPr>
+                </a:tc>
+                <a:tc>
+                  <a:txBody>
+                    <a:bodyPr/>
+                    <a:lstStyle/>
+                    <a:p>
+                      <a:pPr indent="0" marL="0">
+                        <a:buNone/>
+                      </a:pPr>
+                      <a:r>
+                        <a:rPr lang="en-US" sz="1250" dirty="0">
+                          <a:solidFill>
+                            <a:srgbClr val="1E293B"/>
+                          </a:solidFill>
+                          <a:latin typeface="Arial" pitchFamily="34" charset="0"/>
+                          <a:ea typeface="Arial" pitchFamily="34" charset="-122"/>
+                          <a:cs typeface="Arial" pitchFamily="34" charset="-120"/>
+                        </a:rPr>
+                        <a:t>Конкретная дата — 21.11 чекпоинт или 26.12 защита (слайд 7)</a:t>
+                      </a:r>
+                      <a:endParaRPr lang="en-US" sz="1250" dirty="0">
+                        <a:latin typeface="Arial" charset="0"/>
+                        <a:ea typeface="Arial" charset="0"/>
+                        <a:cs typeface="Arial" charset="0"/>
+                      </a:endParaRPr>
+                    </a:p>
+                  </a:txBody>
+                  <a:tcPr marL="91440" marR="91440" marT="45720" marB="45720" anchor="ctr">
+                    <a:lnL w="6350" cap="flat" cmpd="sng" algn="ctr">
+                      <a:solidFill>
+                        <a:srgbClr val="D8DEE6"/>
+                      </a:solidFill>
+                      <a:prstDash val="solid"/>
+                      <a:round/>
+                      <a:headEnd type="none" w="med" len="med"/>
+                      <a:tailEnd type="none" w="med" len="med"/>
+                    </a:lnL>
+                    <a:lnR w="6350" cap="flat" cmpd="sng" algn="ctr">
+                      <a:solidFill>
+                        <a:srgbClr val="D8DEE6"/>
+                      </a:solidFill>
+                      <a:prstDash val="solid"/>
+                      <a:round/>
+                      <a:headEnd type="none" w="med" len="med"/>
+                      <a:tailEnd type="none" w="med" len="med"/>
+                    </a:lnR>
+                    <a:lnT w="6350" cap="flat" cmpd="sng" algn="ctr">
+                      <a:solidFill>
+                        <a:srgbClr val="D8DEE6"/>
+                      </a:solidFill>
+                      <a:prstDash val="solid"/>
+                      <a:round/>
+                      <a:headEnd type="none" w="med" len="med"/>
+                      <a:tailEnd type="none" w="med" len="med"/>
+                    </a:lnT>
+                    <a:lnB w="6350" cap="flat" cmpd="sng" algn="ctr">
+                      <a:solidFill>
+                        <a:srgbClr val="D8DEE6"/>
+                      </a:solidFill>
+                      <a:prstDash val="solid"/>
+                      <a:round/>
+                      <a:headEnd type="none" w="med" len="med"/>
+                      <a:tailEnd type="none" w="med" len="med"/>
+                    </a:lnB>
+                  </a:tcPr>
+                </a:tc>
+                <a:tc>
+                  <a:txBody>
+                    <a:bodyPr/>
+                    <a:lstStyle/>
+                    <a:p>
+                      <a:pPr indent="0" marL="0">
+                        <a:buNone/>
+                      </a:pPr>
+                      <a:r>
+                        <a:rPr lang="en-US" sz="1250" dirty="0">
+                          <a:solidFill>
+                            <a:srgbClr val="1E293B"/>
+                          </a:solidFill>
+                          <a:latin typeface="Arial" pitchFamily="34" charset="0"/>
+                          <a:ea typeface="Arial" pitchFamily="34" charset="-122"/>
+                          <a:cs typeface="Arial" pitchFamily="34" charset="-120"/>
+                        </a:rPr>
+                        <a:t>T</a:t>
+                      </a:r>
+                      <a:endParaRPr lang="en-US" sz="1250" dirty="0">
+                        <a:latin typeface="Arial" charset="0"/>
+                        <a:ea typeface="Arial" charset="0"/>
+                        <a:cs typeface="Arial" charset="0"/>
+                      </a:endParaRPr>
+                    </a:p>
+                  </a:txBody>
+                  <a:tcPr marL="91440" marR="91440" marT="45720" marB="45720" anchor="ctr">
+                    <a:lnL w="6350" cap="flat" cmpd="sng" algn="ctr">
+                      <a:solidFill>
+                        <a:srgbClr val="D8DEE6"/>
+                      </a:solidFill>
+                      <a:prstDash val="solid"/>
+                      <a:round/>
+                      <a:headEnd type="none" w="med" len="med"/>
+                      <a:tailEnd type="none" w="med" len="med"/>
+                    </a:lnL>
+                    <a:lnR w="6350" cap="flat" cmpd="sng" algn="ctr">
+                      <a:solidFill>
+                        <a:srgbClr val="D8DEE6"/>
+                      </a:solidFill>
+                      <a:prstDash val="solid"/>
+                      <a:round/>
+                      <a:headEnd type="none" w="med" len="med"/>
+                      <a:tailEnd type="none" w="med" len="med"/>
+                    </a:lnR>
+                    <a:lnT w="6350" cap="flat" cmpd="sng" algn="ctr">
+                      <a:solidFill>
+                        <a:srgbClr val="D8DEE6"/>
+                      </a:solidFill>
+                      <a:prstDash val="solid"/>
+                      <a:round/>
+                      <a:headEnd type="none" w="med" len="med"/>
+                      <a:tailEnd type="none" w="med" len="med"/>
+                    </a:lnT>
+                    <a:lnB w="6350" cap="flat" cmpd="sng" algn="ctr">
+                      <a:solidFill>
+                        <a:srgbClr val="D8DEE6"/>
+                      </a:solidFill>
+                      <a:prstDash val="solid"/>
+                      <a:round/>
+                      <a:headEnd type="none" w="med" len="med"/>
+                      <a:tailEnd type="none" w="med" len="med"/>
+                    </a:lnB>
+                  </a:tcPr>
+                </a:tc>
+              </a:tr>
+              <a:tr h="475488">
+                <a:tc>
+                  <a:txBody>
+                    <a:bodyPr/>
+                    <a:lstStyle/>
+                    <a:p>
+                      <a:pPr indent="0" marL="0">
+                        <a:buNone/>
+                      </a:pPr>
+                      <a:r>
+                        <a:rPr lang="en-US" sz="1250" dirty="0">
+                          <a:solidFill>
+                            <a:srgbClr val="1E293B"/>
+                          </a:solidFill>
+                          <a:latin typeface="Arial" pitchFamily="34" charset="0"/>
+                          <a:ea typeface="Arial" pitchFamily="34" charset="-122"/>
+                          <a:cs typeface="Arial" pitchFamily="34" charset="-120"/>
+                        </a:rPr>
+                        <a:t>Т — Толковая</a:t>
+                      </a:r>
+                      <a:endParaRPr lang="en-US" sz="1250" dirty="0">
+                        <a:latin typeface="Arial" charset="0"/>
+                        <a:ea typeface="Arial" charset="0"/>
+                        <a:cs typeface="Arial" charset="0"/>
+                      </a:endParaRPr>
+                    </a:p>
+                  </a:txBody>
+                  <a:tcPr marL="91440" marR="91440" marT="45720" marB="45720" anchor="ctr">
+                    <a:lnL w="6350" cap="flat" cmpd="sng" algn="ctr">
+                      <a:solidFill>
+                        <a:srgbClr val="D8DEE6"/>
+                      </a:solidFill>
+                      <a:prstDash val="solid"/>
+                      <a:round/>
+                      <a:headEnd type="none" w="med" len="med"/>
+                      <a:tailEnd type="none" w="med" len="med"/>
+                    </a:lnL>
+                    <a:lnR w="6350" cap="flat" cmpd="sng" algn="ctr">
+                      <a:solidFill>
+                        <a:srgbClr val="D8DEE6"/>
+                      </a:solidFill>
+                      <a:prstDash val="solid"/>
+                      <a:round/>
+                      <a:headEnd type="none" w="med" len="med"/>
+                      <a:tailEnd type="none" w="med" len="med"/>
+                    </a:lnR>
+                    <a:lnT w="6350" cap="flat" cmpd="sng" algn="ctr">
+                      <a:solidFill>
+                        <a:srgbClr val="D8DEE6"/>
+                      </a:solidFill>
+                      <a:prstDash val="solid"/>
+                      <a:round/>
+                      <a:headEnd type="none" w="med" len="med"/>
+                      <a:tailEnd type="none" w="med" len="med"/>
+                    </a:lnT>
+                    <a:lnB w="6350" cap="flat" cmpd="sng" algn="ctr">
+                      <a:solidFill>
+                        <a:srgbClr val="D8DEE6"/>
+                      </a:solidFill>
+                      <a:prstDash val="solid"/>
+                      <a:round/>
+                      <a:headEnd type="none" w="med" len="med"/>
+                      <a:tailEnd type="none" w="med" len="med"/>
+                    </a:lnB>
+                  </a:tcPr>
+                </a:tc>
+                <a:tc>
+                  <a:txBody>
+                    <a:bodyPr/>
+                    <a:lstStyle/>
+                    <a:p>
+                      <a:pPr indent="0" marL="0">
+                        <a:buNone/>
+                      </a:pPr>
+                      <a:r>
+                        <a:rPr lang="en-US" sz="1250" dirty="0">
+                          <a:solidFill>
+                            <a:srgbClr val="1E293B"/>
+                          </a:solidFill>
+                          <a:latin typeface="Arial" pitchFamily="34" charset="0"/>
+                          <a:ea typeface="Arial" pitchFamily="34" charset="-122"/>
+                          <a:cs typeface="Arial" pitchFamily="34" charset="-120"/>
+                        </a:rPr>
+                        <a:t>Решает проблему из ценностного предложения</a:t>
+                      </a:r>
+                      <a:endParaRPr lang="en-US" sz="1250" dirty="0">
+                        <a:latin typeface="Arial" charset="0"/>
+                        <a:ea typeface="Arial" charset="0"/>
+                        <a:cs typeface="Arial" charset="0"/>
+                      </a:endParaRPr>
+                    </a:p>
+                  </a:txBody>
+                  <a:tcPr marL="91440" marR="91440" marT="45720" marB="45720" anchor="ctr">
+                    <a:lnL w="6350" cap="flat" cmpd="sng" algn="ctr">
+                      <a:solidFill>
+                        <a:srgbClr val="D8DEE6"/>
+                      </a:solidFill>
+                      <a:prstDash val="solid"/>
+                      <a:round/>
+                      <a:headEnd type="none" w="med" len="med"/>
+                      <a:tailEnd type="none" w="med" len="med"/>
+                    </a:lnL>
+                    <a:lnR w="6350" cap="flat" cmpd="sng" algn="ctr">
+                      <a:solidFill>
+                        <a:srgbClr val="D8DEE6"/>
+                      </a:solidFill>
+                      <a:prstDash val="solid"/>
+                      <a:round/>
+                      <a:headEnd type="none" w="med" len="med"/>
+                      <a:tailEnd type="none" w="med" len="med"/>
+                    </a:lnR>
+                    <a:lnT w="6350" cap="flat" cmpd="sng" algn="ctr">
+                      <a:solidFill>
+                        <a:srgbClr val="D8DEE6"/>
+                      </a:solidFill>
+                      <a:prstDash val="solid"/>
+                      <a:round/>
+                      <a:headEnd type="none" w="med" len="med"/>
+                      <a:tailEnd type="none" w="med" len="med"/>
+                    </a:lnT>
+                    <a:lnB w="6350" cap="flat" cmpd="sng" algn="ctr">
+                      <a:solidFill>
+                        <a:srgbClr val="D8DEE6"/>
+                      </a:solidFill>
+                      <a:prstDash val="solid"/>
+                      <a:round/>
+                      <a:headEnd type="none" w="med" len="med"/>
+                      <a:tailEnd type="none" w="med" len="med"/>
+                    </a:lnB>
+                  </a:tcPr>
+                </a:tc>
+                <a:tc>
+                  <a:txBody>
+                    <a:bodyPr/>
+                    <a:lstStyle/>
+                    <a:p>
+                      <a:pPr indent="0" marL="0">
+                        <a:buNone/>
+                      </a:pPr>
+                      <a:r>
+                        <a:rPr lang="en-US" sz="1250" dirty="0">
+                          <a:solidFill>
+                            <a:srgbClr val="1E293B"/>
+                          </a:solidFill>
+                          <a:latin typeface="Arial" pitchFamily="34" charset="0"/>
+                          <a:ea typeface="Arial" pitchFamily="34" charset="-122"/>
+                          <a:cs typeface="Arial" pitchFamily="34" charset="-120"/>
+                        </a:rPr>
+                        <a:t>R</a:t>
+                      </a:r>
+                      <a:endParaRPr lang="en-US" sz="1250" dirty="0">
+                        <a:latin typeface="Arial" charset="0"/>
+                        <a:ea typeface="Arial" charset="0"/>
+                        <a:cs typeface="Arial" charset="0"/>
+                      </a:endParaRPr>
+                    </a:p>
+                  </a:txBody>
+                  <a:tcPr marL="91440" marR="91440" marT="45720" marB="45720" anchor="ctr">
+                    <a:lnL w="6350" cap="flat" cmpd="sng" algn="ctr">
+                      <a:solidFill>
+                        <a:srgbClr val="D8DEE6"/>
+                      </a:solidFill>
+                      <a:prstDash val="solid"/>
+                      <a:round/>
+                      <a:headEnd type="none" w="med" len="med"/>
+                      <a:tailEnd type="none" w="med" len="med"/>
+                    </a:lnL>
+                    <a:lnR w="6350" cap="flat" cmpd="sng" algn="ctr">
+                      <a:solidFill>
+                        <a:srgbClr val="D8DEE6"/>
+                      </a:solidFill>
+                      <a:prstDash val="solid"/>
+                      <a:round/>
+                      <a:headEnd type="none" w="med" len="med"/>
+                      <a:tailEnd type="none" w="med" len="med"/>
+                    </a:lnR>
+                    <a:lnT w="6350" cap="flat" cmpd="sng" algn="ctr">
+                      <a:solidFill>
+                        <a:srgbClr val="D8DEE6"/>
+                      </a:solidFill>
+                      <a:prstDash val="solid"/>
+                      <a:round/>
+                      <a:headEnd type="none" w="med" len="med"/>
+                      <a:tailEnd type="none" w="med" len="med"/>
+                    </a:lnT>
+                    <a:lnB w="6350" cap="flat" cmpd="sng" algn="ctr">
+                      <a:solidFill>
+                        <a:srgbClr val="D8DEE6"/>
+                      </a:solidFill>
+                      <a:prstDash val="solid"/>
+                      <a:round/>
+                      <a:headEnd type="none" w="med" len="med"/>
+                      <a:tailEnd type="none" w="med" len="med"/>
+                    </a:lnB>
+                  </a:tcPr>
+                </a:tc>
+              </a:tr>
+              <a:tr h="475488">
+                <a:tc>
+                  <a:txBody>
+                    <a:bodyPr/>
+                    <a:lstStyle/>
+                    <a:p>
+                      <a:pPr indent="0" marL="0">
+                        <a:buNone/>
+                      </a:pPr>
+                      <a:r>
+                        <a:rPr lang="en-US" sz="1250" dirty="0">
+                          <a:solidFill>
+                            <a:srgbClr val="1E293B"/>
+                          </a:solidFill>
+                          <a:latin typeface="Arial" pitchFamily="34" charset="0"/>
+                          <a:ea typeface="Arial" pitchFamily="34" charset="-122"/>
+                          <a:cs typeface="Arial" pitchFamily="34" charset="-120"/>
+                        </a:rPr>
+                        <a:t>О — Осуществимая</a:t>
+                      </a:r>
+                      <a:endParaRPr lang="en-US" sz="1250" dirty="0">
+                        <a:latin typeface="Arial" charset="0"/>
+                        <a:ea typeface="Arial" charset="0"/>
+                        <a:cs typeface="Arial" charset="0"/>
+                      </a:endParaRPr>
+                    </a:p>
+                  </a:txBody>
+                  <a:tcPr marL="91440" marR="91440" marT="45720" marB="45720" anchor="ctr">
+                    <a:lnL w="6350" cap="flat" cmpd="sng" algn="ctr">
+                      <a:solidFill>
+                        <a:srgbClr val="D8DEE6"/>
+                      </a:solidFill>
+                      <a:prstDash val="solid"/>
+                      <a:round/>
+                      <a:headEnd type="none" w="med" len="med"/>
+                      <a:tailEnd type="none" w="med" len="med"/>
+                    </a:lnL>
+                    <a:lnR w="6350" cap="flat" cmpd="sng" algn="ctr">
+                      <a:solidFill>
+                        <a:srgbClr val="D8DEE6"/>
+                      </a:solidFill>
+                      <a:prstDash val="solid"/>
+                      <a:round/>
+                      <a:headEnd type="none" w="med" len="med"/>
+                      <a:tailEnd type="none" w="med" len="med"/>
+                    </a:lnR>
+                    <a:lnT w="6350" cap="flat" cmpd="sng" algn="ctr">
+                      <a:solidFill>
+                        <a:srgbClr val="D8DEE6"/>
+                      </a:solidFill>
+                      <a:prstDash val="solid"/>
+                      <a:round/>
+                      <a:headEnd type="none" w="med" len="med"/>
+                      <a:tailEnd type="none" w="med" len="med"/>
+                    </a:lnT>
+                    <a:lnB w="6350" cap="flat" cmpd="sng" algn="ctr">
+                      <a:solidFill>
+                        <a:srgbClr val="D8DEE6"/>
+                      </a:solidFill>
+                      <a:prstDash val="solid"/>
+                      <a:round/>
+                      <a:headEnd type="none" w="med" len="med"/>
+                      <a:tailEnd type="none" w="med" len="med"/>
+                    </a:lnB>
+                  </a:tcPr>
+                </a:tc>
+                <a:tc>
+                  <a:txBody>
+                    <a:bodyPr/>
+                    <a:lstStyle/>
+                    <a:p>
+                      <a:pPr indent="0" marL="0">
+                        <a:buNone/>
+                      </a:pPr>
+                      <a:r>
+                        <a:rPr lang="en-US" sz="1250" dirty="0">
+                          <a:solidFill>
+                            <a:srgbClr val="1E293B"/>
+                          </a:solidFill>
+                          <a:latin typeface="Arial" pitchFamily="34" charset="0"/>
+                          <a:ea typeface="Arial" pitchFamily="34" charset="-122"/>
+                          <a:cs typeface="Arial" pitchFamily="34" charset="-120"/>
+                        </a:rPr>
+                        <a:t>Ресурсный лимит: реально силами 3–4 человек (слайд 6)</a:t>
+                      </a:r>
+                      <a:endParaRPr lang="en-US" sz="1250" dirty="0">
+                        <a:latin typeface="Arial" charset="0"/>
+                        <a:ea typeface="Arial" charset="0"/>
+                        <a:cs typeface="Arial" charset="0"/>
+                      </a:endParaRPr>
+                    </a:p>
+                  </a:txBody>
+                  <a:tcPr marL="91440" marR="91440" marT="45720" marB="45720" anchor="ctr">
+                    <a:lnL w="6350" cap="flat" cmpd="sng" algn="ctr">
+                      <a:solidFill>
+                        <a:srgbClr val="D8DEE6"/>
+                      </a:solidFill>
+                      <a:prstDash val="solid"/>
+                      <a:round/>
+                      <a:headEnd type="none" w="med" len="med"/>
+                      <a:tailEnd type="none" w="med" len="med"/>
+                    </a:lnL>
+                    <a:lnR w="6350" cap="flat" cmpd="sng" algn="ctr">
+                      <a:solidFill>
+                        <a:srgbClr val="D8DEE6"/>
+                      </a:solidFill>
+                      <a:prstDash val="solid"/>
+                      <a:round/>
+                      <a:headEnd type="none" w="med" len="med"/>
+                      <a:tailEnd type="none" w="med" len="med"/>
+                    </a:lnR>
+                    <a:lnT w="6350" cap="flat" cmpd="sng" algn="ctr">
+                      <a:solidFill>
+                        <a:srgbClr val="D8DEE6"/>
+                      </a:solidFill>
+                      <a:prstDash val="solid"/>
+                      <a:round/>
+                      <a:headEnd type="none" w="med" len="med"/>
+                      <a:tailEnd type="none" w="med" len="med"/>
+                    </a:lnT>
+                    <a:lnB w="6350" cap="flat" cmpd="sng" algn="ctr">
+                      <a:solidFill>
+                        <a:srgbClr val="D8DEE6"/>
+                      </a:solidFill>
+                      <a:prstDash val="solid"/>
+                      <a:round/>
+                      <a:headEnd type="none" w="med" len="med"/>
+                      <a:tailEnd type="none" w="med" len="med"/>
+                    </a:lnB>
+                  </a:tcPr>
+                </a:tc>
+                <a:tc>
+                  <a:txBody>
+                    <a:bodyPr/>
+                    <a:lstStyle/>
+                    <a:p>
+                      <a:pPr indent="0" marL="0">
+                        <a:buNone/>
+                      </a:pPr>
+                      <a:r>
+                        <a:rPr lang="en-US" sz="1250" dirty="0">
+                          <a:solidFill>
+                            <a:srgbClr val="1E293B"/>
+                          </a:solidFill>
+                          <a:latin typeface="Arial" pitchFamily="34" charset="0"/>
+                          <a:ea typeface="Arial" pitchFamily="34" charset="-122"/>
+                          <a:cs typeface="Arial" pitchFamily="34" charset="-120"/>
+                        </a:rPr>
+                        <a:t>A</a:t>
+                      </a:r>
+                      <a:endParaRPr lang="en-US" sz="1250" dirty="0">
+                        <a:latin typeface="Arial" charset="0"/>
+                        <a:ea typeface="Arial" charset="0"/>
+                        <a:cs typeface="Arial" charset="0"/>
+                      </a:endParaRPr>
+                    </a:p>
+                  </a:txBody>
+                  <a:tcPr marL="91440" marR="91440" marT="45720" marB="45720" anchor="ctr">
+                    <a:lnL w="6350" cap="flat" cmpd="sng" algn="ctr">
+                      <a:solidFill>
+                        <a:srgbClr val="D8DEE6"/>
+                      </a:solidFill>
+                      <a:prstDash val="solid"/>
+                      <a:round/>
+                      <a:headEnd type="none" w="med" len="med"/>
+                      <a:tailEnd type="none" w="med" len="med"/>
+                    </a:lnL>
+                    <a:lnR w="6350" cap="flat" cmpd="sng" algn="ctr">
+                      <a:solidFill>
+                        <a:srgbClr val="D8DEE6"/>
+                      </a:solidFill>
+                      <a:prstDash val="solid"/>
+                      <a:round/>
+                      <a:headEnd type="none" w="med" len="med"/>
+                      <a:tailEnd type="none" w="med" len="med"/>
+                    </a:lnR>
+                    <a:lnT w="6350" cap="flat" cmpd="sng" algn="ctr">
+                      <a:solidFill>
+                        <a:srgbClr val="D8DEE6"/>
+                      </a:solidFill>
+                      <a:prstDash val="solid"/>
+                      <a:round/>
+                      <a:headEnd type="none" w="med" len="med"/>
+                      <a:tailEnd type="none" w="med" len="med"/>
+                    </a:lnT>
+                    <a:lnB w="6350" cap="flat" cmpd="sng" algn="ctr">
+                      <a:solidFill>
+                        <a:srgbClr val="D8DEE6"/>
+                      </a:solidFill>
+                      <a:prstDash val="solid"/>
+                      <a:round/>
+                      <a:headEnd type="none" w="med" len="med"/>
+                      <a:tailEnd type="none" w="med" len="med"/>
+                    </a:lnB>
+                  </a:tcPr>
+                </a:tc>
+              </a:tr>
+            </a:tbl>
+          </a:graphicData>
+        </a:graphic>
+      </p:graphicFrame>
+    </p:spTree>
+  </p:cSld>
+  <p:clrMapOvr>
+    <a:masterClrMapping/>
+  </p:clrMapOvr>
+</p:sld>
+</file>
+
+<file path=ppt/slides/slide9.xml><?xml version="1.0" encoding="utf-8"?>
+<p:sld xmlns:a="http://schemas.openxmlformats.org/drawingml/2006/main" xmlns:r="http://schemas.openxmlformats.org/officeDocument/2006/relationships" xmlns:p="http://schemas.openxmlformats.org/presentationml/2006/main">
+  <p:cSld name="Slide 9">
+    <p:bg>
+      <p:bgPr>
+        <a:solidFill>
+          <a:srgbClr val="FFFFFF"/>
+        </a:solidFill>
+      </p:bgPr>
+    </p:bg>
+    <p:spTree>
+      <p:nvGrpSpPr>
+        <p:cNvPr id="1" name=""/>
+        <p:cNvGrpSpPr/>
+        <p:nvPr/>
+      </p:nvGrpSpPr>
+      <p:grpSpPr>
+        <a:xfrm>
+          <a:off x="0" y="0"/>
+          <a:ext cx="0" cy="0"/>
+          <a:chOff x="0" y="0"/>
+          <a:chExt cx="0" cy="0"/>
+        </a:xfrm>
+      </p:grpSpPr>
+      <p:sp>
+        <p:nvSpPr>
+          <p:cNvPr id="2" name="Text 0"/>
+          <p:cNvSpPr txBox="1"/>
+          <p:nvPr/>
+        </p:nvSpPr>
+        <p:spPr>
+          <a:xfrm>
+            <a:off x="502920" y="182880"/>
+            <a:ext cx="8138160" cy="219456"/>
+          </a:xfrm>
+          <a:prstGeom prst="rect">
+            <a:avLst/>
+          </a:prstGeom>
+          <a:noFill/>
+          <a:ln/>
+        </p:spPr>
+        <p:txBody>
+          <a:bodyPr wrap="square" lIns="0" tIns="0" rIns="0" bIns="0" rtlCol="0" anchor="ctr"/>
+          <a:lstStyle/>
+          <a:p>
+            <a:pPr indent="0" marL="0">
+              <a:buNone/>
+            </a:pPr>
+            <a:r>
+              <a:rPr lang="en-US" sz="1100" spc="150" kern="0" dirty="0">
+                <a:solidFill>
+                  <a:srgbClr val="64748B"/>
+                </a:solidFill>
+                <a:latin typeface="Arial" pitchFamily="34" charset="0"/>
+                <a:ea typeface="Arial" pitchFamily="34" charset="-122"/>
+                <a:cs typeface="Arial" pitchFamily="34" charset="-120"/>
+              </a:rPr>
+              <a:t>РАЗБОР НА ДОСКЕ</a:t>
+            </a:r>
+            <a:endParaRPr lang="en-US" sz="1100" dirty="0"/>
+          </a:p>
+        </p:txBody>
+      </p:sp>
+      <p:sp>
+        <p:nvSpPr>
+          <p:cNvPr id="3" name="Text 1"/>
+          <p:cNvSpPr txBox="1"/>
+          <p:nvPr/>
+        </p:nvSpPr>
+        <p:spPr>
+          <a:xfrm>
+            <a:off x="502920" y="384048"/>
+            <a:ext cx="8138160" cy="502920"/>
+          </a:xfrm>
+          <a:prstGeom prst="rect">
+            <a:avLst/>
+          </a:prstGeom>
+          <a:noFill/>
+          <a:ln/>
+        </p:spPr>
+        <p:txBody>
+          <a:bodyPr wrap="square" lIns="0" tIns="0" rIns="0" bIns="0" rtlCol="0" anchor="ctr"/>
+          <a:lstStyle/>
+          <a:p>
+            <a:pPr indent="0" marL="0">
+              <a:buNone/>
+            </a:pPr>
+            <a:r>
+              <a:rPr lang="en-US" sz="2400" b="1" dirty="0">
+                <a:solidFill>
+                  <a:srgbClr val="005AAA"/>
+                </a:solidFill>
+                <a:latin typeface="Arial" pitchFamily="34" charset="0"/>
+                <a:ea typeface="Arial" pitchFamily="34" charset="-122"/>
+                <a:cs typeface="Arial" pitchFamily="34" charset="-120"/>
+              </a:rPr>
+              <a:t>Без числа не ЧИСТО</a:t>
+            </a:r>
+            <a:endParaRPr lang="en-US" sz="2400" dirty="0"/>
+          </a:p>
+        </p:txBody>
+      </p:sp>
+      <p:sp>
+        <p:nvSpPr>
+          <p:cNvPr id="4" name="Text 2"/>
+          <p:cNvSpPr txBox="1"/>
+          <p:nvPr/>
+        </p:nvSpPr>
+        <p:spPr>
+          <a:xfrm>
+            <a:off x="502920" y="914400"/>
+            <a:ext cx="8138160" cy="274320"/>
+          </a:xfrm>
+          <a:prstGeom prst="rect">
+            <a:avLst/>
+          </a:prstGeom>
+          <a:noFill/>
+          <a:ln/>
+        </p:spPr>
+        <p:txBody>
+          <a:bodyPr wrap="square" lIns="0" tIns="0" rIns="0" bIns="0" rtlCol="0" anchor="ctr"/>
+          <a:lstStyle/>
+          <a:p>
+            <a:pPr indent="0" marL="0">
+              <a:buNone/>
+            </a:pPr>
+            <a:r>
+              <a:rPr lang="en-US" sz="1300" i="1" dirty="0">
+                <a:solidFill>
+                  <a:srgbClr val="64748B"/>
+                </a:solidFill>
+                <a:latin typeface="Arial" pitchFamily="34" charset="0"/>
+                <a:ea typeface="Arial" pitchFamily="34" charset="-122"/>
+                <a:cs typeface="Arial" pitchFamily="34" charset="-120"/>
+              </a:rPr>
+              <a:t>Продолжаем пример: умный горшок для растений</a:t>
+            </a:r>
+            <a:endParaRPr lang="en-US" sz="1300" dirty="0"/>
+          </a:p>
+        </p:txBody>
+      </p:sp>
+      <p:graphicFrame>
+        <p:nvGraphicFramePr>
+          <p:cNvPr id="10" name="Table 0"/>
+          <p:cNvGraphicFramePr>
+            <a:graphicFrameLocks noGrp="1"/>
+          </p:cNvGraphicFramePr>
+          <p:nvPr>
+            <p:extLst>
+              <p:ext uri="{D42A27DB-BD31-4B8C-83A1-F6EECF244321}">
+                <p14:modId xmlns:p14="http://schemas.microsoft.com/office/powerpoint/2010/main" val="1579011935"/>
+              </p:ext>
+            </p:extLst>
+          </p:nvPr>
+        </p:nvGraphicFramePr>
+        <p:xfrm>
+          <a:off x="502920" y="1280160"/>
           <a:ext cx="8138160" cy="914400"/>
         </p:xfrm>
         <a:graphic>
@@ -6873,7 +7902,7 @@
                 <a:gridCol w="3611880"/>
                 <a:gridCol w="3611880"/>
               </a:tblGrid>
-              <a:tr h="566928">
+              <a:tr h="548640">
                 <a:tc>
                   <a:txBody>
                     <a:bodyPr/>
@@ -7079,7 +8108,7 @@
                   </a:tcPr>
                 </a:tc>
               </a:tr>
-              <a:tr h="566928">
+              <a:tr h="548640">
                 <a:tc>
                   <a:txBody>
                     <a:bodyPr/>
@@ -7097,7 +8126,7 @@
                           <a:ea typeface="Arial" pitchFamily="34" charset="-122"/>
                           <a:cs typeface="Arial" pitchFamily="34" charset="-120"/>
                         </a:rPr>
-                        <a:t>S</a:t>
+                        <a:t>Ч</a:t>
                       </a:r>
                       <a:endParaRPr lang="en-US" sz="1150" dirty="0">
                         <a:latin typeface="Arial" charset="0"/>
@@ -7162,7 +8191,7 @@
                           <a:ea typeface="Arial" pitchFamily="34" charset="-122"/>
                           <a:cs typeface="Arial" pitchFamily="34" charset="-120"/>
                         </a:rPr>
-                        <a:t>«Сделать систему контроля влажности»</a:t>
+                        <a:t>«Сделать умный горшок»</a:t>
                       </a:r>
                       <a:endParaRPr lang="en-US" sz="1150" dirty="0">
                         <a:latin typeface="Arial" charset="0"/>
@@ -7227,7 +8256,7 @@
                           <a:ea typeface="Arial" pitchFamily="34" charset="-122"/>
                           <a:cs typeface="Arial" pitchFamily="34" charset="-120"/>
                         </a:rPr>
-                        <a:t>Датчик в теплице, показания — в Telegram ответственному</a:t>
+                        <a:t>Датчик влажности почвы + световой индикатор «сухо/норма/перелив»</a:t>
                       </a:r>
                       <a:endParaRPr lang="en-US" sz="1150" dirty="0">
                         <a:latin typeface="Arial" charset="0"/>
@@ -7276,7 +8305,7 @@
                   </a:tcPr>
                 </a:tc>
               </a:tr>
-              <a:tr h="566928">
+              <a:tr h="548640">
                 <a:tc>
                   <a:txBody>
                     <a:bodyPr/>
@@ -7294,7 +8323,7 @@
                           <a:ea typeface="Arial" pitchFamily="34" charset="-122"/>
                           <a:cs typeface="Arial" pitchFamily="34" charset="-120"/>
                         </a:rPr>
-                        <a:t>M</a:t>
+                        <a:t>И</a:t>
                       </a:r>
                       <a:endParaRPr lang="en-US" sz="1150" dirty="0">
                         <a:latin typeface="Arial" charset="0"/>
@@ -7359,7 +8388,7 @@
                           <a:ea typeface="Arial" pitchFamily="34" charset="-122"/>
                           <a:cs typeface="Arial" pitchFamily="34" charset="-120"/>
                         </a:rPr>
-                        <a:t>«Чтобы работало хорошо»</a:t>
+                        <a:t>«Чтобы удобно было»</a:t>
                       </a:r>
                       <a:endParaRPr lang="en-US" sz="1150" dirty="0">
                         <a:latin typeface="Arial" charset="0"/>
@@ -7424,7 +8453,7 @@
                           <a:ea typeface="Arial" pitchFamily="34" charset="-122"/>
                           <a:cs typeface="Arial" pitchFamily="34" charset="-120"/>
                         </a:rPr>
-                        <a:t>Раз в час; точность ±5% от контрольного измерения</a:t>
+                        <a:t>Точность ±10% от контрольного измерения, проверено на 10 циклах полива</a:t>
                       </a:r>
                       <a:endParaRPr lang="en-US" sz="1150" dirty="0">
                         <a:latin typeface="Arial" charset="0"/>
@@ -7473,7 +8502,7 @@
                   </a:tcPr>
                 </a:tc>
               </a:tr>
-              <a:tr h="566928">
+              <a:tr h="548640">
                 <a:tc>
                   <a:txBody>
                     <a:bodyPr/>
@@ -7491,7 +8520,7 @@
                           <a:ea typeface="Arial" pitchFamily="34" charset="-122"/>
                           <a:cs typeface="Arial" pitchFamily="34" charset="-120"/>
                         </a:rPr>
-                        <a:t>A / R</a:t>
+                        <a:t>Т / О</a:t>
                       </a:r>
                       <a:endParaRPr lang="en-US" sz="1150" dirty="0">
                         <a:latin typeface="Arial" charset="0"/>
@@ -7621,7 +8650,7 @@
                           <a:ea typeface="Arial" pitchFamily="34" charset="-122"/>
                           <a:cs typeface="Arial" pitchFamily="34" charset="-120"/>
                         </a:rPr>
-                        <a:t>3–4 человека, доступное оборудование; закрывает названную проблему</a:t>
+                        <a:t>Решает проблему полива на глаз; 3–4 человека, типовые компоненты</a:t>
                       </a:r>
                       <a:endParaRPr lang="en-US" sz="1150" dirty="0">
                         <a:latin typeface="Arial" charset="0"/>
@@ -7670,7 +8699,7 @@
                   </a:tcPr>
                 </a:tc>
               </a:tr>
-              <a:tr h="566928">
+              <a:tr h="548640">
                 <a:tc>
                   <a:txBody>
                     <a:bodyPr/>
@@ -7688,7 +8717,7 @@
                           <a:ea typeface="Arial" pitchFamily="34" charset="-122"/>
                           <a:cs typeface="Arial" pitchFamily="34" charset="-120"/>
                         </a:rPr>
-                        <a:t>T</a:t>
+                        <a:t>С</a:t>
                       </a:r>
                       <a:endParaRPr lang="en-US" sz="1150" dirty="0">
                         <a:latin typeface="Arial" charset="0"/>
@@ -7818,7 +8847,7 @@
                           <a:ea typeface="Arial" pitchFamily="34" charset="-122"/>
                           <a:cs typeface="Arial" pitchFamily="34" charset="-120"/>
                         </a:rPr>
-                        <a:t>Прототип — к 21.11, итог и отчёт — к 26.12</a:t>
+                        <a:t>Прототип — к 21.11, 3 недели теста и отчёт — к 26.12</a:t>
                       </a:r>
                       <a:endParaRPr lang="en-US" sz="1150" dirty="0">
                         <a:latin typeface="Arial" charset="0"/>
@@ -7873,13 +8902,13 @@
       </p:graphicFrame>
       <p:sp>
         <p:nvSpPr>
-          <p:cNvPr id="5" name="Shape 2"/>
+          <p:cNvPr id="6" name="Shape 3"/>
           <p:cNvSpPr/>
           <p:nvPr/>
         </p:nvSpPr>
         <p:spPr>
           <a:xfrm>
-            <a:off x="502920" y="3703320"/>
+            <a:off x="502920" y="3794760"/>
             <a:ext cx="8138160" cy="685800"/>
           </a:xfrm>
           <a:prstGeom prst="roundRect">
@@ -7900,13 +8929,13 @@
       </p:sp>
       <p:sp>
         <p:nvSpPr>
-          <p:cNvPr id="6" name="Text 3"/>
+          <p:cNvPr id="7" name="Text 4"/>
           <p:cNvSpPr txBox="1"/>
           <p:nvPr/>
         </p:nvSpPr>
         <p:spPr>
           <a:xfrm>
-            <a:off x="731520" y="3822192"/>
+            <a:off x="731520" y="3913632"/>
             <a:ext cx="7680960" cy="457200"/>
           </a:xfrm>
           <a:prstGeom prst="rect">
@@ -7921,12 +8950,12 @@
           <a:p>
             <a:pPr indent="0" marL="0">
               <a:lnSpc>
-                <a:spcPts val="1600"/>
+                <a:spcPts val="1500"/>
               </a:lnSpc>
               <a:buNone/>
             </a:pPr>
             <a:r>
-              <a:rPr lang="en-US" sz="1250" b="1" dirty="0">
+              <a:rPr lang="en-US" sz="1150" b="1" dirty="0">
                 <a:solidFill>
                   <a:srgbClr val="FFFFFF"/>
                 </a:solidFill>
@@ -7934,286 +8963,9 @@
                 <a:ea typeface="Arial" pitchFamily="34" charset="-122"/>
                 <a:cs typeface="Arial" pitchFamily="34" charset="-120"/>
               </a:rPr>
-              <a:t>К 26.12 — датчик влажности почвы с оповещением в Telegram, без сбоев 14 дней подряд, точность ±5% — прототип к 21.11</a:t>
+              <a:t>К 26.12 — прототип умного горшка с датчиком влажности и индикатором полива, проверенный 3 недели на живом растении, точность ±10% — прототип к 21.11</a:t>
             </a:r>
-            <a:endParaRPr lang="en-US" sz="1250" dirty="0"/>
-          </a:p>
-        </p:txBody>
-      </p:sp>
-    </p:spTree>
-  </p:cSld>
-  <p:clrMapOvr>
-    <a:masterClrMapping/>
-  </p:clrMapOvr>
-</p:sld>
-</file>
-
-<file path=ppt/slides/slide9.xml><?xml version="1.0" encoding="utf-8"?>
-<p:sld xmlns:a="http://schemas.openxmlformats.org/drawingml/2006/main" xmlns:r="http://schemas.openxmlformats.org/officeDocument/2006/relationships" xmlns:p="http://schemas.openxmlformats.org/presentationml/2006/main">
-  <p:cSld name="Slide 9">
-    <p:bg>
-      <p:bgPr>
-        <a:solidFill>
-          <a:srgbClr val="FFFFFF"/>
-        </a:solidFill>
-      </p:bgPr>
-    </p:bg>
-    <p:spTree>
-      <p:nvGrpSpPr>
-        <p:cNvPr id="1" name=""/>
-        <p:cNvGrpSpPr/>
-        <p:nvPr/>
-      </p:nvGrpSpPr>
-      <p:grpSpPr>
-        <a:xfrm>
-          <a:off x="0" y="0"/>
-          <a:ext cx="0" cy="0"/>
-          <a:chOff x="0" y="0"/>
-          <a:chExt cx="0" cy="0"/>
-        </a:xfrm>
-      </p:grpSpPr>
-      <p:sp>
-        <p:nvSpPr>
-          <p:cNvPr id="2" name="Text 0"/>
-          <p:cNvSpPr txBox="1"/>
-          <p:nvPr/>
-        </p:nvSpPr>
-        <p:spPr>
-          <a:xfrm>
-            <a:off x="502920" y="182880"/>
-            <a:ext cx="8138160" cy="219456"/>
-          </a:xfrm>
-          <a:prstGeom prst="rect">
-            <a:avLst/>
-          </a:prstGeom>
-          <a:noFill/>
-          <a:ln/>
-        </p:spPr>
-        <p:txBody>
-          <a:bodyPr wrap="square" lIns="0" tIns="0" rIns="0" bIns="0" rtlCol="0" anchor="ctr"/>
-          <a:lstStyle/>
-          <a:p>
-            <a:pPr indent="0" marL="0">
-              <a:buNone/>
-            </a:pPr>
-            <a:r>
-              <a:rPr lang="en-US" sz="1100" spc="150" kern="0" dirty="0">
-                <a:solidFill>
-                  <a:srgbClr val="64748B"/>
-                </a:solidFill>
-                <a:latin typeface="Arial" pitchFamily="34" charset="0"/>
-                <a:ea typeface="Arial" pitchFamily="34" charset="-122"/>
-                <a:cs typeface="Arial" pitchFamily="34" charset="-120"/>
-              </a:rPr>
-              <a:t>ЛИСТ 2 · 20 МИНУТ</a:t>
-            </a:r>
-            <a:endParaRPr lang="en-US" sz="1100" dirty="0"/>
-          </a:p>
-        </p:txBody>
-      </p:sp>
-      <p:sp>
-        <p:nvSpPr>
-          <p:cNvPr id="3" name="Text 1"/>
-          <p:cNvSpPr txBox="1"/>
-          <p:nvPr/>
-        </p:nvSpPr>
-        <p:spPr>
-          <a:xfrm>
-            <a:off x="502920" y="365760"/>
-            <a:ext cx="8138160" cy="640080"/>
-          </a:xfrm>
-          <a:prstGeom prst="rect">
-            <a:avLst/>
-          </a:prstGeom>
-          <a:noFill/>
-          <a:ln/>
-        </p:spPr>
-        <p:txBody>
-          <a:bodyPr wrap="square" lIns="0" tIns="0" rIns="0" bIns="0" rtlCol="0" anchor="ctr"/>
-          <a:lstStyle/>
-          <a:p>
-            <a:pPr indent="0" marL="0">
-              <a:buNone/>
-            </a:pPr>
-            <a:r>
-              <a:rPr lang="en-US" sz="2700" b="1" dirty="0">
-                <a:solidFill>
-                  <a:srgbClr val="005AAA"/>
-                </a:solidFill>
-                <a:latin typeface="Arial" pitchFamily="34" charset="0"/>
-                <a:ea typeface="Arial" pitchFamily="34" charset="-122"/>
-                <a:cs typeface="Arial" pitchFamily="34" charset="-120"/>
-              </a:rPr>
-              <a:t>Разверните SMART-цель</a:t>
-            </a:r>
-            <a:endParaRPr lang="en-US" sz="2700" dirty="0"/>
-          </a:p>
-        </p:txBody>
-      </p:sp>
-      <p:sp>
-        <p:nvSpPr>
-          <p:cNvPr id="4" name="Text 2"/>
-          <p:cNvSpPr txBox="1"/>
-          <p:nvPr/>
-        </p:nvSpPr>
-        <p:spPr>
-          <a:xfrm>
-            <a:off x="502920" y="1371600"/>
-            <a:ext cx="8138160" cy="365760"/>
-          </a:xfrm>
-          <a:prstGeom prst="rect">
-            <a:avLst/>
-          </a:prstGeom>
-          <a:noFill/>
-          <a:ln/>
-        </p:spPr>
-        <p:txBody>
-          <a:bodyPr wrap="square" lIns="0" tIns="0" rIns="0" bIns="0" rtlCol="0" anchor="ctr"/>
-          <a:lstStyle/>
-          <a:p>
-            <a:pPr indent="0" marL="0">
-              <a:buNone/>
-            </a:pPr>
-            <a:r>
-              <a:rPr lang="en-US" sz="1500" dirty="0">
-                <a:solidFill>
-                  <a:srgbClr val="1E293B"/>
-                </a:solidFill>
-                <a:latin typeface="Arial" pitchFamily="34" charset="0"/>
-                <a:ea typeface="Arial" pitchFamily="34" charset="-122"/>
-                <a:cs typeface="Arial" pitchFamily="34" charset="-120"/>
-              </a:rPr>
-              <a:t>Каждая буква — отдельная строка, конкретно. Не общей фразой на весь акроним.</a:t>
-            </a:r>
-            <a:endParaRPr lang="en-US" sz="1500" dirty="0"/>
-          </a:p>
-        </p:txBody>
-      </p:sp>
-      <p:sp>
-        <p:nvSpPr>
-          <p:cNvPr id="5" name="Shape 3"/>
-          <p:cNvSpPr/>
-          <p:nvPr/>
-        </p:nvSpPr>
-        <p:spPr>
-          <a:xfrm>
-            <a:off x="502920" y="1920240"/>
-            <a:ext cx="8138160" cy="2011680"/>
-          </a:xfrm>
-          <a:prstGeom prst="roundRect">
-            <a:avLst>
-              <a:gd name="adj" fmla="val 2273"/>
-            </a:avLst>
-          </a:prstGeom>
-          <a:solidFill>
-            <a:srgbClr val="1E4270"/>
-          </a:solidFill>
-          <a:ln w="9525">
-            <a:solidFill>
-              <a:srgbClr val="D8DEE6"/>
-            </a:solidFill>
-            <a:prstDash val="solid"/>
-          </a:ln>
-        </p:spPr>
-      </p:sp>
-      <p:sp>
-        <p:nvSpPr>
-          <p:cNvPr id="6" name="Text 4"/>
-          <p:cNvSpPr txBox="1"/>
-          <p:nvPr/>
-        </p:nvSpPr>
-        <p:spPr>
-          <a:xfrm>
-            <a:off x="822960" y="2194560"/>
-            <a:ext cx="7498080" cy="1371600"/>
-          </a:xfrm>
-          <a:prstGeom prst="rect">
-            <a:avLst/>
-          </a:prstGeom>
-          <a:noFill/>
-          <a:ln/>
-        </p:spPr>
-        <p:txBody>
-          <a:bodyPr wrap="square" lIns="0" tIns="0" rIns="0" bIns="0" rtlCol="0" anchor="ctr"/>
-          <a:lstStyle/>
-          <a:p>
-            <a:pPr indent="0" marL="0">
-              <a:lnSpc>
-                <a:spcPts val="2600"/>
-              </a:lnSpc>
-              <a:buNone/>
-            </a:pPr>
-            <a:r>
-              <a:rPr lang="en-US" sz="1600" b="1" dirty="0">
-                <a:solidFill>
-                  <a:srgbClr val="FFFFFF"/>
-                </a:solidFill>
-                <a:latin typeface="Arial" pitchFamily="34" charset="0"/>
-                <a:ea typeface="Arial" pitchFamily="34" charset="-122"/>
-                <a:cs typeface="Arial" pitchFamily="34" charset="-120"/>
-              </a:rPr>
-              <a:t>Итог блока — одна фраза с датой:</a:t>
-            </a:r>
-            <a:endParaRPr lang="en-US" sz="1600" dirty="0"/>
-          </a:p>
-          <a:p>
-            <a:pPr indent="0" marL="0">
-              <a:lnSpc>
-                <a:spcPts val="2600"/>
-              </a:lnSpc>
-              <a:buNone/>
-            </a:pPr>
-            <a:r>
-              <a:rPr lang="en-US" sz="1600" b="1" dirty="0">
-                <a:solidFill>
-                  <a:srgbClr val="FFFFFF"/>
-                </a:solidFill>
-                <a:latin typeface="Arial" pitchFamily="34" charset="0"/>
-                <a:ea typeface="Arial" pitchFamily="34" charset="-122"/>
-                <a:cs typeface="Arial" pitchFamily="34" charset="-120"/>
-              </a:rPr>
-              <a:t>«К [дата] мы получим [измеримый результат], проверяемый [способ проверки]»</a:t>
-            </a:r>
-            <a:endParaRPr lang="en-US" sz="1600" dirty="0"/>
-          </a:p>
-        </p:txBody>
-      </p:sp>
-      <p:sp>
-        <p:nvSpPr>
-          <p:cNvPr id="7" name="Text 5"/>
-          <p:cNvSpPr txBox="1"/>
-          <p:nvPr/>
-        </p:nvSpPr>
-        <p:spPr>
-          <a:xfrm>
-            <a:off x="502920" y="4160520"/>
-            <a:ext cx="8138160" cy="548640"/>
-          </a:xfrm>
-          <a:prstGeom prst="rect">
-            <a:avLst/>
-          </a:prstGeom>
-          <a:noFill/>
-          <a:ln/>
-        </p:spPr>
-        <p:txBody>
-          <a:bodyPr wrap="square" lIns="0" tIns="0" rIns="0" bIns="0" rtlCol="0" anchor="ctr"/>
-          <a:lstStyle/>
-          <a:p>
-            <a:pPr indent="0" marL="0">
-              <a:buNone/>
-            </a:pPr>
-            <a:r>
-              <a:rPr lang="en-US" sz="1200" i="1" dirty="0">
-                <a:solidFill>
-                  <a:srgbClr val="64748B"/>
-                </a:solidFill>
-                <a:latin typeface="Arial" pitchFamily="34" charset="0"/>
-                <a:ea typeface="Arial" pitchFamily="34" charset="-122"/>
-                <a:cs typeface="Arial" pitchFamily="34" charset="-120"/>
-              </a:rPr>
-              <a:t>💡 Цель без даты или «в конце семестра» — не Time-bound. Требуйте число.</a:t>
-            </a:r>
-            <a:endParaRPr lang="en-US" sz="1200" dirty="0"/>
+            <a:endParaRPr lang="en-US" sz="1150" dirty="0"/>
           </a:p>
         </p:txBody>
       </p:sp>

--- a/zanyatiya/Zanyatie_02_Praktika1_Slaydy.pptx
+++ b/zanyatiya/Zanyatie_02_Praktika1_Slaydy.pptx
@@ -1041,7 +1041,7 @@
           <a:p>
             <a:r>
               <a:rPr lang="en-US" dirty="0"/>
-              <a:t>Это пример преподавателя — озвучить как «вот моя идея», не выдавать за студенческую. Тот же пример вернётся дальше при разборе ЧИСТО.</a:t>
+              <a:t>Таблица намеренно пустая. Порядок заполнения: «для кого» и «в отличие от чего» первыми — они задают рамку; «что делаем» и «выгода» дописываются последними. Записывать на доску ровно то, что говорит зал, включая слабые формулировки, и править их на глазах. Тот же пример вернётся при разборе ЧИСТО.</a:t>
             </a:r>
             <a:endParaRPr lang="en-US" dirty="0"/>
           </a:p>
@@ -1481,7 +1481,7 @@
           <a:p>
             <a:r>
               <a:rPr lang="en-US" dirty="0"/>
-              <a:t>Число в букве И обязательно, даже условное. Ноль лучше не оставлять — приблизительное число можно уточнить позже, отсутствие числа нельзя проверить никогда.</a:t>
+              <a:t>Правый столбец пустой намеренно. На каждую строку — вопрос в зал: «что именно должно получиться», «в каких единицах меряем», «к какому числу». Число в букве И обязательно, даже приблизительное: приблизительное уточним позже, отсутствие числа не проверить никогда.</a:t>
             </a:r>
             <a:endParaRPr lang="en-US" dirty="0"/>
           </a:p>
@@ -3617,7 +3617,7 @@
                 <a:ea typeface="Arial" pitchFamily="34" charset="-122"/>
                 <a:cs typeface="Arial" pitchFamily="34" charset="-120"/>
               </a:rPr>
-              <a:t>Кто конкретно столкнётся с результатом — не «студенты», а «первокурсники перед первой сессией»</a:t>
+              <a:t>Кто конкретно столкнётся с результатом — узкая группа, а не «все студенты»</a:t>
             </a:r>
             <a:endParaRPr lang="en-US" sz="1200" dirty="0"/>
           </a:p>
@@ -4120,7 +4120,7 @@
                 <a:ea typeface="Arial" pitchFamily="34" charset="-122"/>
                 <a:cs typeface="Arial" pitchFamily="34" charset="-120"/>
               </a:rPr>
-              <a:t>ПРИМЕР ОТ ПРЕПОДАВАТЕЛЯ</a:t>
+              <a:t>ПРИМЕР ОТ ПРЕПОДАВАТЕЛЯ · ЗАПОЛНЯЕМ ВМЕСТЕ</a:t>
             </a:r>
             <a:endParaRPr lang="en-US" sz="1100" dirty="0"/>
           </a:p>
@@ -4135,7 +4135,7 @@
         <p:spPr>
           <a:xfrm>
             <a:off x="502920" y="384048"/>
-            <a:ext cx="8138160" cy="548640"/>
+            <a:ext cx="8138160" cy="502920"/>
           </a:xfrm>
           <a:prstGeom prst="rect">
             <a:avLst/>
@@ -4151,7 +4151,7 @@
               <a:buNone/>
             </a:pPr>
             <a:r>
-              <a:rPr lang="en-US" sz="2600" b="1" dirty="0">
+              <a:rPr lang="en-US" sz="2500" b="1" dirty="0">
                 <a:solidFill>
                   <a:srgbClr val="005AAA"/>
                 </a:solidFill>
@@ -4161,7 +4161,7 @@
               </a:rPr>
               <a:t>Слоган — это ещё не предложение</a:t>
             </a:r>
-            <a:endParaRPr lang="en-US" sz="2600" dirty="0"/>
+            <a:endParaRPr lang="en-US" sz="2500" dirty="0"/>
           </a:p>
         </p:txBody>
       </p:sp>
@@ -4173,8 +4173,8 @@
         </p:nvSpPr>
         <p:spPr>
           <a:xfrm>
-            <a:off x="502920" y="960120"/>
-            <a:ext cx="8138160" cy="274320"/>
+            <a:off x="502920" y="914400"/>
+            <a:ext cx="8138160" cy="256032"/>
           </a:xfrm>
           <a:prstGeom prst="rect">
             <a:avLst/>
@@ -4212,12 +4212,12 @@
         </p:nvSpPr>
         <p:spPr>
           <a:xfrm>
-            <a:off x="502920" y="1325880"/>
-            <a:ext cx="8138160" cy="777240"/>
+            <a:off x="502920" y="1234440"/>
+            <a:ext cx="8138160" cy="749808"/>
           </a:xfrm>
           <a:prstGeom prst="roundRect">
             <a:avLst>
-              <a:gd name="adj" fmla="val 5882"/>
+              <a:gd name="adj" fmla="val 6098"/>
             </a:avLst>
           </a:prstGeom>
           <a:solidFill>
@@ -4239,8 +4239,8 @@
         </p:nvSpPr>
         <p:spPr>
           <a:xfrm>
-            <a:off x="777240" y="1481328"/>
-            <a:ext cx="7589520" cy="320040"/>
+            <a:off x="777240" y="1353312"/>
+            <a:ext cx="7589520" cy="292608"/>
           </a:xfrm>
           <a:prstGeom prst="rect">
             <a:avLst/>
@@ -4278,8 +4278,8 @@
         </p:nvSpPr>
         <p:spPr>
           <a:xfrm>
-            <a:off x="777240" y="1828800"/>
-            <a:ext cx="7589520" cy="274320"/>
+            <a:off x="777240" y="1682496"/>
+            <a:ext cx="7589520" cy="256032"/>
           </a:xfrm>
           <a:prstGeom prst="rect">
             <a:avLst/>
@@ -4309,84 +4309,667 @@
           </a:p>
         </p:txBody>
       </p:sp>
-      <p:sp>
-        <p:nvSpPr>
-          <p:cNvPr id="8" name="Shape 6"/>
-          <p:cNvSpPr/>
+      <p:graphicFrame>
+        <p:nvGraphicFramePr>
+          <p:cNvPr id="5" name="Table 0"/>
+          <p:cNvGraphicFramePr>
+            <a:graphicFrameLocks noGrp="1"/>
+          </p:cNvGraphicFramePr>
+          <p:nvPr>
+            <p:extLst>
+              <p:ext uri="{D42A27DB-BD31-4B8C-83A1-F6EECF244321}">
+                <p14:modId xmlns:p14="http://schemas.microsoft.com/office/powerpoint/2010/main" val="1579011935"/>
+              </p:ext>
+            </p:extLst>
+          </p:nvPr>
+        </p:nvGraphicFramePr>
+        <p:xfrm>
+          <a:off x="502920" y="2103120"/>
+          <a:ext cx="8138160" cy="914400"/>
+        </p:xfrm>
+        <a:graphic>
+          <a:graphicData uri="http://schemas.openxmlformats.org/drawingml/2006/table">
+            <a:tbl>
+              <a:tblPr/>
+              <a:tblGrid>
+                <a:gridCol w="2377440"/>
+                <a:gridCol w="5760720"/>
+              </a:tblGrid>
+              <a:tr h="347472">
+                <a:tc>
+                  <a:txBody>
+                    <a:bodyPr/>
+                    <a:lstStyle/>
+                    <a:p>
+                      <a:pPr indent="0" marL="0">
+                        <a:buNone/>
+                      </a:pPr>
+                      <a:r>
+                        <a:rPr lang="en-US" sz="1300" b="1" dirty="0">
+                          <a:solidFill>
+                            <a:srgbClr val="FFFFFF"/>
+                          </a:solidFill>
+                          <a:latin typeface="Arial" pitchFamily="34" charset="0"/>
+                          <a:ea typeface="Arial" pitchFamily="34" charset="-122"/>
+                          <a:cs typeface="Arial" pitchFamily="34" charset="-120"/>
+                        </a:rPr>
+                        <a:t>Строка формулы</a:t>
+                      </a:r>
+                      <a:endParaRPr lang="en-US" sz="1300" dirty="0">
+                        <a:latin typeface="Arial" charset="0"/>
+                        <a:ea typeface="Arial" charset="0"/>
+                        <a:cs typeface="Arial" charset="0"/>
+                      </a:endParaRPr>
+                    </a:p>
+                  </a:txBody>
+                  <a:tcPr marL="91440" marR="91440" marT="45720" marB="45720" anchor="ctr">
+                    <a:lnL w="6350" cap="flat" cmpd="sng" algn="ctr">
+                      <a:solidFill>
+                        <a:srgbClr val="D8DEE6"/>
+                      </a:solidFill>
+                      <a:prstDash val="solid"/>
+                      <a:round/>
+                      <a:headEnd type="none" w="med" len="med"/>
+                      <a:tailEnd type="none" w="med" len="med"/>
+                    </a:lnL>
+                    <a:lnR w="6350" cap="flat" cmpd="sng" algn="ctr">
+                      <a:solidFill>
+                        <a:srgbClr val="D8DEE6"/>
+                      </a:solidFill>
+                      <a:prstDash val="solid"/>
+                      <a:round/>
+                      <a:headEnd type="none" w="med" len="med"/>
+                      <a:tailEnd type="none" w="med" len="med"/>
+                    </a:lnR>
+                    <a:lnT w="6350" cap="flat" cmpd="sng" algn="ctr">
+                      <a:solidFill>
+                        <a:srgbClr val="D8DEE6"/>
+                      </a:solidFill>
+                      <a:prstDash val="solid"/>
+                      <a:round/>
+                      <a:headEnd type="none" w="med" len="med"/>
+                      <a:tailEnd type="none" w="med" len="med"/>
+                    </a:lnT>
+                    <a:lnB w="6350" cap="flat" cmpd="sng" algn="ctr">
+                      <a:solidFill>
+                        <a:srgbClr val="D8DEE6"/>
+                      </a:solidFill>
+                      <a:prstDash val="solid"/>
+                      <a:round/>
+                      <a:headEnd type="none" w="med" len="med"/>
+                      <a:tailEnd type="none" w="med" len="med"/>
+                    </a:lnB>
+                    <a:solidFill>
+                      <a:srgbClr val="1E4270"/>
+                    </a:solidFill>
+                  </a:tcPr>
+                </a:tc>
+                <a:tc>
+                  <a:txBody>
+                    <a:bodyPr/>
+                    <a:lstStyle/>
+                    <a:p>
+                      <a:pPr indent="0" marL="0">
+                        <a:buNone/>
+                      </a:pPr>
+                      <a:r>
+                        <a:rPr lang="en-US" sz="1300" b="1" dirty="0">
+                          <a:solidFill>
+                            <a:srgbClr val="FFFFFF"/>
+                          </a:solidFill>
+                          <a:latin typeface="Arial" pitchFamily="34" charset="0"/>
+                          <a:ea typeface="Arial" pitchFamily="34" charset="-122"/>
+                          <a:cs typeface="Arial" pitchFamily="34" charset="-120"/>
+                        </a:rPr>
+                        <a:t>Пишем на доске</a:t>
+                      </a:r>
+                      <a:endParaRPr lang="en-US" sz="1300" dirty="0">
+                        <a:latin typeface="Arial" charset="0"/>
+                        <a:ea typeface="Arial" charset="0"/>
+                        <a:cs typeface="Arial" charset="0"/>
+                      </a:endParaRPr>
+                    </a:p>
+                  </a:txBody>
+                  <a:tcPr marL="91440" marR="91440" marT="45720" marB="45720" anchor="ctr">
+                    <a:lnL w="6350" cap="flat" cmpd="sng" algn="ctr">
+                      <a:solidFill>
+                        <a:srgbClr val="D8DEE6"/>
+                      </a:solidFill>
+                      <a:prstDash val="solid"/>
+                      <a:round/>
+                      <a:headEnd type="none" w="med" len="med"/>
+                      <a:tailEnd type="none" w="med" len="med"/>
+                    </a:lnL>
+                    <a:lnR w="6350" cap="flat" cmpd="sng" algn="ctr">
+                      <a:solidFill>
+                        <a:srgbClr val="D8DEE6"/>
+                      </a:solidFill>
+                      <a:prstDash val="solid"/>
+                      <a:round/>
+                      <a:headEnd type="none" w="med" len="med"/>
+                      <a:tailEnd type="none" w="med" len="med"/>
+                    </a:lnR>
+                    <a:lnT w="6350" cap="flat" cmpd="sng" algn="ctr">
+                      <a:solidFill>
+                        <a:srgbClr val="D8DEE6"/>
+                      </a:solidFill>
+                      <a:prstDash val="solid"/>
+                      <a:round/>
+                      <a:headEnd type="none" w="med" len="med"/>
+                      <a:tailEnd type="none" w="med" len="med"/>
+                    </a:lnT>
+                    <a:lnB w="6350" cap="flat" cmpd="sng" algn="ctr">
+                      <a:solidFill>
+                        <a:srgbClr val="D8DEE6"/>
+                      </a:solidFill>
+                      <a:prstDash val="solid"/>
+                      <a:round/>
+                      <a:headEnd type="none" w="med" len="med"/>
+                      <a:tailEnd type="none" w="med" len="med"/>
+                    </a:lnB>
+                    <a:solidFill>
+                      <a:srgbClr val="1E4270"/>
+                    </a:solidFill>
+                  </a:tcPr>
+                </a:tc>
+              </a:tr>
+              <a:tr h="457200">
+                <a:tc>
+                  <a:txBody>
+                    <a:bodyPr/>
+                    <a:lstStyle/>
+                    <a:p>
+                      <a:pPr indent="0" marL="0">
+                        <a:buNone/>
+                      </a:pPr>
+                      <a:r>
+                        <a:rPr lang="en-US" sz="1300" dirty="0">
+                          <a:solidFill>
+                            <a:srgbClr val="1E293B"/>
+                          </a:solidFill>
+                          <a:latin typeface="Arial" pitchFamily="34" charset="0"/>
+                          <a:ea typeface="Arial" pitchFamily="34" charset="-122"/>
+                          <a:cs typeface="Arial" pitchFamily="34" charset="-120"/>
+                        </a:rPr>
+                        <a:t>Для кого</a:t>
+                      </a:r>
+                      <a:endParaRPr lang="en-US" sz="1300" dirty="0">
+                        <a:latin typeface="Arial" charset="0"/>
+                        <a:ea typeface="Arial" charset="0"/>
+                        <a:cs typeface="Arial" charset="0"/>
+                      </a:endParaRPr>
+                    </a:p>
+                  </a:txBody>
+                  <a:tcPr marL="91440" marR="91440" marT="45720" marB="45720" anchor="ctr">
+                    <a:lnL w="6350" cap="flat" cmpd="sng" algn="ctr">
+                      <a:solidFill>
+                        <a:srgbClr val="D8DEE6"/>
+                      </a:solidFill>
+                      <a:prstDash val="solid"/>
+                      <a:round/>
+                      <a:headEnd type="none" w="med" len="med"/>
+                      <a:tailEnd type="none" w="med" len="med"/>
+                    </a:lnL>
+                    <a:lnR w="6350" cap="flat" cmpd="sng" algn="ctr">
+                      <a:solidFill>
+                        <a:srgbClr val="D8DEE6"/>
+                      </a:solidFill>
+                      <a:prstDash val="solid"/>
+                      <a:round/>
+                      <a:headEnd type="none" w="med" len="med"/>
+                      <a:tailEnd type="none" w="med" len="med"/>
+                    </a:lnR>
+                    <a:lnT w="6350" cap="flat" cmpd="sng" algn="ctr">
+                      <a:solidFill>
+                        <a:srgbClr val="D8DEE6"/>
+                      </a:solidFill>
+                      <a:prstDash val="solid"/>
+                      <a:round/>
+                      <a:headEnd type="none" w="med" len="med"/>
+                      <a:tailEnd type="none" w="med" len="med"/>
+                    </a:lnT>
+                    <a:lnB w="6350" cap="flat" cmpd="sng" algn="ctr">
+                      <a:solidFill>
+                        <a:srgbClr val="D8DEE6"/>
+                      </a:solidFill>
+                      <a:prstDash val="solid"/>
+                      <a:round/>
+                      <a:headEnd type="none" w="med" len="med"/>
+                      <a:tailEnd type="none" w="med" len="med"/>
+                    </a:lnB>
+                  </a:tcPr>
+                </a:tc>
+                <a:tc>
+                  <a:txBody>
+                    <a:bodyPr/>
+                    <a:lstStyle/>
+                    <a:p>
+                      <a:pPr indent="0" marL="0">
+                        <a:buNone/>
+                      </a:pPr>
+                      <a:endParaRPr lang="en-US" sz="1300" dirty="0">
+                        <a:latin typeface="Arial" charset="0"/>
+                        <a:ea typeface="Arial" charset="0"/>
+                        <a:cs typeface="Arial" charset="0"/>
+                      </a:endParaRPr>
+                    </a:p>
+                  </a:txBody>
+                  <a:tcPr marL="91440" marR="91440" marT="45720" marB="45720" anchor="ctr">
+                    <a:lnL w="6350" cap="flat" cmpd="sng" algn="ctr">
+                      <a:solidFill>
+                        <a:srgbClr val="D8DEE6"/>
+                      </a:solidFill>
+                      <a:prstDash val="solid"/>
+                      <a:round/>
+                      <a:headEnd type="none" w="med" len="med"/>
+                      <a:tailEnd type="none" w="med" len="med"/>
+                    </a:lnL>
+                    <a:lnR w="6350" cap="flat" cmpd="sng" algn="ctr">
+                      <a:solidFill>
+                        <a:srgbClr val="D8DEE6"/>
+                      </a:solidFill>
+                      <a:prstDash val="solid"/>
+                      <a:round/>
+                      <a:headEnd type="none" w="med" len="med"/>
+                      <a:tailEnd type="none" w="med" len="med"/>
+                    </a:lnR>
+                    <a:lnT w="6350" cap="flat" cmpd="sng" algn="ctr">
+                      <a:solidFill>
+                        <a:srgbClr val="D8DEE6"/>
+                      </a:solidFill>
+                      <a:prstDash val="solid"/>
+                      <a:round/>
+                      <a:headEnd type="none" w="med" len="med"/>
+                      <a:tailEnd type="none" w="med" len="med"/>
+                    </a:lnT>
+                    <a:lnB w="6350" cap="flat" cmpd="sng" algn="ctr">
+                      <a:solidFill>
+                        <a:srgbClr val="D8DEE6"/>
+                      </a:solidFill>
+                      <a:prstDash val="solid"/>
+                      <a:round/>
+                      <a:headEnd type="none" w="med" len="med"/>
+                      <a:tailEnd type="none" w="med" len="med"/>
+                    </a:lnB>
+                  </a:tcPr>
+                </a:tc>
+              </a:tr>
+              <a:tr h="457200">
+                <a:tc>
+                  <a:txBody>
+                    <a:bodyPr/>
+                    <a:lstStyle/>
+                    <a:p>
+                      <a:pPr indent="0" marL="0">
+                        <a:buNone/>
+                      </a:pPr>
+                      <a:r>
+                        <a:rPr lang="en-US" sz="1300" dirty="0">
+                          <a:solidFill>
+                            <a:srgbClr val="1E293B"/>
+                          </a:solidFill>
+                          <a:latin typeface="Arial" pitchFamily="34" charset="0"/>
+                          <a:ea typeface="Arial" pitchFamily="34" charset="-122"/>
+                          <a:cs typeface="Arial" pitchFamily="34" charset="-120"/>
+                        </a:rPr>
+                        <a:t>Что делаем</a:t>
+                      </a:r>
+                      <a:endParaRPr lang="en-US" sz="1300" dirty="0">
+                        <a:latin typeface="Arial" charset="0"/>
+                        <a:ea typeface="Arial" charset="0"/>
+                        <a:cs typeface="Arial" charset="0"/>
+                      </a:endParaRPr>
+                    </a:p>
+                  </a:txBody>
+                  <a:tcPr marL="91440" marR="91440" marT="45720" marB="45720" anchor="ctr">
+                    <a:lnL w="6350" cap="flat" cmpd="sng" algn="ctr">
+                      <a:solidFill>
+                        <a:srgbClr val="D8DEE6"/>
+                      </a:solidFill>
+                      <a:prstDash val="solid"/>
+                      <a:round/>
+                      <a:headEnd type="none" w="med" len="med"/>
+                      <a:tailEnd type="none" w="med" len="med"/>
+                    </a:lnL>
+                    <a:lnR w="6350" cap="flat" cmpd="sng" algn="ctr">
+                      <a:solidFill>
+                        <a:srgbClr val="D8DEE6"/>
+                      </a:solidFill>
+                      <a:prstDash val="solid"/>
+                      <a:round/>
+                      <a:headEnd type="none" w="med" len="med"/>
+                      <a:tailEnd type="none" w="med" len="med"/>
+                    </a:lnR>
+                    <a:lnT w="6350" cap="flat" cmpd="sng" algn="ctr">
+                      <a:solidFill>
+                        <a:srgbClr val="D8DEE6"/>
+                      </a:solidFill>
+                      <a:prstDash val="solid"/>
+                      <a:round/>
+                      <a:headEnd type="none" w="med" len="med"/>
+                      <a:tailEnd type="none" w="med" len="med"/>
+                    </a:lnT>
+                    <a:lnB w="6350" cap="flat" cmpd="sng" algn="ctr">
+                      <a:solidFill>
+                        <a:srgbClr val="D8DEE6"/>
+                      </a:solidFill>
+                      <a:prstDash val="solid"/>
+                      <a:round/>
+                      <a:headEnd type="none" w="med" len="med"/>
+                      <a:tailEnd type="none" w="med" len="med"/>
+                    </a:lnB>
+                  </a:tcPr>
+                </a:tc>
+                <a:tc>
+                  <a:txBody>
+                    <a:bodyPr/>
+                    <a:lstStyle/>
+                    <a:p>
+                      <a:pPr indent="0" marL="0">
+                        <a:buNone/>
+                      </a:pPr>
+                      <a:endParaRPr lang="en-US" sz="1300" dirty="0">
+                        <a:latin typeface="Arial" charset="0"/>
+                        <a:ea typeface="Arial" charset="0"/>
+                        <a:cs typeface="Arial" charset="0"/>
+                      </a:endParaRPr>
+                    </a:p>
+                  </a:txBody>
+                  <a:tcPr marL="91440" marR="91440" marT="45720" marB="45720" anchor="ctr">
+                    <a:lnL w="6350" cap="flat" cmpd="sng" algn="ctr">
+                      <a:solidFill>
+                        <a:srgbClr val="D8DEE6"/>
+                      </a:solidFill>
+                      <a:prstDash val="solid"/>
+                      <a:round/>
+                      <a:headEnd type="none" w="med" len="med"/>
+                      <a:tailEnd type="none" w="med" len="med"/>
+                    </a:lnL>
+                    <a:lnR w="6350" cap="flat" cmpd="sng" algn="ctr">
+                      <a:solidFill>
+                        <a:srgbClr val="D8DEE6"/>
+                      </a:solidFill>
+                      <a:prstDash val="solid"/>
+                      <a:round/>
+                      <a:headEnd type="none" w="med" len="med"/>
+                      <a:tailEnd type="none" w="med" len="med"/>
+                    </a:lnR>
+                    <a:lnT w="6350" cap="flat" cmpd="sng" algn="ctr">
+                      <a:solidFill>
+                        <a:srgbClr val="D8DEE6"/>
+                      </a:solidFill>
+                      <a:prstDash val="solid"/>
+                      <a:round/>
+                      <a:headEnd type="none" w="med" len="med"/>
+                      <a:tailEnd type="none" w="med" len="med"/>
+                    </a:lnT>
+                    <a:lnB w="6350" cap="flat" cmpd="sng" algn="ctr">
+                      <a:solidFill>
+                        <a:srgbClr val="D8DEE6"/>
+                      </a:solidFill>
+                      <a:prstDash val="solid"/>
+                      <a:round/>
+                      <a:headEnd type="none" w="med" len="med"/>
+                      <a:tailEnd type="none" w="med" len="med"/>
+                    </a:lnB>
+                  </a:tcPr>
+                </a:tc>
+              </a:tr>
+              <a:tr h="457200">
+                <a:tc>
+                  <a:txBody>
+                    <a:bodyPr/>
+                    <a:lstStyle/>
+                    <a:p>
+                      <a:pPr indent="0" marL="0">
+                        <a:buNone/>
+                      </a:pPr>
+                      <a:r>
+                        <a:rPr lang="en-US" sz="1300" dirty="0">
+                          <a:solidFill>
+                            <a:srgbClr val="1E293B"/>
+                          </a:solidFill>
+                          <a:latin typeface="Arial" pitchFamily="34" charset="0"/>
+                          <a:ea typeface="Arial" pitchFamily="34" charset="-122"/>
+                          <a:cs typeface="Arial" pitchFamily="34" charset="-120"/>
+                        </a:rPr>
+                        <a:t>Какую выгоду даёт</a:t>
+                      </a:r>
+                      <a:endParaRPr lang="en-US" sz="1300" dirty="0">
+                        <a:latin typeface="Arial" charset="0"/>
+                        <a:ea typeface="Arial" charset="0"/>
+                        <a:cs typeface="Arial" charset="0"/>
+                      </a:endParaRPr>
+                    </a:p>
+                  </a:txBody>
+                  <a:tcPr marL="91440" marR="91440" marT="45720" marB="45720" anchor="ctr">
+                    <a:lnL w="6350" cap="flat" cmpd="sng" algn="ctr">
+                      <a:solidFill>
+                        <a:srgbClr val="D8DEE6"/>
+                      </a:solidFill>
+                      <a:prstDash val="solid"/>
+                      <a:round/>
+                      <a:headEnd type="none" w="med" len="med"/>
+                      <a:tailEnd type="none" w="med" len="med"/>
+                    </a:lnL>
+                    <a:lnR w="6350" cap="flat" cmpd="sng" algn="ctr">
+                      <a:solidFill>
+                        <a:srgbClr val="D8DEE6"/>
+                      </a:solidFill>
+                      <a:prstDash val="solid"/>
+                      <a:round/>
+                      <a:headEnd type="none" w="med" len="med"/>
+                      <a:tailEnd type="none" w="med" len="med"/>
+                    </a:lnR>
+                    <a:lnT w="6350" cap="flat" cmpd="sng" algn="ctr">
+                      <a:solidFill>
+                        <a:srgbClr val="D8DEE6"/>
+                      </a:solidFill>
+                      <a:prstDash val="solid"/>
+                      <a:round/>
+                      <a:headEnd type="none" w="med" len="med"/>
+                      <a:tailEnd type="none" w="med" len="med"/>
+                    </a:lnT>
+                    <a:lnB w="6350" cap="flat" cmpd="sng" algn="ctr">
+                      <a:solidFill>
+                        <a:srgbClr val="D8DEE6"/>
+                      </a:solidFill>
+                      <a:prstDash val="solid"/>
+                      <a:round/>
+                      <a:headEnd type="none" w="med" len="med"/>
+                      <a:tailEnd type="none" w="med" len="med"/>
+                    </a:lnB>
+                  </a:tcPr>
+                </a:tc>
+                <a:tc>
+                  <a:txBody>
+                    <a:bodyPr/>
+                    <a:lstStyle/>
+                    <a:p>
+                      <a:pPr indent="0" marL="0">
+                        <a:buNone/>
+                      </a:pPr>
+                      <a:endParaRPr lang="en-US" sz="1300" dirty="0">
+                        <a:latin typeface="Arial" charset="0"/>
+                        <a:ea typeface="Arial" charset="0"/>
+                        <a:cs typeface="Arial" charset="0"/>
+                      </a:endParaRPr>
+                    </a:p>
+                  </a:txBody>
+                  <a:tcPr marL="91440" marR="91440" marT="45720" marB="45720" anchor="ctr">
+                    <a:lnL w="6350" cap="flat" cmpd="sng" algn="ctr">
+                      <a:solidFill>
+                        <a:srgbClr val="D8DEE6"/>
+                      </a:solidFill>
+                      <a:prstDash val="solid"/>
+                      <a:round/>
+                      <a:headEnd type="none" w="med" len="med"/>
+                      <a:tailEnd type="none" w="med" len="med"/>
+                    </a:lnL>
+                    <a:lnR w="6350" cap="flat" cmpd="sng" algn="ctr">
+                      <a:solidFill>
+                        <a:srgbClr val="D8DEE6"/>
+                      </a:solidFill>
+                      <a:prstDash val="solid"/>
+                      <a:round/>
+                      <a:headEnd type="none" w="med" len="med"/>
+                      <a:tailEnd type="none" w="med" len="med"/>
+                    </a:lnR>
+                    <a:lnT w="6350" cap="flat" cmpd="sng" algn="ctr">
+                      <a:solidFill>
+                        <a:srgbClr val="D8DEE6"/>
+                      </a:solidFill>
+                      <a:prstDash val="solid"/>
+                      <a:round/>
+                      <a:headEnd type="none" w="med" len="med"/>
+                      <a:tailEnd type="none" w="med" len="med"/>
+                    </a:lnT>
+                    <a:lnB w="6350" cap="flat" cmpd="sng" algn="ctr">
+                      <a:solidFill>
+                        <a:srgbClr val="D8DEE6"/>
+                      </a:solidFill>
+                      <a:prstDash val="solid"/>
+                      <a:round/>
+                      <a:headEnd type="none" w="med" len="med"/>
+                      <a:tailEnd type="none" w="med" len="med"/>
+                    </a:lnB>
+                  </a:tcPr>
+                </a:tc>
+              </a:tr>
+              <a:tr h="457200">
+                <a:tc>
+                  <a:txBody>
+                    <a:bodyPr/>
+                    <a:lstStyle/>
+                    <a:p>
+                      <a:pPr indent="0" marL="0">
+                        <a:buNone/>
+                      </a:pPr>
+                      <a:r>
+                        <a:rPr lang="en-US" sz="1300" dirty="0">
+                          <a:solidFill>
+                            <a:srgbClr val="1E293B"/>
+                          </a:solidFill>
+                          <a:latin typeface="Arial" pitchFamily="34" charset="0"/>
+                          <a:ea typeface="Arial" pitchFamily="34" charset="-122"/>
+                          <a:cs typeface="Arial" pitchFamily="34" charset="-120"/>
+                        </a:rPr>
+                        <a:t>В отличие от чего</a:t>
+                      </a:r>
+                      <a:endParaRPr lang="en-US" sz="1300" dirty="0">
+                        <a:latin typeface="Arial" charset="0"/>
+                        <a:ea typeface="Arial" charset="0"/>
+                        <a:cs typeface="Arial" charset="0"/>
+                      </a:endParaRPr>
+                    </a:p>
+                  </a:txBody>
+                  <a:tcPr marL="91440" marR="91440" marT="45720" marB="45720" anchor="ctr">
+                    <a:lnL w="6350" cap="flat" cmpd="sng" algn="ctr">
+                      <a:solidFill>
+                        <a:srgbClr val="D8DEE6"/>
+                      </a:solidFill>
+                      <a:prstDash val="solid"/>
+                      <a:round/>
+                      <a:headEnd type="none" w="med" len="med"/>
+                      <a:tailEnd type="none" w="med" len="med"/>
+                    </a:lnL>
+                    <a:lnR w="6350" cap="flat" cmpd="sng" algn="ctr">
+                      <a:solidFill>
+                        <a:srgbClr val="D8DEE6"/>
+                      </a:solidFill>
+                      <a:prstDash val="solid"/>
+                      <a:round/>
+                      <a:headEnd type="none" w="med" len="med"/>
+                      <a:tailEnd type="none" w="med" len="med"/>
+                    </a:lnR>
+                    <a:lnT w="6350" cap="flat" cmpd="sng" algn="ctr">
+                      <a:solidFill>
+                        <a:srgbClr val="D8DEE6"/>
+                      </a:solidFill>
+                      <a:prstDash val="solid"/>
+                      <a:round/>
+                      <a:headEnd type="none" w="med" len="med"/>
+                      <a:tailEnd type="none" w="med" len="med"/>
+                    </a:lnT>
+                    <a:lnB w="6350" cap="flat" cmpd="sng" algn="ctr">
+                      <a:solidFill>
+                        <a:srgbClr val="D8DEE6"/>
+                      </a:solidFill>
+                      <a:prstDash val="solid"/>
+                      <a:round/>
+                      <a:headEnd type="none" w="med" len="med"/>
+                      <a:tailEnd type="none" w="med" len="med"/>
+                    </a:lnB>
+                  </a:tcPr>
+                </a:tc>
+                <a:tc>
+                  <a:txBody>
+                    <a:bodyPr/>
+                    <a:lstStyle/>
+                    <a:p>
+                      <a:pPr indent="0" marL="0">
+                        <a:buNone/>
+                      </a:pPr>
+                      <a:endParaRPr lang="en-US" sz="1300" dirty="0">
+                        <a:latin typeface="Arial" charset="0"/>
+                        <a:ea typeface="Arial" charset="0"/>
+                        <a:cs typeface="Arial" charset="0"/>
+                      </a:endParaRPr>
+                    </a:p>
+                  </a:txBody>
+                  <a:tcPr marL="91440" marR="91440" marT="45720" marB="45720" anchor="ctr">
+                    <a:lnL w="6350" cap="flat" cmpd="sng" algn="ctr">
+                      <a:solidFill>
+                        <a:srgbClr val="D8DEE6"/>
+                      </a:solidFill>
+                      <a:prstDash val="solid"/>
+                      <a:round/>
+                      <a:headEnd type="none" w="med" len="med"/>
+                      <a:tailEnd type="none" w="med" len="med"/>
+                    </a:lnL>
+                    <a:lnR w="6350" cap="flat" cmpd="sng" algn="ctr">
+                      <a:solidFill>
+                        <a:srgbClr val="D8DEE6"/>
+                      </a:solidFill>
+                      <a:prstDash val="solid"/>
+                      <a:round/>
+                      <a:headEnd type="none" w="med" len="med"/>
+                      <a:tailEnd type="none" w="med" len="med"/>
+                    </a:lnR>
+                    <a:lnT w="6350" cap="flat" cmpd="sng" algn="ctr">
+                      <a:solidFill>
+                        <a:srgbClr val="D8DEE6"/>
+                      </a:solidFill>
+                      <a:prstDash val="solid"/>
+                      <a:round/>
+                      <a:headEnd type="none" w="med" len="med"/>
+                      <a:tailEnd type="none" w="med" len="med"/>
+                    </a:lnT>
+                    <a:lnB w="6350" cap="flat" cmpd="sng" algn="ctr">
+                      <a:solidFill>
+                        <a:srgbClr val="D8DEE6"/>
+                      </a:solidFill>
+                      <a:prstDash val="solid"/>
+                      <a:round/>
+                      <a:headEnd type="none" w="med" len="med"/>
+                      <a:tailEnd type="none" w="med" len="med"/>
+                    </a:lnB>
+                  </a:tcPr>
+                </a:tc>
+              </a:tr>
+            </a:tbl>
+          </a:graphicData>
+        </a:graphic>
+      </p:graphicFrame>
+      <p:sp>
+        <p:nvSpPr>
+          <p:cNvPr id="9" name="Text 6"/>
+          <p:cNvSpPr txBox="1"/>
           <p:nvPr/>
         </p:nvSpPr>
         <p:spPr>
           <a:xfrm>
-            <a:off x="502920" y="2286000"/>
-            <a:ext cx="8138160" cy="1417320"/>
-          </a:xfrm>
-          <a:prstGeom prst="roundRect">
-            <a:avLst>
-              <a:gd name="adj" fmla="val 3226"/>
-            </a:avLst>
-          </a:prstGeom>
-          <a:solidFill>
-            <a:srgbClr val="1E4270"/>
-          </a:solidFill>
-          <a:ln w="9525">
-            <a:solidFill>
-              <a:srgbClr val="D8DEE6"/>
-            </a:solidFill>
-            <a:prstDash val="solid"/>
-          </a:ln>
-        </p:spPr>
-      </p:sp>
-      <p:sp>
-        <p:nvSpPr>
-          <p:cNvPr id="9" name="Text 7"/>
-          <p:cNvSpPr txBox="1"/>
-          <p:nvPr/>
-        </p:nvSpPr>
-        <p:spPr>
-          <a:xfrm>
-            <a:off x="777240" y="2450592"/>
-            <a:ext cx="7589520" cy="1143000"/>
-          </a:xfrm>
-          <a:prstGeom prst="rect">
-            <a:avLst/>
-          </a:prstGeom>
-          <a:noFill/>
-          <a:ln/>
-        </p:spPr>
-        <p:txBody>
-          <a:bodyPr wrap="square" lIns="0" tIns="0" rIns="0" bIns="0" rtlCol="0" anchor="ctr"/>
-          <a:lstStyle/>
-          <a:p>
-            <a:pPr indent="0" marL="0">
-              <a:lnSpc>
-                <a:spcPts val="1800"/>
-              </a:lnSpc>
-              <a:buNone/>
-            </a:pPr>
-            <a:r>
-              <a:rPr lang="en-US" sz="1300" dirty="0">
-                <a:solidFill>
-                  <a:srgbClr val="FFFFFF"/>
-                </a:solidFill>
-                <a:latin typeface="Arial" pitchFamily="34" charset="0"/>
-                <a:ea typeface="Arial" pitchFamily="34" charset="-122"/>
-                <a:cs typeface="Arial" pitchFamily="34" charset="-120"/>
-              </a:rPr>
-              <a:t>«Для людей без опыта ухода за растениями, которые поливают на глаз и часто заливают или пересушивают землю, мы делаем горшок со встроенным датчиком влажности и световым индикатором — что снижает случаи гибели растений от неправильного полива — в отличие от полива на глаз, где ошибка видна только тогда, когда растение уже завяло»</a:t>
-            </a:r>
-            <a:endParaRPr lang="en-US" sz="1300" dirty="0"/>
-          </a:p>
-        </p:txBody>
-      </p:sp>
-      <p:sp>
-        <p:nvSpPr>
-          <p:cNvPr id="10" name="Text 8"/>
-          <p:cNvSpPr txBox="1"/>
-          <p:nvPr/>
-        </p:nvSpPr>
-        <p:spPr>
-          <a:xfrm>
-            <a:off x="502920" y="3886200"/>
+            <a:off x="502920" y="4160520"/>
             <a:ext cx="8138160" cy="548640"/>
           </a:xfrm>
           <a:prstGeom prst="rect">
@@ -4411,7 +4994,7 @@
                 <a:ea typeface="Arial" pitchFamily="34" charset="-122"/>
                 <a:cs typeface="Arial" pitchFamily="34" charset="-120"/>
               </a:rPr>
-              <a:t>💡 Проверка простая: если предложение годится для чужого проекта без изменений — оно ничего не говорит про ваш.</a:t>
+              <a:t>💡 Заполняем строку за строкой — вопросом в зал, а не готовым ответом.</a:t>
             </a:r>
             <a:endParaRPr lang="en-US" sz="1200" dirty="0"/>
           </a:p>
@@ -7869,7 +8452,7 @@
                 <a:ea typeface="Arial" pitchFamily="34" charset="-122"/>
                 <a:cs typeface="Arial" pitchFamily="34" charset="-120"/>
               </a:rPr>
-              <a:t>Продолжаем пример: умный горшок для растений</a:t>
+              <a:t>Тот же пример: умный горшок для растений — правый столбец дописываем вместе</a:t>
             </a:r>
             <a:endParaRPr lang="en-US" sz="1300" dirty="0"/>
           </a:p>
@@ -7899,10 +8482,10 @@
               <a:tblPr/>
               <a:tblGrid>
                 <a:gridCol w="1005840"/>
-                <a:gridCol w="3611880"/>
-                <a:gridCol w="3611880"/>
+                <a:gridCol w="3200400"/>
+                <a:gridCol w="4023360"/>
               </a:tblGrid>
-              <a:tr h="548640">
+              <a:tr h="566928">
                 <a:tc>
                   <a:txBody>
                     <a:bodyPr/>
@@ -7912,7 +8495,7 @@
                         <a:buNone/>
                       </a:pPr>
                       <a:r>
-                        <a:rPr lang="en-US" sz="1150" b="1" dirty="0">
+                        <a:rPr lang="en-US" sz="1200" b="1" dirty="0">
                           <a:solidFill>
                             <a:srgbClr val="FFFFFF"/>
                           </a:solidFill>
@@ -7922,7 +8505,7 @@
                         </a:rPr>
                         <a:t>Буква</a:t>
                       </a:r>
-                      <a:endParaRPr lang="en-US" sz="1150" dirty="0">
+                      <a:endParaRPr lang="en-US" sz="1200" dirty="0">
                         <a:latin typeface="Arial" charset="0"/>
                         <a:ea typeface="Arial" charset="0"/>
                         <a:cs typeface="Arial" charset="0"/>
@@ -7980,7 +8563,7 @@
                         <a:buNone/>
                       </a:pPr>
                       <a:r>
-                        <a:rPr lang="en-US" sz="1150" b="1" dirty="0">
+                        <a:rPr lang="en-US" sz="1200" b="1" dirty="0">
                           <a:solidFill>
                             <a:srgbClr val="FFFFFF"/>
                           </a:solidFill>
@@ -7988,9 +8571,9 @@
                           <a:ea typeface="Arial" pitchFamily="34" charset="-122"/>
                           <a:cs typeface="Arial" pitchFamily="34" charset="-120"/>
                         </a:rPr>
-                        <a:t>Наивно</a:t>
+                        <a:t>Как звучит наивно</a:t>
                       </a:r>
-                      <a:endParaRPr lang="en-US" sz="1150" dirty="0">
+                      <a:endParaRPr lang="en-US" sz="1200" dirty="0">
                         <a:latin typeface="Arial" charset="0"/>
                         <a:ea typeface="Arial" charset="0"/>
                         <a:cs typeface="Arial" charset="0"/>
@@ -8048,7 +8631,7 @@
                         <a:buNone/>
                       </a:pPr>
                       <a:r>
-                        <a:rPr lang="en-US" sz="1150" b="1" dirty="0">
+                        <a:rPr lang="en-US" sz="1200" b="1" dirty="0">
                           <a:solidFill>
                             <a:srgbClr val="FFFFFF"/>
                           </a:solidFill>
@@ -8056,9 +8639,9 @@
                           <a:ea typeface="Arial" pitchFamily="34" charset="-122"/>
                           <a:cs typeface="Arial" pitchFamily="34" charset="-120"/>
                         </a:rPr>
-                        <a:t>Дописано</a:t>
+                        <a:t>Дописываем на доске</a:t>
                       </a:r>
-                      <a:endParaRPr lang="en-US" sz="1150" dirty="0">
+                      <a:endParaRPr lang="en-US" sz="1200" dirty="0">
                         <a:latin typeface="Arial" charset="0"/>
                         <a:ea typeface="Arial" charset="0"/>
                         <a:cs typeface="Arial" charset="0"/>
@@ -8108,7 +8691,7 @@
                   </a:tcPr>
                 </a:tc>
               </a:tr>
-              <a:tr h="548640">
+              <a:tr h="566928">
                 <a:tc>
                   <a:txBody>
                     <a:bodyPr/>
@@ -8118,7 +8701,7 @@
                         <a:buNone/>
                       </a:pPr>
                       <a:r>
-                        <a:rPr lang="en-US" sz="1150" dirty="0">
+                        <a:rPr lang="en-US" sz="1200" dirty="0">
                           <a:solidFill>
                             <a:srgbClr val="1E293B"/>
                           </a:solidFill>
@@ -8128,7 +8711,7 @@
                         </a:rPr>
                         <a:t>Ч</a:t>
                       </a:r>
-                      <a:endParaRPr lang="en-US" sz="1150" dirty="0">
+                      <a:endParaRPr lang="en-US" sz="1200" dirty="0">
                         <a:latin typeface="Arial" charset="0"/>
                         <a:ea typeface="Arial" charset="0"/>
                         <a:cs typeface="Arial" charset="0"/>
@@ -8183,7 +8766,7 @@
                         <a:buNone/>
                       </a:pPr>
                       <a:r>
-                        <a:rPr lang="en-US" sz="1150" dirty="0">
+                        <a:rPr lang="en-US" sz="1200" dirty="0">
                           <a:solidFill>
                             <a:srgbClr val="1E293B"/>
                           </a:solidFill>
@@ -8193,7 +8776,128 @@
                         </a:rPr>
                         <a:t>«Сделать умный горшок»</a:t>
                       </a:r>
-                      <a:endParaRPr lang="en-US" sz="1150" dirty="0">
+                      <a:endParaRPr lang="en-US" sz="1200" dirty="0">
+                        <a:latin typeface="Arial" charset="0"/>
+                        <a:ea typeface="Arial" charset="0"/>
+                        <a:cs typeface="Arial" charset="0"/>
+                      </a:endParaRPr>
+                    </a:p>
+                  </a:txBody>
+                  <a:tcPr marL="91440" marR="91440" marT="45720" marB="45720" anchor="ctr">
+                    <a:lnL w="6350" cap="flat" cmpd="sng" algn="ctr">
+                      <a:solidFill>
+                        <a:srgbClr val="D8DEE6"/>
+                      </a:solidFill>
+                      <a:prstDash val="solid"/>
+                      <a:round/>
+                      <a:headEnd type="none" w="med" len="med"/>
+                      <a:tailEnd type="none" w="med" len="med"/>
+                    </a:lnL>
+                    <a:lnR w="6350" cap="flat" cmpd="sng" algn="ctr">
+                      <a:solidFill>
+                        <a:srgbClr val="D8DEE6"/>
+                      </a:solidFill>
+                      <a:prstDash val="solid"/>
+                      <a:round/>
+                      <a:headEnd type="none" w="med" len="med"/>
+                      <a:tailEnd type="none" w="med" len="med"/>
+                    </a:lnR>
+                    <a:lnT w="6350" cap="flat" cmpd="sng" algn="ctr">
+                      <a:solidFill>
+                        <a:srgbClr val="D8DEE6"/>
+                      </a:solidFill>
+                      <a:prstDash val="solid"/>
+                      <a:round/>
+                      <a:headEnd type="none" w="med" len="med"/>
+                      <a:tailEnd type="none" w="med" len="med"/>
+                    </a:lnT>
+                    <a:lnB w="6350" cap="flat" cmpd="sng" algn="ctr">
+                      <a:solidFill>
+                        <a:srgbClr val="D8DEE6"/>
+                      </a:solidFill>
+                      <a:prstDash val="solid"/>
+                      <a:round/>
+                      <a:headEnd type="none" w="med" len="med"/>
+                      <a:tailEnd type="none" w="med" len="med"/>
+                    </a:lnB>
+                  </a:tcPr>
+                </a:tc>
+                <a:tc>
+                  <a:txBody>
+                    <a:bodyPr/>
+                    <a:lstStyle/>
+                    <a:p>
+                      <a:pPr indent="0" marL="0">
+                        <a:buNone/>
+                      </a:pPr>
+                      <a:endParaRPr lang="en-US" sz="1200" dirty="0">
+                        <a:latin typeface="Arial" charset="0"/>
+                        <a:ea typeface="Arial" charset="0"/>
+                        <a:cs typeface="Arial" charset="0"/>
+                      </a:endParaRPr>
+                    </a:p>
+                  </a:txBody>
+                  <a:tcPr marL="91440" marR="91440" marT="45720" marB="45720" anchor="ctr">
+                    <a:lnL w="6350" cap="flat" cmpd="sng" algn="ctr">
+                      <a:solidFill>
+                        <a:srgbClr val="D8DEE6"/>
+                      </a:solidFill>
+                      <a:prstDash val="solid"/>
+                      <a:round/>
+                      <a:headEnd type="none" w="med" len="med"/>
+                      <a:tailEnd type="none" w="med" len="med"/>
+                    </a:lnL>
+                    <a:lnR w="6350" cap="flat" cmpd="sng" algn="ctr">
+                      <a:solidFill>
+                        <a:srgbClr val="D8DEE6"/>
+                      </a:solidFill>
+                      <a:prstDash val="solid"/>
+                      <a:round/>
+                      <a:headEnd type="none" w="med" len="med"/>
+                      <a:tailEnd type="none" w="med" len="med"/>
+                    </a:lnR>
+                    <a:lnT w="6350" cap="flat" cmpd="sng" algn="ctr">
+                      <a:solidFill>
+                        <a:srgbClr val="D8DEE6"/>
+                      </a:solidFill>
+                      <a:prstDash val="solid"/>
+                      <a:round/>
+                      <a:headEnd type="none" w="med" len="med"/>
+                      <a:tailEnd type="none" w="med" len="med"/>
+                    </a:lnT>
+                    <a:lnB w="6350" cap="flat" cmpd="sng" algn="ctr">
+                      <a:solidFill>
+                        <a:srgbClr val="D8DEE6"/>
+                      </a:solidFill>
+                      <a:prstDash val="solid"/>
+                      <a:round/>
+                      <a:headEnd type="none" w="med" len="med"/>
+                      <a:tailEnd type="none" w="med" len="med"/>
+                    </a:lnB>
+                  </a:tcPr>
+                </a:tc>
+              </a:tr>
+              <a:tr h="566928">
+                <a:tc>
+                  <a:txBody>
+                    <a:bodyPr/>
+                    <a:lstStyle/>
+                    <a:p>
+                      <a:pPr indent="0" marL="0">
+                        <a:buNone/>
+                      </a:pPr>
+                      <a:r>
+                        <a:rPr lang="en-US" sz="1200" dirty="0">
+                          <a:solidFill>
+                            <a:srgbClr val="1E293B"/>
+                          </a:solidFill>
+                          <a:latin typeface="Arial" pitchFamily="34" charset="0"/>
+                          <a:ea typeface="Arial" pitchFamily="34" charset="-122"/>
+                          <a:cs typeface="Arial" pitchFamily="34" charset="-120"/>
+                        </a:rPr>
+                        <a:t>И</a:t>
+                      </a:r>
+                      <a:endParaRPr lang="en-US" sz="1200" dirty="0">
                         <a:latin typeface="Arial" charset="0"/>
                         <a:ea typeface="Arial" charset="0"/>
                         <a:cs typeface="Arial" charset="0"/>
@@ -8248,7 +8952,7 @@
                         <a:buNone/>
                       </a:pPr>
                       <a:r>
-                        <a:rPr lang="en-US" sz="1150" dirty="0">
+                        <a:rPr lang="en-US" sz="1200" dirty="0">
                           <a:solidFill>
                             <a:srgbClr val="1E293B"/>
                           </a:solidFill>
@@ -8256,9 +8960,9 @@
                           <a:ea typeface="Arial" pitchFamily="34" charset="-122"/>
                           <a:cs typeface="Arial" pitchFamily="34" charset="-120"/>
                         </a:rPr>
-                        <a:t>Датчик влажности почвы + световой индикатор «сухо/норма/перелив»</a:t>
+                        <a:t>«Чтобы удобно было»</a:t>
                       </a:r>
-                      <a:endParaRPr lang="en-US" sz="1150" dirty="0">
+                      <a:endParaRPr lang="en-US" sz="1200" dirty="0">
                         <a:latin typeface="Arial" charset="0"/>
                         <a:ea typeface="Arial" charset="0"/>
                         <a:cs typeface="Arial" charset="0"/>
@@ -8304,8 +9008,62 @@
                     </a:lnB>
                   </a:tcPr>
                 </a:tc>
+                <a:tc>
+                  <a:txBody>
+                    <a:bodyPr/>
+                    <a:lstStyle/>
+                    <a:p>
+                      <a:pPr indent="0" marL="0">
+                        <a:buNone/>
+                      </a:pPr>
+                      <a:endParaRPr lang="en-US" sz="1200" dirty="0">
+                        <a:latin typeface="Arial" charset="0"/>
+                        <a:ea typeface="Arial" charset="0"/>
+                        <a:cs typeface="Arial" charset="0"/>
+                      </a:endParaRPr>
+                    </a:p>
+                  </a:txBody>
+                  <a:tcPr marL="91440" marR="91440" marT="45720" marB="45720" anchor="ctr">
+                    <a:lnL w="6350" cap="flat" cmpd="sng" algn="ctr">
+                      <a:solidFill>
+                        <a:srgbClr val="D8DEE6"/>
+                      </a:solidFill>
+                      <a:prstDash val="solid"/>
+                      <a:round/>
+                      <a:headEnd type="none" w="med" len="med"/>
+                      <a:tailEnd type="none" w="med" len="med"/>
+                    </a:lnL>
+                    <a:lnR w="6350" cap="flat" cmpd="sng" algn="ctr">
+                      <a:solidFill>
+                        <a:srgbClr val="D8DEE6"/>
+                      </a:solidFill>
+                      <a:prstDash val="solid"/>
+                      <a:round/>
+                      <a:headEnd type="none" w="med" len="med"/>
+                      <a:tailEnd type="none" w="med" len="med"/>
+                    </a:lnR>
+                    <a:lnT w="6350" cap="flat" cmpd="sng" algn="ctr">
+                      <a:solidFill>
+                        <a:srgbClr val="D8DEE6"/>
+                      </a:solidFill>
+                      <a:prstDash val="solid"/>
+                      <a:round/>
+                      <a:headEnd type="none" w="med" len="med"/>
+                      <a:tailEnd type="none" w="med" len="med"/>
+                    </a:lnT>
+                    <a:lnB w="6350" cap="flat" cmpd="sng" algn="ctr">
+                      <a:solidFill>
+                        <a:srgbClr val="D8DEE6"/>
+                      </a:solidFill>
+                      <a:prstDash val="solid"/>
+                      <a:round/>
+                      <a:headEnd type="none" w="med" len="med"/>
+                      <a:tailEnd type="none" w="med" len="med"/>
+                    </a:lnB>
+                  </a:tcPr>
+                </a:tc>
               </a:tr>
-              <a:tr h="548640">
+              <a:tr h="566928">
                 <a:tc>
                   <a:txBody>
                     <a:bodyPr/>
@@ -8315,7 +9073,7 @@
                         <a:buNone/>
                       </a:pPr>
                       <a:r>
-                        <a:rPr lang="en-US" sz="1150" dirty="0">
+                        <a:rPr lang="en-US" sz="1200" dirty="0">
                           <a:solidFill>
                             <a:srgbClr val="1E293B"/>
                           </a:solidFill>
@@ -8323,9 +9081,9 @@
                           <a:ea typeface="Arial" pitchFamily="34" charset="-122"/>
                           <a:cs typeface="Arial" pitchFamily="34" charset="-120"/>
                         </a:rPr>
-                        <a:t>И</a:t>
+                        <a:t>Т / О</a:t>
                       </a:r>
-                      <a:endParaRPr lang="en-US" sz="1150" dirty="0">
+                      <a:endParaRPr lang="en-US" sz="1200" dirty="0">
                         <a:latin typeface="Arial" charset="0"/>
                         <a:ea typeface="Arial" charset="0"/>
                         <a:cs typeface="Arial" charset="0"/>
@@ -8380,7 +9138,7 @@
                         <a:buNone/>
                       </a:pPr>
                       <a:r>
-                        <a:rPr lang="en-US" sz="1150" dirty="0">
+                        <a:rPr lang="en-US" sz="1200" dirty="0">
                           <a:solidFill>
                             <a:srgbClr val="1E293B"/>
                           </a:solidFill>
@@ -8388,9 +9146,130 @@
                           <a:ea typeface="Arial" pitchFamily="34" charset="-122"/>
                           <a:cs typeface="Arial" pitchFamily="34" charset="-120"/>
                         </a:rPr>
-                        <a:t>«Чтобы удобно было»</a:t>
+                        <a:t>не проверяются вовсе</a:t>
                       </a:r>
-                      <a:endParaRPr lang="en-US" sz="1150" dirty="0">
+                      <a:endParaRPr lang="en-US" sz="1200" dirty="0">
+                        <a:latin typeface="Arial" charset="0"/>
+                        <a:ea typeface="Arial" charset="0"/>
+                        <a:cs typeface="Arial" charset="0"/>
+                      </a:endParaRPr>
+                    </a:p>
+                  </a:txBody>
+                  <a:tcPr marL="91440" marR="91440" marT="45720" marB="45720" anchor="ctr">
+                    <a:lnL w="6350" cap="flat" cmpd="sng" algn="ctr">
+                      <a:solidFill>
+                        <a:srgbClr val="D8DEE6"/>
+                      </a:solidFill>
+                      <a:prstDash val="solid"/>
+                      <a:round/>
+                      <a:headEnd type="none" w="med" len="med"/>
+                      <a:tailEnd type="none" w="med" len="med"/>
+                    </a:lnL>
+                    <a:lnR w="6350" cap="flat" cmpd="sng" algn="ctr">
+                      <a:solidFill>
+                        <a:srgbClr val="D8DEE6"/>
+                      </a:solidFill>
+                      <a:prstDash val="solid"/>
+                      <a:round/>
+                      <a:headEnd type="none" w="med" len="med"/>
+                      <a:tailEnd type="none" w="med" len="med"/>
+                    </a:lnR>
+                    <a:lnT w="6350" cap="flat" cmpd="sng" algn="ctr">
+                      <a:solidFill>
+                        <a:srgbClr val="D8DEE6"/>
+                      </a:solidFill>
+                      <a:prstDash val="solid"/>
+                      <a:round/>
+                      <a:headEnd type="none" w="med" len="med"/>
+                      <a:tailEnd type="none" w="med" len="med"/>
+                    </a:lnT>
+                    <a:lnB w="6350" cap="flat" cmpd="sng" algn="ctr">
+                      <a:solidFill>
+                        <a:srgbClr val="D8DEE6"/>
+                      </a:solidFill>
+                      <a:prstDash val="solid"/>
+                      <a:round/>
+                      <a:headEnd type="none" w="med" len="med"/>
+                      <a:tailEnd type="none" w="med" len="med"/>
+                    </a:lnB>
+                  </a:tcPr>
+                </a:tc>
+                <a:tc>
+                  <a:txBody>
+                    <a:bodyPr/>
+                    <a:lstStyle/>
+                    <a:p>
+                      <a:pPr indent="0" marL="0">
+                        <a:buNone/>
+                      </a:pPr>
+                      <a:endParaRPr lang="en-US" sz="1200" dirty="0">
+                        <a:latin typeface="Arial" charset="0"/>
+                        <a:ea typeface="Arial" charset="0"/>
+                        <a:cs typeface="Arial" charset="0"/>
+                      </a:endParaRPr>
+                    </a:p>
+                  </a:txBody>
+                  <a:tcPr marL="91440" marR="91440" marT="45720" marB="45720" anchor="ctr">
+                    <a:lnL w="6350" cap="flat" cmpd="sng" algn="ctr">
+                      <a:solidFill>
+                        <a:srgbClr val="D8DEE6"/>
+                      </a:solidFill>
+                      <a:prstDash val="solid"/>
+                      <a:round/>
+                      <a:headEnd type="none" w="med" len="med"/>
+                      <a:tailEnd type="none" w="med" len="med"/>
+                    </a:lnL>
+                    <a:lnR w="6350" cap="flat" cmpd="sng" algn="ctr">
+                      <a:solidFill>
+                        <a:srgbClr val="D8DEE6"/>
+                      </a:solidFill>
+                      <a:prstDash val="solid"/>
+                      <a:round/>
+                      <a:headEnd type="none" w="med" len="med"/>
+                      <a:tailEnd type="none" w="med" len="med"/>
+                    </a:lnR>
+                    <a:lnT w="6350" cap="flat" cmpd="sng" algn="ctr">
+                      <a:solidFill>
+                        <a:srgbClr val="D8DEE6"/>
+                      </a:solidFill>
+                      <a:prstDash val="solid"/>
+                      <a:round/>
+                      <a:headEnd type="none" w="med" len="med"/>
+                      <a:tailEnd type="none" w="med" len="med"/>
+                    </a:lnT>
+                    <a:lnB w="6350" cap="flat" cmpd="sng" algn="ctr">
+                      <a:solidFill>
+                        <a:srgbClr val="D8DEE6"/>
+                      </a:solidFill>
+                      <a:prstDash val="solid"/>
+                      <a:round/>
+                      <a:headEnd type="none" w="med" len="med"/>
+                      <a:tailEnd type="none" w="med" len="med"/>
+                    </a:lnB>
+                  </a:tcPr>
+                </a:tc>
+              </a:tr>
+              <a:tr h="566928">
+                <a:tc>
+                  <a:txBody>
+                    <a:bodyPr/>
+                    <a:lstStyle/>
+                    <a:p>
+                      <a:pPr indent="0" marL="0">
+                        <a:buNone/>
+                      </a:pPr>
+                      <a:r>
+                        <a:rPr lang="en-US" sz="1200" dirty="0">
+                          <a:solidFill>
+                            <a:srgbClr val="1E293B"/>
+                          </a:solidFill>
+                          <a:latin typeface="Arial" pitchFamily="34" charset="0"/>
+                          <a:ea typeface="Arial" pitchFamily="34" charset="-122"/>
+                          <a:cs typeface="Arial" pitchFamily="34" charset="-120"/>
+                        </a:rPr>
+                        <a:t>С</a:t>
+                      </a:r>
+                      <a:endParaRPr lang="en-US" sz="1200" dirty="0">
                         <a:latin typeface="Arial" charset="0"/>
                         <a:ea typeface="Arial" charset="0"/>
                         <a:cs typeface="Arial" charset="0"/>
@@ -8445,7 +9324,7 @@
                         <a:buNone/>
                       </a:pPr>
                       <a:r>
-                        <a:rPr lang="en-US" sz="1150" dirty="0">
+                        <a:rPr lang="en-US" sz="1200" dirty="0">
                           <a:solidFill>
                             <a:srgbClr val="1E293B"/>
                           </a:solidFill>
@@ -8453,76 +9332,9 @@
                           <a:ea typeface="Arial" pitchFamily="34" charset="-122"/>
                           <a:cs typeface="Arial" pitchFamily="34" charset="-120"/>
                         </a:rPr>
-                        <a:t>Точность ±10% от контрольного измерения, проверено на 10 циклах полива</a:t>
+                        <a:t>«В течение семестра»</a:t>
                       </a:r>
-                      <a:endParaRPr lang="en-US" sz="1150" dirty="0">
-                        <a:latin typeface="Arial" charset="0"/>
-                        <a:ea typeface="Arial" charset="0"/>
-                        <a:cs typeface="Arial" charset="0"/>
-                      </a:endParaRPr>
-                    </a:p>
-                  </a:txBody>
-                  <a:tcPr marL="91440" marR="91440" marT="45720" marB="45720" anchor="ctr">
-                    <a:lnL w="6350" cap="flat" cmpd="sng" algn="ctr">
-                      <a:solidFill>
-                        <a:srgbClr val="D8DEE6"/>
-                      </a:solidFill>
-                      <a:prstDash val="solid"/>
-                      <a:round/>
-                      <a:headEnd type="none" w="med" len="med"/>
-                      <a:tailEnd type="none" w="med" len="med"/>
-                    </a:lnL>
-                    <a:lnR w="6350" cap="flat" cmpd="sng" algn="ctr">
-                      <a:solidFill>
-                        <a:srgbClr val="D8DEE6"/>
-                      </a:solidFill>
-                      <a:prstDash val="solid"/>
-                      <a:round/>
-                      <a:headEnd type="none" w="med" len="med"/>
-                      <a:tailEnd type="none" w="med" len="med"/>
-                    </a:lnR>
-                    <a:lnT w="6350" cap="flat" cmpd="sng" algn="ctr">
-                      <a:solidFill>
-                        <a:srgbClr val="D8DEE6"/>
-                      </a:solidFill>
-                      <a:prstDash val="solid"/>
-                      <a:round/>
-                      <a:headEnd type="none" w="med" len="med"/>
-                      <a:tailEnd type="none" w="med" len="med"/>
-                    </a:lnT>
-                    <a:lnB w="6350" cap="flat" cmpd="sng" algn="ctr">
-                      <a:solidFill>
-                        <a:srgbClr val="D8DEE6"/>
-                      </a:solidFill>
-                      <a:prstDash val="solid"/>
-                      <a:round/>
-                      <a:headEnd type="none" w="med" len="med"/>
-                      <a:tailEnd type="none" w="med" len="med"/>
-                    </a:lnB>
-                  </a:tcPr>
-                </a:tc>
-              </a:tr>
-              <a:tr h="548640">
-                <a:tc>
-                  <a:txBody>
-                    <a:bodyPr/>
-                    <a:lstStyle/>
-                    <a:p>
-                      <a:pPr indent="0" marL="0">
-                        <a:buNone/>
-                      </a:pPr>
-                      <a:r>
-                        <a:rPr lang="en-US" sz="1150" dirty="0">
-                          <a:solidFill>
-                            <a:srgbClr val="1E293B"/>
-                          </a:solidFill>
-                          <a:latin typeface="Arial" pitchFamily="34" charset="0"/>
-                          <a:ea typeface="Arial" pitchFamily="34" charset="-122"/>
-                          <a:cs typeface="Arial" pitchFamily="34" charset="-120"/>
-                        </a:rPr>
-                        <a:t>Т / О</a:t>
-                      </a:r>
-                      <a:endParaRPr lang="en-US" sz="1150" dirty="0">
+                      <a:endParaRPr lang="en-US" sz="1200" dirty="0">
                         <a:latin typeface="Arial" charset="0"/>
                         <a:ea typeface="Arial" charset="0"/>
                         <a:cs typeface="Arial" charset="0"/>
@@ -8576,18 +9388,7 @@
                       <a:pPr indent="0" marL="0">
                         <a:buNone/>
                       </a:pPr>
-                      <a:r>
-                        <a:rPr lang="en-US" sz="1150" dirty="0">
-                          <a:solidFill>
-                            <a:srgbClr val="1E293B"/>
-                          </a:solidFill>
-                          <a:latin typeface="Arial" pitchFamily="34" charset="0"/>
-                          <a:ea typeface="Arial" pitchFamily="34" charset="-122"/>
-                          <a:cs typeface="Arial" pitchFamily="34" charset="-120"/>
-                        </a:rPr>
-                        <a:t>не проверяются вовсе</a:t>
-                      </a:r>
-                      <a:endParaRPr lang="en-US" sz="1150" dirty="0">
+                      <a:endParaRPr lang="en-US" sz="1200" dirty="0">
                         <a:latin typeface="Arial" charset="0"/>
                         <a:ea typeface="Arial" charset="0"/>
                         <a:cs typeface="Arial" charset="0"/>
@@ -8633,268 +9434,6 @@
                     </a:lnB>
                   </a:tcPr>
                 </a:tc>
-                <a:tc>
-                  <a:txBody>
-                    <a:bodyPr/>
-                    <a:lstStyle/>
-                    <a:p>
-                      <a:pPr indent="0" marL="0">
-                        <a:buNone/>
-                      </a:pPr>
-                      <a:r>
-                        <a:rPr lang="en-US" sz="1150" dirty="0">
-                          <a:solidFill>
-                            <a:srgbClr val="1E293B"/>
-                          </a:solidFill>
-                          <a:latin typeface="Arial" pitchFamily="34" charset="0"/>
-                          <a:ea typeface="Arial" pitchFamily="34" charset="-122"/>
-                          <a:cs typeface="Arial" pitchFamily="34" charset="-120"/>
-                        </a:rPr>
-                        <a:t>Решает проблему полива на глаз; 3–4 человека, типовые компоненты</a:t>
-                      </a:r>
-                      <a:endParaRPr lang="en-US" sz="1150" dirty="0">
-                        <a:latin typeface="Arial" charset="0"/>
-                        <a:ea typeface="Arial" charset="0"/>
-                        <a:cs typeface="Arial" charset="0"/>
-                      </a:endParaRPr>
-                    </a:p>
-                  </a:txBody>
-                  <a:tcPr marL="91440" marR="91440" marT="45720" marB="45720" anchor="ctr">
-                    <a:lnL w="6350" cap="flat" cmpd="sng" algn="ctr">
-                      <a:solidFill>
-                        <a:srgbClr val="D8DEE6"/>
-                      </a:solidFill>
-                      <a:prstDash val="solid"/>
-                      <a:round/>
-                      <a:headEnd type="none" w="med" len="med"/>
-                      <a:tailEnd type="none" w="med" len="med"/>
-                    </a:lnL>
-                    <a:lnR w="6350" cap="flat" cmpd="sng" algn="ctr">
-                      <a:solidFill>
-                        <a:srgbClr val="D8DEE6"/>
-                      </a:solidFill>
-                      <a:prstDash val="solid"/>
-                      <a:round/>
-                      <a:headEnd type="none" w="med" len="med"/>
-                      <a:tailEnd type="none" w="med" len="med"/>
-                    </a:lnR>
-                    <a:lnT w="6350" cap="flat" cmpd="sng" algn="ctr">
-                      <a:solidFill>
-                        <a:srgbClr val="D8DEE6"/>
-                      </a:solidFill>
-                      <a:prstDash val="solid"/>
-                      <a:round/>
-                      <a:headEnd type="none" w="med" len="med"/>
-                      <a:tailEnd type="none" w="med" len="med"/>
-                    </a:lnT>
-                    <a:lnB w="6350" cap="flat" cmpd="sng" algn="ctr">
-                      <a:solidFill>
-                        <a:srgbClr val="D8DEE6"/>
-                      </a:solidFill>
-                      <a:prstDash val="solid"/>
-                      <a:round/>
-                      <a:headEnd type="none" w="med" len="med"/>
-                      <a:tailEnd type="none" w="med" len="med"/>
-                    </a:lnB>
-                  </a:tcPr>
-                </a:tc>
-              </a:tr>
-              <a:tr h="548640">
-                <a:tc>
-                  <a:txBody>
-                    <a:bodyPr/>
-                    <a:lstStyle/>
-                    <a:p>
-                      <a:pPr indent="0" marL="0">
-                        <a:buNone/>
-                      </a:pPr>
-                      <a:r>
-                        <a:rPr lang="en-US" sz="1150" dirty="0">
-                          <a:solidFill>
-                            <a:srgbClr val="1E293B"/>
-                          </a:solidFill>
-                          <a:latin typeface="Arial" pitchFamily="34" charset="0"/>
-                          <a:ea typeface="Arial" pitchFamily="34" charset="-122"/>
-                          <a:cs typeface="Arial" pitchFamily="34" charset="-120"/>
-                        </a:rPr>
-                        <a:t>С</a:t>
-                      </a:r>
-                      <a:endParaRPr lang="en-US" sz="1150" dirty="0">
-                        <a:latin typeface="Arial" charset="0"/>
-                        <a:ea typeface="Arial" charset="0"/>
-                        <a:cs typeface="Arial" charset="0"/>
-                      </a:endParaRPr>
-                    </a:p>
-                  </a:txBody>
-                  <a:tcPr marL="91440" marR="91440" marT="45720" marB="45720" anchor="ctr">
-                    <a:lnL w="6350" cap="flat" cmpd="sng" algn="ctr">
-                      <a:solidFill>
-                        <a:srgbClr val="D8DEE6"/>
-                      </a:solidFill>
-                      <a:prstDash val="solid"/>
-                      <a:round/>
-                      <a:headEnd type="none" w="med" len="med"/>
-                      <a:tailEnd type="none" w="med" len="med"/>
-                    </a:lnL>
-                    <a:lnR w="6350" cap="flat" cmpd="sng" algn="ctr">
-                      <a:solidFill>
-                        <a:srgbClr val="D8DEE6"/>
-                      </a:solidFill>
-                      <a:prstDash val="solid"/>
-                      <a:round/>
-                      <a:headEnd type="none" w="med" len="med"/>
-                      <a:tailEnd type="none" w="med" len="med"/>
-                    </a:lnR>
-                    <a:lnT w="6350" cap="flat" cmpd="sng" algn="ctr">
-                      <a:solidFill>
-                        <a:srgbClr val="D8DEE6"/>
-                      </a:solidFill>
-                      <a:prstDash val="solid"/>
-                      <a:round/>
-                      <a:headEnd type="none" w="med" len="med"/>
-                      <a:tailEnd type="none" w="med" len="med"/>
-                    </a:lnT>
-                    <a:lnB w="6350" cap="flat" cmpd="sng" algn="ctr">
-                      <a:solidFill>
-                        <a:srgbClr val="D8DEE6"/>
-                      </a:solidFill>
-                      <a:prstDash val="solid"/>
-                      <a:round/>
-                      <a:headEnd type="none" w="med" len="med"/>
-                      <a:tailEnd type="none" w="med" len="med"/>
-                    </a:lnB>
-                  </a:tcPr>
-                </a:tc>
-                <a:tc>
-                  <a:txBody>
-                    <a:bodyPr/>
-                    <a:lstStyle/>
-                    <a:p>
-                      <a:pPr indent="0" marL="0">
-                        <a:buNone/>
-                      </a:pPr>
-                      <a:r>
-                        <a:rPr lang="en-US" sz="1150" dirty="0">
-                          <a:solidFill>
-                            <a:srgbClr val="1E293B"/>
-                          </a:solidFill>
-                          <a:latin typeface="Arial" pitchFamily="34" charset="0"/>
-                          <a:ea typeface="Arial" pitchFamily="34" charset="-122"/>
-                          <a:cs typeface="Arial" pitchFamily="34" charset="-120"/>
-                        </a:rPr>
-                        <a:t>«В течение семестра»</a:t>
-                      </a:r>
-                      <a:endParaRPr lang="en-US" sz="1150" dirty="0">
-                        <a:latin typeface="Arial" charset="0"/>
-                        <a:ea typeface="Arial" charset="0"/>
-                        <a:cs typeface="Arial" charset="0"/>
-                      </a:endParaRPr>
-                    </a:p>
-                  </a:txBody>
-                  <a:tcPr marL="91440" marR="91440" marT="45720" marB="45720" anchor="ctr">
-                    <a:lnL w="6350" cap="flat" cmpd="sng" algn="ctr">
-                      <a:solidFill>
-                        <a:srgbClr val="D8DEE6"/>
-                      </a:solidFill>
-                      <a:prstDash val="solid"/>
-                      <a:round/>
-                      <a:headEnd type="none" w="med" len="med"/>
-                      <a:tailEnd type="none" w="med" len="med"/>
-                    </a:lnL>
-                    <a:lnR w="6350" cap="flat" cmpd="sng" algn="ctr">
-                      <a:solidFill>
-                        <a:srgbClr val="D8DEE6"/>
-                      </a:solidFill>
-                      <a:prstDash val="solid"/>
-                      <a:round/>
-                      <a:headEnd type="none" w="med" len="med"/>
-                      <a:tailEnd type="none" w="med" len="med"/>
-                    </a:lnR>
-                    <a:lnT w="6350" cap="flat" cmpd="sng" algn="ctr">
-                      <a:solidFill>
-                        <a:srgbClr val="D8DEE6"/>
-                      </a:solidFill>
-                      <a:prstDash val="solid"/>
-                      <a:round/>
-                      <a:headEnd type="none" w="med" len="med"/>
-                      <a:tailEnd type="none" w="med" len="med"/>
-                    </a:lnT>
-                    <a:lnB w="6350" cap="flat" cmpd="sng" algn="ctr">
-                      <a:solidFill>
-                        <a:srgbClr val="D8DEE6"/>
-                      </a:solidFill>
-                      <a:prstDash val="solid"/>
-                      <a:round/>
-                      <a:headEnd type="none" w="med" len="med"/>
-                      <a:tailEnd type="none" w="med" len="med"/>
-                    </a:lnB>
-                  </a:tcPr>
-                </a:tc>
-                <a:tc>
-                  <a:txBody>
-                    <a:bodyPr/>
-                    <a:lstStyle/>
-                    <a:p>
-                      <a:pPr indent="0" marL="0">
-                        <a:buNone/>
-                      </a:pPr>
-                      <a:r>
-                        <a:rPr lang="en-US" sz="1150" dirty="0">
-                          <a:solidFill>
-                            <a:srgbClr val="1E293B"/>
-                          </a:solidFill>
-                          <a:latin typeface="Arial" pitchFamily="34" charset="0"/>
-                          <a:ea typeface="Arial" pitchFamily="34" charset="-122"/>
-                          <a:cs typeface="Arial" pitchFamily="34" charset="-120"/>
-                        </a:rPr>
-                        <a:t>Прототип — к 21.11, 3 недели теста и отчёт — к 26.12</a:t>
-                      </a:r>
-                      <a:endParaRPr lang="en-US" sz="1150" dirty="0">
-                        <a:latin typeface="Arial" charset="0"/>
-                        <a:ea typeface="Arial" charset="0"/>
-                        <a:cs typeface="Arial" charset="0"/>
-                      </a:endParaRPr>
-                    </a:p>
-                  </a:txBody>
-                  <a:tcPr marL="91440" marR="91440" marT="45720" marB="45720" anchor="ctr">
-                    <a:lnL w="6350" cap="flat" cmpd="sng" algn="ctr">
-                      <a:solidFill>
-                        <a:srgbClr val="D8DEE6"/>
-                      </a:solidFill>
-                      <a:prstDash val="solid"/>
-                      <a:round/>
-                      <a:headEnd type="none" w="med" len="med"/>
-                      <a:tailEnd type="none" w="med" len="med"/>
-                    </a:lnL>
-                    <a:lnR w="6350" cap="flat" cmpd="sng" algn="ctr">
-                      <a:solidFill>
-                        <a:srgbClr val="D8DEE6"/>
-                      </a:solidFill>
-                      <a:prstDash val="solid"/>
-                      <a:round/>
-                      <a:headEnd type="none" w="med" len="med"/>
-                      <a:tailEnd type="none" w="med" len="med"/>
-                    </a:lnR>
-                    <a:lnT w="6350" cap="flat" cmpd="sng" algn="ctr">
-                      <a:solidFill>
-                        <a:srgbClr val="D8DEE6"/>
-                      </a:solidFill>
-                      <a:prstDash val="solid"/>
-                      <a:round/>
-                      <a:headEnd type="none" w="med" len="med"/>
-                      <a:tailEnd type="none" w="med" len="med"/>
-                    </a:lnT>
-                    <a:lnB w="6350" cap="flat" cmpd="sng" algn="ctr">
-                      <a:solidFill>
-                        <a:srgbClr val="D8DEE6"/>
-                      </a:solidFill>
-                      <a:prstDash val="solid"/>
-                      <a:round/>
-                      <a:headEnd type="none" w="med" len="med"/>
-                      <a:tailEnd type="none" w="med" len="med"/>
-                    </a:lnB>
-                  </a:tcPr>
-                </a:tc>
               </a:tr>
             </a:tbl>
           </a:graphicData>
@@ -8909,15 +9448,15 @@
         <p:spPr>
           <a:xfrm>
             <a:off x="502920" y="3794760"/>
-            <a:ext cx="8138160" cy="685800"/>
+            <a:ext cx="8138160" cy="731520"/>
           </a:xfrm>
           <a:prstGeom prst="roundRect">
             <a:avLst>
-              <a:gd name="adj" fmla="val 6667"/>
+              <a:gd name="adj" fmla="val 6250"/>
             </a:avLst>
           </a:prstGeom>
           <a:solidFill>
-            <a:srgbClr val="1E4270"/>
+            <a:srgbClr val="F5F7FA"/>
           </a:solidFill>
           <a:ln w="9525">
             <a:solidFill>
@@ -8935,8 +9474,8 @@
         </p:nvSpPr>
         <p:spPr>
           <a:xfrm>
-            <a:off x="731520" y="3913632"/>
-            <a:ext cx="7680960" cy="457200"/>
+            <a:off x="731520" y="3977640"/>
+            <a:ext cx="7680960" cy="411480"/>
           </a:xfrm>
           <a:prstGeom prst="rect">
             <a:avLst/>
@@ -8949,23 +9488,20 @@
           <a:lstStyle/>
           <a:p>
             <a:pPr indent="0" marL="0">
-              <a:lnSpc>
-                <a:spcPts val="1500"/>
-              </a:lnSpc>
               <a:buNone/>
             </a:pPr>
             <a:r>
-              <a:rPr lang="en-US" sz="1150" b="1" dirty="0">
+              <a:rPr lang="en-US" sz="1250" i="1" dirty="0">
                 <a:solidFill>
-                  <a:srgbClr val="FFFFFF"/>
+                  <a:srgbClr val="64748B"/>
                 </a:solidFill>
                 <a:latin typeface="Arial" pitchFamily="34" charset="0"/>
                 <a:ea typeface="Arial" pitchFamily="34" charset="-122"/>
                 <a:cs typeface="Arial" pitchFamily="34" charset="-120"/>
               </a:rPr>
-              <a:t>К 26.12 — прототип умного горшка с датчиком влажности и индикатором полива, проверенный 3 недели на живом растении, точность ±10% — прототип к 21.11</a:t>
+              <a:t>Итоговая фраза — собираем из строк справа: «К [дата] мы получим [измеримый результат], проверяемый [способ проверки]»</a:t>
             </a:r>
-            <a:endParaRPr lang="en-US" sz="1150" dirty="0"/>
+            <a:endParaRPr lang="en-US" sz="1250" dirty="0"/>
           </a:p>
         </p:txBody>
       </p:sp>

--- a/zanyatiya/Zanyatie_02_Praktika1_Slaydy.pptx
+++ b/zanyatiya/Zanyatie_02_Praktika1_Slaydy.pptx
@@ -17,9 +17,11 @@
     <p:sldId id="265" r:id="rId11"/>
     <p:sldId id="266" r:id="rId12"/>
     <p:sldId id="267" r:id="rId13"/>
+    <p:sldId id="268" r:id="rId14"/>
+    <p:sldId id="269" r:id="rId15"/>
   </p:sldIdLst>
   <p:notesMasterIdLst>
-    <p:notesMasterId r:id="rId14"/>
+    <p:notesMasterId r:id="rId16"/>
   </p:notesMasterIdLst>
   <p:sldSz cx="9144000" cy="5143500"/>
   <p:notesSz cx="5143500" cy="9144000"/>
@@ -601,7 +603,7 @@
           <a:p>
             <a:r>
               <a:rPr lang="en-US" dirty="0"/>
-              <a:t>Не сокращать. Единственный блок, дающий итоговый артефакт занятия.</a:t>
+              <a:t>Правый столбец пустой намеренно. На каждую строку — вопрос в зал. Число в букве M обязательно, даже приблизительное.</a:t>
             </a:r>
             <a:endParaRPr lang="en-US" dirty="0"/>
           </a:p>
@@ -689,7 +691,7 @@
           <a:p>
             <a:r>
               <a:rPr lang="en-US" dirty="0"/>
-              <a:t>Пять минут на поиск, пять на устный разбор в паре.</a:t>
+              <a:t>Показывать только ПОСЛЕ разбора на доске — это сверка, а не подсказка. Ровно такой объём ждём от каждой команды на листе 2.</a:t>
             </a:r>
             <a:endParaRPr lang="en-US" dirty="0"/>
           </a:p>
@@ -777,7 +779,7 @@
           <a:p>
             <a:r>
               <a:rPr lang="en-US" dirty="0"/>
-              <a:t>Продиктовать и убедиться, что записали.</a:t>
+              <a:t>Не сокращать. Единственный блок, дающий итоговый артефакт занятия.</a:t>
             </a:r>
             <a:endParaRPr lang="en-US" dirty="0"/>
           </a:p>
@@ -801,6 +803,182 @@
             <a:fld id="{F7021451-1387-4CA6-816F-3879F97B5CBC}" type="slidenum">
               <a:rPr lang="en-US"/>
               <a:t>12</a:t>
+            </a:fld>
+            <a:endParaRPr lang="en-US"/>
+          </a:p>
+        </p:txBody>
+      </p:sp>
+    </p:spTree>
+    <p:extLst>
+      <p:ext uri="{BB962C8B-B14F-4D97-AF65-F5344CB8AC3E}">
+        <p14:creationId xmlns:p14="http://schemas.microsoft.com/office/powerpoint/2010/main" val="1024086991"/>
+      </p:ext>
+    </p:extLst>
+  </p:cSld>
+  <p:clrMapOvr>
+    <a:masterClrMapping/>
+  </p:clrMapOvr>
+</p:notes>
+</file>
+
+<file path=ppt/notesSlides/notesSlide13.xml><?xml version="1.0" encoding="utf-8"?>
+<p:notes xmlns:a="http://schemas.openxmlformats.org/drawingml/2006/main" xmlns:r="http://schemas.openxmlformats.org/officeDocument/2006/relationships" xmlns:p="http://schemas.openxmlformats.org/presentationml/2006/main">
+  <p:cSld>
+    <p:spTree>
+      <p:nvGrpSpPr>
+        <p:cNvPr id="1" name=""/>
+        <p:cNvGrpSpPr/>
+        <p:nvPr/>
+      </p:nvGrpSpPr>
+      <p:grpSpPr>
+        <a:xfrm>
+          <a:off x="0" y="0"/>
+          <a:ext cx="0" cy="0"/>
+          <a:chOff x="0" y="0"/>
+          <a:chExt cx="0" cy="0"/>
+        </a:xfrm>
+      </p:grpSpPr>
+      <p:sp>
+        <p:nvSpPr>
+          <p:cNvPr id="2" name="Slide Image Placeholder 1"/>
+          <p:cNvSpPr>
+            <a:spLocks noGrp="1" noRot="1" noChangeAspect="1"/>
+          </p:cNvSpPr>
+          <p:nvPr>
+            <p:ph type="sldImg"/>
+          </p:nvPr>
+        </p:nvSpPr>
+        <p:spPr/>
+      </p:sp>
+      <p:sp>
+        <p:nvSpPr>
+          <p:cNvPr id="3" name="Notes Placeholder 2"/>
+          <p:cNvSpPr>
+            <a:spLocks noGrp="1"/>
+          </p:cNvSpPr>
+          <p:nvPr>
+            <p:ph type="body" idx="1"/>
+          </p:nvPr>
+        </p:nvSpPr>
+        <p:spPr/>
+        <p:txBody>
+          <a:bodyPr/>
+          <a:lstStyle/>
+          <a:p>
+            <a:r>
+              <a:rPr lang="en-US" dirty="0"/>
+              <a:t>Три минуты на поиск, две на устный разбор в паре.</a:t>
+            </a:r>
+            <a:endParaRPr lang="en-US" dirty="0"/>
+          </a:p>
+        </p:txBody>
+      </p:sp>
+      <p:sp>
+        <p:nvSpPr>
+          <p:cNvPr id="4" name="Slide Number Placeholder 3"/>
+          <p:cNvSpPr>
+            <a:spLocks noGrp="1"/>
+          </p:cNvSpPr>
+          <p:nvPr>
+            <p:ph type="sldNum" sz="quarter" idx="10"/>
+          </p:nvPr>
+        </p:nvSpPr>
+        <p:spPr/>
+        <p:txBody>
+          <a:bodyPr/>
+          <a:lstStyle/>
+          <a:p>
+            <a:fld id="{F7021451-1387-4CA6-816F-3879F97B5CBC}" type="slidenum">
+              <a:rPr lang="en-US"/>
+              <a:t>13</a:t>
+            </a:fld>
+            <a:endParaRPr lang="en-US"/>
+          </a:p>
+        </p:txBody>
+      </p:sp>
+    </p:spTree>
+    <p:extLst>
+      <p:ext uri="{BB962C8B-B14F-4D97-AF65-F5344CB8AC3E}">
+        <p14:creationId xmlns:p14="http://schemas.microsoft.com/office/powerpoint/2010/main" val="1024086991"/>
+      </p:ext>
+    </p:extLst>
+  </p:cSld>
+  <p:clrMapOvr>
+    <a:masterClrMapping/>
+  </p:clrMapOvr>
+</p:notes>
+</file>
+
+<file path=ppt/notesSlides/notesSlide14.xml><?xml version="1.0" encoding="utf-8"?>
+<p:notes xmlns:a="http://schemas.openxmlformats.org/drawingml/2006/main" xmlns:r="http://schemas.openxmlformats.org/officeDocument/2006/relationships" xmlns:p="http://schemas.openxmlformats.org/presentationml/2006/main">
+  <p:cSld>
+    <p:spTree>
+      <p:nvGrpSpPr>
+        <p:cNvPr id="1" name=""/>
+        <p:cNvGrpSpPr/>
+        <p:nvPr/>
+      </p:nvGrpSpPr>
+      <p:grpSpPr>
+        <a:xfrm>
+          <a:off x="0" y="0"/>
+          <a:ext cx="0" cy="0"/>
+          <a:chOff x="0" y="0"/>
+          <a:chExt cx="0" cy="0"/>
+        </a:xfrm>
+      </p:grpSpPr>
+      <p:sp>
+        <p:nvSpPr>
+          <p:cNvPr id="2" name="Slide Image Placeholder 1"/>
+          <p:cNvSpPr>
+            <a:spLocks noGrp="1" noRot="1" noChangeAspect="1"/>
+          </p:cNvSpPr>
+          <p:nvPr>
+            <p:ph type="sldImg"/>
+          </p:nvPr>
+        </p:nvSpPr>
+        <p:spPr/>
+      </p:sp>
+      <p:sp>
+        <p:nvSpPr>
+          <p:cNvPr id="3" name="Notes Placeholder 2"/>
+          <p:cNvSpPr>
+            <a:spLocks noGrp="1"/>
+          </p:cNvSpPr>
+          <p:nvPr>
+            <p:ph type="body" idx="1"/>
+          </p:nvPr>
+        </p:nvSpPr>
+        <p:spPr/>
+        <p:txBody>
+          <a:bodyPr/>
+          <a:lstStyle/>
+          <a:p>
+            <a:r>
+              <a:rPr lang="en-US" dirty="0"/>
+              <a:t>Продиктовать и убедиться, что записали.</a:t>
+            </a:r>
+            <a:endParaRPr lang="en-US" dirty="0"/>
+          </a:p>
+        </p:txBody>
+      </p:sp>
+      <p:sp>
+        <p:nvSpPr>
+          <p:cNvPr id="4" name="Slide Number Placeholder 3"/>
+          <p:cNvSpPr>
+            <a:spLocks noGrp="1"/>
+          </p:cNvSpPr>
+          <p:nvPr>
+            <p:ph type="sldNum" sz="quarter" idx="10"/>
+          </p:nvPr>
+        </p:nvSpPr>
+        <p:spPr/>
+        <p:txBody>
+          <a:bodyPr/>
+          <a:lstStyle/>
+          <a:p>
+            <a:fld id="{F7021451-1387-4CA6-816F-3879F97B5CBC}" type="slidenum">
+              <a:rPr lang="en-US"/>
+              <a:t>14</a:t>
             </a:fld>
             <a:endParaRPr lang="en-US"/>
           </a:p>
@@ -865,7 +1043,7 @@
           <a:p>
             <a:r>
               <a:rPr lang="en-US" dirty="0"/>
-              <a:t>Один-два добровольца называют вслух свои два концепта, без оценки.</a:t>
+              <a:t>Короткая остановка: одна-две команды называют свои два концепта вслух, без оценки.</a:t>
             </a:r>
             <a:endParaRPr lang="en-US" dirty="0"/>
           </a:p>
@@ -953,7 +1131,7 @@
           <a:p>
             <a:r>
               <a:rPr lang="en-US" dirty="0"/>
-              <a:t>Проверка: если «для кого» можно заменить на кого угодно — предложение не написано.</a:t>
+              <a:t>Подстановочный тест: если предложение годится для чужого проекта без изменений — оно не написано.</a:t>
             </a:r>
             <a:endParaRPr lang="en-US" dirty="0"/>
           </a:p>
@@ -1041,7 +1219,7 @@
           <a:p>
             <a:r>
               <a:rPr lang="en-US" dirty="0"/>
-              <a:t>Таблица намеренно пустая. Порядок заполнения: «для кого» и «в отличие от чего» первыми — они задают рамку; «что делаем» и «выгода» дописываются последними. Записывать на доску ровно то, что говорит зал, включая слабые формулировки, и править их на глазах. Тот же пример вернётся при разборе ЧИСТО.</a:t>
+              <a:t>Таблица намеренно пустая. Порядок: «для кого» и «в отличие от чего» первыми — они задают рамку; «что делаем» и «выгода» последними. Записывать ровно то, что говорит зал, и править на глазах.</a:t>
             </a:r>
             <a:endParaRPr lang="en-US" dirty="0"/>
           </a:p>
@@ -1129,7 +1307,7 @@
           <a:p>
             <a:r>
               <a:rPr lang="en-US" dirty="0"/>
-              <a:t>Ходить между командами: на каждое «удобнее»/«лучше» спрашивать «насколько, в цифрах».</a:t>
+              <a:t>Ходить между командами. Не отвечать за них — только спрашивать.</a:t>
             </a:r>
             <a:endParaRPr lang="en-US" dirty="0"/>
           </a:p>
@@ -1217,7 +1395,7 @@
           <a:p>
             <a:r>
               <a:rPr lang="en-US" dirty="0"/>
-              <a:t>При равенстве решает капитан — это тоже опыт принятия решения в команде.</a:t>
+              <a:t>Заготовки читать вслух целиком — студенты подставляют своё прямо в них.</a:t>
             </a:r>
             <a:endParaRPr lang="en-US" dirty="0"/>
           </a:p>
@@ -1305,7 +1483,7 @@
           <a:p>
             <a:r>
               <a:rPr lang="en-US" dirty="0"/>
-              <a:t>Порядок букв ЧИСТО не совпадает с порядком SMART — это нормально, важны все пять проверок, а не порядок.</a:t>
+              <a:t>Проигравший концепт не выбрасывается — пойдёт в паспорт проекта как альтернатива.</a:t>
             </a:r>
             <a:endParaRPr lang="en-US" dirty="0"/>
           </a:p>
@@ -1393,7 +1571,7 @@
           <a:p>
             <a:r>
               <a:rPr lang="en-US" dirty="0"/>
-              <a:t>Это не новый инструмент — тот же треугольник и та же ресурсная граница, применённые к своей цели.</a:t>
+              <a:t>Сначала SMART как основной термин, ЧИСТО — как альтернатива для запоминания, не вместо.</a:t>
             </a:r>
             <a:endParaRPr lang="en-US" dirty="0"/>
           </a:p>
@@ -1481,7 +1659,7 @@
           <a:p>
             <a:r>
               <a:rPr lang="en-US" dirty="0"/>
-              <a:t>Правый столбец пустой намеренно. На каждую строку — вопрос в зал: «что именно должно получиться», «в каких единицах меряем», «к какому числу». Число в букве И обязательно, даже приблизительное: приблизительное уточним позже, отсутствие числа не проверить никогда.</a:t>
+              <a:t>Не новый инструмент: тот же треугольник и та же ресурсная граница из вводной лекции, применённые к своей цели.</a:t>
             </a:r>
             <a:endParaRPr lang="en-US" dirty="0"/>
           </a:p>
@@ -2056,6 +2234,45 @@
         </p:nvSpPr>
         <p:spPr>
           <a:xfrm>
+            <a:off x="7543800" y="4736592"/>
+            <a:ext cx="1097280" cy="256032"/>
+          </a:xfrm>
+          <a:prstGeom prst="rect">
+            <a:avLst/>
+          </a:prstGeom>
+          <a:noFill/>
+          <a:ln/>
+        </p:spPr>
+        <p:txBody>
+          <a:bodyPr wrap="square" lIns="0" tIns="0" rIns="0" bIns="0" rtlCol="0" anchor="ctr"/>
+          <a:lstStyle/>
+          <a:p>
+            <a:pPr algn="r" indent="0" marL="0">
+              <a:buNone/>
+            </a:pPr>
+            <a:r>
+              <a:rPr lang="en-US" sz="1000" dirty="0">
+                <a:solidFill>
+                  <a:srgbClr val="64748B"/>
+                </a:solidFill>
+                <a:latin typeface="Arial" pitchFamily="34" charset="0"/>
+                <a:ea typeface="Arial" pitchFamily="34" charset="-122"/>
+                <a:cs typeface="Arial" pitchFamily="34" charset="-120"/>
+              </a:rPr>
+              <a:t>10 / 14</a:t>
+            </a:r>
+            <a:endParaRPr lang="en-US" sz="1000" dirty="0"/>
+          </a:p>
+        </p:txBody>
+      </p:sp>
+      <p:sp>
+        <p:nvSpPr>
+          <p:cNvPr id="3" name="Text 1"/>
+          <p:cNvSpPr txBox="1"/>
+          <p:nvPr/>
+        </p:nvSpPr>
+        <p:spPr>
+          <a:xfrm>
             <a:off x="502920" y="182880"/>
             <a:ext cx="8138160" cy="219456"/>
           </a:xfrm>
@@ -2081,7 +2298,7 @@
                 <a:ea typeface="Arial" pitchFamily="34" charset="-122"/>
                 <a:cs typeface="Arial" pitchFamily="34" charset="-120"/>
               </a:rPr>
-              <a:t>ЛИСТ 2 · 20 МИНУТ</a:t>
+              <a:t>РАЗБОР НА ДОСКЕ</a:t>
             </a:r>
             <a:endParaRPr lang="en-US" sz="1100" dirty="0"/>
           </a:p>
@@ -2089,14 +2306,14 @@
       </p:sp>
       <p:sp>
         <p:nvSpPr>
-          <p:cNvPr id="3" name="Text 1"/>
+          <p:cNvPr id="4" name="Text 2"/>
           <p:cNvSpPr txBox="1"/>
           <p:nvPr/>
         </p:nvSpPr>
         <p:spPr>
           <a:xfrm>
-            <a:off x="502920" y="365760"/>
-            <a:ext cx="8138160" cy="640080"/>
+            <a:off x="502920" y="384048"/>
+            <a:ext cx="8138160" cy="502920"/>
           </a:xfrm>
           <a:prstGeom prst="rect">
             <a:avLst/>
@@ -2112,7 +2329,7 @@
               <a:buNone/>
             </a:pPr>
             <a:r>
-              <a:rPr lang="en-US" sz="2700" b="1" dirty="0">
+              <a:rPr lang="en-US" sz="2400" b="1" dirty="0">
                 <a:solidFill>
                   <a:srgbClr val="005AAA"/>
                 </a:solidFill>
@@ -2120,22 +2337,22 @@
                 <a:ea typeface="Arial" pitchFamily="34" charset="-122"/>
                 <a:cs typeface="Arial" pitchFamily="34" charset="-120"/>
               </a:rPr>
-              <a:t>Разверните SMART-цель</a:t>
+              <a:t>Без числа не SMART</a:t>
             </a:r>
-            <a:endParaRPr lang="en-US" sz="2700" dirty="0"/>
+            <a:endParaRPr lang="en-US" sz="2400" dirty="0"/>
           </a:p>
         </p:txBody>
       </p:sp>
       <p:sp>
         <p:nvSpPr>
-          <p:cNvPr id="4" name="Text 2"/>
+          <p:cNvPr id="5" name="Text 3"/>
           <p:cNvSpPr txBox="1"/>
           <p:nvPr/>
         </p:nvSpPr>
         <p:spPr>
           <a:xfrm>
-            <a:off x="502920" y="1371600"/>
-            <a:ext cx="8138160" cy="365760"/>
+            <a:off x="502920" y="914400"/>
+            <a:ext cx="8138160" cy="256032"/>
           </a:xfrm>
           <a:prstGeom prst="rect">
             <a:avLst/>
@@ -2151,119 +2368,1197 @@
               <a:buNone/>
             </a:pPr>
             <a:r>
-              <a:rPr lang="en-US" sz="1500" dirty="0">
+              <a:rPr lang="en-US" sz="1300" i="1" dirty="0">
                 <a:solidFill>
-                  <a:srgbClr val="1E293B"/>
+                  <a:srgbClr val="64748B"/>
                 </a:solidFill>
                 <a:latin typeface="Arial" pitchFamily="34" charset="0"/>
                 <a:ea typeface="Arial" pitchFamily="34" charset="-122"/>
                 <a:cs typeface="Arial" pitchFamily="34" charset="-120"/>
               </a:rPr>
-              <a:t>Каждая буква — отдельная строка, конкретно. Не общей фразой на весь акроним.</a:t>
+              <a:t>Тот же пример: умный горшок. Правый столбец дописываем вместе</a:t>
             </a:r>
-            <a:endParaRPr lang="en-US" sz="1500" dirty="0"/>
+            <a:endParaRPr lang="en-US" sz="1300" dirty="0"/>
           </a:p>
         </p:txBody>
       </p:sp>
-      <p:sp>
-        <p:nvSpPr>
-          <p:cNvPr id="5" name="Shape 3"/>
-          <p:cNvSpPr/>
-          <p:nvPr/>
-        </p:nvSpPr>
-        <p:spPr>
-          <a:xfrm>
-            <a:off x="502920" y="1920240"/>
-            <a:ext cx="8138160" cy="2011680"/>
-          </a:xfrm>
-          <a:prstGeom prst="roundRect">
-            <a:avLst>
-              <a:gd name="adj" fmla="val 2273"/>
-            </a:avLst>
-          </a:prstGeom>
-          <a:solidFill>
-            <a:srgbClr val="1E4270"/>
-          </a:solidFill>
-          <a:ln w="9525">
-            <a:solidFill>
-              <a:srgbClr val="D8DEE6"/>
-            </a:solidFill>
-            <a:prstDash val="solid"/>
-          </a:ln>
-        </p:spPr>
-      </p:sp>
-      <p:sp>
-        <p:nvSpPr>
-          <p:cNvPr id="6" name="Text 4"/>
-          <p:cNvSpPr txBox="1"/>
-          <p:nvPr/>
-        </p:nvSpPr>
-        <p:spPr>
-          <a:xfrm>
-            <a:off x="822960" y="2194560"/>
-            <a:ext cx="7498080" cy="1371600"/>
-          </a:xfrm>
-          <a:prstGeom prst="rect">
-            <a:avLst/>
-          </a:prstGeom>
-          <a:noFill/>
-          <a:ln/>
-        </p:spPr>
-        <p:txBody>
-          <a:bodyPr wrap="square" lIns="0" tIns="0" rIns="0" bIns="0" rtlCol="0" anchor="ctr"/>
-          <a:lstStyle/>
-          <a:p>
-            <a:pPr indent="0" marL="0">
-              <a:lnSpc>
-                <a:spcPts val="2600"/>
-              </a:lnSpc>
-              <a:buNone/>
-            </a:pPr>
-            <a:r>
-              <a:rPr lang="en-US" sz="1600" b="1" dirty="0">
-                <a:solidFill>
-                  <a:srgbClr val="FFFFFF"/>
-                </a:solidFill>
-                <a:latin typeface="Arial" pitchFamily="34" charset="0"/>
-                <a:ea typeface="Arial" pitchFamily="34" charset="-122"/>
-                <a:cs typeface="Arial" pitchFamily="34" charset="-120"/>
-              </a:rPr>
-              <a:t>Итог блока — одна фраза с датой:</a:t>
-            </a:r>
-            <a:endParaRPr lang="en-US" sz="1600" dirty="0"/>
-          </a:p>
-          <a:p>
-            <a:pPr indent="0" marL="0">
-              <a:lnSpc>
-                <a:spcPts val="2600"/>
-              </a:lnSpc>
-              <a:buNone/>
-            </a:pPr>
-            <a:r>
-              <a:rPr lang="en-US" sz="1600" b="1" dirty="0">
-                <a:solidFill>
-                  <a:srgbClr val="FFFFFF"/>
-                </a:solidFill>
-                <a:latin typeface="Arial" pitchFamily="34" charset="0"/>
-                <a:ea typeface="Arial" pitchFamily="34" charset="-122"/>
-                <a:cs typeface="Arial" pitchFamily="34" charset="-120"/>
-              </a:rPr>
-              <a:t>«К [дата] мы получим [измеримый результат], проверяемый [способ проверки]»</a:t>
-            </a:r>
-            <a:endParaRPr lang="en-US" sz="1600" dirty="0"/>
-          </a:p>
-        </p:txBody>
-      </p:sp>
-      <p:sp>
-        <p:nvSpPr>
-          <p:cNvPr id="7" name="Text 5"/>
+      <p:graphicFrame>
+        <p:nvGraphicFramePr>
+          <p:cNvPr id="11" name="Table 0"/>
+          <p:cNvGraphicFramePr>
+            <a:graphicFrameLocks noGrp="1"/>
+          </p:cNvGraphicFramePr>
+          <p:nvPr>
+            <p:extLst>
+              <p:ext uri="{D42A27DB-BD31-4B8C-83A1-F6EECF244321}">
+                <p14:modId xmlns:p14="http://schemas.microsoft.com/office/powerpoint/2010/main" val="1579011935"/>
+              </p:ext>
+            </p:extLst>
+          </p:nvPr>
+        </p:nvGraphicFramePr>
+        <p:xfrm>
+          <a:off x="502920" y="1234440"/>
+          <a:ext cx="8138160" cy="914400"/>
+        </p:xfrm>
+        <a:graphic>
+          <a:graphicData uri="http://schemas.openxmlformats.org/drawingml/2006/table">
+            <a:tbl>
+              <a:tblPr/>
+              <a:tblGrid>
+                <a:gridCol w="1188720"/>
+                <a:gridCol w="3017520"/>
+                <a:gridCol w="3931920"/>
+              </a:tblGrid>
+              <a:tr h="347472">
+                <a:tc>
+                  <a:txBody>
+                    <a:bodyPr/>
+                    <a:lstStyle/>
+                    <a:p>
+                      <a:pPr algn="ctr" indent="0" marL="0">
+                        <a:buNone/>
+                      </a:pPr>
+                      <a:r>
+                        <a:rPr lang="en-US" sz="1200" b="1" dirty="0">
+                          <a:solidFill>
+                            <a:srgbClr val="FFFFFF"/>
+                          </a:solidFill>
+                          <a:latin typeface="Arial" pitchFamily="34" charset="0"/>
+                          <a:ea typeface="Arial" pitchFamily="34" charset="-122"/>
+                          <a:cs typeface="Arial" pitchFamily="34" charset="-120"/>
+                        </a:rPr>
+                        <a:t>Буква</a:t>
+                      </a:r>
+                      <a:endParaRPr lang="en-US" sz="1200" dirty="0">
+                        <a:latin typeface="Arial" charset="0"/>
+                        <a:ea typeface="Arial" charset="0"/>
+                        <a:cs typeface="Arial" charset="0"/>
+                      </a:endParaRPr>
+                    </a:p>
+                  </a:txBody>
+                  <a:tcPr marL="91440" marR="91440" marT="45720" marB="45720" anchor="ctr">
+                    <a:lnL w="6350" cap="flat" cmpd="sng" algn="ctr">
+                      <a:solidFill>
+                        <a:srgbClr val="D8DEE6"/>
+                      </a:solidFill>
+                      <a:prstDash val="solid"/>
+                      <a:round/>
+                      <a:headEnd type="none" w="med" len="med"/>
+                      <a:tailEnd type="none" w="med" len="med"/>
+                    </a:lnL>
+                    <a:lnR w="6350" cap="flat" cmpd="sng" algn="ctr">
+                      <a:solidFill>
+                        <a:srgbClr val="D8DEE6"/>
+                      </a:solidFill>
+                      <a:prstDash val="solid"/>
+                      <a:round/>
+                      <a:headEnd type="none" w="med" len="med"/>
+                      <a:tailEnd type="none" w="med" len="med"/>
+                    </a:lnR>
+                    <a:lnT w="6350" cap="flat" cmpd="sng" algn="ctr">
+                      <a:solidFill>
+                        <a:srgbClr val="D8DEE6"/>
+                      </a:solidFill>
+                      <a:prstDash val="solid"/>
+                      <a:round/>
+                      <a:headEnd type="none" w="med" len="med"/>
+                      <a:tailEnd type="none" w="med" len="med"/>
+                    </a:lnT>
+                    <a:lnB w="6350" cap="flat" cmpd="sng" algn="ctr">
+                      <a:solidFill>
+                        <a:srgbClr val="D8DEE6"/>
+                      </a:solidFill>
+                      <a:prstDash val="solid"/>
+                      <a:round/>
+                      <a:headEnd type="none" w="med" len="med"/>
+                      <a:tailEnd type="none" w="med" len="med"/>
+                    </a:lnB>
+                    <a:solidFill>
+                      <a:srgbClr val="1E4270"/>
+                    </a:solidFill>
+                  </a:tcPr>
+                </a:tc>
+                <a:tc>
+                  <a:txBody>
+                    <a:bodyPr/>
+                    <a:lstStyle/>
+                    <a:p>
+                      <a:pPr indent="0" marL="0">
+                        <a:buNone/>
+                      </a:pPr>
+                      <a:r>
+                        <a:rPr lang="en-US" sz="1200" b="1" dirty="0">
+                          <a:solidFill>
+                            <a:srgbClr val="FFFFFF"/>
+                          </a:solidFill>
+                          <a:latin typeface="Arial" pitchFamily="34" charset="0"/>
+                          <a:ea typeface="Arial" pitchFamily="34" charset="-122"/>
+                          <a:cs typeface="Arial" pitchFamily="34" charset="-120"/>
+                        </a:rPr>
+                        <a:t>Как звучит наивно</a:t>
+                      </a:r>
+                      <a:endParaRPr lang="en-US" sz="1200" dirty="0">
+                        <a:latin typeface="Arial" charset="0"/>
+                        <a:ea typeface="Arial" charset="0"/>
+                        <a:cs typeface="Arial" charset="0"/>
+                      </a:endParaRPr>
+                    </a:p>
+                  </a:txBody>
+                  <a:tcPr marL="91440" marR="91440" marT="45720" marB="45720" anchor="ctr">
+                    <a:lnL w="6350" cap="flat" cmpd="sng" algn="ctr">
+                      <a:solidFill>
+                        <a:srgbClr val="D8DEE6"/>
+                      </a:solidFill>
+                      <a:prstDash val="solid"/>
+                      <a:round/>
+                      <a:headEnd type="none" w="med" len="med"/>
+                      <a:tailEnd type="none" w="med" len="med"/>
+                    </a:lnL>
+                    <a:lnR w="6350" cap="flat" cmpd="sng" algn="ctr">
+                      <a:solidFill>
+                        <a:srgbClr val="D8DEE6"/>
+                      </a:solidFill>
+                      <a:prstDash val="solid"/>
+                      <a:round/>
+                      <a:headEnd type="none" w="med" len="med"/>
+                      <a:tailEnd type="none" w="med" len="med"/>
+                    </a:lnR>
+                    <a:lnT w="6350" cap="flat" cmpd="sng" algn="ctr">
+                      <a:solidFill>
+                        <a:srgbClr val="D8DEE6"/>
+                      </a:solidFill>
+                      <a:prstDash val="solid"/>
+                      <a:round/>
+                      <a:headEnd type="none" w="med" len="med"/>
+                      <a:tailEnd type="none" w="med" len="med"/>
+                    </a:lnT>
+                    <a:lnB w="6350" cap="flat" cmpd="sng" algn="ctr">
+                      <a:solidFill>
+                        <a:srgbClr val="D8DEE6"/>
+                      </a:solidFill>
+                      <a:prstDash val="solid"/>
+                      <a:round/>
+                      <a:headEnd type="none" w="med" len="med"/>
+                      <a:tailEnd type="none" w="med" len="med"/>
+                    </a:lnB>
+                    <a:solidFill>
+                      <a:srgbClr val="1E4270"/>
+                    </a:solidFill>
+                  </a:tcPr>
+                </a:tc>
+                <a:tc>
+                  <a:txBody>
+                    <a:bodyPr/>
+                    <a:lstStyle/>
+                    <a:p>
+                      <a:pPr indent="0" marL="0">
+                        <a:buNone/>
+                      </a:pPr>
+                      <a:r>
+                        <a:rPr lang="en-US" sz="1200" b="1" dirty="0">
+                          <a:solidFill>
+                            <a:srgbClr val="FFFFFF"/>
+                          </a:solidFill>
+                          <a:latin typeface="Arial" pitchFamily="34" charset="0"/>
+                          <a:ea typeface="Arial" pitchFamily="34" charset="-122"/>
+                          <a:cs typeface="Arial" pitchFamily="34" charset="-120"/>
+                        </a:rPr>
+                        <a:t>Дописываем на доске</a:t>
+                      </a:r>
+                      <a:endParaRPr lang="en-US" sz="1200" dirty="0">
+                        <a:latin typeface="Arial" charset="0"/>
+                        <a:ea typeface="Arial" charset="0"/>
+                        <a:cs typeface="Arial" charset="0"/>
+                      </a:endParaRPr>
+                    </a:p>
+                  </a:txBody>
+                  <a:tcPr marL="91440" marR="91440" marT="45720" marB="45720" anchor="ctr">
+                    <a:lnL w="6350" cap="flat" cmpd="sng" algn="ctr">
+                      <a:solidFill>
+                        <a:srgbClr val="D8DEE6"/>
+                      </a:solidFill>
+                      <a:prstDash val="solid"/>
+                      <a:round/>
+                      <a:headEnd type="none" w="med" len="med"/>
+                      <a:tailEnd type="none" w="med" len="med"/>
+                    </a:lnL>
+                    <a:lnR w="6350" cap="flat" cmpd="sng" algn="ctr">
+                      <a:solidFill>
+                        <a:srgbClr val="D8DEE6"/>
+                      </a:solidFill>
+                      <a:prstDash val="solid"/>
+                      <a:round/>
+                      <a:headEnd type="none" w="med" len="med"/>
+                      <a:tailEnd type="none" w="med" len="med"/>
+                    </a:lnR>
+                    <a:lnT w="6350" cap="flat" cmpd="sng" algn="ctr">
+                      <a:solidFill>
+                        <a:srgbClr val="D8DEE6"/>
+                      </a:solidFill>
+                      <a:prstDash val="solid"/>
+                      <a:round/>
+                      <a:headEnd type="none" w="med" len="med"/>
+                      <a:tailEnd type="none" w="med" len="med"/>
+                    </a:lnT>
+                    <a:lnB w="6350" cap="flat" cmpd="sng" algn="ctr">
+                      <a:solidFill>
+                        <a:srgbClr val="D8DEE6"/>
+                      </a:solidFill>
+                      <a:prstDash val="solid"/>
+                      <a:round/>
+                      <a:headEnd type="none" w="med" len="med"/>
+                      <a:tailEnd type="none" w="med" len="med"/>
+                    </a:lnB>
+                    <a:solidFill>
+                      <a:srgbClr val="1E4270"/>
+                    </a:solidFill>
+                  </a:tcPr>
+                </a:tc>
+              </a:tr>
+              <a:tr h="566928">
+                <a:tc>
+                  <a:txBody>
+                    <a:bodyPr/>
+                    <a:lstStyle/>
+                    <a:p>
+                      <a:pPr indent="0" marL="0">
+                        <a:buNone/>
+                      </a:pPr>
+                      <a:r>
+                        <a:rPr lang="en-US" sz="1200" dirty="0">
+                          <a:solidFill>
+                            <a:srgbClr val="1E293B"/>
+                          </a:solidFill>
+                          <a:latin typeface="Arial" pitchFamily="34" charset="0"/>
+                          <a:ea typeface="Arial" pitchFamily="34" charset="-122"/>
+                          <a:cs typeface="Arial" pitchFamily="34" charset="-120"/>
+                        </a:rPr>
+                        <a:t>S — Ч</a:t>
+                      </a:r>
+                      <a:endParaRPr lang="en-US" sz="1200" dirty="0">
+                        <a:latin typeface="Arial" charset="0"/>
+                        <a:ea typeface="Arial" charset="0"/>
+                        <a:cs typeface="Arial" charset="0"/>
+                      </a:endParaRPr>
+                    </a:p>
+                  </a:txBody>
+                  <a:tcPr marL="91440" marR="91440" marT="45720" marB="45720" anchor="ctr">
+                    <a:lnL w="6350" cap="flat" cmpd="sng" algn="ctr">
+                      <a:solidFill>
+                        <a:srgbClr val="D8DEE6"/>
+                      </a:solidFill>
+                      <a:prstDash val="solid"/>
+                      <a:round/>
+                      <a:headEnd type="none" w="med" len="med"/>
+                      <a:tailEnd type="none" w="med" len="med"/>
+                    </a:lnL>
+                    <a:lnR w="6350" cap="flat" cmpd="sng" algn="ctr">
+                      <a:solidFill>
+                        <a:srgbClr val="D8DEE6"/>
+                      </a:solidFill>
+                      <a:prstDash val="solid"/>
+                      <a:round/>
+                      <a:headEnd type="none" w="med" len="med"/>
+                      <a:tailEnd type="none" w="med" len="med"/>
+                    </a:lnR>
+                    <a:lnT w="6350" cap="flat" cmpd="sng" algn="ctr">
+                      <a:solidFill>
+                        <a:srgbClr val="D8DEE6"/>
+                      </a:solidFill>
+                      <a:prstDash val="solid"/>
+                      <a:round/>
+                      <a:headEnd type="none" w="med" len="med"/>
+                      <a:tailEnd type="none" w="med" len="med"/>
+                    </a:lnT>
+                    <a:lnB w="6350" cap="flat" cmpd="sng" algn="ctr">
+                      <a:solidFill>
+                        <a:srgbClr val="D8DEE6"/>
+                      </a:solidFill>
+                      <a:prstDash val="solid"/>
+                      <a:round/>
+                      <a:headEnd type="none" w="med" len="med"/>
+                      <a:tailEnd type="none" w="med" len="med"/>
+                    </a:lnB>
+                  </a:tcPr>
+                </a:tc>
+                <a:tc>
+                  <a:txBody>
+                    <a:bodyPr/>
+                    <a:lstStyle/>
+                    <a:p>
+                      <a:pPr indent="0" marL="0">
+                        <a:buNone/>
+                      </a:pPr>
+                      <a:r>
+                        <a:rPr lang="en-US" sz="1200" dirty="0">
+                          <a:solidFill>
+                            <a:srgbClr val="1E293B"/>
+                          </a:solidFill>
+                          <a:latin typeface="Arial" pitchFamily="34" charset="0"/>
+                          <a:ea typeface="Arial" pitchFamily="34" charset="-122"/>
+                          <a:cs typeface="Arial" pitchFamily="34" charset="-120"/>
+                        </a:rPr>
+                        <a:t>«Сделать умный горшок»</a:t>
+                      </a:r>
+                      <a:endParaRPr lang="en-US" sz="1200" dirty="0">
+                        <a:latin typeface="Arial" charset="0"/>
+                        <a:ea typeface="Arial" charset="0"/>
+                        <a:cs typeface="Arial" charset="0"/>
+                      </a:endParaRPr>
+                    </a:p>
+                  </a:txBody>
+                  <a:tcPr marL="91440" marR="91440" marT="45720" marB="45720" anchor="ctr">
+                    <a:lnL w="6350" cap="flat" cmpd="sng" algn="ctr">
+                      <a:solidFill>
+                        <a:srgbClr val="D8DEE6"/>
+                      </a:solidFill>
+                      <a:prstDash val="solid"/>
+                      <a:round/>
+                      <a:headEnd type="none" w="med" len="med"/>
+                      <a:tailEnd type="none" w="med" len="med"/>
+                    </a:lnL>
+                    <a:lnR w="6350" cap="flat" cmpd="sng" algn="ctr">
+                      <a:solidFill>
+                        <a:srgbClr val="D8DEE6"/>
+                      </a:solidFill>
+                      <a:prstDash val="solid"/>
+                      <a:round/>
+                      <a:headEnd type="none" w="med" len="med"/>
+                      <a:tailEnd type="none" w="med" len="med"/>
+                    </a:lnR>
+                    <a:lnT w="6350" cap="flat" cmpd="sng" algn="ctr">
+                      <a:solidFill>
+                        <a:srgbClr val="D8DEE6"/>
+                      </a:solidFill>
+                      <a:prstDash val="solid"/>
+                      <a:round/>
+                      <a:headEnd type="none" w="med" len="med"/>
+                      <a:tailEnd type="none" w="med" len="med"/>
+                    </a:lnT>
+                    <a:lnB w="6350" cap="flat" cmpd="sng" algn="ctr">
+                      <a:solidFill>
+                        <a:srgbClr val="D8DEE6"/>
+                      </a:solidFill>
+                      <a:prstDash val="solid"/>
+                      <a:round/>
+                      <a:headEnd type="none" w="med" len="med"/>
+                      <a:tailEnd type="none" w="med" len="med"/>
+                    </a:lnB>
+                  </a:tcPr>
+                </a:tc>
+                <a:tc>
+                  <a:txBody>
+                    <a:bodyPr/>
+                    <a:lstStyle/>
+                    <a:p>
+                      <a:pPr indent="0" marL="0">
+                        <a:buNone/>
+                      </a:pPr>
+                      <a:endParaRPr lang="en-US" sz="1200" dirty="0">
+                        <a:latin typeface="Arial" charset="0"/>
+                        <a:ea typeface="Arial" charset="0"/>
+                        <a:cs typeface="Arial" charset="0"/>
+                      </a:endParaRPr>
+                    </a:p>
+                  </a:txBody>
+                  <a:tcPr marL="91440" marR="91440" marT="45720" marB="45720" anchor="ctr">
+                    <a:lnL w="6350" cap="flat" cmpd="sng" algn="ctr">
+                      <a:solidFill>
+                        <a:srgbClr val="D8DEE6"/>
+                      </a:solidFill>
+                      <a:prstDash val="solid"/>
+                      <a:round/>
+                      <a:headEnd type="none" w="med" len="med"/>
+                      <a:tailEnd type="none" w="med" len="med"/>
+                    </a:lnL>
+                    <a:lnR w="6350" cap="flat" cmpd="sng" algn="ctr">
+                      <a:solidFill>
+                        <a:srgbClr val="D8DEE6"/>
+                      </a:solidFill>
+                      <a:prstDash val="solid"/>
+                      <a:round/>
+                      <a:headEnd type="none" w="med" len="med"/>
+                      <a:tailEnd type="none" w="med" len="med"/>
+                    </a:lnR>
+                    <a:lnT w="6350" cap="flat" cmpd="sng" algn="ctr">
+                      <a:solidFill>
+                        <a:srgbClr val="D8DEE6"/>
+                      </a:solidFill>
+                      <a:prstDash val="solid"/>
+                      <a:round/>
+                      <a:headEnd type="none" w="med" len="med"/>
+                      <a:tailEnd type="none" w="med" len="med"/>
+                    </a:lnT>
+                    <a:lnB w="6350" cap="flat" cmpd="sng" algn="ctr">
+                      <a:solidFill>
+                        <a:srgbClr val="D8DEE6"/>
+                      </a:solidFill>
+                      <a:prstDash val="solid"/>
+                      <a:round/>
+                      <a:headEnd type="none" w="med" len="med"/>
+                      <a:tailEnd type="none" w="med" len="med"/>
+                    </a:lnB>
+                  </a:tcPr>
+                </a:tc>
+              </a:tr>
+              <a:tr h="566928">
+                <a:tc>
+                  <a:txBody>
+                    <a:bodyPr/>
+                    <a:lstStyle/>
+                    <a:p>
+                      <a:pPr indent="0" marL="0">
+                        <a:buNone/>
+                      </a:pPr>
+                      <a:r>
+                        <a:rPr lang="en-US" sz="1200" dirty="0">
+                          <a:solidFill>
+                            <a:srgbClr val="1E293B"/>
+                          </a:solidFill>
+                          <a:latin typeface="Arial" pitchFamily="34" charset="0"/>
+                          <a:ea typeface="Arial" pitchFamily="34" charset="-122"/>
+                          <a:cs typeface="Arial" pitchFamily="34" charset="-120"/>
+                        </a:rPr>
+                        <a:t>M — И</a:t>
+                      </a:r>
+                      <a:endParaRPr lang="en-US" sz="1200" dirty="0">
+                        <a:latin typeface="Arial" charset="0"/>
+                        <a:ea typeface="Arial" charset="0"/>
+                        <a:cs typeface="Arial" charset="0"/>
+                      </a:endParaRPr>
+                    </a:p>
+                  </a:txBody>
+                  <a:tcPr marL="91440" marR="91440" marT="45720" marB="45720" anchor="ctr">
+                    <a:lnL w="6350" cap="flat" cmpd="sng" algn="ctr">
+                      <a:solidFill>
+                        <a:srgbClr val="D8DEE6"/>
+                      </a:solidFill>
+                      <a:prstDash val="solid"/>
+                      <a:round/>
+                      <a:headEnd type="none" w="med" len="med"/>
+                      <a:tailEnd type="none" w="med" len="med"/>
+                    </a:lnL>
+                    <a:lnR w="6350" cap="flat" cmpd="sng" algn="ctr">
+                      <a:solidFill>
+                        <a:srgbClr val="D8DEE6"/>
+                      </a:solidFill>
+                      <a:prstDash val="solid"/>
+                      <a:round/>
+                      <a:headEnd type="none" w="med" len="med"/>
+                      <a:tailEnd type="none" w="med" len="med"/>
+                    </a:lnR>
+                    <a:lnT w="6350" cap="flat" cmpd="sng" algn="ctr">
+                      <a:solidFill>
+                        <a:srgbClr val="D8DEE6"/>
+                      </a:solidFill>
+                      <a:prstDash val="solid"/>
+                      <a:round/>
+                      <a:headEnd type="none" w="med" len="med"/>
+                      <a:tailEnd type="none" w="med" len="med"/>
+                    </a:lnT>
+                    <a:lnB w="6350" cap="flat" cmpd="sng" algn="ctr">
+                      <a:solidFill>
+                        <a:srgbClr val="D8DEE6"/>
+                      </a:solidFill>
+                      <a:prstDash val="solid"/>
+                      <a:round/>
+                      <a:headEnd type="none" w="med" len="med"/>
+                      <a:tailEnd type="none" w="med" len="med"/>
+                    </a:lnB>
+                  </a:tcPr>
+                </a:tc>
+                <a:tc>
+                  <a:txBody>
+                    <a:bodyPr/>
+                    <a:lstStyle/>
+                    <a:p>
+                      <a:pPr indent="0" marL="0">
+                        <a:buNone/>
+                      </a:pPr>
+                      <a:r>
+                        <a:rPr lang="en-US" sz="1200" dirty="0">
+                          <a:solidFill>
+                            <a:srgbClr val="1E293B"/>
+                          </a:solidFill>
+                          <a:latin typeface="Arial" pitchFamily="34" charset="0"/>
+                          <a:ea typeface="Arial" pitchFamily="34" charset="-122"/>
+                          <a:cs typeface="Arial" pitchFamily="34" charset="-120"/>
+                        </a:rPr>
+                        <a:t>«Чтобы удобно было»</a:t>
+                      </a:r>
+                      <a:endParaRPr lang="en-US" sz="1200" dirty="0">
+                        <a:latin typeface="Arial" charset="0"/>
+                        <a:ea typeface="Arial" charset="0"/>
+                        <a:cs typeface="Arial" charset="0"/>
+                      </a:endParaRPr>
+                    </a:p>
+                  </a:txBody>
+                  <a:tcPr marL="91440" marR="91440" marT="45720" marB="45720" anchor="ctr">
+                    <a:lnL w="6350" cap="flat" cmpd="sng" algn="ctr">
+                      <a:solidFill>
+                        <a:srgbClr val="D8DEE6"/>
+                      </a:solidFill>
+                      <a:prstDash val="solid"/>
+                      <a:round/>
+                      <a:headEnd type="none" w="med" len="med"/>
+                      <a:tailEnd type="none" w="med" len="med"/>
+                    </a:lnL>
+                    <a:lnR w="6350" cap="flat" cmpd="sng" algn="ctr">
+                      <a:solidFill>
+                        <a:srgbClr val="D8DEE6"/>
+                      </a:solidFill>
+                      <a:prstDash val="solid"/>
+                      <a:round/>
+                      <a:headEnd type="none" w="med" len="med"/>
+                      <a:tailEnd type="none" w="med" len="med"/>
+                    </a:lnR>
+                    <a:lnT w="6350" cap="flat" cmpd="sng" algn="ctr">
+                      <a:solidFill>
+                        <a:srgbClr val="D8DEE6"/>
+                      </a:solidFill>
+                      <a:prstDash val="solid"/>
+                      <a:round/>
+                      <a:headEnd type="none" w="med" len="med"/>
+                      <a:tailEnd type="none" w="med" len="med"/>
+                    </a:lnT>
+                    <a:lnB w="6350" cap="flat" cmpd="sng" algn="ctr">
+                      <a:solidFill>
+                        <a:srgbClr val="D8DEE6"/>
+                      </a:solidFill>
+                      <a:prstDash val="solid"/>
+                      <a:round/>
+                      <a:headEnd type="none" w="med" len="med"/>
+                      <a:tailEnd type="none" w="med" len="med"/>
+                    </a:lnB>
+                  </a:tcPr>
+                </a:tc>
+                <a:tc>
+                  <a:txBody>
+                    <a:bodyPr/>
+                    <a:lstStyle/>
+                    <a:p>
+                      <a:pPr indent="0" marL="0">
+                        <a:buNone/>
+                      </a:pPr>
+                      <a:endParaRPr lang="en-US" sz="1200" dirty="0">
+                        <a:latin typeface="Arial" charset="0"/>
+                        <a:ea typeface="Arial" charset="0"/>
+                        <a:cs typeface="Arial" charset="0"/>
+                      </a:endParaRPr>
+                    </a:p>
+                  </a:txBody>
+                  <a:tcPr marL="91440" marR="91440" marT="45720" marB="45720" anchor="ctr">
+                    <a:lnL w="6350" cap="flat" cmpd="sng" algn="ctr">
+                      <a:solidFill>
+                        <a:srgbClr val="D8DEE6"/>
+                      </a:solidFill>
+                      <a:prstDash val="solid"/>
+                      <a:round/>
+                      <a:headEnd type="none" w="med" len="med"/>
+                      <a:tailEnd type="none" w="med" len="med"/>
+                    </a:lnL>
+                    <a:lnR w="6350" cap="flat" cmpd="sng" algn="ctr">
+                      <a:solidFill>
+                        <a:srgbClr val="D8DEE6"/>
+                      </a:solidFill>
+                      <a:prstDash val="solid"/>
+                      <a:round/>
+                      <a:headEnd type="none" w="med" len="med"/>
+                      <a:tailEnd type="none" w="med" len="med"/>
+                    </a:lnR>
+                    <a:lnT w="6350" cap="flat" cmpd="sng" algn="ctr">
+                      <a:solidFill>
+                        <a:srgbClr val="D8DEE6"/>
+                      </a:solidFill>
+                      <a:prstDash val="solid"/>
+                      <a:round/>
+                      <a:headEnd type="none" w="med" len="med"/>
+                      <a:tailEnd type="none" w="med" len="med"/>
+                    </a:lnT>
+                    <a:lnB w="6350" cap="flat" cmpd="sng" algn="ctr">
+                      <a:solidFill>
+                        <a:srgbClr val="D8DEE6"/>
+                      </a:solidFill>
+                      <a:prstDash val="solid"/>
+                      <a:round/>
+                      <a:headEnd type="none" w="med" len="med"/>
+                      <a:tailEnd type="none" w="med" len="med"/>
+                    </a:lnB>
+                  </a:tcPr>
+                </a:tc>
+              </a:tr>
+              <a:tr h="566928">
+                <a:tc>
+                  <a:txBody>
+                    <a:bodyPr/>
+                    <a:lstStyle/>
+                    <a:p>
+                      <a:pPr indent="0" marL="0">
+                        <a:buNone/>
+                      </a:pPr>
+                      <a:r>
+                        <a:rPr lang="en-US" sz="1200" dirty="0">
+                          <a:solidFill>
+                            <a:srgbClr val="1E293B"/>
+                          </a:solidFill>
+                          <a:latin typeface="Arial" pitchFamily="34" charset="0"/>
+                          <a:ea typeface="Arial" pitchFamily="34" charset="-122"/>
+                          <a:cs typeface="Arial" pitchFamily="34" charset="-120"/>
+                        </a:rPr>
+                        <a:t>A — О</a:t>
+                      </a:r>
+                      <a:endParaRPr lang="en-US" sz="1200" dirty="0">
+                        <a:latin typeface="Arial" charset="0"/>
+                        <a:ea typeface="Arial" charset="0"/>
+                        <a:cs typeface="Arial" charset="0"/>
+                      </a:endParaRPr>
+                    </a:p>
+                  </a:txBody>
+                  <a:tcPr marL="91440" marR="91440" marT="45720" marB="45720" anchor="ctr">
+                    <a:lnL w="6350" cap="flat" cmpd="sng" algn="ctr">
+                      <a:solidFill>
+                        <a:srgbClr val="D8DEE6"/>
+                      </a:solidFill>
+                      <a:prstDash val="solid"/>
+                      <a:round/>
+                      <a:headEnd type="none" w="med" len="med"/>
+                      <a:tailEnd type="none" w="med" len="med"/>
+                    </a:lnL>
+                    <a:lnR w="6350" cap="flat" cmpd="sng" algn="ctr">
+                      <a:solidFill>
+                        <a:srgbClr val="D8DEE6"/>
+                      </a:solidFill>
+                      <a:prstDash val="solid"/>
+                      <a:round/>
+                      <a:headEnd type="none" w="med" len="med"/>
+                      <a:tailEnd type="none" w="med" len="med"/>
+                    </a:lnR>
+                    <a:lnT w="6350" cap="flat" cmpd="sng" algn="ctr">
+                      <a:solidFill>
+                        <a:srgbClr val="D8DEE6"/>
+                      </a:solidFill>
+                      <a:prstDash val="solid"/>
+                      <a:round/>
+                      <a:headEnd type="none" w="med" len="med"/>
+                      <a:tailEnd type="none" w="med" len="med"/>
+                    </a:lnT>
+                    <a:lnB w="6350" cap="flat" cmpd="sng" algn="ctr">
+                      <a:solidFill>
+                        <a:srgbClr val="D8DEE6"/>
+                      </a:solidFill>
+                      <a:prstDash val="solid"/>
+                      <a:round/>
+                      <a:headEnd type="none" w="med" len="med"/>
+                      <a:tailEnd type="none" w="med" len="med"/>
+                    </a:lnB>
+                  </a:tcPr>
+                </a:tc>
+                <a:tc>
+                  <a:txBody>
+                    <a:bodyPr/>
+                    <a:lstStyle/>
+                    <a:p>
+                      <a:pPr indent="0" marL="0">
+                        <a:buNone/>
+                      </a:pPr>
+                      <a:r>
+                        <a:rPr lang="en-US" sz="1200" dirty="0">
+                          <a:solidFill>
+                            <a:srgbClr val="1E293B"/>
+                          </a:solidFill>
+                          <a:latin typeface="Arial" pitchFamily="34" charset="0"/>
+                          <a:ea typeface="Arial" pitchFamily="34" charset="-122"/>
+                          <a:cs typeface="Arial" pitchFamily="34" charset="-120"/>
+                        </a:rPr>
+                        <a:t>не проверяется вовсе</a:t>
+                      </a:r>
+                      <a:endParaRPr lang="en-US" sz="1200" dirty="0">
+                        <a:latin typeface="Arial" charset="0"/>
+                        <a:ea typeface="Arial" charset="0"/>
+                        <a:cs typeface="Arial" charset="0"/>
+                      </a:endParaRPr>
+                    </a:p>
+                  </a:txBody>
+                  <a:tcPr marL="91440" marR="91440" marT="45720" marB="45720" anchor="ctr">
+                    <a:lnL w="6350" cap="flat" cmpd="sng" algn="ctr">
+                      <a:solidFill>
+                        <a:srgbClr val="D8DEE6"/>
+                      </a:solidFill>
+                      <a:prstDash val="solid"/>
+                      <a:round/>
+                      <a:headEnd type="none" w="med" len="med"/>
+                      <a:tailEnd type="none" w="med" len="med"/>
+                    </a:lnL>
+                    <a:lnR w="6350" cap="flat" cmpd="sng" algn="ctr">
+                      <a:solidFill>
+                        <a:srgbClr val="D8DEE6"/>
+                      </a:solidFill>
+                      <a:prstDash val="solid"/>
+                      <a:round/>
+                      <a:headEnd type="none" w="med" len="med"/>
+                      <a:tailEnd type="none" w="med" len="med"/>
+                    </a:lnR>
+                    <a:lnT w="6350" cap="flat" cmpd="sng" algn="ctr">
+                      <a:solidFill>
+                        <a:srgbClr val="D8DEE6"/>
+                      </a:solidFill>
+                      <a:prstDash val="solid"/>
+                      <a:round/>
+                      <a:headEnd type="none" w="med" len="med"/>
+                      <a:tailEnd type="none" w="med" len="med"/>
+                    </a:lnT>
+                    <a:lnB w="6350" cap="flat" cmpd="sng" algn="ctr">
+                      <a:solidFill>
+                        <a:srgbClr val="D8DEE6"/>
+                      </a:solidFill>
+                      <a:prstDash val="solid"/>
+                      <a:round/>
+                      <a:headEnd type="none" w="med" len="med"/>
+                      <a:tailEnd type="none" w="med" len="med"/>
+                    </a:lnB>
+                  </a:tcPr>
+                </a:tc>
+                <a:tc>
+                  <a:txBody>
+                    <a:bodyPr/>
+                    <a:lstStyle/>
+                    <a:p>
+                      <a:pPr indent="0" marL="0">
+                        <a:buNone/>
+                      </a:pPr>
+                      <a:endParaRPr lang="en-US" sz="1200" dirty="0">
+                        <a:latin typeface="Arial" charset="0"/>
+                        <a:ea typeface="Arial" charset="0"/>
+                        <a:cs typeface="Arial" charset="0"/>
+                      </a:endParaRPr>
+                    </a:p>
+                  </a:txBody>
+                  <a:tcPr marL="91440" marR="91440" marT="45720" marB="45720" anchor="ctr">
+                    <a:lnL w="6350" cap="flat" cmpd="sng" algn="ctr">
+                      <a:solidFill>
+                        <a:srgbClr val="D8DEE6"/>
+                      </a:solidFill>
+                      <a:prstDash val="solid"/>
+                      <a:round/>
+                      <a:headEnd type="none" w="med" len="med"/>
+                      <a:tailEnd type="none" w="med" len="med"/>
+                    </a:lnL>
+                    <a:lnR w="6350" cap="flat" cmpd="sng" algn="ctr">
+                      <a:solidFill>
+                        <a:srgbClr val="D8DEE6"/>
+                      </a:solidFill>
+                      <a:prstDash val="solid"/>
+                      <a:round/>
+                      <a:headEnd type="none" w="med" len="med"/>
+                      <a:tailEnd type="none" w="med" len="med"/>
+                    </a:lnR>
+                    <a:lnT w="6350" cap="flat" cmpd="sng" algn="ctr">
+                      <a:solidFill>
+                        <a:srgbClr val="D8DEE6"/>
+                      </a:solidFill>
+                      <a:prstDash val="solid"/>
+                      <a:round/>
+                      <a:headEnd type="none" w="med" len="med"/>
+                      <a:tailEnd type="none" w="med" len="med"/>
+                    </a:lnT>
+                    <a:lnB w="6350" cap="flat" cmpd="sng" algn="ctr">
+                      <a:solidFill>
+                        <a:srgbClr val="D8DEE6"/>
+                      </a:solidFill>
+                      <a:prstDash val="solid"/>
+                      <a:round/>
+                      <a:headEnd type="none" w="med" len="med"/>
+                      <a:tailEnd type="none" w="med" len="med"/>
+                    </a:lnB>
+                  </a:tcPr>
+                </a:tc>
+              </a:tr>
+              <a:tr h="566928">
+                <a:tc>
+                  <a:txBody>
+                    <a:bodyPr/>
+                    <a:lstStyle/>
+                    <a:p>
+                      <a:pPr indent="0" marL="0">
+                        <a:buNone/>
+                      </a:pPr>
+                      <a:r>
+                        <a:rPr lang="en-US" sz="1200" dirty="0">
+                          <a:solidFill>
+                            <a:srgbClr val="1E293B"/>
+                          </a:solidFill>
+                          <a:latin typeface="Arial" pitchFamily="34" charset="0"/>
+                          <a:ea typeface="Arial" pitchFamily="34" charset="-122"/>
+                          <a:cs typeface="Arial" pitchFamily="34" charset="-120"/>
+                        </a:rPr>
+                        <a:t>R — Т</a:t>
+                      </a:r>
+                      <a:endParaRPr lang="en-US" sz="1200" dirty="0">
+                        <a:latin typeface="Arial" charset="0"/>
+                        <a:ea typeface="Arial" charset="0"/>
+                        <a:cs typeface="Arial" charset="0"/>
+                      </a:endParaRPr>
+                    </a:p>
+                  </a:txBody>
+                  <a:tcPr marL="91440" marR="91440" marT="45720" marB="45720" anchor="ctr">
+                    <a:lnL w="6350" cap="flat" cmpd="sng" algn="ctr">
+                      <a:solidFill>
+                        <a:srgbClr val="D8DEE6"/>
+                      </a:solidFill>
+                      <a:prstDash val="solid"/>
+                      <a:round/>
+                      <a:headEnd type="none" w="med" len="med"/>
+                      <a:tailEnd type="none" w="med" len="med"/>
+                    </a:lnL>
+                    <a:lnR w="6350" cap="flat" cmpd="sng" algn="ctr">
+                      <a:solidFill>
+                        <a:srgbClr val="D8DEE6"/>
+                      </a:solidFill>
+                      <a:prstDash val="solid"/>
+                      <a:round/>
+                      <a:headEnd type="none" w="med" len="med"/>
+                      <a:tailEnd type="none" w="med" len="med"/>
+                    </a:lnR>
+                    <a:lnT w="6350" cap="flat" cmpd="sng" algn="ctr">
+                      <a:solidFill>
+                        <a:srgbClr val="D8DEE6"/>
+                      </a:solidFill>
+                      <a:prstDash val="solid"/>
+                      <a:round/>
+                      <a:headEnd type="none" w="med" len="med"/>
+                      <a:tailEnd type="none" w="med" len="med"/>
+                    </a:lnT>
+                    <a:lnB w="6350" cap="flat" cmpd="sng" algn="ctr">
+                      <a:solidFill>
+                        <a:srgbClr val="D8DEE6"/>
+                      </a:solidFill>
+                      <a:prstDash val="solid"/>
+                      <a:round/>
+                      <a:headEnd type="none" w="med" len="med"/>
+                      <a:tailEnd type="none" w="med" len="med"/>
+                    </a:lnB>
+                  </a:tcPr>
+                </a:tc>
+                <a:tc>
+                  <a:txBody>
+                    <a:bodyPr/>
+                    <a:lstStyle/>
+                    <a:p>
+                      <a:pPr indent="0" marL="0">
+                        <a:buNone/>
+                      </a:pPr>
+                      <a:r>
+                        <a:rPr lang="en-US" sz="1200" dirty="0">
+                          <a:solidFill>
+                            <a:srgbClr val="1E293B"/>
+                          </a:solidFill>
+                          <a:latin typeface="Arial" pitchFamily="34" charset="0"/>
+                          <a:ea typeface="Arial" pitchFamily="34" charset="-122"/>
+                          <a:cs typeface="Arial" pitchFamily="34" charset="-120"/>
+                        </a:rPr>
+                        <a:t>не проверяется вовсе</a:t>
+                      </a:r>
+                      <a:endParaRPr lang="en-US" sz="1200" dirty="0">
+                        <a:latin typeface="Arial" charset="0"/>
+                        <a:ea typeface="Arial" charset="0"/>
+                        <a:cs typeface="Arial" charset="0"/>
+                      </a:endParaRPr>
+                    </a:p>
+                  </a:txBody>
+                  <a:tcPr marL="91440" marR="91440" marT="45720" marB="45720" anchor="ctr">
+                    <a:lnL w="6350" cap="flat" cmpd="sng" algn="ctr">
+                      <a:solidFill>
+                        <a:srgbClr val="D8DEE6"/>
+                      </a:solidFill>
+                      <a:prstDash val="solid"/>
+                      <a:round/>
+                      <a:headEnd type="none" w="med" len="med"/>
+                      <a:tailEnd type="none" w="med" len="med"/>
+                    </a:lnL>
+                    <a:lnR w="6350" cap="flat" cmpd="sng" algn="ctr">
+                      <a:solidFill>
+                        <a:srgbClr val="D8DEE6"/>
+                      </a:solidFill>
+                      <a:prstDash val="solid"/>
+                      <a:round/>
+                      <a:headEnd type="none" w="med" len="med"/>
+                      <a:tailEnd type="none" w="med" len="med"/>
+                    </a:lnR>
+                    <a:lnT w="6350" cap="flat" cmpd="sng" algn="ctr">
+                      <a:solidFill>
+                        <a:srgbClr val="D8DEE6"/>
+                      </a:solidFill>
+                      <a:prstDash val="solid"/>
+                      <a:round/>
+                      <a:headEnd type="none" w="med" len="med"/>
+                      <a:tailEnd type="none" w="med" len="med"/>
+                    </a:lnT>
+                    <a:lnB w="6350" cap="flat" cmpd="sng" algn="ctr">
+                      <a:solidFill>
+                        <a:srgbClr val="D8DEE6"/>
+                      </a:solidFill>
+                      <a:prstDash val="solid"/>
+                      <a:round/>
+                      <a:headEnd type="none" w="med" len="med"/>
+                      <a:tailEnd type="none" w="med" len="med"/>
+                    </a:lnB>
+                  </a:tcPr>
+                </a:tc>
+                <a:tc>
+                  <a:txBody>
+                    <a:bodyPr/>
+                    <a:lstStyle/>
+                    <a:p>
+                      <a:pPr indent="0" marL="0">
+                        <a:buNone/>
+                      </a:pPr>
+                      <a:endParaRPr lang="en-US" sz="1200" dirty="0">
+                        <a:latin typeface="Arial" charset="0"/>
+                        <a:ea typeface="Arial" charset="0"/>
+                        <a:cs typeface="Arial" charset="0"/>
+                      </a:endParaRPr>
+                    </a:p>
+                  </a:txBody>
+                  <a:tcPr marL="91440" marR="91440" marT="45720" marB="45720" anchor="ctr">
+                    <a:lnL w="6350" cap="flat" cmpd="sng" algn="ctr">
+                      <a:solidFill>
+                        <a:srgbClr val="D8DEE6"/>
+                      </a:solidFill>
+                      <a:prstDash val="solid"/>
+                      <a:round/>
+                      <a:headEnd type="none" w="med" len="med"/>
+                      <a:tailEnd type="none" w="med" len="med"/>
+                    </a:lnL>
+                    <a:lnR w="6350" cap="flat" cmpd="sng" algn="ctr">
+                      <a:solidFill>
+                        <a:srgbClr val="D8DEE6"/>
+                      </a:solidFill>
+                      <a:prstDash val="solid"/>
+                      <a:round/>
+                      <a:headEnd type="none" w="med" len="med"/>
+                      <a:tailEnd type="none" w="med" len="med"/>
+                    </a:lnR>
+                    <a:lnT w="6350" cap="flat" cmpd="sng" algn="ctr">
+                      <a:solidFill>
+                        <a:srgbClr val="D8DEE6"/>
+                      </a:solidFill>
+                      <a:prstDash val="solid"/>
+                      <a:round/>
+                      <a:headEnd type="none" w="med" len="med"/>
+                      <a:tailEnd type="none" w="med" len="med"/>
+                    </a:lnT>
+                    <a:lnB w="6350" cap="flat" cmpd="sng" algn="ctr">
+                      <a:solidFill>
+                        <a:srgbClr val="D8DEE6"/>
+                      </a:solidFill>
+                      <a:prstDash val="solid"/>
+                      <a:round/>
+                      <a:headEnd type="none" w="med" len="med"/>
+                      <a:tailEnd type="none" w="med" len="med"/>
+                    </a:lnB>
+                  </a:tcPr>
+                </a:tc>
+              </a:tr>
+              <a:tr h="566928">
+                <a:tc>
+                  <a:txBody>
+                    <a:bodyPr/>
+                    <a:lstStyle/>
+                    <a:p>
+                      <a:pPr indent="0" marL="0">
+                        <a:buNone/>
+                      </a:pPr>
+                      <a:r>
+                        <a:rPr lang="en-US" sz="1200" dirty="0">
+                          <a:solidFill>
+                            <a:srgbClr val="1E293B"/>
+                          </a:solidFill>
+                          <a:latin typeface="Arial" pitchFamily="34" charset="0"/>
+                          <a:ea typeface="Arial" pitchFamily="34" charset="-122"/>
+                          <a:cs typeface="Arial" pitchFamily="34" charset="-120"/>
+                        </a:rPr>
+                        <a:t>T — С</a:t>
+                      </a:r>
+                      <a:endParaRPr lang="en-US" sz="1200" dirty="0">
+                        <a:latin typeface="Arial" charset="0"/>
+                        <a:ea typeface="Arial" charset="0"/>
+                        <a:cs typeface="Arial" charset="0"/>
+                      </a:endParaRPr>
+                    </a:p>
+                  </a:txBody>
+                  <a:tcPr marL="91440" marR="91440" marT="45720" marB="45720" anchor="ctr">
+                    <a:lnL w="6350" cap="flat" cmpd="sng" algn="ctr">
+                      <a:solidFill>
+                        <a:srgbClr val="D8DEE6"/>
+                      </a:solidFill>
+                      <a:prstDash val="solid"/>
+                      <a:round/>
+                      <a:headEnd type="none" w="med" len="med"/>
+                      <a:tailEnd type="none" w="med" len="med"/>
+                    </a:lnL>
+                    <a:lnR w="6350" cap="flat" cmpd="sng" algn="ctr">
+                      <a:solidFill>
+                        <a:srgbClr val="D8DEE6"/>
+                      </a:solidFill>
+                      <a:prstDash val="solid"/>
+                      <a:round/>
+                      <a:headEnd type="none" w="med" len="med"/>
+                      <a:tailEnd type="none" w="med" len="med"/>
+                    </a:lnR>
+                    <a:lnT w="6350" cap="flat" cmpd="sng" algn="ctr">
+                      <a:solidFill>
+                        <a:srgbClr val="D8DEE6"/>
+                      </a:solidFill>
+                      <a:prstDash val="solid"/>
+                      <a:round/>
+                      <a:headEnd type="none" w="med" len="med"/>
+                      <a:tailEnd type="none" w="med" len="med"/>
+                    </a:lnT>
+                    <a:lnB w="6350" cap="flat" cmpd="sng" algn="ctr">
+                      <a:solidFill>
+                        <a:srgbClr val="D8DEE6"/>
+                      </a:solidFill>
+                      <a:prstDash val="solid"/>
+                      <a:round/>
+                      <a:headEnd type="none" w="med" len="med"/>
+                      <a:tailEnd type="none" w="med" len="med"/>
+                    </a:lnB>
+                  </a:tcPr>
+                </a:tc>
+                <a:tc>
+                  <a:txBody>
+                    <a:bodyPr/>
+                    <a:lstStyle/>
+                    <a:p>
+                      <a:pPr indent="0" marL="0">
+                        <a:buNone/>
+                      </a:pPr>
+                      <a:r>
+                        <a:rPr lang="en-US" sz="1200" dirty="0">
+                          <a:solidFill>
+                            <a:srgbClr val="1E293B"/>
+                          </a:solidFill>
+                          <a:latin typeface="Arial" pitchFamily="34" charset="0"/>
+                          <a:ea typeface="Arial" pitchFamily="34" charset="-122"/>
+                          <a:cs typeface="Arial" pitchFamily="34" charset="-120"/>
+                        </a:rPr>
+                        <a:t>«В течение семестра»</a:t>
+                      </a:r>
+                      <a:endParaRPr lang="en-US" sz="1200" dirty="0">
+                        <a:latin typeface="Arial" charset="0"/>
+                        <a:ea typeface="Arial" charset="0"/>
+                        <a:cs typeface="Arial" charset="0"/>
+                      </a:endParaRPr>
+                    </a:p>
+                  </a:txBody>
+                  <a:tcPr marL="91440" marR="91440" marT="45720" marB="45720" anchor="ctr">
+                    <a:lnL w="6350" cap="flat" cmpd="sng" algn="ctr">
+                      <a:solidFill>
+                        <a:srgbClr val="D8DEE6"/>
+                      </a:solidFill>
+                      <a:prstDash val="solid"/>
+                      <a:round/>
+                      <a:headEnd type="none" w="med" len="med"/>
+                      <a:tailEnd type="none" w="med" len="med"/>
+                    </a:lnL>
+                    <a:lnR w="6350" cap="flat" cmpd="sng" algn="ctr">
+                      <a:solidFill>
+                        <a:srgbClr val="D8DEE6"/>
+                      </a:solidFill>
+                      <a:prstDash val="solid"/>
+                      <a:round/>
+                      <a:headEnd type="none" w="med" len="med"/>
+                      <a:tailEnd type="none" w="med" len="med"/>
+                    </a:lnR>
+                    <a:lnT w="6350" cap="flat" cmpd="sng" algn="ctr">
+                      <a:solidFill>
+                        <a:srgbClr val="D8DEE6"/>
+                      </a:solidFill>
+                      <a:prstDash val="solid"/>
+                      <a:round/>
+                      <a:headEnd type="none" w="med" len="med"/>
+                      <a:tailEnd type="none" w="med" len="med"/>
+                    </a:lnT>
+                    <a:lnB w="6350" cap="flat" cmpd="sng" algn="ctr">
+                      <a:solidFill>
+                        <a:srgbClr val="D8DEE6"/>
+                      </a:solidFill>
+                      <a:prstDash val="solid"/>
+                      <a:round/>
+                      <a:headEnd type="none" w="med" len="med"/>
+                      <a:tailEnd type="none" w="med" len="med"/>
+                    </a:lnB>
+                  </a:tcPr>
+                </a:tc>
+                <a:tc>
+                  <a:txBody>
+                    <a:bodyPr/>
+                    <a:lstStyle/>
+                    <a:p>
+                      <a:pPr indent="0" marL="0">
+                        <a:buNone/>
+                      </a:pPr>
+                      <a:endParaRPr lang="en-US" sz="1200" dirty="0">
+                        <a:latin typeface="Arial" charset="0"/>
+                        <a:ea typeface="Arial" charset="0"/>
+                        <a:cs typeface="Arial" charset="0"/>
+                      </a:endParaRPr>
+                    </a:p>
+                  </a:txBody>
+                  <a:tcPr marL="91440" marR="91440" marT="45720" marB="45720" anchor="ctr">
+                    <a:lnL w="6350" cap="flat" cmpd="sng" algn="ctr">
+                      <a:solidFill>
+                        <a:srgbClr val="D8DEE6"/>
+                      </a:solidFill>
+                      <a:prstDash val="solid"/>
+                      <a:round/>
+                      <a:headEnd type="none" w="med" len="med"/>
+                      <a:tailEnd type="none" w="med" len="med"/>
+                    </a:lnL>
+                    <a:lnR w="6350" cap="flat" cmpd="sng" algn="ctr">
+                      <a:solidFill>
+                        <a:srgbClr val="D8DEE6"/>
+                      </a:solidFill>
+                      <a:prstDash val="solid"/>
+                      <a:round/>
+                      <a:headEnd type="none" w="med" len="med"/>
+                      <a:tailEnd type="none" w="med" len="med"/>
+                    </a:lnR>
+                    <a:lnT w="6350" cap="flat" cmpd="sng" algn="ctr">
+                      <a:solidFill>
+                        <a:srgbClr val="D8DEE6"/>
+                      </a:solidFill>
+                      <a:prstDash val="solid"/>
+                      <a:round/>
+                      <a:headEnd type="none" w="med" len="med"/>
+                      <a:tailEnd type="none" w="med" len="med"/>
+                    </a:lnT>
+                    <a:lnB w="6350" cap="flat" cmpd="sng" algn="ctr">
+                      <a:solidFill>
+                        <a:srgbClr val="D8DEE6"/>
+                      </a:solidFill>
+                      <a:prstDash val="solid"/>
+                      <a:round/>
+                      <a:headEnd type="none" w="med" len="med"/>
+                      <a:tailEnd type="none" w="med" len="med"/>
+                    </a:lnB>
+                  </a:tcPr>
+                </a:tc>
+              </a:tr>
+            </a:tbl>
+          </a:graphicData>
+        </a:graphic>
+      </p:graphicFrame>
+      <p:sp>
+        <p:nvSpPr>
+          <p:cNvPr id="7" name="Text 4"/>
           <p:cNvSpPr txBox="1"/>
           <p:nvPr/>
         </p:nvSpPr>
         <p:spPr>
           <a:xfrm>
             <a:off x="502920" y="4160520"/>
-            <a:ext cx="8138160" cy="548640"/>
+            <a:ext cx="8138160" cy="365760"/>
           </a:xfrm>
           <a:prstGeom prst="rect">
             <a:avLst/>
@@ -2287,7 +3582,7 @@
                 <a:ea typeface="Arial" pitchFamily="34" charset="-122"/>
                 <a:cs typeface="Arial" pitchFamily="34" charset="-120"/>
               </a:rPr>
-              <a:t>💡 Цель без даты или «в конце семестра» — не Time-bound. Требуйте число.</a:t>
+              <a:t>Итоговая фраза собирается из правого столбца: «К [дата] мы получим [измеримый результат], проверяемый [способ проверки]»</a:t>
             </a:r>
             <a:endParaRPr lang="en-US" sz="1200" dirty="0"/>
           </a:p>
@@ -2333,6 +3628,45 @@
         </p:nvSpPr>
         <p:spPr>
           <a:xfrm>
+            <a:off x="7543800" y="4736592"/>
+            <a:ext cx="1097280" cy="256032"/>
+          </a:xfrm>
+          <a:prstGeom prst="rect">
+            <a:avLst/>
+          </a:prstGeom>
+          <a:noFill/>
+          <a:ln/>
+        </p:spPr>
+        <p:txBody>
+          <a:bodyPr wrap="square" lIns="0" tIns="0" rIns="0" bIns="0" rtlCol="0" anchor="ctr"/>
+          <a:lstStyle/>
+          <a:p>
+            <a:pPr algn="r" indent="0" marL="0">
+              <a:buNone/>
+            </a:pPr>
+            <a:r>
+              <a:rPr lang="en-US" sz="1000" dirty="0">
+                <a:solidFill>
+                  <a:srgbClr val="64748B"/>
+                </a:solidFill>
+                <a:latin typeface="Arial" pitchFamily="34" charset="0"/>
+                <a:ea typeface="Arial" pitchFamily="34" charset="-122"/>
+                <a:cs typeface="Arial" pitchFamily="34" charset="-120"/>
+              </a:rPr>
+              <a:t>11 / 14</a:t>
+            </a:r>
+            <a:endParaRPr lang="en-US" sz="1000" dirty="0"/>
+          </a:p>
+        </p:txBody>
+      </p:sp>
+      <p:sp>
+        <p:nvSpPr>
+          <p:cNvPr id="3" name="Text 1"/>
+          <p:cNvSpPr txBox="1"/>
+          <p:nvPr/>
+        </p:nvSpPr>
+        <p:spPr>
+          <a:xfrm>
             <a:off x="502920" y="182880"/>
             <a:ext cx="8138160" cy="219456"/>
           </a:xfrm>
@@ -2358,7 +3692,7 @@
                 <a:ea typeface="Arial" pitchFamily="34" charset="-122"/>
                 <a:cs typeface="Arial" pitchFamily="34" charset="-120"/>
               </a:rPr>
-              <a:t>75–85 МИН</a:t>
+              <a:t>ОБРАЗЕЦ · ТАК ЭТО ВЫГЛЯДИТ ЦЕЛИКОМ</a:t>
             </a:r>
             <a:endParaRPr lang="en-US" sz="1100" dirty="0"/>
           </a:p>
@@ -2366,14 +3700,14 @@
       </p:sp>
       <p:sp>
         <p:nvSpPr>
-          <p:cNvPr id="3" name="Text 1"/>
+          <p:cNvPr id="4" name="Text 2"/>
           <p:cNvSpPr txBox="1"/>
           <p:nvPr/>
         </p:nvSpPr>
         <p:spPr>
           <a:xfrm>
             <a:off x="502920" y="365760"/>
-            <a:ext cx="8138160" cy="640080"/>
+            <a:ext cx="8138160" cy="502920"/>
           </a:xfrm>
           <a:prstGeom prst="rect">
             <a:avLst/>
@@ -2389,7 +3723,7 @@
               <a:buNone/>
             </a:pPr>
             <a:r>
-              <a:rPr lang="en-US" sz="2700" b="1" dirty="0">
+              <a:rPr lang="en-US" sz="2400" b="1" dirty="0">
                 <a:solidFill>
                   <a:srgbClr val="005AAA"/>
                 </a:solidFill>
@@ -2397,30 +3731,858 @@
                 <a:ea typeface="Arial" pitchFamily="34" charset="-122"/>
                 <a:cs typeface="Arial" pitchFamily="34" charset="-120"/>
               </a:rPr>
-              <a:t>Соседняя команда ищет слабое место</a:t>
+              <a:t>Развёрнутая SMART-цель: умный горшок</a:t>
             </a:r>
-            <a:endParaRPr lang="en-US" sz="2700" dirty="0"/>
+            <a:endParaRPr lang="en-US" sz="2400" dirty="0"/>
           </a:p>
         </p:txBody>
       </p:sp>
-      <p:sp>
-        <p:nvSpPr>
-          <p:cNvPr id="4" name="Shape 2"/>
+      <p:graphicFrame>
+        <p:nvGraphicFramePr>
+          <p:cNvPr id="12" name="Table 0"/>
+          <p:cNvGraphicFramePr>
+            <a:graphicFrameLocks noGrp="1"/>
+          </p:cNvGraphicFramePr>
+          <p:nvPr>
+            <p:extLst>
+              <p:ext uri="{D42A27DB-BD31-4B8C-83A1-F6EECF244321}">
+                <p14:modId xmlns:p14="http://schemas.microsoft.com/office/powerpoint/2010/main" val="1579011935"/>
+              </p:ext>
+            </p:extLst>
+          </p:nvPr>
+        </p:nvGraphicFramePr>
+        <p:xfrm>
+          <a:off x="502920" y="960120"/>
+          <a:ext cx="8138160" cy="914400"/>
+        </p:xfrm>
+        <a:graphic>
+          <a:graphicData uri="http://schemas.openxmlformats.org/drawingml/2006/table">
+            <a:tbl>
+              <a:tblPr/>
+              <a:tblGrid>
+                <a:gridCol w="822960"/>
+                <a:gridCol w="7315200"/>
+              </a:tblGrid>
+              <a:tr h="310896">
+                <a:tc>
+                  <a:txBody>
+                    <a:bodyPr/>
+                    <a:lstStyle/>
+                    <a:p>
+                      <a:pPr algn="ctr" indent="0" marL="0">
+                        <a:buNone/>
+                      </a:pPr>
+                      <a:r>
+                        <a:rPr lang="en-US" sz="1150" b="1" dirty="0">
+                          <a:solidFill>
+                            <a:srgbClr val="FFFFFF"/>
+                          </a:solidFill>
+                          <a:latin typeface="Arial" pitchFamily="34" charset="0"/>
+                          <a:ea typeface="Arial" pitchFamily="34" charset="-122"/>
+                          <a:cs typeface="Arial" pitchFamily="34" charset="-120"/>
+                        </a:rPr>
+                        <a:t>Буква</a:t>
+                      </a:r>
+                      <a:endParaRPr lang="en-US" sz="1150" dirty="0">
+                        <a:latin typeface="Arial" charset="0"/>
+                        <a:ea typeface="Arial" charset="0"/>
+                        <a:cs typeface="Arial" charset="0"/>
+                      </a:endParaRPr>
+                    </a:p>
+                  </a:txBody>
+                  <a:tcPr marL="91440" marR="91440" marT="45720" marB="45720" anchor="ctr">
+                    <a:lnL w="6350" cap="flat" cmpd="sng" algn="ctr">
+                      <a:solidFill>
+                        <a:srgbClr val="D8DEE6"/>
+                      </a:solidFill>
+                      <a:prstDash val="solid"/>
+                      <a:round/>
+                      <a:headEnd type="none" w="med" len="med"/>
+                      <a:tailEnd type="none" w="med" len="med"/>
+                    </a:lnL>
+                    <a:lnR w="6350" cap="flat" cmpd="sng" algn="ctr">
+                      <a:solidFill>
+                        <a:srgbClr val="D8DEE6"/>
+                      </a:solidFill>
+                      <a:prstDash val="solid"/>
+                      <a:round/>
+                      <a:headEnd type="none" w="med" len="med"/>
+                      <a:tailEnd type="none" w="med" len="med"/>
+                    </a:lnR>
+                    <a:lnT w="6350" cap="flat" cmpd="sng" algn="ctr">
+                      <a:solidFill>
+                        <a:srgbClr val="D8DEE6"/>
+                      </a:solidFill>
+                      <a:prstDash val="solid"/>
+                      <a:round/>
+                      <a:headEnd type="none" w="med" len="med"/>
+                      <a:tailEnd type="none" w="med" len="med"/>
+                    </a:lnT>
+                    <a:lnB w="6350" cap="flat" cmpd="sng" algn="ctr">
+                      <a:solidFill>
+                        <a:srgbClr val="D8DEE6"/>
+                      </a:solidFill>
+                      <a:prstDash val="solid"/>
+                      <a:round/>
+                      <a:headEnd type="none" w="med" len="med"/>
+                      <a:tailEnd type="none" w="med" len="med"/>
+                    </a:lnB>
+                    <a:solidFill>
+                      <a:srgbClr val="1E4270"/>
+                    </a:solidFill>
+                  </a:tcPr>
+                </a:tc>
+                <a:tc>
+                  <a:txBody>
+                    <a:bodyPr/>
+                    <a:lstStyle/>
+                    <a:p>
+                      <a:pPr indent="0" marL="0">
+                        <a:buNone/>
+                      </a:pPr>
+                      <a:r>
+                        <a:rPr lang="en-US" sz="1150" b="1" dirty="0">
+                          <a:solidFill>
+                            <a:srgbClr val="FFFFFF"/>
+                          </a:solidFill>
+                          <a:latin typeface="Arial" pitchFamily="34" charset="0"/>
+                          <a:ea typeface="Arial" pitchFamily="34" charset="-122"/>
+                          <a:cs typeface="Arial" pitchFamily="34" charset="-120"/>
+                        </a:rPr>
+                        <a:t>Развёрнутая формулировка</a:t>
+                      </a:r>
+                      <a:endParaRPr lang="en-US" sz="1150" dirty="0">
+                        <a:latin typeface="Arial" charset="0"/>
+                        <a:ea typeface="Arial" charset="0"/>
+                        <a:cs typeface="Arial" charset="0"/>
+                      </a:endParaRPr>
+                    </a:p>
+                  </a:txBody>
+                  <a:tcPr marL="91440" marR="91440" marT="45720" marB="45720" anchor="ctr">
+                    <a:lnL w="6350" cap="flat" cmpd="sng" algn="ctr">
+                      <a:solidFill>
+                        <a:srgbClr val="D8DEE6"/>
+                      </a:solidFill>
+                      <a:prstDash val="solid"/>
+                      <a:round/>
+                      <a:headEnd type="none" w="med" len="med"/>
+                      <a:tailEnd type="none" w="med" len="med"/>
+                    </a:lnL>
+                    <a:lnR w="6350" cap="flat" cmpd="sng" algn="ctr">
+                      <a:solidFill>
+                        <a:srgbClr val="D8DEE6"/>
+                      </a:solidFill>
+                      <a:prstDash val="solid"/>
+                      <a:round/>
+                      <a:headEnd type="none" w="med" len="med"/>
+                      <a:tailEnd type="none" w="med" len="med"/>
+                    </a:lnR>
+                    <a:lnT w="6350" cap="flat" cmpd="sng" algn="ctr">
+                      <a:solidFill>
+                        <a:srgbClr val="D8DEE6"/>
+                      </a:solidFill>
+                      <a:prstDash val="solid"/>
+                      <a:round/>
+                      <a:headEnd type="none" w="med" len="med"/>
+                      <a:tailEnd type="none" w="med" len="med"/>
+                    </a:lnT>
+                    <a:lnB w="6350" cap="flat" cmpd="sng" algn="ctr">
+                      <a:solidFill>
+                        <a:srgbClr val="D8DEE6"/>
+                      </a:solidFill>
+                      <a:prstDash val="solid"/>
+                      <a:round/>
+                      <a:headEnd type="none" w="med" len="med"/>
+                      <a:tailEnd type="none" w="med" len="med"/>
+                    </a:lnB>
+                    <a:solidFill>
+                      <a:srgbClr val="1E4270"/>
+                    </a:solidFill>
+                  </a:tcPr>
+                </a:tc>
+              </a:tr>
+              <a:tr h="548640">
+                <a:tc>
+                  <a:txBody>
+                    <a:bodyPr/>
+                    <a:lstStyle/>
+                    <a:p>
+                      <a:pPr indent="0" marL="0">
+                        <a:buNone/>
+                      </a:pPr>
+                      <a:r>
+                        <a:rPr lang="en-US" sz="1150" dirty="0">
+                          <a:solidFill>
+                            <a:srgbClr val="1E293B"/>
+                          </a:solidFill>
+                          <a:latin typeface="Arial" pitchFamily="34" charset="0"/>
+                          <a:ea typeface="Arial" pitchFamily="34" charset="-122"/>
+                          <a:cs typeface="Arial" pitchFamily="34" charset="-120"/>
+                        </a:rPr>
+                        <a:t>S</a:t>
+                      </a:r>
+                      <a:endParaRPr lang="en-US" sz="1150" dirty="0">
+                        <a:latin typeface="Arial" charset="0"/>
+                        <a:ea typeface="Arial" charset="0"/>
+                        <a:cs typeface="Arial" charset="0"/>
+                      </a:endParaRPr>
+                    </a:p>
+                  </a:txBody>
+                  <a:tcPr marL="91440" marR="91440" marT="45720" marB="45720" anchor="ctr">
+                    <a:lnL w="6350" cap="flat" cmpd="sng" algn="ctr">
+                      <a:solidFill>
+                        <a:srgbClr val="D8DEE6"/>
+                      </a:solidFill>
+                      <a:prstDash val="solid"/>
+                      <a:round/>
+                      <a:headEnd type="none" w="med" len="med"/>
+                      <a:tailEnd type="none" w="med" len="med"/>
+                    </a:lnL>
+                    <a:lnR w="6350" cap="flat" cmpd="sng" algn="ctr">
+                      <a:solidFill>
+                        <a:srgbClr val="D8DEE6"/>
+                      </a:solidFill>
+                      <a:prstDash val="solid"/>
+                      <a:round/>
+                      <a:headEnd type="none" w="med" len="med"/>
+                      <a:tailEnd type="none" w="med" len="med"/>
+                    </a:lnR>
+                    <a:lnT w="6350" cap="flat" cmpd="sng" algn="ctr">
+                      <a:solidFill>
+                        <a:srgbClr val="D8DEE6"/>
+                      </a:solidFill>
+                      <a:prstDash val="solid"/>
+                      <a:round/>
+                      <a:headEnd type="none" w="med" len="med"/>
+                      <a:tailEnd type="none" w="med" len="med"/>
+                    </a:lnT>
+                    <a:lnB w="6350" cap="flat" cmpd="sng" algn="ctr">
+                      <a:solidFill>
+                        <a:srgbClr val="D8DEE6"/>
+                      </a:solidFill>
+                      <a:prstDash val="solid"/>
+                      <a:round/>
+                      <a:headEnd type="none" w="med" len="med"/>
+                      <a:tailEnd type="none" w="med" len="med"/>
+                    </a:lnB>
+                  </a:tcPr>
+                </a:tc>
+                <a:tc>
+                  <a:txBody>
+                    <a:bodyPr/>
+                    <a:lstStyle/>
+                    <a:p>
+                      <a:pPr indent="0" marL="0">
+                        <a:buNone/>
+                      </a:pPr>
+                      <a:r>
+                        <a:rPr lang="en-US" sz="1150" dirty="0">
+                          <a:solidFill>
+                            <a:srgbClr val="1E293B"/>
+                          </a:solidFill>
+                          <a:latin typeface="Arial" pitchFamily="34" charset="0"/>
+                          <a:ea typeface="Arial" pitchFamily="34" charset="-122"/>
+                          <a:cs typeface="Arial" pitchFamily="34" charset="-120"/>
+                        </a:rPr>
+                        <a:t>Прототип горшка со встроенным датчиком влажности почвы и световым индикатором «сухо / норма / перелив»</a:t>
+                      </a:r>
+                      <a:endParaRPr lang="en-US" sz="1150" dirty="0">
+                        <a:latin typeface="Arial" charset="0"/>
+                        <a:ea typeface="Arial" charset="0"/>
+                        <a:cs typeface="Arial" charset="0"/>
+                      </a:endParaRPr>
+                    </a:p>
+                  </a:txBody>
+                  <a:tcPr marL="91440" marR="91440" marT="45720" marB="45720" anchor="ctr">
+                    <a:lnL w="6350" cap="flat" cmpd="sng" algn="ctr">
+                      <a:solidFill>
+                        <a:srgbClr val="D8DEE6"/>
+                      </a:solidFill>
+                      <a:prstDash val="solid"/>
+                      <a:round/>
+                      <a:headEnd type="none" w="med" len="med"/>
+                      <a:tailEnd type="none" w="med" len="med"/>
+                    </a:lnL>
+                    <a:lnR w="6350" cap="flat" cmpd="sng" algn="ctr">
+                      <a:solidFill>
+                        <a:srgbClr val="D8DEE6"/>
+                      </a:solidFill>
+                      <a:prstDash val="solid"/>
+                      <a:round/>
+                      <a:headEnd type="none" w="med" len="med"/>
+                      <a:tailEnd type="none" w="med" len="med"/>
+                    </a:lnR>
+                    <a:lnT w="6350" cap="flat" cmpd="sng" algn="ctr">
+                      <a:solidFill>
+                        <a:srgbClr val="D8DEE6"/>
+                      </a:solidFill>
+                      <a:prstDash val="solid"/>
+                      <a:round/>
+                      <a:headEnd type="none" w="med" len="med"/>
+                      <a:tailEnd type="none" w="med" len="med"/>
+                    </a:lnT>
+                    <a:lnB w="6350" cap="flat" cmpd="sng" algn="ctr">
+                      <a:solidFill>
+                        <a:srgbClr val="D8DEE6"/>
+                      </a:solidFill>
+                      <a:prstDash val="solid"/>
+                      <a:round/>
+                      <a:headEnd type="none" w="med" len="med"/>
+                      <a:tailEnd type="none" w="med" len="med"/>
+                    </a:lnB>
+                  </a:tcPr>
+                </a:tc>
+              </a:tr>
+              <a:tr h="548640">
+                <a:tc>
+                  <a:txBody>
+                    <a:bodyPr/>
+                    <a:lstStyle/>
+                    <a:p>
+                      <a:pPr indent="0" marL="0">
+                        <a:buNone/>
+                      </a:pPr>
+                      <a:r>
+                        <a:rPr lang="en-US" sz="1150" dirty="0">
+                          <a:solidFill>
+                            <a:srgbClr val="1E293B"/>
+                          </a:solidFill>
+                          <a:latin typeface="Arial" pitchFamily="34" charset="0"/>
+                          <a:ea typeface="Arial" pitchFamily="34" charset="-122"/>
+                          <a:cs typeface="Arial" pitchFamily="34" charset="-120"/>
+                        </a:rPr>
+                        <a:t>M</a:t>
+                      </a:r>
+                      <a:endParaRPr lang="en-US" sz="1150" dirty="0">
+                        <a:latin typeface="Arial" charset="0"/>
+                        <a:ea typeface="Arial" charset="0"/>
+                        <a:cs typeface="Arial" charset="0"/>
+                      </a:endParaRPr>
+                    </a:p>
+                  </a:txBody>
+                  <a:tcPr marL="91440" marR="91440" marT="45720" marB="45720" anchor="ctr">
+                    <a:lnL w="6350" cap="flat" cmpd="sng" algn="ctr">
+                      <a:solidFill>
+                        <a:srgbClr val="D8DEE6"/>
+                      </a:solidFill>
+                      <a:prstDash val="solid"/>
+                      <a:round/>
+                      <a:headEnd type="none" w="med" len="med"/>
+                      <a:tailEnd type="none" w="med" len="med"/>
+                    </a:lnL>
+                    <a:lnR w="6350" cap="flat" cmpd="sng" algn="ctr">
+                      <a:solidFill>
+                        <a:srgbClr val="D8DEE6"/>
+                      </a:solidFill>
+                      <a:prstDash val="solid"/>
+                      <a:round/>
+                      <a:headEnd type="none" w="med" len="med"/>
+                      <a:tailEnd type="none" w="med" len="med"/>
+                    </a:lnR>
+                    <a:lnT w="6350" cap="flat" cmpd="sng" algn="ctr">
+                      <a:solidFill>
+                        <a:srgbClr val="D8DEE6"/>
+                      </a:solidFill>
+                      <a:prstDash val="solid"/>
+                      <a:round/>
+                      <a:headEnd type="none" w="med" len="med"/>
+                      <a:tailEnd type="none" w="med" len="med"/>
+                    </a:lnT>
+                    <a:lnB w="6350" cap="flat" cmpd="sng" algn="ctr">
+                      <a:solidFill>
+                        <a:srgbClr val="D8DEE6"/>
+                      </a:solidFill>
+                      <a:prstDash val="solid"/>
+                      <a:round/>
+                      <a:headEnd type="none" w="med" len="med"/>
+                      <a:tailEnd type="none" w="med" len="med"/>
+                    </a:lnB>
+                  </a:tcPr>
+                </a:tc>
+                <a:tc>
+                  <a:txBody>
+                    <a:bodyPr/>
+                    <a:lstStyle/>
+                    <a:p>
+                      <a:pPr indent="0" marL="0">
+                        <a:buNone/>
+                      </a:pPr>
+                      <a:r>
+                        <a:rPr lang="en-US" sz="1150" dirty="0">
+                          <a:solidFill>
+                            <a:srgbClr val="1E293B"/>
+                          </a:solidFill>
+                          <a:latin typeface="Arial" pitchFamily="34" charset="0"/>
+                          <a:ea typeface="Arial" pitchFamily="34" charset="-122"/>
+                          <a:cs typeface="Arial" pitchFamily="34" charset="-120"/>
+                        </a:rPr>
+                        <a:t>Индикатор совпадает с контрольным влагомером с точностью не хуже ±10 %, проверено не менее чем в 10 циклах полива</a:t>
+                      </a:r>
+                      <a:endParaRPr lang="en-US" sz="1150" dirty="0">
+                        <a:latin typeface="Arial" charset="0"/>
+                        <a:ea typeface="Arial" charset="0"/>
+                        <a:cs typeface="Arial" charset="0"/>
+                      </a:endParaRPr>
+                    </a:p>
+                  </a:txBody>
+                  <a:tcPr marL="91440" marR="91440" marT="45720" marB="45720" anchor="ctr">
+                    <a:lnL w="6350" cap="flat" cmpd="sng" algn="ctr">
+                      <a:solidFill>
+                        <a:srgbClr val="D8DEE6"/>
+                      </a:solidFill>
+                      <a:prstDash val="solid"/>
+                      <a:round/>
+                      <a:headEnd type="none" w="med" len="med"/>
+                      <a:tailEnd type="none" w="med" len="med"/>
+                    </a:lnL>
+                    <a:lnR w="6350" cap="flat" cmpd="sng" algn="ctr">
+                      <a:solidFill>
+                        <a:srgbClr val="D8DEE6"/>
+                      </a:solidFill>
+                      <a:prstDash val="solid"/>
+                      <a:round/>
+                      <a:headEnd type="none" w="med" len="med"/>
+                      <a:tailEnd type="none" w="med" len="med"/>
+                    </a:lnR>
+                    <a:lnT w="6350" cap="flat" cmpd="sng" algn="ctr">
+                      <a:solidFill>
+                        <a:srgbClr val="D8DEE6"/>
+                      </a:solidFill>
+                      <a:prstDash val="solid"/>
+                      <a:round/>
+                      <a:headEnd type="none" w="med" len="med"/>
+                      <a:tailEnd type="none" w="med" len="med"/>
+                    </a:lnT>
+                    <a:lnB w="6350" cap="flat" cmpd="sng" algn="ctr">
+                      <a:solidFill>
+                        <a:srgbClr val="D8DEE6"/>
+                      </a:solidFill>
+                      <a:prstDash val="solid"/>
+                      <a:round/>
+                      <a:headEnd type="none" w="med" len="med"/>
+                      <a:tailEnd type="none" w="med" len="med"/>
+                    </a:lnB>
+                  </a:tcPr>
+                </a:tc>
+              </a:tr>
+              <a:tr h="548640">
+                <a:tc>
+                  <a:txBody>
+                    <a:bodyPr/>
+                    <a:lstStyle/>
+                    <a:p>
+                      <a:pPr indent="0" marL="0">
+                        <a:buNone/>
+                      </a:pPr>
+                      <a:r>
+                        <a:rPr lang="en-US" sz="1150" dirty="0">
+                          <a:solidFill>
+                            <a:srgbClr val="1E293B"/>
+                          </a:solidFill>
+                          <a:latin typeface="Arial" pitchFamily="34" charset="0"/>
+                          <a:ea typeface="Arial" pitchFamily="34" charset="-122"/>
+                          <a:cs typeface="Arial" pitchFamily="34" charset="-120"/>
+                        </a:rPr>
+                        <a:t>A</a:t>
+                      </a:r>
+                      <a:endParaRPr lang="en-US" sz="1150" dirty="0">
+                        <a:latin typeface="Arial" charset="0"/>
+                        <a:ea typeface="Arial" charset="0"/>
+                        <a:cs typeface="Arial" charset="0"/>
+                      </a:endParaRPr>
+                    </a:p>
+                  </a:txBody>
+                  <a:tcPr marL="91440" marR="91440" marT="45720" marB="45720" anchor="ctr">
+                    <a:lnL w="6350" cap="flat" cmpd="sng" algn="ctr">
+                      <a:solidFill>
+                        <a:srgbClr val="D8DEE6"/>
+                      </a:solidFill>
+                      <a:prstDash val="solid"/>
+                      <a:round/>
+                      <a:headEnd type="none" w="med" len="med"/>
+                      <a:tailEnd type="none" w="med" len="med"/>
+                    </a:lnL>
+                    <a:lnR w="6350" cap="flat" cmpd="sng" algn="ctr">
+                      <a:solidFill>
+                        <a:srgbClr val="D8DEE6"/>
+                      </a:solidFill>
+                      <a:prstDash val="solid"/>
+                      <a:round/>
+                      <a:headEnd type="none" w="med" len="med"/>
+                      <a:tailEnd type="none" w="med" len="med"/>
+                    </a:lnR>
+                    <a:lnT w="6350" cap="flat" cmpd="sng" algn="ctr">
+                      <a:solidFill>
+                        <a:srgbClr val="D8DEE6"/>
+                      </a:solidFill>
+                      <a:prstDash val="solid"/>
+                      <a:round/>
+                      <a:headEnd type="none" w="med" len="med"/>
+                      <a:tailEnd type="none" w="med" len="med"/>
+                    </a:lnT>
+                    <a:lnB w="6350" cap="flat" cmpd="sng" algn="ctr">
+                      <a:solidFill>
+                        <a:srgbClr val="D8DEE6"/>
+                      </a:solidFill>
+                      <a:prstDash val="solid"/>
+                      <a:round/>
+                      <a:headEnd type="none" w="med" len="med"/>
+                      <a:tailEnd type="none" w="med" len="med"/>
+                    </a:lnB>
+                  </a:tcPr>
+                </a:tc>
+                <a:tc>
+                  <a:txBody>
+                    <a:bodyPr/>
+                    <a:lstStyle/>
+                    <a:p>
+                      <a:pPr indent="0" marL="0">
+                        <a:buNone/>
+                      </a:pPr>
+                      <a:r>
+                        <a:rPr lang="en-US" sz="1150" dirty="0">
+                          <a:solidFill>
+                            <a:srgbClr val="1E293B"/>
+                          </a:solidFill>
+                          <a:latin typeface="Arial" pitchFamily="34" charset="0"/>
+                          <a:ea typeface="Arial" pitchFamily="34" charset="-122"/>
+                          <a:cs typeface="Arial" pitchFamily="34" charset="-120"/>
+                        </a:rPr>
+                        <a:t>Команда 3–4 человека; нужны датчик влажности, микроконтроллер, светодиод — типовой доступный набор</a:t>
+                      </a:r>
+                      <a:endParaRPr lang="en-US" sz="1150" dirty="0">
+                        <a:latin typeface="Arial" charset="0"/>
+                        <a:ea typeface="Arial" charset="0"/>
+                        <a:cs typeface="Arial" charset="0"/>
+                      </a:endParaRPr>
+                    </a:p>
+                  </a:txBody>
+                  <a:tcPr marL="91440" marR="91440" marT="45720" marB="45720" anchor="ctr">
+                    <a:lnL w="6350" cap="flat" cmpd="sng" algn="ctr">
+                      <a:solidFill>
+                        <a:srgbClr val="D8DEE6"/>
+                      </a:solidFill>
+                      <a:prstDash val="solid"/>
+                      <a:round/>
+                      <a:headEnd type="none" w="med" len="med"/>
+                      <a:tailEnd type="none" w="med" len="med"/>
+                    </a:lnL>
+                    <a:lnR w="6350" cap="flat" cmpd="sng" algn="ctr">
+                      <a:solidFill>
+                        <a:srgbClr val="D8DEE6"/>
+                      </a:solidFill>
+                      <a:prstDash val="solid"/>
+                      <a:round/>
+                      <a:headEnd type="none" w="med" len="med"/>
+                      <a:tailEnd type="none" w="med" len="med"/>
+                    </a:lnR>
+                    <a:lnT w="6350" cap="flat" cmpd="sng" algn="ctr">
+                      <a:solidFill>
+                        <a:srgbClr val="D8DEE6"/>
+                      </a:solidFill>
+                      <a:prstDash val="solid"/>
+                      <a:round/>
+                      <a:headEnd type="none" w="med" len="med"/>
+                      <a:tailEnd type="none" w="med" len="med"/>
+                    </a:lnT>
+                    <a:lnB w="6350" cap="flat" cmpd="sng" algn="ctr">
+                      <a:solidFill>
+                        <a:srgbClr val="D8DEE6"/>
+                      </a:solidFill>
+                      <a:prstDash val="solid"/>
+                      <a:round/>
+                      <a:headEnd type="none" w="med" len="med"/>
+                      <a:tailEnd type="none" w="med" len="med"/>
+                    </a:lnB>
+                  </a:tcPr>
+                </a:tc>
+              </a:tr>
+              <a:tr h="548640">
+                <a:tc>
+                  <a:txBody>
+                    <a:bodyPr/>
+                    <a:lstStyle/>
+                    <a:p>
+                      <a:pPr indent="0" marL="0">
+                        <a:buNone/>
+                      </a:pPr>
+                      <a:r>
+                        <a:rPr lang="en-US" sz="1150" dirty="0">
+                          <a:solidFill>
+                            <a:srgbClr val="1E293B"/>
+                          </a:solidFill>
+                          <a:latin typeface="Arial" pitchFamily="34" charset="0"/>
+                          <a:ea typeface="Arial" pitchFamily="34" charset="-122"/>
+                          <a:cs typeface="Arial" pitchFamily="34" charset="-120"/>
+                        </a:rPr>
+                        <a:t>R</a:t>
+                      </a:r>
+                      <a:endParaRPr lang="en-US" sz="1150" dirty="0">
+                        <a:latin typeface="Arial" charset="0"/>
+                        <a:ea typeface="Arial" charset="0"/>
+                        <a:cs typeface="Arial" charset="0"/>
+                      </a:endParaRPr>
+                    </a:p>
+                  </a:txBody>
+                  <a:tcPr marL="91440" marR="91440" marT="45720" marB="45720" anchor="ctr">
+                    <a:lnL w="6350" cap="flat" cmpd="sng" algn="ctr">
+                      <a:solidFill>
+                        <a:srgbClr val="D8DEE6"/>
+                      </a:solidFill>
+                      <a:prstDash val="solid"/>
+                      <a:round/>
+                      <a:headEnd type="none" w="med" len="med"/>
+                      <a:tailEnd type="none" w="med" len="med"/>
+                    </a:lnL>
+                    <a:lnR w="6350" cap="flat" cmpd="sng" algn="ctr">
+                      <a:solidFill>
+                        <a:srgbClr val="D8DEE6"/>
+                      </a:solidFill>
+                      <a:prstDash val="solid"/>
+                      <a:round/>
+                      <a:headEnd type="none" w="med" len="med"/>
+                      <a:tailEnd type="none" w="med" len="med"/>
+                    </a:lnR>
+                    <a:lnT w="6350" cap="flat" cmpd="sng" algn="ctr">
+                      <a:solidFill>
+                        <a:srgbClr val="D8DEE6"/>
+                      </a:solidFill>
+                      <a:prstDash val="solid"/>
+                      <a:round/>
+                      <a:headEnd type="none" w="med" len="med"/>
+                      <a:tailEnd type="none" w="med" len="med"/>
+                    </a:lnT>
+                    <a:lnB w="6350" cap="flat" cmpd="sng" algn="ctr">
+                      <a:solidFill>
+                        <a:srgbClr val="D8DEE6"/>
+                      </a:solidFill>
+                      <a:prstDash val="solid"/>
+                      <a:round/>
+                      <a:headEnd type="none" w="med" len="med"/>
+                      <a:tailEnd type="none" w="med" len="med"/>
+                    </a:lnB>
+                  </a:tcPr>
+                </a:tc>
+                <a:tc>
+                  <a:txBody>
+                    <a:bodyPr/>
+                    <a:lstStyle/>
+                    <a:p>
+                      <a:pPr indent="0" marL="0">
+                        <a:buNone/>
+                      </a:pPr>
+                      <a:r>
+                        <a:rPr lang="en-US" sz="1150" dirty="0">
+                          <a:solidFill>
+                            <a:srgbClr val="1E293B"/>
+                          </a:solidFill>
+                          <a:latin typeface="Arial" pitchFamily="34" charset="0"/>
+                          <a:ea typeface="Arial" pitchFamily="34" charset="-122"/>
+                          <a:cs typeface="Arial" pitchFamily="34" charset="-120"/>
+                        </a:rPr>
+                        <a:t>Закрывает проблему из ценностного предложения: полив на глаз, без обратной связи от почвы</a:t>
+                      </a:r>
+                      <a:endParaRPr lang="en-US" sz="1150" dirty="0">
+                        <a:latin typeface="Arial" charset="0"/>
+                        <a:ea typeface="Arial" charset="0"/>
+                        <a:cs typeface="Arial" charset="0"/>
+                      </a:endParaRPr>
+                    </a:p>
+                  </a:txBody>
+                  <a:tcPr marL="91440" marR="91440" marT="45720" marB="45720" anchor="ctr">
+                    <a:lnL w="6350" cap="flat" cmpd="sng" algn="ctr">
+                      <a:solidFill>
+                        <a:srgbClr val="D8DEE6"/>
+                      </a:solidFill>
+                      <a:prstDash val="solid"/>
+                      <a:round/>
+                      <a:headEnd type="none" w="med" len="med"/>
+                      <a:tailEnd type="none" w="med" len="med"/>
+                    </a:lnL>
+                    <a:lnR w="6350" cap="flat" cmpd="sng" algn="ctr">
+                      <a:solidFill>
+                        <a:srgbClr val="D8DEE6"/>
+                      </a:solidFill>
+                      <a:prstDash val="solid"/>
+                      <a:round/>
+                      <a:headEnd type="none" w="med" len="med"/>
+                      <a:tailEnd type="none" w="med" len="med"/>
+                    </a:lnR>
+                    <a:lnT w="6350" cap="flat" cmpd="sng" algn="ctr">
+                      <a:solidFill>
+                        <a:srgbClr val="D8DEE6"/>
+                      </a:solidFill>
+                      <a:prstDash val="solid"/>
+                      <a:round/>
+                      <a:headEnd type="none" w="med" len="med"/>
+                      <a:tailEnd type="none" w="med" len="med"/>
+                    </a:lnT>
+                    <a:lnB w="6350" cap="flat" cmpd="sng" algn="ctr">
+                      <a:solidFill>
+                        <a:srgbClr val="D8DEE6"/>
+                      </a:solidFill>
+                      <a:prstDash val="solid"/>
+                      <a:round/>
+                      <a:headEnd type="none" w="med" len="med"/>
+                      <a:tailEnd type="none" w="med" len="med"/>
+                    </a:lnB>
+                  </a:tcPr>
+                </a:tc>
+              </a:tr>
+              <a:tr h="548640">
+                <a:tc>
+                  <a:txBody>
+                    <a:bodyPr/>
+                    <a:lstStyle/>
+                    <a:p>
+                      <a:pPr indent="0" marL="0">
+                        <a:buNone/>
+                      </a:pPr>
+                      <a:r>
+                        <a:rPr lang="en-US" sz="1150" dirty="0">
+                          <a:solidFill>
+                            <a:srgbClr val="1E293B"/>
+                          </a:solidFill>
+                          <a:latin typeface="Arial" pitchFamily="34" charset="0"/>
+                          <a:ea typeface="Arial" pitchFamily="34" charset="-122"/>
+                          <a:cs typeface="Arial" pitchFamily="34" charset="-120"/>
+                        </a:rPr>
+                        <a:t>T</a:t>
+                      </a:r>
+                      <a:endParaRPr lang="en-US" sz="1150" dirty="0">
+                        <a:latin typeface="Arial" charset="0"/>
+                        <a:ea typeface="Arial" charset="0"/>
+                        <a:cs typeface="Arial" charset="0"/>
+                      </a:endParaRPr>
+                    </a:p>
+                  </a:txBody>
+                  <a:tcPr marL="91440" marR="91440" marT="45720" marB="45720" anchor="ctr">
+                    <a:lnL w="6350" cap="flat" cmpd="sng" algn="ctr">
+                      <a:solidFill>
+                        <a:srgbClr val="D8DEE6"/>
+                      </a:solidFill>
+                      <a:prstDash val="solid"/>
+                      <a:round/>
+                      <a:headEnd type="none" w="med" len="med"/>
+                      <a:tailEnd type="none" w="med" len="med"/>
+                    </a:lnL>
+                    <a:lnR w="6350" cap="flat" cmpd="sng" algn="ctr">
+                      <a:solidFill>
+                        <a:srgbClr val="D8DEE6"/>
+                      </a:solidFill>
+                      <a:prstDash val="solid"/>
+                      <a:round/>
+                      <a:headEnd type="none" w="med" len="med"/>
+                      <a:tailEnd type="none" w="med" len="med"/>
+                    </a:lnR>
+                    <a:lnT w="6350" cap="flat" cmpd="sng" algn="ctr">
+                      <a:solidFill>
+                        <a:srgbClr val="D8DEE6"/>
+                      </a:solidFill>
+                      <a:prstDash val="solid"/>
+                      <a:round/>
+                      <a:headEnd type="none" w="med" len="med"/>
+                      <a:tailEnd type="none" w="med" len="med"/>
+                    </a:lnT>
+                    <a:lnB w="6350" cap="flat" cmpd="sng" algn="ctr">
+                      <a:solidFill>
+                        <a:srgbClr val="D8DEE6"/>
+                      </a:solidFill>
+                      <a:prstDash val="solid"/>
+                      <a:round/>
+                      <a:headEnd type="none" w="med" len="med"/>
+                      <a:tailEnd type="none" w="med" len="med"/>
+                    </a:lnB>
+                  </a:tcPr>
+                </a:tc>
+                <a:tc>
+                  <a:txBody>
+                    <a:bodyPr/>
+                    <a:lstStyle/>
+                    <a:p>
+                      <a:pPr indent="0" marL="0">
+                        <a:buNone/>
+                      </a:pPr>
+                      <a:r>
+                        <a:rPr lang="en-US" sz="1150" dirty="0">
+                          <a:solidFill>
+                            <a:srgbClr val="1E293B"/>
+                          </a:solidFill>
+                          <a:latin typeface="Arial" pitchFamily="34" charset="0"/>
+                          <a:ea typeface="Arial" pitchFamily="34" charset="-122"/>
+                          <a:cs typeface="Arial" pitchFamily="34" charset="-120"/>
+                        </a:rPr>
+                        <a:t>Рабочий прототип — к чекпоинту 21.11; три недели тестов и отчёт — к защите 26.12</a:t>
+                      </a:r>
+                      <a:endParaRPr lang="en-US" sz="1150" dirty="0">
+                        <a:latin typeface="Arial" charset="0"/>
+                        <a:ea typeface="Arial" charset="0"/>
+                        <a:cs typeface="Arial" charset="0"/>
+                      </a:endParaRPr>
+                    </a:p>
+                  </a:txBody>
+                  <a:tcPr marL="91440" marR="91440" marT="45720" marB="45720" anchor="ctr">
+                    <a:lnL w="6350" cap="flat" cmpd="sng" algn="ctr">
+                      <a:solidFill>
+                        <a:srgbClr val="D8DEE6"/>
+                      </a:solidFill>
+                      <a:prstDash val="solid"/>
+                      <a:round/>
+                      <a:headEnd type="none" w="med" len="med"/>
+                      <a:tailEnd type="none" w="med" len="med"/>
+                    </a:lnL>
+                    <a:lnR w="6350" cap="flat" cmpd="sng" algn="ctr">
+                      <a:solidFill>
+                        <a:srgbClr val="D8DEE6"/>
+                      </a:solidFill>
+                      <a:prstDash val="solid"/>
+                      <a:round/>
+                      <a:headEnd type="none" w="med" len="med"/>
+                      <a:tailEnd type="none" w="med" len="med"/>
+                    </a:lnR>
+                    <a:lnT w="6350" cap="flat" cmpd="sng" algn="ctr">
+                      <a:solidFill>
+                        <a:srgbClr val="D8DEE6"/>
+                      </a:solidFill>
+                      <a:prstDash val="solid"/>
+                      <a:round/>
+                      <a:headEnd type="none" w="med" len="med"/>
+                      <a:tailEnd type="none" w="med" len="med"/>
+                    </a:lnT>
+                    <a:lnB w="6350" cap="flat" cmpd="sng" algn="ctr">
+                      <a:solidFill>
+                        <a:srgbClr val="D8DEE6"/>
+                      </a:solidFill>
+                      <a:prstDash val="solid"/>
+                      <a:round/>
+                      <a:headEnd type="none" w="med" len="med"/>
+                      <a:tailEnd type="none" w="med" len="med"/>
+                    </a:lnB>
+                  </a:tcPr>
+                </a:tc>
+              </a:tr>
+            </a:tbl>
+          </a:graphicData>
+        </a:graphic>
+      </p:graphicFrame>
+      <p:sp>
+        <p:nvSpPr>
+          <p:cNvPr id="6" name="Shape 3"/>
           <p:cNvSpPr/>
           <p:nvPr/>
         </p:nvSpPr>
         <p:spPr>
           <a:xfrm>
-            <a:off x="502920" y="1463040"/>
-            <a:ext cx="8138160" cy="1554480"/>
+            <a:off x="502920" y="3950208"/>
+            <a:ext cx="8138160" cy="713232"/>
           </a:xfrm>
           <a:prstGeom prst="roundRect">
             <a:avLst>
-              <a:gd name="adj" fmla="val 2941"/>
+              <a:gd name="adj" fmla="val 6410"/>
             </a:avLst>
           </a:prstGeom>
           <a:solidFill>
-            <a:srgbClr val="F5F7FA"/>
+            <a:srgbClr val="1E4270"/>
           </a:solidFill>
           <a:ln w="9525">
             <a:solidFill>
@@ -2432,14 +4594,14 @@
       </p:sp>
       <p:sp>
         <p:nvSpPr>
-          <p:cNvPr id="5" name="Text 3"/>
+          <p:cNvPr id="7" name="Text 4"/>
           <p:cNvSpPr txBox="1"/>
           <p:nvPr/>
         </p:nvSpPr>
         <p:spPr>
           <a:xfrm>
-            <a:off x="777240" y="1737360"/>
-            <a:ext cx="7589520" cy="1005840"/>
+            <a:off x="731520" y="4059936"/>
+            <a:ext cx="7680960" cy="548640"/>
           </a:xfrm>
           <a:prstGeom prst="rect">
             <a:avLst/>
@@ -2453,61 +4615,22 @@
           <a:p>
             <a:pPr indent="0" marL="0">
               <a:lnSpc>
-                <a:spcPts val="2400"/>
+                <a:spcPts val="1500"/>
               </a:lnSpc>
               <a:buNone/>
             </a:pPr>
             <a:r>
-              <a:rPr lang="en-US" sz="1600" dirty="0">
+              <a:rPr lang="en-US" sz="1150" b="1" dirty="0">
                 <a:solidFill>
-                  <a:srgbClr val="1E293B"/>
+                  <a:srgbClr val="FFFFFF"/>
                 </a:solidFill>
                 <a:latin typeface="Arial" pitchFamily="34" charset="0"/>
                 <a:ea typeface="Arial" pitchFamily="34" charset="-122"/>
                 <a:cs typeface="Arial" pitchFamily="34" charset="-120"/>
               </a:rPr>
-              <a:t>Обменяйтесь листом 2. Найдите ОДНУ букву ЧИСТО, которая на самом деле не выполнена, и напишите почему.</a:t>
+              <a:t>«К 26 декабря мы представим прототип умного горшка с датчиком влажности и индикатором полива, проверенный три недели на живом растении с точностью показаний не хуже 10 %; рабочий прототип — к 21 ноября»</a:t>
             </a:r>
-            <a:endParaRPr lang="en-US" sz="1600" dirty="0"/>
-          </a:p>
-        </p:txBody>
-      </p:sp>
-      <p:sp>
-        <p:nvSpPr>
-          <p:cNvPr id="6" name="Text 4"/>
-          <p:cNvSpPr txBox="1"/>
-          <p:nvPr/>
-        </p:nvSpPr>
-        <p:spPr>
-          <a:xfrm>
-            <a:off x="502920" y="3246120"/>
-            <a:ext cx="8138160" cy="457200"/>
-          </a:xfrm>
-          <a:prstGeom prst="rect">
-            <a:avLst/>
-          </a:prstGeom>
-          <a:noFill/>
-          <a:ln/>
-        </p:spPr>
-        <p:txBody>
-          <a:bodyPr wrap="square" lIns="0" tIns="0" rIns="0" bIns="0" rtlCol="0" anchor="ctr"/>
-          <a:lstStyle/>
-          <a:p>
-            <a:pPr indent="0" marL="0">
-              <a:buNone/>
-            </a:pPr>
-            <a:r>
-              <a:rPr lang="en-US" sz="1300" i="1" dirty="0">
-                <a:solidFill>
-                  <a:srgbClr val="64748B"/>
-                </a:solidFill>
-                <a:latin typeface="Arial" pitchFamily="34" charset="0"/>
-                <a:ea typeface="Arial" pitchFamily="34" charset="-122"/>
-                <a:cs typeface="Arial" pitchFamily="34" charset="-120"/>
-              </a:rPr>
-              <a:t>Найти слабое место в чужой цели — услуга, а не критика. В следующий раз то же самое сделают с вашей.</a:t>
-            </a:r>
-            <a:endParaRPr lang="en-US" sz="1300" dirty="0"/>
+            <a:endParaRPr lang="en-US" sz="1150" dirty="0"/>
           </a:p>
         </p:txBody>
       </p:sp>
@@ -2551,6 +4674,618 @@
         </p:nvSpPr>
         <p:spPr>
           <a:xfrm>
+            <a:off x="7543800" y="4736592"/>
+            <a:ext cx="1097280" cy="256032"/>
+          </a:xfrm>
+          <a:prstGeom prst="rect">
+            <a:avLst/>
+          </a:prstGeom>
+          <a:noFill/>
+          <a:ln/>
+        </p:spPr>
+        <p:txBody>
+          <a:bodyPr wrap="square" lIns="0" tIns="0" rIns="0" bIns="0" rtlCol="0" anchor="ctr"/>
+          <a:lstStyle/>
+          <a:p>
+            <a:pPr algn="r" indent="0" marL="0">
+              <a:buNone/>
+            </a:pPr>
+            <a:r>
+              <a:rPr lang="en-US" sz="1000" dirty="0">
+                <a:solidFill>
+                  <a:srgbClr val="64748B"/>
+                </a:solidFill>
+                <a:latin typeface="Arial" pitchFamily="34" charset="0"/>
+                <a:ea typeface="Arial" pitchFamily="34" charset="-122"/>
+                <a:cs typeface="Arial" pitchFamily="34" charset="-120"/>
+              </a:rPr>
+              <a:t>12 / 14</a:t>
+            </a:r>
+            <a:endParaRPr lang="en-US" sz="1000" dirty="0"/>
+          </a:p>
+        </p:txBody>
+      </p:sp>
+      <p:sp>
+        <p:nvSpPr>
+          <p:cNvPr id="3" name="Text 1"/>
+          <p:cNvSpPr txBox="1"/>
+          <p:nvPr/>
+        </p:nvSpPr>
+        <p:spPr>
+          <a:xfrm>
+            <a:off x="502920" y="182880"/>
+            <a:ext cx="8138160" cy="219456"/>
+          </a:xfrm>
+          <a:prstGeom prst="rect">
+            <a:avLst/>
+          </a:prstGeom>
+          <a:noFill/>
+          <a:ln/>
+        </p:spPr>
+        <p:txBody>
+          <a:bodyPr wrap="square" lIns="0" tIns="0" rIns="0" bIns="0" rtlCol="0" anchor="ctr"/>
+          <a:lstStyle/>
+          <a:p>
+            <a:pPr indent="0" marL="0">
+              <a:buNone/>
+            </a:pPr>
+            <a:r>
+              <a:rPr lang="en-US" sz="1100" spc="150" kern="0" dirty="0">
+                <a:solidFill>
+                  <a:srgbClr val="64748B"/>
+                </a:solidFill>
+                <a:latin typeface="Arial" pitchFamily="34" charset="0"/>
+                <a:ea typeface="Arial" pitchFamily="34" charset="-122"/>
+                <a:cs typeface="Arial" pitchFamily="34" charset="-120"/>
+              </a:rPr>
+              <a:t>ЛИСТ 2 · 16 МИНУТ</a:t>
+            </a:r>
+            <a:endParaRPr lang="en-US" sz="1100" dirty="0"/>
+          </a:p>
+        </p:txBody>
+      </p:sp>
+      <p:sp>
+        <p:nvSpPr>
+          <p:cNvPr id="4" name="Text 2"/>
+          <p:cNvSpPr txBox="1"/>
+          <p:nvPr/>
+        </p:nvSpPr>
+        <p:spPr>
+          <a:xfrm>
+            <a:off x="502920" y="365760"/>
+            <a:ext cx="8138160" cy="640080"/>
+          </a:xfrm>
+          <a:prstGeom prst="rect">
+            <a:avLst/>
+          </a:prstGeom>
+          <a:noFill/>
+          <a:ln/>
+        </p:spPr>
+        <p:txBody>
+          <a:bodyPr wrap="square" lIns="0" tIns="0" rIns="0" bIns="0" rtlCol="0" anchor="ctr"/>
+          <a:lstStyle/>
+          <a:p>
+            <a:pPr indent="0" marL="0">
+              <a:buNone/>
+            </a:pPr>
+            <a:r>
+              <a:rPr lang="en-US" sz="2700" b="1" dirty="0">
+                <a:solidFill>
+                  <a:srgbClr val="005AAA"/>
+                </a:solidFill>
+                <a:latin typeface="Arial" pitchFamily="34" charset="0"/>
+                <a:ea typeface="Arial" pitchFamily="34" charset="-122"/>
+                <a:cs typeface="Arial" pitchFamily="34" charset="-120"/>
+              </a:rPr>
+              <a:t>Разверните свою SMART-цель</a:t>
+            </a:r>
+            <a:endParaRPr lang="en-US" sz="2700" dirty="0"/>
+          </a:p>
+        </p:txBody>
+      </p:sp>
+      <p:sp>
+        <p:nvSpPr>
+          <p:cNvPr id="5" name="Text 3"/>
+          <p:cNvSpPr txBox="1"/>
+          <p:nvPr/>
+        </p:nvSpPr>
+        <p:spPr>
+          <a:xfrm>
+            <a:off x="502920" y="1371600"/>
+            <a:ext cx="8138160" cy="365760"/>
+          </a:xfrm>
+          <a:prstGeom prst="rect">
+            <a:avLst/>
+          </a:prstGeom>
+          <a:noFill/>
+          <a:ln/>
+        </p:spPr>
+        <p:txBody>
+          <a:bodyPr wrap="square" lIns="0" tIns="0" rIns="0" bIns="0" rtlCol="0" anchor="ctr"/>
+          <a:lstStyle/>
+          <a:p>
+            <a:pPr indent="0" marL="0">
+              <a:buNone/>
+            </a:pPr>
+            <a:r>
+              <a:rPr lang="en-US" sz="1500" dirty="0">
+                <a:solidFill>
+                  <a:srgbClr val="1E293B"/>
+                </a:solidFill>
+                <a:latin typeface="Arial" pitchFamily="34" charset="0"/>
+                <a:ea typeface="Arial" pitchFamily="34" charset="-122"/>
+                <a:cs typeface="Arial" pitchFamily="34" charset="-120"/>
+              </a:rPr>
+              <a:t>Каждая буква — отдельная строка, конкретно. Не общей фразой на весь акроним.</a:t>
+            </a:r>
+            <a:endParaRPr lang="en-US" sz="1500" dirty="0"/>
+          </a:p>
+        </p:txBody>
+      </p:sp>
+      <p:sp>
+        <p:nvSpPr>
+          <p:cNvPr id="6" name="Shape 4"/>
+          <p:cNvSpPr/>
+          <p:nvPr/>
+        </p:nvSpPr>
+        <p:spPr>
+          <a:xfrm>
+            <a:off x="502920" y="1920240"/>
+            <a:ext cx="8138160" cy="2011680"/>
+          </a:xfrm>
+          <a:prstGeom prst="roundRect">
+            <a:avLst>
+              <a:gd name="adj" fmla="val 2273"/>
+            </a:avLst>
+          </a:prstGeom>
+          <a:solidFill>
+            <a:srgbClr val="1E4270"/>
+          </a:solidFill>
+          <a:ln w="9525">
+            <a:solidFill>
+              <a:srgbClr val="D8DEE6"/>
+            </a:solidFill>
+            <a:prstDash val="solid"/>
+          </a:ln>
+        </p:spPr>
+      </p:sp>
+      <p:sp>
+        <p:nvSpPr>
+          <p:cNvPr id="7" name="Text 5"/>
+          <p:cNvSpPr txBox="1"/>
+          <p:nvPr/>
+        </p:nvSpPr>
+        <p:spPr>
+          <a:xfrm>
+            <a:off x="822960" y="2194560"/>
+            <a:ext cx="7498080" cy="1371600"/>
+          </a:xfrm>
+          <a:prstGeom prst="rect">
+            <a:avLst/>
+          </a:prstGeom>
+          <a:noFill/>
+          <a:ln/>
+        </p:spPr>
+        <p:txBody>
+          <a:bodyPr wrap="square" lIns="0" tIns="0" rIns="0" bIns="0" rtlCol="0" anchor="ctr"/>
+          <a:lstStyle/>
+          <a:p>
+            <a:pPr indent="0" marL="0">
+              <a:lnSpc>
+                <a:spcPts val="2600"/>
+              </a:lnSpc>
+              <a:buNone/>
+            </a:pPr>
+            <a:r>
+              <a:rPr lang="en-US" sz="1600" b="1" dirty="0">
+                <a:solidFill>
+                  <a:srgbClr val="FFFFFF"/>
+                </a:solidFill>
+                <a:latin typeface="Arial" pitchFamily="34" charset="0"/>
+                <a:ea typeface="Arial" pitchFamily="34" charset="-122"/>
+                <a:cs typeface="Arial" pitchFamily="34" charset="-120"/>
+              </a:rPr>
+              <a:t>Итог блока — одна фраза с датой:</a:t>
+            </a:r>
+            <a:endParaRPr lang="en-US" sz="1600" dirty="0"/>
+          </a:p>
+          <a:p>
+            <a:pPr indent="0" marL="0">
+              <a:lnSpc>
+                <a:spcPts val="2600"/>
+              </a:lnSpc>
+              <a:buNone/>
+            </a:pPr>
+            <a:r>
+              <a:rPr lang="en-US" sz="1600" b="1" dirty="0">
+                <a:solidFill>
+                  <a:srgbClr val="FFFFFF"/>
+                </a:solidFill>
+                <a:latin typeface="Arial" pitchFamily="34" charset="0"/>
+                <a:ea typeface="Arial" pitchFamily="34" charset="-122"/>
+                <a:cs typeface="Arial" pitchFamily="34" charset="-120"/>
+              </a:rPr>
+              <a:t>«К [дата] мы получим [измеримый результат], проверяемый [способ проверки]»</a:t>
+            </a:r>
+            <a:endParaRPr lang="en-US" sz="1600" dirty="0"/>
+          </a:p>
+        </p:txBody>
+      </p:sp>
+      <p:sp>
+        <p:nvSpPr>
+          <p:cNvPr id="8" name="Text 6"/>
+          <p:cNvSpPr txBox="1"/>
+          <p:nvPr/>
+        </p:nvSpPr>
+        <p:spPr>
+          <a:xfrm>
+            <a:off x="502920" y="4069080"/>
+            <a:ext cx="8138160" cy="548640"/>
+          </a:xfrm>
+          <a:prstGeom prst="rect">
+            <a:avLst/>
+          </a:prstGeom>
+          <a:noFill/>
+          <a:ln/>
+        </p:spPr>
+        <p:txBody>
+          <a:bodyPr wrap="square" lIns="0" tIns="0" rIns="0" bIns="0" rtlCol="0" anchor="ctr"/>
+          <a:lstStyle/>
+          <a:p>
+            <a:pPr indent="0" marL="0">
+              <a:buNone/>
+            </a:pPr>
+            <a:r>
+              <a:rPr lang="en-US" sz="1200" i="1" dirty="0">
+                <a:solidFill>
+                  <a:srgbClr val="64748B"/>
+                </a:solidFill>
+                <a:latin typeface="Arial" pitchFamily="34" charset="0"/>
+                <a:ea typeface="Arial" pitchFamily="34" charset="-122"/>
+                <a:cs typeface="Arial" pitchFamily="34" charset="-120"/>
+              </a:rPr>
+              <a:t>💡 Цель без даты или «в конце семестра» — не Time-bound. Нужно число.</a:t>
+            </a:r>
+            <a:endParaRPr lang="en-US" sz="1200" dirty="0"/>
+          </a:p>
+        </p:txBody>
+      </p:sp>
+    </p:spTree>
+  </p:cSld>
+  <p:clrMapOvr>
+    <a:masterClrMapping/>
+  </p:clrMapOvr>
+</p:sld>
+</file>
+
+<file path=ppt/slides/slide13.xml><?xml version="1.0" encoding="utf-8"?>
+<p:sld xmlns:a="http://schemas.openxmlformats.org/drawingml/2006/main" xmlns:r="http://schemas.openxmlformats.org/officeDocument/2006/relationships" xmlns:p="http://schemas.openxmlformats.org/presentationml/2006/main">
+  <p:cSld name="Slide 13">
+    <p:bg>
+      <p:bgPr>
+        <a:solidFill>
+          <a:srgbClr val="FFFFFF"/>
+        </a:solidFill>
+      </p:bgPr>
+    </p:bg>
+    <p:spTree>
+      <p:nvGrpSpPr>
+        <p:cNvPr id="1" name=""/>
+        <p:cNvGrpSpPr/>
+        <p:nvPr/>
+      </p:nvGrpSpPr>
+      <p:grpSpPr>
+        <a:xfrm>
+          <a:off x="0" y="0"/>
+          <a:ext cx="0" cy="0"/>
+          <a:chOff x="0" y="0"/>
+          <a:chExt cx="0" cy="0"/>
+        </a:xfrm>
+      </p:grpSpPr>
+      <p:sp>
+        <p:nvSpPr>
+          <p:cNvPr id="2" name="Text 0"/>
+          <p:cNvSpPr txBox="1"/>
+          <p:nvPr/>
+        </p:nvSpPr>
+        <p:spPr>
+          <a:xfrm>
+            <a:off x="7543800" y="4736592"/>
+            <a:ext cx="1097280" cy="256032"/>
+          </a:xfrm>
+          <a:prstGeom prst="rect">
+            <a:avLst/>
+          </a:prstGeom>
+          <a:noFill/>
+          <a:ln/>
+        </p:spPr>
+        <p:txBody>
+          <a:bodyPr wrap="square" lIns="0" tIns="0" rIns="0" bIns="0" rtlCol="0" anchor="ctr"/>
+          <a:lstStyle/>
+          <a:p>
+            <a:pPr algn="r" indent="0" marL="0">
+              <a:buNone/>
+            </a:pPr>
+            <a:r>
+              <a:rPr lang="en-US" sz="1000" dirty="0">
+                <a:solidFill>
+                  <a:srgbClr val="64748B"/>
+                </a:solidFill>
+                <a:latin typeface="Arial" pitchFamily="34" charset="0"/>
+                <a:ea typeface="Arial" pitchFamily="34" charset="-122"/>
+                <a:cs typeface="Arial" pitchFamily="34" charset="-120"/>
+              </a:rPr>
+              <a:t>13 / 14</a:t>
+            </a:r>
+            <a:endParaRPr lang="en-US" sz="1000" dirty="0"/>
+          </a:p>
+        </p:txBody>
+      </p:sp>
+      <p:sp>
+        <p:nvSpPr>
+          <p:cNvPr id="3" name="Text 1"/>
+          <p:cNvSpPr txBox="1"/>
+          <p:nvPr/>
+        </p:nvSpPr>
+        <p:spPr>
+          <a:xfrm>
+            <a:off x="502920" y="182880"/>
+            <a:ext cx="8138160" cy="219456"/>
+          </a:xfrm>
+          <a:prstGeom prst="rect">
+            <a:avLst/>
+          </a:prstGeom>
+          <a:noFill/>
+          <a:ln/>
+        </p:spPr>
+        <p:txBody>
+          <a:bodyPr wrap="square" lIns="0" tIns="0" rIns="0" bIns="0" rtlCol="0" anchor="ctr"/>
+          <a:lstStyle/>
+          <a:p>
+            <a:pPr indent="0" marL="0">
+              <a:buNone/>
+            </a:pPr>
+            <a:r>
+              <a:rPr lang="en-US" sz="1100" spc="150" kern="0" dirty="0">
+                <a:solidFill>
+                  <a:srgbClr val="64748B"/>
+                </a:solidFill>
+                <a:latin typeface="Arial" pitchFamily="34" charset="0"/>
+                <a:ea typeface="Arial" pitchFamily="34" charset="-122"/>
+                <a:cs typeface="Arial" pitchFamily="34" charset="-120"/>
+              </a:rPr>
+              <a:t>5 МИНУТ</a:t>
+            </a:r>
+            <a:endParaRPr lang="en-US" sz="1100" dirty="0"/>
+          </a:p>
+        </p:txBody>
+      </p:sp>
+      <p:sp>
+        <p:nvSpPr>
+          <p:cNvPr id="4" name="Text 2"/>
+          <p:cNvSpPr txBox="1"/>
+          <p:nvPr/>
+        </p:nvSpPr>
+        <p:spPr>
+          <a:xfrm>
+            <a:off x="502920" y="365760"/>
+            <a:ext cx="8138160" cy="640080"/>
+          </a:xfrm>
+          <a:prstGeom prst="rect">
+            <a:avLst/>
+          </a:prstGeom>
+          <a:noFill/>
+          <a:ln/>
+        </p:spPr>
+        <p:txBody>
+          <a:bodyPr wrap="square" lIns="0" tIns="0" rIns="0" bIns="0" rtlCol="0" anchor="ctr"/>
+          <a:lstStyle/>
+          <a:p>
+            <a:pPr indent="0" marL="0">
+              <a:buNone/>
+            </a:pPr>
+            <a:r>
+              <a:rPr lang="en-US" sz="2700" b="1" dirty="0">
+                <a:solidFill>
+                  <a:srgbClr val="005AAA"/>
+                </a:solidFill>
+                <a:latin typeface="Arial" pitchFamily="34" charset="0"/>
+                <a:ea typeface="Arial" pitchFamily="34" charset="-122"/>
+                <a:cs typeface="Arial" pitchFamily="34" charset="-120"/>
+              </a:rPr>
+              <a:t>Соседняя команда ищет слабое место</a:t>
+            </a:r>
+            <a:endParaRPr lang="en-US" sz="2700" dirty="0"/>
+          </a:p>
+        </p:txBody>
+      </p:sp>
+      <p:sp>
+        <p:nvSpPr>
+          <p:cNvPr id="5" name="Shape 3"/>
+          <p:cNvSpPr/>
+          <p:nvPr/>
+        </p:nvSpPr>
+        <p:spPr>
+          <a:xfrm>
+            <a:off x="502920" y="1463040"/>
+            <a:ext cx="8138160" cy="1554480"/>
+          </a:xfrm>
+          <a:prstGeom prst="roundRect">
+            <a:avLst>
+              <a:gd name="adj" fmla="val 2941"/>
+            </a:avLst>
+          </a:prstGeom>
+          <a:solidFill>
+            <a:srgbClr val="F5F7FA"/>
+          </a:solidFill>
+          <a:ln w="9525">
+            <a:solidFill>
+              <a:srgbClr val="D8DEE6"/>
+            </a:solidFill>
+            <a:prstDash val="solid"/>
+          </a:ln>
+        </p:spPr>
+      </p:sp>
+      <p:sp>
+        <p:nvSpPr>
+          <p:cNvPr id="6" name="Text 4"/>
+          <p:cNvSpPr txBox="1"/>
+          <p:nvPr/>
+        </p:nvSpPr>
+        <p:spPr>
+          <a:xfrm>
+            <a:off x="777240" y="1737360"/>
+            <a:ext cx="7589520" cy="1005840"/>
+          </a:xfrm>
+          <a:prstGeom prst="rect">
+            <a:avLst/>
+          </a:prstGeom>
+          <a:noFill/>
+          <a:ln/>
+        </p:spPr>
+        <p:txBody>
+          <a:bodyPr wrap="square" lIns="0" tIns="0" rIns="0" bIns="0" rtlCol="0" anchor="ctr"/>
+          <a:lstStyle/>
+          <a:p>
+            <a:pPr indent="0" marL="0">
+              <a:lnSpc>
+                <a:spcPts val="2400"/>
+              </a:lnSpc>
+              <a:buNone/>
+            </a:pPr>
+            <a:r>
+              <a:rPr lang="en-US" sz="1600" dirty="0">
+                <a:solidFill>
+                  <a:srgbClr val="1E293B"/>
+                </a:solidFill>
+                <a:latin typeface="Arial" pitchFamily="34" charset="0"/>
+                <a:ea typeface="Arial" pitchFamily="34" charset="-122"/>
+                <a:cs typeface="Arial" pitchFamily="34" charset="-120"/>
+              </a:rPr>
+              <a:t>Обменяйтесь листом 2. Найдите ОДНУ букву SMART, которая на самом деле не выполнена, и напишите почему.</a:t>
+            </a:r>
+            <a:endParaRPr lang="en-US" sz="1600" dirty="0"/>
+          </a:p>
+        </p:txBody>
+      </p:sp>
+      <p:sp>
+        <p:nvSpPr>
+          <p:cNvPr id="7" name="Text 5"/>
+          <p:cNvSpPr txBox="1"/>
+          <p:nvPr/>
+        </p:nvSpPr>
+        <p:spPr>
+          <a:xfrm>
+            <a:off x="502920" y="3246120"/>
+            <a:ext cx="8138160" cy="457200"/>
+          </a:xfrm>
+          <a:prstGeom prst="rect">
+            <a:avLst/>
+          </a:prstGeom>
+          <a:noFill/>
+          <a:ln/>
+        </p:spPr>
+        <p:txBody>
+          <a:bodyPr wrap="square" lIns="0" tIns="0" rIns="0" bIns="0" rtlCol="0" anchor="ctr"/>
+          <a:lstStyle/>
+          <a:p>
+            <a:pPr indent="0" marL="0">
+              <a:buNone/>
+            </a:pPr>
+            <a:r>
+              <a:rPr lang="en-US" sz="1300" i="1" dirty="0">
+                <a:solidFill>
+                  <a:srgbClr val="64748B"/>
+                </a:solidFill>
+                <a:latin typeface="Arial" pitchFamily="34" charset="0"/>
+                <a:ea typeface="Arial" pitchFamily="34" charset="-122"/>
+                <a:cs typeface="Arial" pitchFamily="34" charset="-120"/>
+              </a:rPr>
+              <a:t>Найти слабое место в чужой цели — услуга, а не критика. В следующий раз то же самое сделают с вашей.</a:t>
+            </a:r>
+            <a:endParaRPr lang="en-US" sz="1300" dirty="0"/>
+          </a:p>
+        </p:txBody>
+      </p:sp>
+    </p:spTree>
+  </p:cSld>
+  <p:clrMapOvr>
+    <a:masterClrMapping/>
+  </p:clrMapOvr>
+</p:sld>
+</file>
+
+<file path=ppt/slides/slide14.xml><?xml version="1.0" encoding="utf-8"?>
+<p:sld xmlns:a="http://schemas.openxmlformats.org/drawingml/2006/main" xmlns:r="http://schemas.openxmlformats.org/officeDocument/2006/relationships" xmlns:p="http://schemas.openxmlformats.org/presentationml/2006/main">
+  <p:cSld name="Slide 14">
+    <p:bg>
+      <p:bgPr>
+        <a:solidFill>
+          <a:srgbClr val="FFFFFF"/>
+        </a:solidFill>
+      </p:bgPr>
+    </p:bg>
+    <p:spTree>
+      <p:nvGrpSpPr>
+        <p:cNvPr id="1" name=""/>
+        <p:cNvGrpSpPr/>
+        <p:nvPr/>
+      </p:nvGrpSpPr>
+      <p:grpSpPr>
+        <a:xfrm>
+          <a:off x="0" y="0"/>
+          <a:ext cx="0" cy="0"/>
+          <a:chOff x="0" y="0"/>
+          <a:chExt cx="0" cy="0"/>
+        </a:xfrm>
+      </p:grpSpPr>
+      <p:sp>
+        <p:nvSpPr>
+          <p:cNvPr id="2" name="Text 0"/>
+          <p:cNvSpPr txBox="1"/>
+          <p:nvPr/>
+        </p:nvSpPr>
+        <p:spPr>
+          <a:xfrm>
+            <a:off x="7543800" y="4736592"/>
+            <a:ext cx="1097280" cy="256032"/>
+          </a:xfrm>
+          <a:prstGeom prst="rect">
+            <a:avLst/>
+          </a:prstGeom>
+          <a:noFill/>
+          <a:ln/>
+        </p:spPr>
+        <p:txBody>
+          <a:bodyPr wrap="square" lIns="0" tIns="0" rIns="0" bIns="0" rtlCol="0" anchor="ctr"/>
+          <a:lstStyle/>
+          <a:p>
+            <a:pPr algn="r" indent="0" marL="0">
+              <a:buNone/>
+            </a:pPr>
+            <a:r>
+              <a:rPr lang="en-US" sz="1000" dirty="0">
+                <a:solidFill>
+                  <a:srgbClr val="64748B"/>
+                </a:solidFill>
+                <a:latin typeface="Arial" pitchFamily="34" charset="0"/>
+                <a:ea typeface="Arial" pitchFamily="34" charset="-122"/>
+                <a:cs typeface="Arial" pitchFamily="34" charset="-120"/>
+              </a:rPr>
+              <a:t>14 / 14</a:t>
+            </a:r>
+            <a:endParaRPr lang="en-US" sz="1000" dirty="0"/>
+          </a:p>
+        </p:txBody>
+      </p:sp>
+      <p:sp>
+        <p:nvSpPr>
+          <p:cNvPr id="3" name="Text 1"/>
+          <p:cNvSpPr txBox="1"/>
+          <p:nvPr/>
+        </p:nvSpPr>
+        <p:spPr>
+          <a:xfrm>
             <a:off x="502920" y="182880"/>
             <a:ext cx="8138160" cy="219456"/>
           </a:xfrm>
@@ -2584,7 +5319,7 @@
       </p:sp>
       <p:sp>
         <p:nvSpPr>
-          <p:cNvPr id="3" name="Text 1"/>
+          <p:cNvPr id="4" name="Text 2"/>
           <p:cNvSpPr txBox="1"/>
           <p:nvPr/>
         </p:nvSpPr>
@@ -2623,7 +5358,7 @@
       </p:sp>
       <p:sp>
         <p:nvSpPr>
-          <p:cNvPr id="4" name="Text 2"/>
+          <p:cNvPr id="5" name="Text 3"/>
           <p:cNvSpPr txBox="1"/>
           <p:nvPr/>
         </p:nvSpPr>
@@ -2662,7 +5397,7 @@
       </p:sp>
       <p:sp>
         <p:nvSpPr>
-          <p:cNvPr id="5" name="Text 3"/>
+          <p:cNvPr id="6" name="Text 4"/>
           <p:cNvSpPr txBox="1"/>
           <p:nvPr/>
         </p:nvSpPr>
@@ -2701,7 +5436,7 @@
       </p:sp>
       <p:sp>
         <p:nvSpPr>
-          <p:cNvPr id="6" name="Text 4"/>
+          <p:cNvPr id="7" name="Text 5"/>
           <p:cNvSpPr txBox="1"/>
           <p:nvPr/>
         </p:nvSpPr>
@@ -2740,7 +5475,7 @@
       </p:sp>
       <p:sp>
         <p:nvSpPr>
-          <p:cNvPr id="7" name="Text 5"/>
+          <p:cNvPr id="8" name="Text 6"/>
           <p:cNvSpPr txBox="1"/>
           <p:nvPr/>
         </p:nvSpPr>
@@ -2779,7 +5514,7 @@
       </p:sp>
       <p:sp>
         <p:nvSpPr>
-          <p:cNvPr id="8" name="Text 6"/>
+          <p:cNvPr id="9" name="Text 7"/>
           <p:cNvSpPr txBox="1"/>
           <p:nvPr/>
         </p:nvSpPr>
@@ -2818,7 +5553,7 @@
       </p:sp>
       <p:sp>
         <p:nvSpPr>
-          <p:cNvPr id="9" name="Text 7"/>
+          <p:cNvPr id="10" name="Text 8"/>
           <p:cNvSpPr txBox="1"/>
           <p:nvPr/>
         </p:nvSpPr>
@@ -2857,7 +5592,7 @@
       </p:sp>
       <p:sp>
         <p:nvSpPr>
-          <p:cNvPr id="10" name="Text 8"/>
+          <p:cNvPr id="11" name="Text 9"/>
           <p:cNvSpPr txBox="1"/>
           <p:nvPr/>
         </p:nvSpPr>
@@ -2888,7 +5623,7 @@
                 <a:ea typeface="Arial" pitchFamily="34" charset="-122"/>
                 <a:cs typeface="Arial" pitchFamily="34" charset="-120"/>
               </a:rPr>
-              <a:t>Паспорт — тот самый документ из лекции 05.09 про гранты РНФ и «УМНИК». Сегодняшние два листа — его первая половина.</a:t>
+              <a:t>Паспорт — тот самый документ из вводной лекции про гранты РНФ и «УМНИК». Сегодняшние два листа — его первая половина.</a:t>
             </a:r>
             <a:endParaRPr lang="en-US" sz="1200" dirty="0"/>
           </a:p>
@@ -2934,6 +5669,45 @@
         </p:nvSpPr>
         <p:spPr>
           <a:xfrm>
+            <a:off x="7543800" y="4736592"/>
+            <a:ext cx="1097280" cy="256032"/>
+          </a:xfrm>
+          <a:prstGeom prst="rect">
+            <a:avLst/>
+          </a:prstGeom>
+          <a:noFill/>
+          <a:ln/>
+        </p:spPr>
+        <p:txBody>
+          <a:bodyPr wrap="square" lIns="0" tIns="0" rIns="0" bIns="0" rtlCol="0" anchor="ctr"/>
+          <a:lstStyle/>
+          <a:p>
+            <a:pPr algn="r" indent="0" marL="0">
+              <a:buNone/>
+            </a:pPr>
+            <a:r>
+              <a:rPr lang="en-US" sz="1000" dirty="0">
+                <a:solidFill>
+                  <a:srgbClr val="64748B"/>
+                </a:solidFill>
+                <a:latin typeface="Arial" pitchFamily="34" charset="0"/>
+                <a:ea typeface="Arial" pitchFamily="34" charset="-122"/>
+                <a:cs typeface="Arial" pitchFamily="34" charset="-120"/>
+              </a:rPr>
+              <a:t>2 / 14</a:t>
+            </a:r>
+            <a:endParaRPr lang="en-US" sz="1000" dirty="0"/>
+          </a:p>
+        </p:txBody>
+      </p:sp>
+      <p:sp>
+        <p:nvSpPr>
+          <p:cNvPr id="3" name="Text 1"/>
+          <p:cNvSpPr txBox="1"/>
+          <p:nvPr/>
+        </p:nvSpPr>
+        <p:spPr>
+          <a:xfrm>
             <a:off x="502920" y="182880"/>
             <a:ext cx="8138160" cy="219456"/>
           </a:xfrm>
@@ -2967,7 +5741,7 @@
       </p:sp>
       <p:sp>
         <p:nvSpPr>
-          <p:cNvPr id="3" name="Text 1"/>
+          <p:cNvPr id="4" name="Text 2"/>
           <p:cNvSpPr txBox="1"/>
           <p:nvPr/>
         </p:nvSpPr>
@@ -3006,7 +5780,7 @@
       </p:sp>
       <p:sp>
         <p:nvSpPr>
-          <p:cNvPr id="4" name="Shape 2"/>
+          <p:cNvPr id="5" name="Shape 3"/>
           <p:cNvSpPr/>
           <p:nvPr/>
         </p:nvSpPr>
@@ -3033,7 +5807,7 @@
       </p:sp>
       <p:sp>
         <p:nvSpPr>
-          <p:cNvPr id="5" name="Text 3"/>
+          <p:cNvPr id="6" name="Text 4"/>
           <p:cNvSpPr txBox="1"/>
           <p:nvPr/>
         </p:nvSpPr>
@@ -3072,7 +5846,7 @@
       </p:sp>
       <p:sp>
         <p:nvSpPr>
-          <p:cNvPr id="6" name="Text 4"/>
+          <p:cNvPr id="7" name="Text 5"/>
           <p:cNvSpPr txBox="1"/>
           <p:nvPr/>
         </p:nvSpPr>
@@ -3203,7 +5977,7 @@
       </p:sp>
       <p:sp>
         <p:nvSpPr>
-          <p:cNvPr id="7" name="Shape 5"/>
+          <p:cNvPr id="8" name="Shape 6"/>
           <p:cNvSpPr/>
           <p:nvPr/>
         </p:nvSpPr>
@@ -3230,7 +6004,7 @@
       </p:sp>
       <p:sp>
         <p:nvSpPr>
-          <p:cNvPr id="8" name="Text 6"/>
+          <p:cNvPr id="9" name="Text 7"/>
           <p:cNvSpPr txBox="1"/>
           <p:nvPr/>
         </p:nvSpPr>
@@ -3269,7 +6043,7 @@
       </p:sp>
       <p:sp>
         <p:nvSpPr>
-          <p:cNvPr id="9" name="Text 7"/>
+          <p:cNvPr id="10" name="Text 8"/>
           <p:cNvSpPr txBox="1"/>
           <p:nvPr/>
         </p:nvSpPr>
@@ -3364,6 +6138,45 @@
                 <a:cs typeface="Arial" pitchFamily="34" charset="-120"/>
               </a:rPr>
               <a:t>4. Проверка соседней командой</a:t>
+            </a:r>
+            <a:endParaRPr lang="en-US" sz="1300" dirty="0"/>
+          </a:p>
+        </p:txBody>
+      </p:sp>
+      <p:sp>
+        <p:nvSpPr>
+          <p:cNvPr id="11" name="Text 9"/>
+          <p:cNvSpPr txBox="1"/>
+          <p:nvPr/>
+        </p:nvSpPr>
+        <p:spPr>
+          <a:xfrm>
+            <a:off x="502920" y="4023360"/>
+            <a:ext cx="8138160" cy="274320"/>
+          </a:xfrm>
+          <a:prstGeom prst="rect">
+            <a:avLst/>
+          </a:prstGeom>
+          <a:noFill/>
+          <a:ln/>
+        </p:spPr>
+        <p:txBody>
+          <a:bodyPr wrap="square" lIns="0" tIns="0" rIns="0" bIns="0" rtlCol="0" anchor="ctr"/>
+          <a:lstStyle/>
+          <a:p>
+            <a:pPr indent="0" marL="0">
+              <a:buNone/>
+            </a:pPr>
+            <a:r>
+              <a:rPr lang="en-US" sz="1300" b="1" dirty="0">
+                <a:solidFill>
+                  <a:srgbClr val="9E4257"/>
+                </a:solidFill>
+                <a:latin typeface="Arial" pitchFamily="34" charset="0"/>
+                <a:ea typeface="Arial" pitchFamily="34" charset="-122"/>
+                <a:cs typeface="Arial" pitchFamily="34" charset="-120"/>
+              </a:rPr>
+              <a:t>Итог пары — два документа по ОДНОМУ выбранному концепту</a:t>
             </a:r>
             <a:endParaRPr lang="en-US" sz="1300" dirty="0"/>
           </a:p>
@@ -3409,6 +6222,45 @@
         </p:nvSpPr>
         <p:spPr>
           <a:xfrm>
+            <a:off x="7543800" y="4736592"/>
+            <a:ext cx="1097280" cy="256032"/>
+          </a:xfrm>
+          <a:prstGeom prst="rect">
+            <a:avLst/>
+          </a:prstGeom>
+          <a:noFill/>
+          <a:ln/>
+        </p:spPr>
+        <p:txBody>
+          <a:bodyPr wrap="square" lIns="0" tIns="0" rIns="0" bIns="0" rtlCol="0" anchor="ctr"/>
+          <a:lstStyle/>
+          <a:p>
+            <a:pPr algn="r" indent="0" marL="0">
+              <a:buNone/>
+            </a:pPr>
+            <a:r>
+              <a:rPr lang="en-US" sz="1000" dirty="0">
+                <a:solidFill>
+                  <a:srgbClr val="64748B"/>
+                </a:solidFill>
+                <a:latin typeface="Arial" pitchFamily="34" charset="0"/>
+                <a:ea typeface="Arial" pitchFamily="34" charset="-122"/>
+                <a:cs typeface="Arial" pitchFamily="34" charset="-120"/>
+              </a:rPr>
+              <a:t>3 / 14</a:t>
+            </a:r>
+            <a:endParaRPr lang="en-US" sz="1000" dirty="0"/>
+          </a:p>
+        </p:txBody>
+      </p:sp>
+      <p:sp>
+        <p:nvSpPr>
+          <p:cNvPr id="3" name="Text 1"/>
+          <p:cNvSpPr txBox="1"/>
+          <p:nvPr/>
+        </p:nvSpPr>
+        <p:spPr>
+          <a:xfrm>
             <a:off x="502920" y="182880"/>
             <a:ext cx="8138160" cy="219456"/>
           </a:xfrm>
@@ -3442,7 +6294,7 @@
       </p:sp>
       <p:sp>
         <p:nvSpPr>
-          <p:cNvPr id="3" name="Text 1"/>
+          <p:cNvPr id="4" name="Text 2"/>
           <p:cNvSpPr txBox="1"/>
           <p:nvPr/>
         </p:nvSpPr>
@@ -3481,18 +6333,126 @@
       </p:sp>
       <p:sp>
         <p:nvSpPr>
-          <p:cNvPr id="4" name="Shape 2"/>
+          <p:cNvPr id="5" name="Shape 3"/>
           <p:cNvSpPr/>
           <p:nvPr/>
         </p:nvSpPr>
         <p:spPr>
           <a:xfrm>
-            <a:off x="502920" y="1325880"/>
-            <a:ext cx="8138160" cy="621792"/>
+            <a:off x="502920" y="1078992"/>
+            <a:ext cx="8138160" cy="1051560"/>
           </a:xfrm>
           <a:prstGeom prst="roundRect">
             <a:avLst>
-              <a:gd name="adj" fmla="val 7353"/>
+              <a:gd name="adj" fmla="val 4348"/>
+            </a:avLst>
+          </a:prstGeom>
+          <a:solidFill>
+            <a:srgbClr val="1E4270"/>
+          </a:solidFill>
+          <a:ln w="9525">
+            <a:solidFill>
+              <a:srgbClr val="D8DEE6"/>
+            </a:solidFill>
+            <a:prstDash val="solid"/>
+          </a:ln>
+        </p:spPr>
+      </p:sp>
+      <p:sp>
+        <p:nvSpPr>
+          <p:cNvPr id="6" name="Text 4"/>
+          <p:cNvSpPr txBox="1"/>
+          <p:nvPr/>
+        </p:nvSpPr>
+        <p:spPr>
+          <a:xfrm>
+            <a:off x="777240" y="1207008"/>
+            <a:ext cx="7589520" cy="822960"/>
+          </a:xfrm>
+          <a:prstGeom prst="rect">
+            <a:avLst/>
+          </a:prstGeom>
+          <a:noFill/>
+          <a:ln/>
+        </p:spPr>
+        <p:txBody>
+          <a:bodyPr wrap="square" lIns="0" tIns="0" rIns="0" bIns="0" rtlCol="0" anchor="ctr"/>
+          <a:lstStyle/>
+          <a:p>
+            <a:pPr indent="0" marL="0">
+              <a:lnSpc>
+                <a:spcPts val="1900"/>
+              </a:lnSpc>
+              <a:buNone/>
+            </a:pPr>
+            <a:r>
+              <a:rPr lang="en-US" sz="1350" dirty="0">
+                <a:solidFill>
+                  <a:srgbClr val="FFFFFF"/>
+                </a:solidFill>
+                <a:latin typeface="Arial" pitchFamily="34" charset="0"/>
+                <a:ea typeface="Arial" pitchFamily="34" charset="-122"/>
+                <a:cs typeface="Arial" pitchFamily="34" charset="-120"/>
+              </a:rPr>
+              <a:t>Определение. Ценностное предложение — короткое проверяемое утверждение о том, какую конкретную выгоду и для какой конкретной группы людей создаёт результат проекта и чем предложенный способ лучше того, которым эта задача решается сейчас.</a:t>
+            </a:r>
+            <a:endParaRPr lang="en-US" sz="1350" dirty="0"/>
+          </a:p>
+        </p:txBody>
+      </p:sp>
+      <p:sp>
+        <p:nvSpPr>
+          <p:cNvPr id="7" name="Text 5"/>
+          <p:cNvSpPr txBox="1"/>
+          <p:nvPr/>
+        </p:nvSpPr>
+        <p:spPr>
+          <a:xfrm>
+            <a:off x="502920" y="2212848"/>
+            <a:ext cx="8138160" cy="237744"/>
+          </a:xfrm>
+          <a:prstGeom prst="rect">
+            <a:avLst/>
+          </a:prstGeom>
+          <a:noFill/>
+          <a:ln/>
+        </p:spPr>
+        <p:txBody>
+          <a:bodyPr wrap="square" lIns="0" tIns="0" rIns="0" bIns="0" rtlCol="0" anchor="ctr"/>
+          <a:lstStyle/>
+          <a:p>
+            <a:pPr indent="0" marL="0">
+              <a:buNone/>
+            </a:pPr>
+            <a:r>
+              <a:rPr lang="en-US" sz="1200" i="1" dirty="0">
+                <a:solidFill>
+                  <a:srgbClr val="64748B"/>
+                </a:solidFill>
+                <a:latin typeface="Arial" pitchFamily="34" charset="0"/>
+                <a:ea typeface="Arial" pitchFamily="34" charset="-122"/>
+                <a:cs typeface="Arial" pitchFamily="34" charset="-120"/>
+              </a:rPr>
+              <a:t>Четыре части — заполняются все четыре, иначе утверждение нечем проверить</a:t>
+            </a:r>
+            <a:endParaRPr lang="en-US" sz="1200" dirty="0"/>
+          </a:p>
+        </p:txBody>
+      </p:sp>
+      <p:sp>
+        <p:nvSpPr>
+          <p:cNvPr id="8" name="Shape 6"/>
+          <p:cNvSpPr/>
+          <p:nvPr/>
+        </p:nvSpPr>
+        <p:spPr>
+          <a:xfrm>
+            <a:off x="502920" y="2487168"/>
+            <a:ext cx="8138160" cy="475488"/>
+          </a:xfrm>
+          <a:prstGeom prst="roundRect">
+            <a:avLst>
+              <a:gd name="adj" fmla="val 9615"/>
             </a:avLst>
           </a:prstGeom>
           <a:solidFill>
@@ -3508,14 +6468,14 @@
       </p:sp>
       <p:sp>
         <p:nvSpPr>
-          <p:cNvPr id="5" name="Text 3"/>
+          <p:cNvPr id="9" name="Text 7"/>
           <p:cNvSpPr txBox="1"/>
           <p:nvPr/>
         </p:nvSpPr>
         <p:spPr>
           <a:xfrm>
-            <a:off x="685800" y="1472184"/>
-            <a:ext cx="365760" cy="365760"/>
+            <a:off x="685800" y="2560320"/>
+            <a:ext cx="365760" cy="329184"/>
           </a:xfrm>
           <a:prstGeom prst="rect">
             <a:avLst/>
@@ -3531,7 +6491,7 @@
               <a:buNone/>
             </a:pPr>
             <a:r>
-              <a:rPr lang="en-US" sz="2000" b="1" dirty="0">
+              <a:rPr lang="en-US" sz="1700" b="1" dirty="0">
                 <a:solidFill>
                   <a:srgbClr val="9E4257"/>
                 </a:solidFill>
@@ -3541,20 +6501,20 @@
               </a:rPr>
               <a:t>1</a:t>
             </a:r>
-            <a:endParaRPr lang="en-US" sz="2000" dirty="0"/>
+            <a:endParaRPr lang="en-US" sz="1700" dirty="0"/>
           </a:p>
         </p:txBody>
       </p:sp>
       <p:sp>
         <p:nvSpPr>
-          <p:cNvPr id="6" name="Text 4"/>
+          <p:cNvPr id="10" name="Text 8"/>
           <p:cNvSpPr txBox="1"/>
           <p:nvPr/>
         </p:nvSpPr>
         <p:spPr>
           <a:xfrm>
-            <a:off x="1124712" y="1399032"/>
-            <a:ext cx="2377440" cy="457200"/>
+            <a:off x="1069848" y="2532888"/>
+            <a:ext cx="2286000" cy="384048"/>
           </a:xfrm>
           <a:prstGeom prst="rect">
             <a:avLst/>
@@ -3570,7 +6530,7 @@
               <a:buNone/>
             </a:pPr>
             <a:r>
-              <a:rPr lang="en-US" sz="1400" b="1" dirty="0">
+              <a:rPr lang="en-US" sz="1350" b="1" dirty="0">
                 <a:solidFill>
                   <a:srgbClr val="1E293B"/>
                 </a:solidFill>
@@ -3580,20 +6540,20 @@
               </a:rPr>
               <a:t>Для кого</a:t>
             </a:r>
-            <a:endParaRPr lang="en-US" sz="1400" dirty="0"/>
+            <a:endParaRPr lang="en-US" sz="1350" dirty="0"/>
           </a:p>
         </p:txBody>
       </p:sp>
       <p:sp>
         <p:nvSpPr>
-          <p:cNvPr id="7" name="Text 5"/>
+          <p:cNvPr id="11" name="Text 9"/>
           <p:cNvSpPr txBox="1"/>
           <p:nvPr/>
         </p:nvSpPr>
         <p:spPr>
           <a:xfrm>
-            <a:off x="3566160" y="1399032"/>
-            <a:ext cx="4754880" cy="457200"/>
+            <a:off x="3429000" y="2532888"/>
+            <a:ext cx="4892040" cy="384048"/>
           </a:xfrm>
           <a:prstGeom prst="rect">
             <a:avLst/>
@@ -3609,7 +6569,7 @@
               <a:buNone/>
             </a:pPr>
             <a:r>
-              <a:rPr lang="en-US" sz="1200" dirty="0">
+              <a:rPr lang="en-US" sz="1150" dirty="0">
                 <a:solidFill>
                   <a:srgbClr val="64748B"/>
                 </a:solidFill>
@@ -3617,26 +6577,26 @@
                 <a:ea typeface="Arial" pitchFamily="34" charset="-122"/>
                 <a:cs typeface="Arial" pitchFamily="34" charset="-120"/>
               </a:rPr>
-              <a:t>Кто конкретно столкнётся с результатом — узкая группа, а не «все студенты»</a:t>
+              <a:t>Узкая группа людей, а не «все студенты»</a:t>
             </a:r>
-            <a:endParaRPr lang="en-US" sz="1200" dirty="0"/>
+            <a:endParaRPr lang="en-US" sz="1150" dirty="0"/>
           </a:p>
         </p:txBody>
       </p:sp>
       <p:sp>
         <p:nvSpPr>
-          <p:cNvPr id="8" name="Shape 6"/>
+          <p:cNvPr id="12" name="Shape 10"/>
           <p:cNvSpPr/>
           <p:nvPr/>
         </p:nvSpPr>
         <p:spPr>
           <a:xfrm>
-            <a:off x="502920" y="2075688"/>
-            <a:ext cx="8138160" cy="621792"/>
+            <a:off x="502920" y="3035808"/>
+            <a:ext cx="8138160" cy="475488"/>
           </a:xfrm>
           <a:prstGeom prst="roundRect">
             <a:avLst>
-              <a:gd name="adj" fmla="val 7353"/>
+              <a:gd name="adj" fmla="val 9615"/>
             </a:avLst>
           </a:prstGeom>
           <a:solidFill>
@@ -3652,14 +6612,14 @@
       </p:sp>
       <p:sp>
         <p:nvSpPr>
-          <p:cNvPr id="9" name="Text 7"/>
+          <p:cNvPr id="13" name="Text 11"/>
           <p:cNvSpPr txBox="1"/>
           <p:nvPr/>
         </p:nvSpPr>
         <p:spPr>
           <a:xfrm>
-            <a:off x="685800" y="2221992"/>
-            <a:ext cx="365760" cy="365760"/>
+            <a:off x="685800" y="3108960"/>
+            <a:ext cx="365760" cy="329184"/>
           </a:xfrm>
           <a:prstGeom prst="rect">
             <a:avLst/>
@@ -3675,7 +6635,7 @@
               <a:buNone/>
             </a:pPr>
             <a:r>
-              <a:rPr lang="en-US" sz="2000" b="1" dirty="0">
+              <a:rPr lang="en-US" sz="1700" b="1" dirty="0">
                 <a:solidFill>
                   <a:srgbClr val="9E4257"/>
                 </a:solidFill>
@@ -3685,20 +6645,20 @@
               </a:rPr>
               <a:t>2</a:t>
             </a:r>
-            <a:endParaRPr lang="en-US" sz="2000" dirty="0"/>
+            <a:endParaRPr lang="en-US" sz="1700" dirty="0"/>
           </a:p>
         </p:txBody>
       </p:sp>
       <p:sp>
         <p:nvSpPr>
-          <p:cNvPr id="10" name="Text 8"/>
+          <p:cNvPr id="14" name="Text 12"/>
           <p:cNvSpPr txBox="1"/>
           <p:nvPr/>
         </p:nvSpPr>
         <p:spPr>
           <a:xfrm>
-            <a:off x="1124712" y="2148840"/>
-            <a:ext cx="2377440" cy="457200"/>
+            <a:off x="1069848" y="3081528"/>
+            <a:ext cx="2286000" cy="384048"/>
           </a:xfrm>
           <a:prstGeom prst="rect">
             <a:avLst/>
@@ -3714,7 +6674,7 @@
               <a:buNone/>
             </a:pPr>
             <a:r>
-              <a:rPr lang="en-US" sz="1400" b="1" dirty="0">
+              <a:rPr lang="en-US" sz="1350" b="1" dirty="0">
                 <a:solidFill>
                   <a:srgbClr val="1E293B"/>
                 </a:solidFill>
@@ -3724,20 +6684,20 @@
               </a:rPr>
               <a:t>Что делаем</a:t>
             </a:r>
-            <a:endParaRPr lang="en-US" sz="1400" dirty="0"/>
+            <a:endParaRPr lang="en-US" sz="1350" dirty="0"/>
           </a:p>
         </p:txBody>
       </p:sp>
       <p:sp>
         <p:nvSpPr>
-          <p:cNvPr id="11" name="Text 9"/>
+          <p:cNvPr id="15" name="Text 13"/>
           <p:cNvSpPr txBox="1"/>
           <p:nvPr/>
         </p:nvSpPr>
         <p:spPr>
           <a:xfrm>
-            <a:off x="3566160" y="2148840"/>
-            <a:ext cx="4754880" cy="457200"/>
+            <a:off x="3429000" y="3081528"/>
+            <a:ext cx="4892040" cy="384048"/>
           </a:xfrm>
           <a:prstGeom prst="rect">
             <a:avLst/>
@@ -3753,7 +6713,7 @@
               <a:buNone/>
             </a:pPr>
             <a:r>
-              <a:rPr lang="en-US" sz="1200" dirty="0">
+              <a:rPr lang="en-US" sz="1150" dirty="0">
                 <a:solidFill>
                   <a:srgbClr val="64748B"/>
                 </a:solidFill>
@@ -3763,24 +6723,24 @@
               </a:rPr>
               <a:t>Какой продукт, инструмент или изменение мы создаём</a:t>
             </a:r>
-            <a:endParaRPr lang="en-US" sz="1200" dirty="0"/>
+            <a:endParaRPr lang="en-US" sz="1150" dirty="0"/>
           </a:p>
         </p:txBody>
       </p:sp>
       <p:sp>
         <p:nvSpPr>
-          <p:cNvPr id="12" name="Shape 10"/>
+          <p:cNvPr id="16" name="Shape 14"/>
           <p:cNvSpPr/>
           <p:nvPr/>
         </p:nvSpPr>
         <p:spPr>
           <a:xfrm>
-            <a:off x="502920" y="2825496"/>
-            <a:ext cx="8138160" cy="621792"/>
+            <a:off x="502920" y="3584448"/>
+            <a:ext cx="8138160" cy="475488"/>
           </a:xfrm>
           <a:prstGeom prst="roundRect">
             <a:avLst>
-              <a:gd name="adj" fmla="val 7353"/>
+              <a:gd name="adj" fmla="val 9615"/>
             </a:avLst>
           </a:prstGeom>
           <a:solidFill>
@@ -3796,14 +6756,14 @@
       </p:sp>
       <p:sp>
         <p:nvSpPr>
-          <p:cNvPr id="13" name="Text 11"/>
+          <p:cNvPr id="17" name="Text 15"/>
           <p:cNvSpPr txBox="1"/>
           <p:nvPr/>
         </p:nvSpPr>
         <p:spPr>
           <a:xfrm>
-            <a:off x="685800" y="2971800"/>
-            <a:ext cx="365760" cy="365760"/>
+            <a:off x="685800" y="3657600"/>
+            <a:ext cx="365760" cy="329184"/>
           </a:xfrm>
           <a:prstGeom prst="rect">
             <a:avLst/>
@@ -3819,7 +6779,7 @@
               <a:buNone/>
             </a:pPr>
             <a:r>
-              <a:rPr lang="en-US" sz="2000" b="1" dirty="0">
+              <a:rPr lang="en-US" sz="1700" b="1" dirty="0">
                 <a:solidFill>
                   <a:srgbClr val="9E4257"/>
                 </a:solidFill>
@@ -3829,20 +6789,20 @@
               </a:rPr>
               <a:t>3</a:t>
             </a:r>
-            <a:endParaRPr lang="en-US" sz="2000" dirty="0"/>
+            <a:endParaRPr lang="en-US" sz="1700" dirty="0"/>
           </a:p>
         </p:txBody>
       </p:sp>
       <p:sp>
         <p:nvSpPr>
-          <p:cNvPr id="14" name="Text 12"/>
+          <p:cNvPr id="18" name="Text 16"/>
           <p:cNvSpPr txBox="1"/>
           <p:nvPr/>
         </p:nvSpPr>
         <p:spPr>
           <a:xfrm>
-            <a:off x="1124712" y="2898648"/>
-            <a:ext cx="2377440" cy="457200"/>
+            <a:off x="1069848" y="3630168"/>
+            <a:ext cx="2286000" cy="384048"/>
           </a:xfrm>
           <a:prstGeom prst="rect">
             <a:avLst/>
@@ -3858,7 +6818,7 @@
               <a:buNone/>
             </a:pPr>
             <a:r>
-              <a:rPr lang="en-US" sz="1400" b="1" dirty="0">
+              <a:rPr lang="en-US" sz="1350" b="1" dirty="0">
                 <a:solidFill>
                   <a:srgbClr val="1E293B"/>
                 </a:solidFill>
@@ -3868,20 +6828,20 @@
               </a:rPr>
               <a:t>Какую выгоду даёт</a:t>
             </a:r>
-            <a:endParaRPr lang="en-US" sz="1400" dirty="0"/>
+            <a:endParaRPr lang="en-US" sz="1350" dirty="0"/>
           </a:p>
         </p:txBody>
       </p:sp>
       <p:sp>
         <p:nvSpPr>
-          <p:cNvPr id="15" name="Text 13"/>
+          <p:cNvPr id="19" name="Text 17"/>
           <p:cNvSpPr txBox="1"/>
           <p:nvPr/>
         </p:nvSpPr>
         <p:spPr>
           <a:xfrm>
-            <a:off x="3566160" y="2898648"/>
-            <a:ext cx="4754880" cy="457200"/>
+            <a:off x="3429000" y="3630168"/>
+            <a:ext cx="4892040" cy="384048"/>
           </a:xfrm>
           <a:prstGeom prst="rect">
             <a:avLst/>
@@ -3897,7 +6857,7 @@
               <a:buNone/>
             </a:pPr>
             <a:r>
-              <a:rPr lang="en-US" sz="1200" dirty="0">
+              <a:rPr lang="en-US" sz="1150" dirty="0">
                 <a:solidFill>
                   <a:srgbClr val="64748B"/>
                 </a:solidFill>
@@ -3905,26 +6865,26 @@
                 <a:ea typeface="Arial" pitchFamily="34" charset="-122"/>
                 <a:cs typeface="Arial" pitchFamily="34" charset="-120"/>
               </a:rPr>
-              <a:t>Что станет лучше и насколько это измеримо</a:t>
+              <a:t>Что станет лучше и по какому признаку это видно</a:t>
             </a:r>
-            <a:endParaRPr lang="en-US" sz="1200" dirty="0"/>
+            <a:endParaRPr lang="en-US" sz="1150" dirty="0"/>
           </a:p>
         </p:txBody>
       </p:sp>
       <p:sp>
         <p:nvSpPr>
-          <p:cNvPr id="16" name="Shape 14"/>
+          <p:cNvPr id="20" name="Shape 18"/>
           <p:cNvSpPr/>
           <p:nvPr/>
         </p:nvSpPr>
         <p:spPr>
           <a:xfrm>
-            <a:off x="502920" y="3575304"/>
-            <a:ext cx="8138160" cy="621792"/>
+            <a:off x="502920" y="4133088"/>
+            <a:ext cx="8138160" cy="475488"/>
           </a:xfrm>
           <a:prstGeom prst="roundRect">
             <a:avLst>
-              <a:gd name="adj" fmla="val 7353"/>
+              <a:gd name="adj" fmla="val 9615"/>
             </a:avLst>
           </a:prstGeom>
           <a:solidFill>
@@ -3940,14 +6900,14 @@
       </p:sp>
       <p:sp>
         <p:nvSpPr>
-          <p:cNvPr id="17" name="Text 15"/>
+          <p:cNvPr id="21" name="Text 19"/>
           <p:cNvSpPr txBox="1"/>
           <p:nvPr/>
         </p:nvSpPr>
         <p:spPr>
           <a:xfrm>
-            <a:off x="685800" y="3721608"/>
-            <a:ext cx="365760" cy="365760"/>
+            <a:off x="685800" y="4206240"/>
+            <a:ext cx="365760" cy="329184"/>
           </a:xfrm>
           <a:prstGeom prst="rect">
             <a:avLst/>
@@ -3963,7 +6923,7 @@
               <a:buNone/>
             </a:pPr>
             <a:r>
-              <a:rPr lang="en-US" sz="2000" b="1" dirty="0">
+              <a:rPr lang="en-US" sz="1700" b="1" dirty="0">
                 <a:solidFill>
                   <a:srgbClr val="9E4257"/>
                 </a:solidFill>
@@ -3973,20 +6933,20 @@
               </a:rPr>
               <a:t>4</a:t>
             </a:r>
-            <a:endParaRPr lang="en-US" sz="2000" dirty="0"/>
+            <a:endParaRPr lang="en-US" sz="1700" dirty="0"/>
           </a:p>
         </p:txBody>
       </p:sp>
       <p:sp>
         <p:nvSpPr>
-          <p:cNvPr id="18" name="Text 16"/>
+          <p:cNvPr id="22" name="Text 20"/>
           <p:cNvSpPr txBox="1"/>
           <p:nvPr/>
         </p:nvSpPr>
         <p:spPr>
           <a:xfrm>
-            <a:off x="1124712" y="3648456"/>
-            <a:ext cx="2377440" cy="457200"/>
+            <a:off x="1069848" y="4178808"/>
+            <a:ext cx="2286000" cy="384048"/>
           </a:xfrm>
           <a:prstGeom prst="rect">
             <a:avLst/>
@@ -4002,7 +6962,7 @@
               <a:buNone/>
             </a:pPr>
             <a:r>
-              <a:rPr lang="en-US" sz="1400" b="1" dirty="0">
+              <a:rPr lang="en-US" sz="1350" b="1" dirty="0">
                 <a:solidFill>
                   <a:srgbClr val="1E293B"/>
                 </a:solidFill>
@@ -4012,20 +6972,20 @@
               </a:rPr>
               <a:t>В отличие от чего</a:t>
             </a:r>
-            <a:endParaRPr lang="en-US" sz="1400" dirty="0"/>
+            <a:endParaRPr lang="en-US" sz="1350" dirty="0"/>
           </a:p>
         </p:txBody>
       </p:sp>
       <p:sp>
         <p:nvSpPr>
-          <p:cNvPr id="19" name="Text 17"/>
+          <p:cNvPr id="23" name="Text 21"/>
           <p:cNvSpPr txBox="1"/>
           <p:nvPr/>
         </p:nvSpPr>
         <p:spPr>
           <a:xfrm>
-            <a:off x="3566160" y="3648456"/>
-            <a:ext cx="4754880" cy="457200"/>
+            <a:off x="3429000" y="4178808"/>
+            <a:ext cx="4892040" cy="384048"/>
           </a:xfrm>
           <a:prstGeom prst="rect">
             <a:avLst/>
@@ -4041,7 +7001,7 @@
               <a:buNone/>
             </a:pPr>
             <a:r>
-              <a:rPr lang="en-US" sz="1200" dirty="0">
+              <a:rPr lang="en-US" sz="1150" dirty="0">
                 <a:solidFill>
                   <a:srgbClr val="64748B"/>
                 </a:solidFill>
@@ -4049,9 +7009,9 @@
                 <a:ea typeface="Arial" pitchFamily="34" charset="-122"/>
                 <a:cs typeface="Arial" pitchFamily="34" charset="-120"/>
               </a:rPr>
-              <a:t>Как решается сейчас без вас — и почему это хуже</a:t>
+              <a:t>Как задача решается сейчас без нас — и почему это хуже</a:t>
             </a:r>
-            <a:endParaRPr lang="en-US" sz="1200" dirty="0"/>
+            <a:endParaRPr lang="en-US" sz="1150" dirty="0"/>
           </a:p>
         </p:txBody>
       </p:sp>
@@ -4095,6 +7055,45 @@
         </p:nvSpPr>
         <p:spPr>
           <a:xfrm>
+            <a:off x="7543800" y="4736592"/>
+            <a:ext cx="1097280" cy="256032"/>
+          </a:xfrm>
+          <a:prstGeom prst="rect">
+            <a:avLst/>
+          </a:prstGeom>
+          <a:noFill/>
+          <a:ln/>
+        </p:spPr>
+        <p:txBody>
+          <a:bodyPr wrap="square" lIns="0" tIns="0" rIns="0" bIns="0" rtlCol="0" anchor="ctr"/>
+          <a:lstStyle/>
+          <a:p>
+            <a:pPr algn="r" indent="0" marL="0">
+              <a:buNone/>
+            </a:pPr>
+            <a:r>
+              <a:rPr lang="en-US" sz="1000" dirty="0">
+                <a:solidFill>
+                  <a:srgbClr val="64748B"/>
+                </a:solidFill>
+                <a:latin typeface="Arial" pitchFamily="34" charset="0"/>
+                <a:ea typeface="Arial" pitchFamily="34" charset="-122"/>
+                <a:cs typeface="Arial" pitchFamily="34" charset="-120"/>
+              </a:rPr>
+              <a:t>4 / 14</a:t>
+            </a:r>
+            <a:endParaRPr lang="en-US" sz="1000" dirty="0"/>
+          </a:p>
+        </p:txBody>
+      </p:sp>
+      <p:sp>
+        <p:nvSpPr>
+          <p:cNvPr id="3" name="Text 1"/>
+          <p:cNvSpPr txBox="1"/>
+          <p:nvPr/>
+        </p:nvSpPr>
+        <p:spPr>
+          <a:xfrm>
             <a:off x="502920" y="182880"/>
             <a:ext cx="8138160" cy="219456"/>
           </a:xfrm>
@@ -4128,7 +7127,7 @@
       </p:sp>
       <p:sp>
         <p:nvSpPr>
-          <p:cNvPr id="3" name="Text 1"/>
+          <p:cNvPr id="4" name="Text 2"/>
           <p:cNvSpPr txBox="1"/>
           <p:nvPr/>
         </p:nvSpPr>
@@ -4167,7 +7166,7 @@
       </p:sp>
       <p:sp>
         <p:nvSpPr>
-          <p:cNvPr id="4" name="Text 2"/>
+          <p:cNvPr id="5" name="Text 3"/>
           <p:cNvSpPr txBox="1"/>
           <p:nvPr/>
         </p:nvSpPr>
@@ -4206,7 +7205,7 @@
       </p:sp>
       <p:sp>
         <p:nvSpPr>
-          <p:cNvPr id="5" name="Shape 3"/>
+          <p:cNvPr id="6" name="Shape 4"/>
           <p:cNvSpPr/>
           <p:nvPr/>
         </p:nvSpPr>
@@ -4233,7 +7232,7 @@
       </p:sp>
       <p:sp>
         <p:nvSpPr>
-          <p:cNvPr id="6" name="Text 4"/>
+          <p:cNvPr id="7" name="Text 5"/>
           <p:cNvSpPr txBox="1"/>
           <p:nvPr/>
         </p:nvSpPr>
@@ -4272,7 +7271,7 @@
       </p:sp>
       <p:sp>
         <p:nvSpPr>
-          <p:cNvPr id="7" name="Text 5"/>
+          <p:cNvPr id="8" name="Text 6"/>
           <p:cNvSpPr txBox="1"/>
           <p:nvPr/>
         </p:nvSpPr>
@@ -4963,7 +7962,7 @@
       </p:graphicFrame>
       <p:sp>
         <p:nvSpPr>
-          <p:cNvPr id="9" name="Text 6"/>
+          <p:cNvPr id="10" name="Text 7"/>
           <p:cNvSpPr txBox="1"/>
           <p:nvPr/>
         </p:nvSpPr>
@@ -5040,6 +8039,45 @@
         </p:nvSpPr>
         <p:spPr>
           <a:xfrm>
+            <a:off x="7543800" y="4736592"/>
+            <a:ext cx="1097280" cy="256032"/>
+          </a:xfrm>
+          <a:prstGeom prst="rect">
+            <a:avLst/>
+          </a:prstGeom>
+          <a:noFill/>
+          <a:ln/>
+        </p:spPr>
+        <p:txBody>
+          <a:bodyPr wrap="square" lIns="0" tIns="0" rIns="0" bIns="0" rtlCol="0" anchor="ctr"/>
+          <a:lstStyle/>
+          <a:p>
+            <a:pPr algn="r" indent="0" marL="0">
+              <a:buNone/>
+            </a:pPr>
+            <a:r>
+              <a:rPr lang="en-US" sz="1000" dirty="0">
+                <a:solidFill>
+                  <a:srgbClr val="64748B"/>
+                </a:solidFill>
+                <a:latin typeface="Arial" pitchFamily="34" charset="0"/>
+                <a:ea typeface="Arial" pitchFamily="34" charset="-122"/>
+                <a:cs typeface="Arial" pitchFamily="34" charset="-120"/>
+              </a:rPr>
+              <a:t>5 / 14</a:t>
+            </a:r>
+            <a:endParaRPr lang="en-US" sz="1000" dirty="0"/>
+          </a:p>
+        </p:txBody>
+      </p:sp>
+      <p:sp>
+        <p:nvSpPr>
+          <p:cNvPr id="3" name="Text 1"/>
+          <p:cNvSpPr txBox="1"/>
+          <p:nvPr/>
+        </p:nvSpPr>
+        <p:spPr>
+          <a:xfrm>
             <a:off x="502920" y="182880"/>
             <a:ext cx="8138160" cy="219456"/>
           </a:xfrm>
@@ -5065,7 +8103,7 @@
                 <a:ea typeface="Arial" pitchFamily="34" charset="-122"/>
                 <a:cs typeface="Arial" pitchFamily="34" charset="-120"/>
               </a:rPr>
-              <a:t>ЛИСТ 1 · 15 МИНУТ</a:t>
+              <a:t>ЛИСТ 1 · 12 МИНУТ</a:t>
             </a:r>
             <a:endParaRPr lang="en-US" sz="1100" dirty="0"/>
           </a:p>
@@ -5073,7 +8111,7 @@
       </p:sp>
       <p:sp>
         <p:nvSpPr>
-          <p:cNvPr id="3" name="Text 1"/>
+          <p:cNvPr id="4" name="Text 2"/>
           <p:cNvSpPr txBox="1"/>
           <p:nvPr/>
         </p:nvSpPr>
@@ -5112,7 +8150,7 @@
       </p:sp>
       <p:sp>
         <p:nvSpPr>
-          <p:cNvPr id="4" name="Text 2"/>
+          <p:cNvPr id="5" name="Text 3"/>
           <p:cNvSpPr txBox="1"/>
           <p:nvPr/>
         </p:nvSpPr>
@@ -5151,7 +8189,7 @@
       </p:sp>
       <p:sp>
         <p:nvSpPr>
-          <p:cNvPr id="5" name="Shape 3"/>
+          <p:cNvPr id="6" name="Shape 4"/>
           <p:cNvSpPr/>
           <p:nvPr/>
         </p:nvSpPr>
@@ -5700,6 +8738,45 @@
           </a:graphicData>
         </a:graphic>
       </p:graphicFrame>
+      <p:sp>
+        <p:nvSpPr>
+          <p:cNvPr id="8" name="Text 5"/>
+          <p:cNvSpPr txBox="1"/>
+          <p:nvPr/>
+        </p:nvSpPr>
+        <p:spPr>
+          <a:xfrm>
+            <a:off x="502920" y="3977640"/>
+            <a:ext cx="8138160" cy="548640"/>
+          </a:xfrm>
+          <a:prstGeom prst="rect">
+            <a:avLst/>
+          </a:prstGeom>
+          <a:noFill/>
+          <a:ln/>
+        </p:spPr>
+        <p:txBody>
+          <a:bodyPr wrap="square" lIns="0" tIns="0" rIns="0" bIns="0" rtlCol="0" anchor="ctr"/>
+          <a:lstStyle/>
+          <a:p>
+            <a:pPr indent="0" marL="0">
+              <a:buNone/>
+            </a:pPr>
+            <a:r>
+              <a:rPr lang="en-US" sz="1200" i="1" dirty="0">
+                <a:solidFill>
+                  <a:srgbClr val="64748B"/>
+                </a:solidFill>
+                <a:latin typeface="Arial" pitchFamily="34" charset="0"/>
+                <a:ea typeface="Arial" pitchFamily="34" charset="-122"/>
+                <a:cs typeface="Arial" pitchFamily="34" charset="-120"/>
+              </a:rPr>
+              <a:t>💡 На каждое «удобнее» и «лучше» — вопрос: насколько, в чём измеряется.</a:t>
+            </a:r>
+            <a:endParaRPr lang="en-US" sz="1200" dirty="0"/>
+          </a:p>
+        </p:txBody>
+      </p:sp>
     </p:spTree>
   </p:cSld>
   <p:clrMapOvr>
@@ -5740,6 +8817,45 @@
         </p:nvSpPr>
         <p:spPr>
           <a:xfrm>
+            <a:off x="7543800" y="4736592"/>
+            <a:ext cx="1097280" cy="256032"/>
+          </a:xfrm>
+          <a:prstGeom prst="rect">
+            <a:avLst/>
+          </a:prstGeom>
+          <a:noFill/>
+          <a:ln/>
+        </p:spPr>
+        <p:txBody>
+          <a:bodyPr wrap="square" lIns="0" tIns="0" rIns="0" bIns="0" rtlCol="0" anchor="ctr"/>
+          <a:lstStyle/>
+          <a:p>
+            <a:pPr algn="r" indent="0" marL="0">
+              <a:buNone/>
+            </a:pPr>
+            <a:r>
+              <a:rPr lang="en-US" sz="1000" dirty="0">
+                <a:solidFill>
+                  <a:srgbClr val="64748B"/>
+                </a:solidFill>
+                <a:latin typeface="Arial" pitchFamily="34" charset="0"/>
+                <a:ea typeface="Arial" pitchFamily="34" charset="-122"/>
+                <a:cs typeface="Arial" pitchFamily="34" charset="-120"/>
+              </a:rPr>
+              <a:t>6 / 14</a:t>
+            </a:r>
+            <a:endParaRPr lang="en-US" sz="1000" dirty="0"/>
+          </a:p>
+        </p:txBody>
+      </p:sp>
+      <p:sp>
+        <p:nvSpPr>
+          <p:cNvPr id="3" name="Text 1"/>
+          <p:cNvSpPr txBox="1"/>
+          <p:nvPr/>
+        </p:nvSpPr>
+        <p:spPr>
+          <a:xfrm>
             <a:off x="502920" y="182880"/>
             <a:ext cx="8138160" cy="219456"/>
           </a:xfrm>
@@ -5765,7 +8881,7 @@
                 <a:ea typeface="Arial" pitchFamily="34" charset="-122"/>
                 <a:cs typeface="Arial" pitchFamily="34" charset="-120"/>
               </a:rPr>
-              <a:t>15–45 МИН</a:t>
+              <a:t>ВЫБОР · ЧАСТЬ 1</a:t>
             </a:r>
             <a:endParaRPr lang="en-US" sz="1100" dirty="0"/>
           </a:p>
@@ -5773,7 +8889,7 @@
       </p:sp>
       <p:sp>
         <p:nvSpPr>
-          <p:cNvPr id="3" name="Text 1"/>
+          <p:cNvPr id="4" name="Text 2"/>
           <p:cNvSpPr txBox="1"/>
           <p:nvPr/>
         </p:nvSpPr>
@@ -5804,9 +8920,48 @@
                 <a:ea typeface="Arial" pitchFamily="34" charset="-122"/>
                 <a:cs typeface="Arial" pitchFamily="34" charset="-120"/>
               </a:rPr>
-              <a:t>Выберите один по критериям слайда 10</a:t>
+              <a:t>Четыре критерия: что писать в строке</a:t>
             </a:r>
             <a:endParaRPr lang="en-US" sz="2700" dirty="0"/>
+          </a:p>
+        </p:txBody>
+      </p:sp>
+      <p:sp>
+        <p:nvSpPr>
+          <p:cNvPr id="5" name="Text 3"/>
+          <p:cNvSpPr txBox="1"/>
+          <p:nvPr/>
+        </p:nvSpPr>
+        <p:spPr>
+          <a:xfrm>
+            <a:off x="502920" y="1024128"/>
+            <a:ext cx="8138160" cy="256032"/>
+          </a:xfrm>
+          <a:prstGeom prst="rect">
+            <a:avLst/>
+          </a:prstGeom>
+          <a:noFill/>
+          <a:ln/>
+        </p:spPr>
+        <p:txBody>
+          <a:bodyPr wrap="square" lIns="0" tIns="0" rIns="0" bIns="0" rtlCol="0" anchor="ctr"/>
+          <a:lstStyle/>
+          <a:p>
+            <a:pPr indent="0" marL="0">
+              <a:buNone/>
+            </a:pPr>
+            <a:r>
+              <a:rPr lang="en-US" sz="1200" i="1" dirty="0">
+                <a:solidFill>
+                  <a:srgbClr val="64748B"/>
+                </a:solidFill>
+                <a:latin typeface="Arial" pitchFamily="34" charset="0"/>
+                <a:ea typeface="Arial" pitchFamily="34" charset="-122"/>
+                <a:cs typeface="Arial" pitchFamily="34" charset="-120"/>
+              </a:rPr>
+              <a:t>Критерии те же, что я называл на вводной лекции. Сегодня они впервые работают как инструмент выбора, а не как список.</a:t>
+            </a:r>
+            <a:endParaRPr lang="en-US" sz="1200" dirty="0"/>
           </a:p>
         </p:txBody>
       </p:sp>
@@ -5833,21 +8988,20 @@
             <a:tbl>
               <a:tblPr/>
               <a:tblGrid>
-                <a:gridCol w="4480560"/>
-                <a:gridCol w="1874520"/>
-                <a:gridCol w="1874520"/>
+                <a:gridCol w="2011680"/>
+                <a:gridCol w="6126480"/>
               </a:tblGrid>
-              <a:tr h="475488">
+              <a:tr h="384048">
                 <a:tc>
                   <a:txBody>
                     <a:bodyPr/>
                     <a:lstStyle/>
                     <a:p>
-                      <a:pPr algn="l" indent="0" marL="0">
+                      <a:pPr algn="ctr" indent="0" marL="0">
                         <a:buNone/>
                       </a:pPr>
                       <a:r>
-                        <a:rPr lang="en-US" sz="1400" b="1" dirty="0">
+                        <a:rPr lang="en-US" sz="1200" b="1" dirty="0">
                           <a:solidFill>
                             <a:srgbClr val="FFFFFF"/>
                           </a:solidFill>
@@ -5857,7 +9011,7 @@
                         </a:rPr>
                         <a:t>Критерий</a:t>
                       </a:r>
-                      <a:endParaRPr lang="en-US" sz="1400" dirty="0">
+                      <a:endParaRPr lang="en-US" sz="1200" dirty="0">
                         <a:latin typeface="Arial" charset="0"/>
                         <a:ea typeface="Arial" charset="0"/>
                         <a:cs typeface="Arial" charset="0"/>
@@ -5911,11 +9065,11 @@
                     <a:bodyPr/>
                     <a:lstStyle/>
                     <a:p>
-                      <a:pPr algn="ctr" indent="0" marL="0">
+                      <a:pPr indent="0" marL="0">
                         <a:buNone/>
                       </a:pPr>
                       <a:r>
-                        <a:rPr lang="en-US" sz="1400" b="1" dirty="0">
+                        <a:rPr lang="en-US" sz="1200" b="1" dirty="0">
                           <a:solidFill>
                             <a:srgbClr val="FFFFFF"/>
                           </a:solidFill>
@@ -5923,9 +9077,9 @@
                           <a:ea typeface="Arial" pitchFamily="34" charset="-122"/>
                           <a:cs typeface="Arial" pitchFamily="34" charset="-120"/>
                         </a:rPr>
-                        <a:t>Вектор А</a:t>
+                        <a:t>Заготовка фразы — дописать своими словами</a:t>
                       </a:r>
-                      <a:endParaRPr lang="en-US" sz="1400" dirty="0">
+                      <a:endParaRPr lang="en-US" sz="1200" dirty="0">
                         <a:latin typeface="Arial" charset="0"/>
                         <a:ea typeface="Arial" charset="0"/>
                         <a:cs typeface="Arial" charset="0"/>
@@ -5974,86 +9128,18 @@
                     </a:solidFill>
                   </a:tcPr>
                 </a:tc>
+              </a:tr>
+              <a:tr h="731520">
                 <a:tc>
                   <a:txBody>
                     <a:bodyPr/>
                     <a:lstStyle/>
                     <a:p>
-                      <a:pPr algn="ctr" indent="0" marL="0">
+                      <a:pPr indent="0" marL="0">
                         <a:buNone/>
                       </a:pPr>
                       <a:r>
-                        <a:rPr lang="en-US" sz="1400" b="1" dirty="0">
-                          <a:solidFill>
-                            <a:srgbClr val="FFFFFF"/>
-                          </a:solidFill>
-                          <a:latin typeface="Arial" pitchFamily="34" charset="0"/>
-                          <a:ea typeface="Arial" pitchFamily="34" charset="-122"/>
-                          <a:cs typeface="Arial" pitchFamily="34" charset="-120"/>
-                        </a:rPr>
-                        <a:t>Вектор Б</a:t>
-                      </a:r>
-                      <a:endParaRPr lang="en-US" sz="1400" dirty="0">
-                        <a:latin typeface="Arial" charset="0"/>
-                        <a:ea typeface="Arial" charset="0"/>
-                        <a:cs typeface="Arial" charset="0"/>
-                      </a:endParaRPr>
-                    </a:p>
-                  </a:txBody>
-                  <a:tcPr marL="91440" marR="91440" marT="45720" marB="45720" anchor="ctr">
-                    <a:lnL w="6350" cap="flat" cmpd="sng" algn="ctr">
-                      <a:solidFill>
-                        <a:srgbClr val="D8DEE6"/>
-                      </a:solidFill>
-                      <a:prstDash val="solid"/>
-                      <a:round/>
-                      <a:headEnd type="none" w="med" len="med"/>
-                      <a:tailEnd type="none" w="med" len="med"/>
-                    </a:lnL>
-                    <a:lnR w="6350" cap="flat" cmpd="sng" algn="ctr">
-                      <a:solidFill>
-                        <a:srgbClr val="D8DEE6"/>
-                      </a:solidFill>
-                      <a:prstDash val="solid"/>
-                      <a:round/>
-                      <a:headEnd type="none" w="med" len="med"/>
-                      <a:tailEnd type="none" w="med" len="med"/>
-                    </a:lnR>
-                    <a:lnT w="6350" cap="flat" cmpd="sng" algn="ctr">
-                      <a:solidFill>
-                        <a:srgbClr val="D8DEE6"/>
-                      </a:solidFill>
-                      <a:prstDash val="solid"/>
-                      <a:round/>
-                      <a:headEnd type="none" w="med" len="med"/>
-                      <a:tailEnd type="none" w="med" len="med"/>
-                    </a:lnT>
-                    <a:lnB w="6350" cap="flat" cmpd="sng" algn="ctr">
-                      <a:solidFill>
-                        <a:srgbClr val="D8DEE6"/>
-                      </a:solidFill>
-                      <a:prstDash val="solid"/>
-                      <a:round/>
-                      <a:headEnd type="none" w="med" len="med"/>
-                      <a:tailEnd type="none" w="med" len="med"/>
-                    </a:lnB>
-                    <a:solidFill>
-                      <a:srgbClr val="1E4270"/>
-                    </a:solidFill>
-                  </a:tcPr>
-                </a:tc>
-              </a:tr>
-              <a:tr h="475488">
-                <a:tc>
-                  <a:txBody>
-                    <a:bodyPr/>
-                    <a:lstStyle/>
-                    <a:p>
-                      <a:pPr algn="ctr" indent="0" marL="0">
-                        <a:buNone/>
-                      </a:pPr>
-                      <a:r>
-                        <a:rPr lang="en-US" sz="1400" dirty="0">
+                        <a:rPr lang="en-US" sz="1200" dirty="0">
                           <a:solidFill>
                             <a:srgbClr val="1E293B"/>
                           </a:solidFill>
@@ -6063,7 +9149,7 @@
                         </a:rPr>
                         <a:t>Актуальность</a:t>
                       </a:r>
-                      <a:endParaRPr lang="en-US" sz="1400" dirty="0">
+                      <a:endParaRPr lang="en-US" sz="1200" dirty="0">
                         <a:latin typeface="Arial" charset="0"/>
                         <a:ea typeface="Arial" charset="0"/>
                         <a:cs typeface="Arial" charset="0"/>
@@ -6114,10 +9200,21 @@
                     <a:bodyPr/>
                     <a:lstStyle/>
                     <a:p>
-                      <a:pPr algn="ctr" indent="0" marL="0">
+                      <a:pPr indent="0" marL="0">
                         <a:buNone/>
                       </a:pPr>
-                      <a:endParaRPr lang="en-US" sz="1400" dirty="0">
+                      <a:r>
+                        <a:rPr lang="en-US" sz="1200" dirty="0">
+                          <a:solidFill>
+                            <a:srgbClr val="1E293B"/>
+                          </a:solidFill>
+                          <a:latin typeface="Arial" pitchFamily="34" charset="0"/>
+                          <a:ea typeface="Arial" pitchFamily="34" charset="-122"/>
+                          <a:cs typeface="Arial" pitchFamily="34" charset="-120"/>
+                        </a:rPr>
+                        <a:t>Проблема есть у [кто именно], возникает [как часто] и стоит им [время / деньги / риск]</a:t>
+                      </a:r>
+                      <a:endParaRPr lang="en-US" sz="1200" dirty="0">
                         <a:latin typeface="Arial" charset="0"/>
                         <a:ea typeface="Arial" charset="0"/>
                         <a:cs typeface="Arial" charset="0"/>
@@ -6163,72 +9260,18 @@
                     </a:lnB>
                   </a:tcPr>
                 </a:tc>
+              </a:tr>
+              <a:tr h="731520">
                 <a:tc>
                   <a:txBody>
                     <a:bodyPr/>
                     <a:lstStyle/>
                     <a:p>
-                      <a:pPr algn="ctr" indent="0" marL="0">
-                        <a:buNone/>
-                      </a:pPr>
-                      <a:endParaRPr lang="en-US" sz="1400" dirty="0">
-                        <a:latin typeface="Arial" charset="0"/>
-                        <a:ea typeface="Arial" charset="0"/>
-                        <a:cs typeface="Arial" charset="0"/>
-                      </a:endParaRPr>
-                    </a:p>
-                  </a:txBody>
-                  <a:tcPr marL="91440" marR="91440" marT="45720" marB="45720" anchor="ctr">
-                    <a:lnL w="6350" cap="flat" cmpd="sng" algn="ctr">
-                      <a:solidFill>
-                        <a:srgbClr val="D8DEE6"/>
-                      </a:solidFill>
-                      <a:prstDash val="solid"/>
-                      <a:round/>
-                      <a:headEnd type="none" w="med" len="med"/>
-                      <a:tailEnd type="none" w="med" len="med"/>
-                    </a:lnL>
-                    <a:lnR w="6350" cap="flat" cmpd="sng" algn="ctr">
-                      <a:solidFill>
-                        <a:srgbClr val="D8DEE6"/>
-                      </a:solidFill>
-                      <a:prstDash val="solid"/>
-                      <a:round/>
-                      <a:headEnd type="none" w="med" len="med"/>
-                      <a:tailEnd type="none" w="med" len="med"/>
-                    </a:lnR>
-                    <a:lnT w="6350" cap="flat" cmpd="sng" algn="ctr">
-                      <a:solidFill>
-                        <a:srgbClr val="D8DEE6"/>
-                      </a:solidFill>
-                      <a:prstDash val="solid"/>
-                      <a:round/>
-                      <a:headEnd type="none" w="med" len="med"/>
-                      <a:tailEnd type="none" w="med" len="med"/>
-                    </a:lnT>
-                    <a:lnB w="6350" cap="flat" cmpd="sng" algn="ctr">
-                      <a:solidFill>
-                        <a:srgbClr val="D8DEE6"/>
-                      </a:solidFill>
-                      <a:prstDash val="solid"/>
-                      <a:round/>
-                      <a:headEnd type="none" w="med" len="med"/>
-                      <a:tailEnd type="none" w="med" len="med"/>
-                    </a:lnB>
-                  </a:tcPr>
-                </a:tc>
-              </a:tr>
-              <a:tr h="475488">
-                <a:tc>
-                  <a:txBody>
-                    <a:bodyPr/>
-                    <a:lstStyle/>
-                    <a:p>
-                      <a:pPr algn="ctr" indent="0" marL="0">
+                      <a:pPr indent="0" marL="0">
                         <a:buNone/>
                       </a:pPr>
                       <a:r>
-                        <a:rPr lang="en-US" sz="1400" dirty="0">
+                        <a:rPr lang="en-US" sz="1200" dirty="0">
                           <a:solidFill>
                             <a:srgbClr val="1E293B"/>
                           </a:solidFill>
@@ -6238,7 +9281,7 @@
                         </a:rPr>
                         <a:t>Реализуемость</a:t>
                       </a:r>
-                      <a:endParaRPr lang="en-US" sz="1400" dirty="0">
+                      <a:endParaRPr lang="en-US" sz="1200" dirty="0">
                         <a:latin typeface="Arial" charset="0"/>
                         <a:ea typeface="Arial" charset="0"/>
                         <a:cs typeface="Arial" charset="0"/>
@@ -6289,10 +9332,21 @@
                     <a:bodyPr/>
                     <a:lstStyle/>
                     <a:p>
-                      <a:pPr algn="ctr" indent="0" marL="0">
+                      <a:pPr indent="0" marL="0">
                         <a:buNone/>
                       </a:pPr>
-                      <a:endParaRPr lang="en-US" sz="1400" dirty="0">
+                      <a:r>
+                        <a:rPr lang="en-US" sz="1200" dirty="0">
+                          <a:solidFill>
+                            <a:srgbClr val="1E293B"/>
+                          </a:solidFill>
+                          <a:latin typeface="Arial" pitchFamily="34" charset="0"/>
+                          <a:ea typeface="Arial" pitchFamily="34" charset="-122"/>
+                          <a:cs typeface="Arial" pitchFamily="34" charset="-120"/>
+                        </a:rPr>
+                        <a:t>За один семестр силами 3–4 человек; нужно [что именно], и это [есть / надо искать / нет]</a:t>
+                      </a:r>
+                      <a:endParaRPr lang="en-US" sz="1200" dirty="0">
                         <a:latin typeface="Arial" charset="0"/>
                         <a:ea typeface="Arial" charset="0"/>
                         <a:cs typeface="Arial" charset="0"/>
@@ -6338,72 +9392,18 @@
                     </a:lnB>
                   </a:tcPr>
                 </a:tc>
+              </a:tr>
+              <a:tr h="731520">
                 <a:tc>
                   <a:txBody>
                     <a:bodyPr/>
                     <a:lstStyle/>
                     <a:p>
-                      <a:pPr algn="ctr" indent="0" marL="0">
-                        <a:buNone/>
-                      </a:pPr>
-                      <a:endParaRPr lang="en-US" sz="1400" dirty="0">
-                        <a:latin typeface="Arial" charset="0"/>
-                        <a:ea typeface="Arial" charset="0"/>
-                        <a:cs typeface="Arial" charset="0"/>
-                      </a:endParaRPr>
-                    </a:p>
-                  </a:txBody>
-                  <a:tcPr marL="91440" marR="91440" marT="45720" marB="45720" anchor="ctr">
-                    <a:lnL w="6350" cap="flat" cmpd="sng" algn="ctr">
-                      <a:solidFill>
-                        <a:srgbClr val="D8DEE6"/>
-                      </a:solidFill>
-                      <a:prstDash val="solid"/>
-                      <a:round/>
-                      <a:headEnd type="none" w="med" len="med"/>
-                      <a:tailEnd type="none" w="med" len="med"/>
-                    </a:lnL>
-                    <a:lnR w="6350" cap="flat" cmpd="sng" algn="ctr">
-                      <a:solidFill>
-                        <a:srgbClr val="D8DEE6"/>
-                      </a:solidFill>
-                      <a:prstDash val="solid"/>
-                      <a:round/>
-                      <a:headEnd type="none" w="med" len="med"/>
-                      <a:tailEnd type="none" w="med" len="med"/>
-                    </a:lnR>
-                    <a:lnT w="6350" cap="flat" cmpd="sng" algn="ctr">
-                      <a:solidFill>
-                        <a:srgbClr val="D8DEE6"/>
-                      </a:solidFill>
-                      <a:prstDash val="solid"/>
-                      <a:round/>
-                      <a:headEnd type="none" w="med" len="med"/>
-                      <a:tailEnd type="none" w="med" len="med"/>
-                    </a:lnT>
-                    <a:lnB w="6350" cap="flat" cmpd="sng" algn="ctr">
-                      <a:solidFill>
-                        <a:srgbClr val="D8DEE6"/>
-                      </a:solidFill>
-                      <a:prstDash val="solid"/>
-                      <a:round/>
-                      <a:headEnd type="none" w="med" len="med"/>
-                      <a:tailEnd type="none" w="med" len="med"/>
-                    </a:lnB>
-                  </a:tcPr>
-                </a:tc>
-              </a:tr>
-              <a:tr h="475488">
-                <a:tc>
-                  <a:txBody>
-                    <a:bodyPr/>
-                    <a:lstStyle/>
-                    <a:p>
-                      <a:pPr algn="ctr" indent="0" marL="0">
+                      <a:pPr indent="0" marL="0">
                         <a:buNone/>
                       </a:pPr>
                       <a:r>
-                        <a:rPr lang="en-US" sz="1400" dirty="0">
+                        <a:rPr lang="en-US" sz="1200" dirty="0">
                           <a:solidFill>
                             <a:srgbClr val="1E293B"/>
                           </a:solidFill>
@@ -6413,7 +9413,7 @@
                         </a:rPr>
                         <a:t>Измеримость</a:t>
                       </a:r>
-                      <a:endParaRPr lang="en-US" sz="1400" dirty="0">
+                      <a:endParaRPr lang="en-US" sz="1200" dirty="0">
                         <a:latin typeface="Arial" charset="0"/>
                         <a:ea typeface="Arial" charset="0"/>
                         <a:cs typeface="Arial" charset="0"/>
@@ -6464,10 +9464,21 @@
                     <a:bodyPr/>
                     <a:lstStyle/>
                     <a:p>
-                      <a:pPr algn="ctr" indent="0" marL="0">
+                      <a:pPr indent="0" marL="0">
                         <a:buNone/>
                       </a:pPr>
-                      <a:endParaRPr lang="en-US" sz="1400" dirty="0">
+                      <a:r>
+                        <a:rPr lang="en-US" sz="1200" dirty="0">
+                          <a:solidFill>
+                            <a:srgbClr val="1E293B"/>
+                          </a:solidFill>
+                          <a:latin typeface="Arial" pitchFamily="34" charset="0"/>
+                          <a:ea typeface="Arial" pitchFamily="34" charset="-122"/>
+                          <a:cs typeface="Arial" pitchFamily="34" charset="-120"/>
+                        </a:rPr>
+                        <a:t>Успех — это [величина] [в каких единицах], измеряем [чем или как] [когда]</a:t>
+                      </a:r>
+                      <a:endParaRPr lang="en-US" sz="1200" dirty="0">
                         <a:latin typeface="Arial" charset="0"/>
                         <a:ea typeface="Arial" charset="0"/>
                         <a:cs typeface="Arial" charset="0"/>
@@ -6513,72 +9524,18 @@
                     </a:lnB>
                   </a:tcPr>
                 </a:tc>
+              </a:tr>
+              <a:tr h="731520">
                 <a:tc>
                   <a:txBody>
                     <a:bodyPr/>
                     <a:lstStyle/>
                     <a:p>
-                      <a:pPr algn="ctr" indent="0" marL="0">
-                        <a:buNone/>
-                      </a:pPr>
-                      <a:endParaRPr lang="en-US" sz="1400" dirty="0">
-                        <a:latin typeface="Arial" charset="0"/>
-                        <a:ea typeface="Arial" charset="0"/>
-                        <a:cs typeface="Arial" charset="0"/>
-                      </a:endParaRPr>
-                    </a:p>
-                  </a:txBody>
-                  <a:tcPr marL="91440" marR="91440" marT="45720" marB="45720" anchor="ctr">
-                    <a:lnL w="6350" cap="flat" cmpd="sng" algn="ctr">
-                      <a:solidFill>
-                        <a:srgbClr val="D8DEE6"/>
-                      </a:solidFill>
-                      <a:prstDash val="solid"/>
-                      <a:round/>
-                      <a:headEnd type="none" w="med" len="med"/>
-                      <a:tailEnd type="none" w="med" len="med"/>
-                    </a:lnL>
-                    <a:lnR w="6350" cap="flat" cmpd="sng" algn="ctr">
-                      <a:solidFill>
-                        <a:srgbClr val="D8DEE6"/>
-                      </a:solidFill>
-                      <a:prstDash val="solid"/>
-                      <a:round/>
-                      <a:headEnd type="none" w="med" len="med"/>
-                      <a:tailEnd type="none" w="med" len="med"/>
-                    </a:lnR>
-                    <a:lnT w="6350" cap="flat" cmpd="sng" algn="ctr">
-                      <a:solidFill>
-                        <a:srgbClr val="D8DEE6"/>
-                      </a:solidFill>
-                      <a:prstDash val="solid"/>
-                      <a:round/>
-                      <a:headEnd type="none" w="med" len="med"/>
-                      <a:tailEnd type="none" w="med" len="med"/>
-                    </a:lnT>
-                    <a:lnB w="6350" cap="flat" cmpd="sng" algn="ctr">
-                      <a:solidFill>
-                        <a:srgbClr val="D8DEE6"/>
-                      </a:solidFill>
-                      <a:prstDash val="solid"/>
-                      <a:round/>
-                      <a:headEnd type="none" w="med" len="med"/>
-                      <a:tailEnd type="none" w="med" len="med"/>
-                    </a:lnB>
-                  </a:tcPr>
-                </a:tc>
-              </a:tr>
-              <a:tr h="475488">
-                <a:tc>
-                  <a:txBody>
-                    <a:bodyPr/>
-                    <a:lstStyle/>
-                    <a:p>
-                      <a:pPr algn="ctr" indent="0" marL="0">
+                      <a:pPr indent="0" marL="0">
                         <a:buNone/>
                       </a:pPr>
                       <a:r>
-                        <a:rPr lang="en-US" sz="1400" dirty="0">
+                        <a:rPr lang="en-US" sz="1200" dirty="0">
                           <a:solidFill>
                             <a:srgbClr val="1E293B"/>
                           </a:solidFill>
@@ -6588,7 +9545,7 @@
                         </a:rPr>
                         <a:t>Новизна</a:t>
                       </a:r>
-                      <a:endParaRPr lang="en-US" sz="1400" dirty="0">
+                      <a:endParaRPr lang="en-US" sz="1200" dirty="0">
                         <a:latin typeface="Arial" charset="0"/>
                         <a:ea typeface="Arial" charset="0"/>
                         <a:cs typeface="Arial" charset="0"/>
@@ -6639,10 +9596,21 @@
                     <a:bodyPr/>
                     <a:lstStyle/>
                     <a:p>
-                      <a:pPr algn="ctr" indent="0" marL="0">
+                      <a:pPr indent="0" marL="0">
                         <a:buNone/>
                       </a:pPr>
-                      <a:endParaRPr lang="en-US" sz="1400" dirty="0">
+                      <a:r>
+                        <a:rPr lang="en-US" sz="1200" dirty="0">
+                          <a:solidFill>
+                            <a:srgbClr val="1E293B"/>
+                          </a:solidFill>
+                          <a:latin typeface="Arial" pitchFamily="34" charset="0"/>
+                          <a:ea typeface="Arial" pitchFamily="34" charset="-122"/>
+                          <a:cs typeface="Arial" pitchFamily="34" charset="-120"/>
+                        </a:rPr>
+                        <a:t>Похожие решения: [какие]. Мы отличаемся [чем: техникой, методикой или аудиторией]</a:t>
+                      </a:r>
+                      <a:endParaRPr lang="en-US" sz="1200" dirty="0">
                         <a:latin typeface="Arial" charset="0"/>
                         <a:ea typeface="Arial" charset="0"/>
                         <a:cs typeface="Arial" charset="0"/>
@@ -6688,60 +9656,6 @@
                     </a:lnB>
                   </a:tcPr>
                 </a:tc>
-                <a:tc>
-                  <a:txBody>
-                    <a:bodyPr/>
-                    <a:lstStyle/>
-                    <a:p>
-                      <a:pPr algn="ctr" indent="0" marL="0">
-                        <a:buNone/>
-                      </a:pPr>
-                      <a:endParaRPr lang="en-US" sz="1400" dirty="0">
-                        <a:latin typeface="Arial" charset="0"/>
-                        <a:ea typeface="Arial" charset="0"/>
-                        <a:cs typeface="Arial" charset="0"/>
-                      </a:endParaRPr>
-                    </a:p>
-                  </a:txBody>
-                  <a:tcPr marL="91440" marR="91440" marT="45720" marB="45720" anchor="ctr">
-                    <a:lnL w="6350" cap="flat" cmpd="sng" algn="ctr">
-                      <a:solidFill>
-                        <a:srgbClr val="D8DEE6"/>
-                      </a:solidFill>
-                      <a:prstDash val="solid"/>
-                      <a:round/>
-                      <a:headEnd type="none" w="med" len="med"/>
-                      <a:tailEnd type="none" w="med" len="med"/>
-                    </a:lnL>
-                    <a:lnR w="6350" cap="flat" cmpd="sng" algn="ctr">
-                      <a:solidFill>
-                        <a:srgbClr val="D8DEE6"/>
-                      </a:solidFill>
-                      <a:prstDash val="solid"/>
-                      <a:round/>
-                      <a:headEnd type="none" w="med" len="med"/>
-                      <a:tailEnd type="none" w="med" len="med"/>
-                    </a:lnR>
-                    <a:lnT w="6350" cap="flat" cmpd="sng" algn="ctr">
-                      <a:solidFill>
-                        <a:srgbClr val="D8DEE6"/>
-                      </a:solidFill>
-                      <a:prstDash val="solid"/>
-                      <a:round/>
-                      <a:headEnd type="none" w="med" len="med"/>
-                      <a:tailEnd type="none" w="med" len="med"/>
-                    </a:lnT>
-                    <a:lnB w="6350" cap="flat" cmpd="sng" algn="ctr">
-                      <a:solidFill>
-                        <a:srgbClr val="D8DEE6"/>
-                      </a:solidFill>
-                      <a:prstDash val="solid"/>
-                      <a:round/>
-                      <a:headEnd type="none" w="med" len="med"/>
-                      <a:tailEnd type="none" w="med" len="med"/>
-                    </a:lnB>
-                  </a:tcPr>
-                </a:tc>
               </a:tr>
             </a:tbl>
           </a:graphicData>
@@ -6749,14 +9663,14 @@
       </p:graphicFrame>
       <p:sp>
         <p:nvSpPr>
-          <p:cNvPr id="5" name="Text 2"/>
+          <p:cNvPr id="7" name="Text 4"/>
           <p:cNvSpPr txBox="1"/>
           <p:nvPr/>
         </p:nvSpPr>
         <p:spPr>
           <a:xfrm>
-            <a:off x="502920" y="3749040"/>
-            <a:ext cx="8138160" cy="457200"/>
+            <a:off x="502920" y="4224528"/>
+            <a:ext cx="8138160" cy="548640"/>
           </a:xfrm>
           <a:prstGeom prst="rect">
             <a:avLst/>
@@ -6772,7 +9686,7 @@
               <a:buNone/>
             </a:pPr>
             <a:r>
-              <a:rPr lang="en-US" sz="1300" dirty="0">
+              <a:rPr lang="en-US" sz="1200" i="1" dirty="0">
                 <a:solidFill>
                   <a:srgbClr val="64748B"/>
                 </a:solidFill>
@@ -6780,9 +9694,9 @@
                 <a:ea typeface="Arial" pitchFamily="34" charset="-122"/>
                 <a:cs typeface="Arial" pitchFamily="34" charset="-120"/>
               </a:rPr>
-              <a:t>Больше баллов — выбранный вектор. Проигравший не выбрасывается: попадёт в паспорт проекта как альтернатива.</a:t>
+              <a:t>💡 Одна строка обоснования на критерий. Балл без строки не ставится.</a:t>
             </a:r>
-            <a:endParaRPr lang="en-US" sz="1300" dirty="0"/>
+            <a:endParaRPr lang="en-US" sz="1200" dirty="0"/>
           </a:p>
         </p:txBody>
       </p:sp>
@@ -6797,197 +9711,6 @@
 <file path=ppt/slides/slide7.xml><?xml version="1.0" encoding="utf-8"?>
 <p:sld xmlns:a="http://schemas.openxmlformats.org/drawingml/2006/main" xmlns:r="http://schemas.openxmlformats.org/officeDocument/2006/relationships" xmlns:p="http://schemas.openxmlformats.org/presentationml/2006/main">
   <p:cSld name="Slide 7">
-    <p:bg>
-      <p:bgPr>
-        <a:solidFill>
-          <a:srgbClr val="1E4270"/>
-        </a:solidFill>
-      </p:bgPr>
-    </p:bg>
-    <p:spTree>
-      <p:nvGrpSpPr>
-        <p:cNvPr id="1" name=""/>
-        <p:cNvGrpSpPr/>
-        <p:nvPr/>
-      </p:nvGrpSpPr>
-      <p:grpSpPr>
-        <a:xfrm>
-          <a:off x="0" y="0"/>
-          <a:ext cx="0" cy="0"/>
-          <a:chOff x="0" y="0"/>
-          <a:chExt cx="0" cy="0"/>
-        </a:xfrm>
-      </p:grpSpPr>
-      <p:sp>
-        <p:nvSpPr>
-          <p:cNvPr id="2" name="Text 0"/>
-          <p:cNvSpPr txBox="1"/>
-          <p:nvPr/>
-        </p:nvSpPr>
-        <p:spPr>
-          <a:xfrm>
-            <a:off x="502920" y="182880"/>
-            <a:ext cx="8138160" cy="219456"/>
-          </a:xfrm>
-          <a:prstGeom prst="rect">
-            <a:avLst/>
-          </a:prstGeom>
-          <a:noFill/>
-          <a:ln/>
-        </p:spPr>
-        <p:txBody>
-          <a:bodyPr wrap="square" lIns="0" tIns="0" rIns="0" bIns="0" rtlCol="0" anchor="ctr"/>
-          <a:lstStyle/>
-          <a:p>
-            <a:pPr indent="0" marL="0">
-              <a:buNone/>
-            </a:pPr>
-            <a:r>
-              <a:rPr lang="en-US" sz="1100" spc="150" kern="0" dirty="0">
-                <a:solidFill>
-                  <a:srgbClr val="B9CBDE"/>
-                </a:solidFill>
-                <a:latin typeface="Arial" pitchFamily="34" charset="0"/>
-                <a:ea typeface="Arial" pitchFamily="34" charset="-122"/>
-                <a:cs typeface="Arial" pitchFamily="34" charset="-120"/>
-              </a:rPr>
-              <a:t>СВОЙ СПОСОБ ЗАПОМНИТЬ</a:t>
-            </a:r>
-            <a:endParaRPr lang="en-US" sz="1100" dirty="0"/>
-          </a:p>
-        </p:txBody>
-      </p:sp>
-      <p:sp>
-        <p:nvSpPr>
-          <p:cNvPr id="3" name="Text 1"/>
-          <p:cNvSpPr txBox="1"/>
-          <p:nvPr/>
-        </p:nvSpPr>
-        <p:spPr>
-          <a:xfrm>
-            <a:off x="502920" y="1005840"/>
-            <a:ext cx="8138160" cy="457200"/>
-          </a:xfrm>
-          <a:prstGeom prst="rect">
-            <a:avLst/>
-          </a:prstGeom>
-          <a:noFill/>
-          <a:ln/>
-        </p:spPr>
-        <p:txBody>
-          <a:bodyPr wrap="square" lIns="0" tIns="0" rIns="0" bIns="0" rtlCol="0" anchor="ctr"/>
-          <a:lstStyle/>
-          <a:p>
-            <a:pPr indent="0" marL="0">
-              <a:buNone/>
-            </a:pPr>
-            <a:r>
-              <a:rPr lang="en-US" sz="2000" dirty="0">
-                <a:solidFill>
-                  <a:srgbClr val="DCE6F0"/>
-                </a:solidFill>
-                <a:latin typeface="Arial" pitchFamily="34" charset="0"/>
-                <a:ea typeface="Arial" pitchFamily="34" charset="-122"/>
-                <a:cs typeface="Arial" pitchFamily="34" charset="-120"/>
-              </a:rPr>
-              <a:t>Цель должна быть</a:t>
-            </a:r>
-            <a:endParaRPr lang="en-US" sz="2000" dirty="0"/>
-          </a:p>
-        </p:txBody>
-      </p:sp>
-      <p:sp>
-        <p:nvSpPr>
-          <p:cNvPr id="4" name="Text 2"/>
-          <p:cNvSpPr txBox="1"/>
-          <p:nvPr/>
-        </p:nvSpPr>
-        <p:spPr>
-          <a:xfrm>
-            <a:off x="502920" y="1417320"/>
-            <a:ext cx="8138160" cy="1005840"/>
-          </a:xfrm>
-          <a:prstGeom prst="rect">
-            <a:avLst/>
-          </a:prstGeom>
-          <a:noFill/>
-          <a:ln/>
-        </p:spPr>
-        <p:txBody>
-          <a:bodyPr wrap="square" lIns="0" tIns="0" rIns="0" bIns="0" rtlCol="0" anchor="ctr"/>
-          <a:lstStyle/>
-          <a:p>
-            <a:pPr indent="0" marL="0">
-              <a:buNone/>
-            </a:pPr>
-            <a:r>
-              <a:rPr lang="en-US" sz="6400" b="1" spc="600" kern="0" dirty="0">
-                <a:solidFill>
-                  <a:srgbClr val="FFFFFF"/>
-                </a:solidFill>
-                <a:latin typeface="Arial" pitchFamily="34" charset="0"/>
-                <a:ea typeface="Arial" pitchFamily="34" charset="-122"/>
-                <a:cs typeface="Arial" pitchFamily="34" charset="-120"/>
-              </a:rPr>
-              <a:t>ЧИСТО</a:t>
-            </a:r>
-            <a:endParaRPr lang="en-US" sz="6400" dirty="0"/>
-          </a:p>
-        </p:txBody>
-      </p:sp>
-      <p:sp>
-        <p:nvSpPr>
-          <p:cNvPr id="5" name="Text 3"/>
-          <p:cNvSpPr txBox="1"/>
-          <p:nvPr/>
-        </p:nvSpPr>
-        <p:spPr>
-          <a:xfrm>
-            <a:off x="502920" y="2606040"/>
-            <a:ext cx="8138160" cy="822960"/>
-          </a:xfrm>
-          <a:prstGeom prst="rect">
-            <a:avLst/>
-          </a:prstGeom>
-          <a:noFill/>
-          <a:ln/>
-        </p:spPr>
-        <p:txBody>
-          <a:bodyPr wrap="square" lIns="0" tIns="0" rIns="0" bIns="0" rtlCol="0" anchor="ctr"/>
-          <a:lstStyle/>
-          <a:p>
-            <a:pPr indent="0" marL="0">
-              <a:lnSpc>
-                <a:spcPts val="1900"/>
-              </a:lnSpc>
-              <a:buNone/>
-            </a:pPr>
-            <a:r>
-              <a:rPr lang="en-US" sz="1300" dirty="0">
-                <a:solidFill>
-                  <a:srgbClr val="B9CBDE"/>
-                </a:solidFill>
-                <a:latin typeface="Arial" pitchFamily="34" charset="0"/>
-                <a:ea typeface="Arial" pitchFamily="34" charset="-122"/>
-                <a:cs typeface="Arial" pitchFamily="34" charset="-120"/>
-              </a:rPr>
-              <a:t>По-английски то же самое называется SMART — оба термина нужно знать: SMART встретится в заявках на гранты и в резюме, ЧИСТО — чтобы не забыть последовательность под давлением времени на паре.</a:t>
-            </a:r>
-            <a:endParaRPr lang="en-US" sz="1300" dirty="0"/>
-          </a:p>
-        </p:txBody>
-      </p:sp>
-    </p:spTree>
-  </p:cSld>
-  <p:clrMapOvr>
-    <a:masterClrMapping/>
-  </p:clrMapOvr>
-</p:sld>
-</file>
-
-<file path=ppt/slides/slide8.xml><?xml version="1.0" encoding="utf-8"?>
-<p:sld xmlns:a="http://schemas.openxmlformats.org/drawingml/2006/main" xmlns:r="http://schemas.openxmlformats.org/officeDocument/2006/relationships" xmlns:p="http://schemas.openxmlformats.org/presentationml/2006/main">
-  <p:cSld name="Slide 8">
     <p:bg>
       <p:bgPr>
         <a:solidFill>
@@ -7017,6 +9740,45 @@
         </p:nvSpPr>
         <p:spPr>
           <a:xfrm>
+            <a:off x="7543800" y="4736592"/>
+            <a:ext cx="1097280" cy="256032"/>
+          </a:xfrm>
+          <a:prstGeom prst="rect">
+            <a:avLst/>
+          </a:prstGeom>
+          <a:noFill/>
+          <a:ln/>
+        </p:spPr>
+        <p:txBody>
+          <a:bodyPr wrap="square" lIns="0" tIns="0" rIns="0" bIns="0" rtlCol="0" anchor="ctr"/>
+          <a:lstStyle/>
+          <a:p>
+            <a:pPr algn="r" indent="0" marL="0">
+              <a:buNone/>
+            </a:pPr>
+            <a:r>
+              <a:rPr lang="en-US" sz="1000" dirty="0">
+                <a:solidFill>
+                  <a:srgbClr val="64748B"/>
+                </a:solidFill>
+                <a:latin typeface="Arial" pitchFamily="34" charset="0"/>
+                <a:ea typeface="Arial" pitchFamily="34" charset="-122"/>
+                <a:cs typeface="Arial" pitchFamily="34" charset="-120"/>
+              </a:rPr>
+              <a:t>7 / 14</a:t>
+            </a:r>
+            <a:endParaRPr lang="en-US" sz="1000" dirty="0"/>
+          </a:p>
+        </p:txBody>
+      </p:sp>
+      <p:sp>
+        <p:nvSpPr>
+          <p:cNvPr id="3" name="Text 1"/>
+          <p:cNvSpPr txBox="1"/>
+          <p:nvPr/>
+        </p:nvSpPr>
+        <p:spPr>
+          <a:xfrm>
             <a:off x="502920" y="182880"/>
             <a:ext cx="8138160" cy="219456"/>
           </a:xfrm>
@@ -7042,7 +9804,7 @@
                 <a:ea typeface="Arial" pitchFamily="34" charset="-122"/>
                 <a:cs typeface="Arial" pitchFamily="34" charset="-120"/>
               </a:rPr>
-              <a:t>ИНСТРУМЕНТ, НЕ ПОВТОР</a:t>
+              <a:t>ВЫБОР · ЧАСТЬ 2</a:t>
             </a:r>
             <a:endParaRPr lang="en-US" sz="1100" dirty="0"/>
           </a:p>
@@ -7050,7 +9812,7 @@
       </p:sp>
       <p:sp>
         <p:nvSpPr>
-          <p:cNvPr id="3" name="Text 1"/>
+          <p:cNvPr id="4" name="Text 2"/>
           <p:cNvSpPr txBox="1"/>
           <p:nvPr/>
         </p:nvSpPr>
@@ -7081,7 +9843,7 @@
                 <a:ea typeface="Arial" pitchFamily="34" charset="-122"/>
                 <a:cs typeface="Arial" pitchFamily="34" charset="-120"/>
               </a:rPr>
-              <a:t>ЧИСТО — та же проверка, что и раньше</a:t>
+              <a:t>Как ставить баллы: шкала 0–2</a:t>
             </a:r>
             <a:endParaRPr lang="en-US" sz="2700" dirty="0"/>
           </a:p>
@@ -7089,7 +9851,7 @@
       </p:sp>
       <p:graphicFrame>
         <p:nvGraphicFramePr>
-          <p:cNvPr id="9" name="Table 0"/>
+          <p:cNvPr id="8" name="Table 0"/>
           <p:cNvGraphicFramePr>
             <a:graphicFrameLocks noGrp="1"/>
           </p:cNvGraphicFramePr>
@@ -7110,11 +9872,10 @@
             <a:tbl>
               <a:tblPr/>
               <a:tblGrid>
-                <a:gridCol w="1920240"/>
-                <a:gridCol w="5212080"/>
-                <a:gridCol w="1097280"/>
+                <a:gridCol w="914400"/>
+                <a:gridCol w="7223760"/>
               </a:tblGrid>
-              <a:tr h="475488">
+              <a:tr h="365760">
                 <a:tc>
                   <a:txBody>
                     <a:bodyPr/>
@@ -7132,7 +9893,7 @@
                           <a:ea typeface="Arial" pitchFamily="34" charset="-122"/>
                           <a:cs typeface="Arial" pitchFamily="34" charset="-120"/>
                         </a:rPr>
-                        <a:t>ЧИСТО</a:t>
+                        <a:t>Балл</a:t>
                       </a:r>
                       <a:endParaRPr lang="en-US" sz="1250" dirty="0">
                         <a:latin typeface="Arial" charset="0"/>
@@ -7200,7 +9961,7 @@
                           <a:ea typeface="Arial" pitchFamily="34" charset="-122"/>
                           <a:cs typeface="Arial" pitchFamily="34" charset="-120"/>
                         </a:rPr>
-                        <a:t>Значит</a:t>
+                        <a:t>Что это значит — одинаково для всех четырёх критериев</a:t>
                       </a:r>
                       <a:endParaRPr lang="en-US" sz="1250" dirty="0">
                         <a:latin typeface="Arial" charset="0"/>
@@ -7251,6 +10012,8 @@
                     </a:solidFill>
                   </a:tcPr>
                 </a:tc>
+              </a:tr>
+              <a:tr h="658368">
                 <a:tc>
                   <a:txBody>
                     <a:bodyPr/>
@@ -7262,83 +10025,13 @@
                       <a:r>
                         <a:rPr lang="en-US" sz="1250" b="1" dirty="0">
                           <a:solidFill>
-                            <a:srgbClr val="FFFFFF"/>
-                          </a:solidFill>
-                          <a:latin typeface="Arial" pitchFamily="34" charset="0"/>
-                          <a:ea typeface="Arial" pitchFamily="34" charset="-122"/>
-                          <a:cs typeface="Arial" pitchFamily="34" charset="-120"/>
-                        </a:rPr>
-                        <a:t>= SMART</a:t>
-                      </a:r>
-                      <a:endParaRPr lang="en-US" sz="1250" dirty="0">
-                        <a:latin typeface="Arial" charset="0"/>
-                        <a:ea typeface="Arial" charset="0"/>
-                        <a:cs typeface="Arial" charset="0"/>
-                      </a:endParaRPr>
-                    </a:p>
-                  </a:txBody>
-                  <a:tcPr marL="91440" marR="91440" marT="45720" marB="45720" anchor="ctr">
-                    <a:lnL w="6350" cap="flat" cmpd="sng" algn="ctr">
-                      <a:solidFill>
-                        <a:srgbClr val="D8DEE6"/>
-                      </a:solidFill>
-                      <a:prstDash val="solid"/>
-                      <a:round/>
-                      <a:headEnd type="none" w="med" len="med"/>
-                      <a:tailEnd type="none" w="med" len="med"/>
-                    </a:lnL>
-                    <a:lnR w="6350" cap="flat" cmpd="sng" algn="ctr">
-                      <a:solidFill>
-                        <a:srgbClr val="D8DEE6"/>
-                      </a:solidFill>
-                      <a:prstDash val="solid"/>
-                      <a:round/>
-                      <a:headEnd type="none" w="med" len="med"/>
-                      <a:tailEnd type="none" w="med" len="med"/>
-                    </a:lnR>
-                    <a:lnT w="6350" cap="flat" cmpd="sng" algn="ctr">
-                      <a:solidFill>
-                        <a:srgbClr val="D8DEE6"/>
-                      </a:solidFill>
-                      <a:prstDash val="solid"/>
-                      <a:round/>
-                      <a:headEnd type="none" w="med" len="med"/>
-                      <a:tailEnd type="none" w="med" len="med"/>
-                    </a:lnT>
-                    <a:lnB w="6350" cap="flat" cmpd="sng" algn="ctr">
-                      <a:solidFill>
-                        <a:srgbClr val="D8DEE6"/>
-                      </a:solidFill>
-                      <a:prstDash val="solid"/>
-                      <a:round/>
-                      <a:headEnd type="none" w="med" len="med"/>
-                      <a:tailEnd type="none" w="med" len="med"/>
-                    </a:lnB>
-                    <a:solidFill>
-                      <a:srgbClr val="1E4270"/>
-                    </a:solidFill>
-                  </a:tcPr>
-                </a:tc>
-              </a:tr>
-              <a:tr h="475488">
-                <a:tc>
-                  <a:txBody>
-                    <a:bodyPr/>
-                    <a:lstStyle/>
-                    <a:p>
-                      <a:pPr indent="0" marL="0">
-                        <a:buNone/>
-                      </a:pPr>
-                      <a:r>
-                        <a:rPr lang="en-US" sz="1250" dirty="0">
-                          <a:solidFill>
                             <a:srgbClr val="1E293B"/>
                           </a:solidFill>
                           <a:latin typeface="Arial" pitchFamily="34" charset="0"/>
                           <a:ea typeface="Arial" pitchFamily="34" charset="-122"/>
                           <a:cs typeface="Arial" pitchFamily="34" charset="-120"/>
                         </a:rPr>
-                        <a:t>Ч — Чёткая</a:t>
+                        <a:t>0</a:t>
                       </a:r>
                       <a:endParaRPr lang="en-US" sz="1250" dirty="0">
                         <a:latin typeface="Arial" charset="0"/>
@@ -7403,7 +10096,74 @@
                           <a:ea typeface="Arial" pitchFamily="34" charset="-122"/>
                           <a:cs typeface="Arial" pitchFamily="34" charset="-120"/>
                         </a:rPr>
-                        <a:t>Образ результата, а не процесс (слайд 6: целевая направленность)</a:t>
+                        <a:t>Ответить нечем: ни людей назвать, ни числа, ни отличия — только общие слова</a:t>
+                      </a:r>
+                      <a:endParaRPr lang="en-US" sz="1250" dirty="0">
+                        <a:latin typeface="Arial" charset="0"/>
+                        <a:ea typeface="Arial" charset="0"/>
+                        <a:cs typeface="Arial" charset="0"/>
+                      </a:endParaRPr>
+                    </a:p>
+                  </a:txBody>
+                  <a:tcPr marL="91440" marR="91440" marT="45720" marB="45720" anchor="ctr">
+                    <a:lnL w="6350" cap="flat" cmpd="sng" algn="ctr">
+                      <a:solidFill>
+                        <a:srgbClr val="D8DEE6"/>
+                      </a:solidFill>
+                      <a:prstDash val="solid"/>
+                      <a:round/>
+                      <a:headEnd type="none" w="med" len="med"/>
+                      <a:tailEnd type="none" w="med" len="med"/>
+                    </a:lnL>
+                    <a:lnR w="6350" cap="flat" cmpd="sng" algn="ctr">
+                      <a:solidFill>
+                        <a:srgbClr val="D8DEE6"/>
+                      </a:solidFill>
+                      <a:prstDash val="solid"/>
+                      <a:round/>
+                      <a:headEnd type="none" w="med" len="med"/>
+                      <a:tailEnd type="none" w="med" len="med"/>
+                    </a:lnR>
+                    <a:lnT w="6350" cap="flat" cmpd="sng" algn="ctr">
+                      <a:solidFill>
+                        <a:srgbClr val="D8DEE6"/>
+                      </a:solidFill>
+                      <a:prstDash val="solid"/>
+                      <a:round/>
+                      <a:headEnd type="none" w="med" len="med"/>
+                      <a:tailEnd type="none" w="med" len="med"/>
+                    </a:lnT>
+                    <a:lnB w="6350" cap="flat" cmpd="sng" algn="ctr">
+                      <a:solidFill>
+                        <a:srgbClr val="D8DEE6"/>
+                      </a:solidFill>
+                      <a:prstDash val="solid"/>
+                      <a:round/>
+                      <a:headEnd type="none" w="med" len="med"/>
+                      <a:tailEnd type="none" w="med" len="med"/>
+                    </a:lnB>
+                  </a:tcPr>
+                </a:tc>
+              </a:tr>
+              <a:tr h="658368">
+                <a:tc>
+                  <a:txBody>
+                    <a:bodyPr/>
+                    <a:lstStyle/>
+                    <a:p>
+                      <a:pPr algn="ctr" indent="0" marL="0">
+                        <a:buNone/>
+                      </a:pPr>
+                      <a:r>
+                        <a:rPr lang="en-US" sz="1250" b="1" dirty="0">
+                          <a:solidFill>
+                            <a:srgbClr val="1E293B"/>
+                          </a:solidFill>
+                          <a:latin typeface="Arial" pitchFamily="34" charset="0"/>
+                          <a:ea typeface="Arial" pitchFamily="34" charset="-122"/>
+                          <a:cs typeface="Arial" pitchFamily="34" charset="-120"/>
+                        </a:rPr>
+                        <a:t>1</a:t>
                       </a:r>
                       <a:endParaRPr lang="en-US" sz="1250" dirty="0">
                         <a:latin typeface="Arial" charset="0"/>
@@ -7468,7 +10228,7 @@
                           <a:ea typeface="Arial" pitchFamily="34" charset="-122"/>
                           <a:cs typeface="Arial" pitchFamily="34" charset="-120"/>
                         </a:rPr>
-                        <a:t>S</a:t>
+                        <a:t>Ответ есть, но без конкретики: знаем «что», не знаем «кто», «сколько» или «чем измерить»</a:t>
                       </a:r>
                       <a:endParaRPr lang="en-US" sz="1250" dirty="0">
                         <a:latin typeface="Arial" charset="0"/>
@@ -7517,17 +10277,17 @@
                   </a:tcPr>
                 </a:tc>
               </a:tr>
-              <a:tr h="475488">
+              <a:tr h="658368">
                 <a:tc>
                   <a:txBody>
                     <a:bodyPr/>
                     <a:lstStyle/>
                     <a:p>
-                      <a:pPr indent="0" marL="0">
+                      <a:pPr algn="ctr" indent="0" marL="0">
                         <a:buNone/>
                       </a:pPr>
                       <a:r>
-                        <a:rPr lang="en-US" sz="1250" dirty="0">
+                        <a:rPr lang="en-US" sz="1250" b="1" dirty="0">
                           <a:solidFill>
                             <a:srgbClr val="1E293B"/>
                           </a:solidFill>
@@ -7535,7 +10295,7 @@
                           <a:ea typeface="Arial" pitchFamily="34" charset="-122"/>
                           <a:cs typeface="Arial" pitchFamily="34" charset="-120"/>
                         </a:rPr>
-                        <a:t>И — Измеримая</a:t>
+                        <a:t>2</a:t>
                       </a:r>
                       <a:endParaRPr lang="en-US" sz="1250" dirty="0">
                         <a:latin typeface="Arial" charset="0"/>
@@ -7600,7 +10360,7 @@
                           <a:ea typeface="Arial" pitchFamily="34" charset="-122"/>
                           <a:cs typeface="Arial" pitchFamily="34" charset="-120"/>
                         </a:rPr>
-                        <a:t>Проверяется числом, а не словом «хорошо»</a:t>
+                        <a:t>Ответ конкретный и проверяемый: можно назвать людей, число, способ измерения, отличие</a:t>
                       </a:r>
                       <a:endParaRPr lang="en-US" sz="1250" dirty="0">
                         <a:latin typeface="Arial" charset="0"/>
@@ -7648,667 +10408,474 @@
                     </a:lnB>
                   </a:tcPr>
                 </a:tc>
-                <a:tc>
-                  <a:txBody>
-                    <a:bodyPr/>
-                    <a:lstStyle/>
-                    <a:p>
-                      <a:pPr indent="0" marL="0">
-                        <a:buNone/>
-                      </a:pPr>
-                      <a:r>
-                        <a:rPr lang="en-US" sz="1250" dirty="0">
-                          <a:solidFill>
-                            <a:srgbClr val="1E293B"/>
-                          </a:solidFill>
-                          <a:latin typeface="Arial" pitchFamily="34" charset="0"/>
-                          <a:ea typeface="Arial" pitchFamily="34" charset="-122"/>
-                          <a:cs typeface="Arial" pitchFamily="34" charset="-120"/>
-                        </a:rPr>
-                        <a:t>M</a:t>
-                      </a:r>
-                      <a:endParaRPr lang="en-US" sz="1250" dirty="0">
-                        <a:latin typeface="Arial" charset="0"/>
-                        <a:ea typeface="Arial" charset="0"/>
-                        <a:cs typeface="Arial" charset="0"/>
-                      </a:endParaRPr>
-                    </a:p>
-                  </a:txBody>
-                  <a:tcPr marL="91440" marR="91440" marT="45720" marB="45720" anchor="ctr">
-                    <a:lnL w="6350" cap="flat" cmpd="sng" algn="ctr">
-                      <a:solidFill>
-                        <a:srgbClr val="D8DEE6"/>
-                      </a:solidFill>
-                      <a:prstDash val="solid"/>
-                      <a:round/>
-                      <a:headEnd type="none" w="med" len="med"/>
-                      <a:tailEnd type="none" w="med" len="med"/>
-                    </a:lnL>
-                    <a:lnR w="6350" cap="flat" cmpd="sng" algn="ctr">
-                      <a:solidFill>
-                        <a:srgbClr val="D8DEE6"/>
-                      </a:solidFill>
-                      <a:prstDash val="solid"/>
-                      <a:round/>
-                      <a:headEnd type="none" w="med" len="med"/>
-                      <a:tailEnd type="none" w="med" len="med"/>
-                    </a:lnR>
-                    <a:lnT w="6350" cap="flat" cmpd="sng" algn="ctr">
-                      <a:solidFill>
-                        <a:srgbClr val="D8DEE6"/>
-                      </a:solidFill>
-                      <a:prstDash val="solid"/>
-                      <a:round/>
-                      <a:headEnd type="none" w="med" len="med"/>
-                      <a:tailEnd type="none" w="med" len="med"/>
-                    </a:lnT>
-                    <a:lnB w="6350" cap="flat" cmpd="sng" algn="ctr">
-                      <a:solidFill>
-                        <a:srgbClr val="D8DEE6"/>
-                      </a:solidFill>
-                      <a:prstDash val="solid"/>
-                      <a:round/>
-                      <a:headEnd type="none" w="med" len="med"/>
-                      <a:tailEnd type="none" w="med" len="med"/>
-                    </a:lnB>
-                  </a:tcPr>
-                </a:tc>
-              </a:tr>
-              <a:tr h="475488">
-                <a:tc>
-                  <a:txBody>
-                    <a:bodyPr/>
-                    <a:lstStyle/>
-                    <a:p>
-                      <a:pPr indent="0" marL="0">
-                        <a:buNone/>
-                      </a:pPr>
-                      <a:r>
-                        <a:rPr lang="en-US" sz="1250" dirty="0">
-                          <a:solidFill>
-                            <a:srgbClr val="1E293B"/>
-                          </a:solidFill>
-                          <a:latin typeface="Arial" pitchFamily="34" charset="0"/>
-                          <a:ea typeface="Arial" pitchFamily="34" charset="-122"/>
-                          <a:cs typeface="Arial" pitchFamily="34" charset="-120"/>
-                        </a:rPr>
-                        <a:t>С — Со сроком</a:t>
-                      </a:r>
-                      <a:endParaRPr lang="en-US" sz="1250" dirty="0">
-                        <a:latin typeface="Arial" charset="0"/>
-                        <a:ea typeface="Arial" charset="0"/>
-                        <a:cs typeface="Arial" charset="0"/>
-                      </a:endParaRPr>
-                    </a:p>
-                  </a:txBody>
-                  <a:tcPr marL="91440" marR="91440" marT="45720" marB="45720" anchor="ctr">
-                    <a:lnL w="6350" cap="flat" cmpd="sng" algn="ctr">
-                      <a:solidFill>
-                        <a:srgbClr val="D8DEE6"/>
-                      </a:solidFill>
-                      <a:prstDash val="solid"/>
-                      <a:round/>
-                      <a:headEnd type="none" w="med" len="med"/>
-                      <a:tailEnd type="none" w="med" len="med"/>
-                    </a:lnL>
-                    <a:lnR w="6350" cap="flat" cmpd="sng" algn="ctr">
-                      <a:solidFill>
-                        <a:srgbClr val="D8DEE6"/>
-                      </a:solidFill>
-                      <a:prstDash val="solid"/>
-                      <a:round/>
-                      <a:headEnd type="none" w="med" len="med"/>
-                      <a:tailEnd type="none" w="med" len="med"/>
-                    </a:lnR>
-                    <a:lnT w="6350" cap="flat" cmpd="sng" algn="ctr">
-                      <a:solidFill>
-                        <a:srgbClr val="D8DEE6"/>
-                      </a:solidFill>
-                      <a:prstDash val="solid"/>
-                      <a:round/>
-                      <a:headEnd type="none" w="med" len="med"/>
-                      <a:tailEnd type="none" w="med" len="med"/>
-                    </a:lnT>
-                    <a:lnB w="6350" cap="flat" cmpd="sng" algn="ctr">
-                      <a:solidFill>
-                        <a:srgbClr val="D8DEE6"/>
-                      </a:solidFill>
-                      <a:prstDash val="solid"/>
-                      <a:round/>
-                      <a:headEnd type="none" w="med" len="med"/>
-                      <a:tailEnd type="none" w="med" len="med"/>
-                    </a:lnB>
-                  </a:tcPr>
-                </a:tc>
-                <a:tc>
-                  <a:txBody>
-                    <a:bodyPr/>
-                    <a:lstStyle/>
-                    <a:p>
-                      <a:pPr indent="0" marL="0">
-                        <a:buNone/>
-                      </a:pPr>
-                      <a:r>
-                        <a:rPr lang="en-US" sz="1250" dirty="0">
-                          <a:solidFill>
-                            <a:srgbClr val="1E293B"/>
-                          </a:solidFill>
-                          <a:latin typeface="Arial" pitchFamily="34" charset="0"/>
-                          <a:ea typeface="Arial" pitchFamily="34" charset="-122"/>
-                          <a:cs typeface="Arial" pitchFamily="34" charset="-120"/>
-                        </a:rPr>
-                        <a:t>Конкретная дата — 21.11 чекпоинт или 26.12 защита (слайд 7)</a:t>
-                      </a:r>
-                      <a:endParaRPr lang="en-US" sz="1250" dirty="0">
-                        <a:latin typeface="Arial" charset="0"/>
-                        <a:ea typeface="Arial" charset="0"/>
-                        <a:cs typeface="Arial" charset="0"/>
-                      </a:endParaRPr>
-                    </a:p>
-                  </a:txBody>
-                  <a:tcPr marL="91440" marR="91440" marT="45720" marB="45720" anchor="ctr">
-                    <a:lnL w="6350" cap="flat" cmpd="sng" algn="ctr">
-                      <a:solidFill>
-                        <a:srgbClr val="D8DEE6"/>
-                      </a:solidFill>
-                      <a:prstDash val="solid"/>
-                      <a:round/>
-                      <a:headEnd type="none" w="med" len="med"/>
-                      <a:tailEnd type="none" w="med" len="med"/>
-                    </a:lnL>
-                    <a:lnR w="6350" cap="flat" cmpd="sng" algn="ctr">
-                      <a:solidFill>
-                        <a:srgbClr val="D8DEE6"/>
-                      </a:solidFill>
-                      <a:prstDash val="solid"/>
-                      <a:round/>
-                      <a:headEnd type="none" w="med" len="med"/>
-                      <a:tailEnd type="none" w="med" len="med"/>
-                    </a:lnR>
-                    <a:lnT w="6350" cap="flat" cmpd="sng" algn="ctr">
-                      <a:solidFill>
-                        <a:srgbClr val="D8DEE6"/>
-                      </a:solidFill>
-                      <a:prstDash val="solid"/>
-                      <a:round/>
-                      <a:headEnd type="none" w="med" len="med"/>
-                      <a:tailEnd type="none" w="med" len="med"/>
-                    </a:lnT>
-                    <a:lnB w="6350" cap="flat" cmpd="sng" algn="ctr">
-                      <a:solidFill>
-                        <a:srgbClr val="D8DEE6"/>
-                      </a:solidFill>
-                      <a:prstDash val="solid"/>
-                      <a:round/>
-                      <a:headEnd type="none" w="med" len="med"/>
-                      <a:tailEnd type="none" w="med" len="med"/>
-                    </a:lnB>
-                  </a:tcPr>
-                </a:tc>
-                <a:tc>
-                  <a:txBody>
-                    <a:bodyPr/>
-                    <a:lstStyle/>
-                    <a:p>
-                      <a:pPr indent="0" marL="0">
-                        <a:buNone/>
-                      </a:pPr>
-                      <a:r>
-                        <a:rPr lang="en-US" sz="1250" dirty="0">
-                          <a:solidFill>
-                            <a:srgbClr val="1E293B"/>
-                          </a:solidFill>
-                          <a:latin typeface="Arial" pitchFamily="34" charset="0"/>
-                          <a:ea typeface="Arial" pitchFamily="34" charset="-122"/>
-                          <a:cs typeface="Arial" pitchFamily="34" charset="-120"/>
-                        </a:rPr>
-                        <a:t>T</a:t>
-                      </a:r>
-                      <a:endParaRPr lang="en-US" sz="1250" dirty="0">
-                        <a:latin typeface="Arial" charset="0"/>
-                        <a:ea typeface="Arial" charset="0"/>
-                        <a:cs typeface="Arial" charset="0"/>
-                      </a:endParaRPr>
-                    </a:p>
-                  </a:txBody>
-                  <a:tcPr marL="91440" marR="91440" marT="45720" marB="45720" anchor="ctr">
-                    <a:lnL w="6350" cap="flat" cmpd="sng" algn="ctr">
-                      <a:solidFill>
-                        <a:srgbClr val="D8DEE6"/>
-                      </a:solidFill>
-                      <a:prstDash val="solid"/>
-                      <a:round/>
-                      <a:headEnd type="none" w="med" len="med"/>
-                      <a:tailEnd type="none" w="med" len="med"/>
-                    </a:lnL>
-                    <a:lnR w="6350" cap="flat" cmpd="sng" algn="ctr">
-                      <a:solidFill>
-                        <a:srgbClr val="D8DEE6"/>
-                      </a:solidFill>
-                      <a:prstDash val="solid"/>
-                      <a:round/>
-                      <a:headEnd type="none" w="med" len="med"/>
-                      <a:tailEnd type="none" w="med" len="med"/>
-                    </a:lnR>
-                    <a:lnT w="6350" cap="flat" cmpd="sng" algn="ctr">
-                      <a:solidFill>
-                        <a:srgbClr val="D8DEE6"/>
-                      </a:solidFill>
-                      <a:prstDash val="solid"/>
-                      <a:round/>
-                      <a:headEnd type="none" w="med" len="med"/>
-                      <a:tailEnd type="none" w="med" len="med"/>
-                    </a:lnT>
-                    <a:lnB w="6350" cap="flat" cmpd="sng" algn="ctr">
-                      <a:solidFill>
-                        <a:srgbClr val="D8DEE6"/>
-                      </a:solidFill>
-                      <a:prstDash val="solid"/>
-                      <a:round/>
-                      <a:headEnd type="none" w="med" len="med"/>
-                      <a:tailEnd type="none" w="med" len="med"/>
-                    </a:lnB>
-                  </a:tcPr>
-                </a:tc>
-              </a:tr>
-              <a:tr h="475488">
-                <a:tc>
-                  <a:txBody>
-                    <a:bodyPr/>
-                    <a:lstStyle/>
-                    <a:p>
-                      <a:pPr indent="0" marL="0">
-                        <a:buNone/>
-                      </a:pPr>
-                      <a:r>
-                        <a:rPr lang="en-US" sz="1250" dirty="0">
-                          <a:solidFill>
-                            <a:srgbClr val="1E293B"/>
-                          </a:solidFill>
-                          <a:latin typeface="Arial" pitchFamily="34" charset="0"/>
-                          <a:ea typeface="Arial" pitchFamily="34" charset="-122"/>
-                          <a:cs typeface="Arial" pitchFamily="34" charset="-120"/>
-                        </a:rPr>
-                        <a:t>Т — Толковая</a:t>
-                      </a:r>
-                      <a:endParaRPr lang="en-US" sz="1250" dirty="0">
-                        <a:latin typeface="Arial" charset="0"/>
-                        <a:ea typeface="Arial" charset="0"/>
-                        <a:cs typeface="Arial" charset="0"/>
-                      </a:endParaRPr>
-                    </a:p>
-                  </a:txBody>
-                  <a:tcPr marL="91440" marR="91440" marT="45720" marB="45720" anchor="ctr">
-                    <a:lnL w="6350" cap="flat" cmpd="sng" algn="ctr">
-                      <a:solidFill>
-                        <a:srgbClr val="D8DEE6"/>
-                      </a:solidFill>
-                      <a:prstDash val="solid"/>
-                      <a:round/>
-                      <a:headEnd type="none" w="med" len="med"/>
-                      <a:tailEnd type="none" w="med" len="med"/>
-                    </a:lnL>
-                    <a:lnR w="6350" cap="flat" cmpd="sng" algn="ctr">
-                      <a:solidFill>
-                        <a:srgbClr val="D8DEE6"/>
-                      </a:solidFill>
-                      <a:prstDash val="solid"/>
-                      <a:round/>
-                      <a:headEnd type="none" w="med" len="med"/>
-                      <a:tailEnd type="none" w="med" len="med"/>
-                    </a:lnR>
-                    <a:lnT w="6350" cap="flat" cmpd="sng" algn="ctr">
-                      <a:solidFill>
-                        <a:srgbClr val="D8DEE6"/>
-                      </a:solidFill>
-                      <a:prstDash val="solid"/>
-                      <a:round/>
-                      <a:headEnd type="none" w="med" len="med"/>
-                      <a:tailEnd type="none" w="med" len="med"/>
-                    </a:lnT>
-                    <a:lnB w="6350" cap="flat" cmpd="sng" algn="ctr">
-                      <a:solidFill>
-                        <a:srgbClr val="D8DEE6"/>
-                      </a:solidFill>
-                      <a:prstDash val="solid"/>
-                      <a:round/>
-                      <a:headEnd type="none" w="med" len="med"/>
-                      <a:tailEnd type="none" w="med" len="med"/>
-                    </a:lnB>
-                  </a:tcPr>
-                </a:tc>
-                <a:tc>
-                  <a:txBody>
-                    <a:bodyPr/>
-                    <a:lstStyle/>
-                    <a:p>
-                      <a:pPr indent="0" marL="0">
-                        <a:buNone/>
-                      </a:pPr>
-                      <a:r>
-                        <a:rPr lang="en-US" sz="1250" dirty="0">
-                          <a:solidFill>
-                            <a:srgbClr val="1E293B"/>
-                          </a:solidFill>
-                          <a:latin typeface="Arial" pitchFamily="34" charset="0"/>
-                          <a:ea typeface="Arial" pitchFamily="34" charset="-122"/>
-                          <a:cs typeface="Arial" pitchFamily="34" charset="-120"/>
-                        </a:rPr>
-                        <a:t>Решает проблему из ценностного предложения</a:t>
-                      </a:r>
-                      <a:endParaRPr lang="en-US" sz="1250" dirty="0">
-                        <a:latin typeface="Arial" charset="0"/>
-                        <a:ea typeface="Arial" charset="0"/>
-                        <a:cs typeface="Arial" charset="0"/>
-                      </a:endParaRPr>
-                    </a:p>
-                  </a:txBody>
-                  <a:tcPr marL="91440" marR="91440" marT="45720" marB="45720" anchor="ctr">
-                    <a:lnL w="6350" cap="flat" cmpd="sng" algn="ctr">
-                      <a:solidFill>
-                        <a:srgbClr val="D8DEE6"/>
-                      </a:solidFill>
-                      <a:prstDash val="solid"/>
-                      <a:round/>
-                      <a:headEnd type="none" w="med" len="med"/>
-                      <a:tailEnd type="none" w="med" len="med"/>
-                    </a:lnL>
-                    <a:lnR w="6350" cap="flat" cmpd="sng" algn="ctr">
-                      <a:solidFill>
-                        <a:srgbClr val="D8DEE6"/>
-                      </a:solidFill>
-                      <a:prstDash val="solid"/>
-                      <a:round/>
-                      <a:headEnd type="none" w="med" len="med"/>
-                      <a:tailEnd type="none" w="med" len="med"/>
-                    </a:lnR>
-                    <a:lnT w="6350" cap="flat" cmpd="sng" algn="ctr">
-                      <a:solidFill>
-                        <a:srgbClr val="D8DEE6"/>
-                      </a:solidFill>
-                      <a:prstDash val="solid"/>
-                      <a:round/>
-                      <a:headEnd type="none" w="med" len="med"/>
-                      <a:tailEnd type="none" w="med" len="med"/>
-                    </a:lnT>
-                    <a:lnB w="6350" cap="flat" cmpd="sng" algn="ctr">
-                      <a:solidFill>
-                        <a:srgbClr val="D8DEE6"/>
-                      </a:solidFill>
-                      <a:prstDash val="solid"/>
-                      <a:round/>
-                      <a:headEnd type="none" w="med" len="med"/>
-                      <a:tailEnd type="none" w="med" len="med"/>
-                    </a:lnB>
-                  </a:tcPr>
-                </a:tc>
-                <a:tc>
-                  <a:txBody>
-                    <a:bodyPr/>
-                    <a:lstStyle/>
-                    <a:p>
-                      <a:pPr indent="0" marL="0">
-                        <a:buNone/>
-                      </a:pPr>
-                      <a:r>
-                        <a:rPr lang="en-US" sz="1250" dirty="0">
-                          <a:solidFill>
-                            <a:srgbClr val="1E293B"/>
-                          </a:solidFill>
-                          <a:latin typeface="Arial" pitchFamily="34" charset="0"/>
-                          <a:ea typeface="Arial" pitchFamily="34" charset="-122"/>
-                          <a:cs typeface="Arial" pitchFamily="34" charset="-120"/>
-                        </a:rPr>
-                        <a:t>R</a:t>
-                      </a:r>
-                      <a:endParaRPr lang="en-US" sz="1250" dirty="0">
-                        <a:latin typeface="Arial" charset="0"/>
-                        <a:ea typeface="Arial" charset="0"/>
-                        <a:cs typeface="Arial" charset="0"/>
-                      </a:endParaRPr>
-                    </a:p>
-                  </a:txBody>
-                  <a:tcPr marL="91440" marR="91440" marT="45720" marB="45720" anchor="ctr">
-                    <a:lnL w="6350" cap="flat" cmpd="sng" algn="ctr">
-                      <a:solidFill>
-                        <a:srgbClr val="D8DEE6"/>
-                      </a:solidFill>
-                      <a:prstDash val="solid"/>
-                      <a:round/>
-                      <a:headEnd type="none" w="med" len="med"/>
-                      <a:tailEnd type="none" w="med" len="med"/>
-                    </a:lnL>
-                    <a:lnR w="6350" cap="flat" cmpd="sng" algn="ctr">
-                      <a:solidFill>
-                        <a:srgbClr val="D8DEE6"/>
-                      </a:solidFill>
-                      <a:prstDash val="solid"/>
-                      <a:round/>
-                      <a:headEnd type="none" w="med" len="med"/>
-                      <a:tailEnd type="none" w="med" len="med"/>
-                    </a:lnR>
-                    <a:lnT w="6350" cap="flat" cmpd="sng" algn="ctr">
-                      <a:solidFill>
-                        <a:srgbClr val="D8DEE6"/>
-                      </a:solidFill>
-                      <a:prstDash val="solid"/>
-                      <a:round/>
-                      <a:headEnd type="none" w="med" len="med"/>
-                      <a:tailEnd type="none" w="med" len="med"/>
-                    </a:lnT>
-                    <a:lnB w="6350" cap="flat" cmpd="sng" algn="ctr">
-                      <a:solidFill>
-                        <a:srgbClr val="D8DEE6"/>
-                      </a:solidFill>
-                      <a:prstDash val="solid"/>
-                      <a:round/>
-                      <a:headEnd type="none" w="med" len="med"/>
-                      <a:tailEnd type="none" w="med" len="med"/>
-                    </a:lnB>
-                  </a:tcPr>
-                </a:tc>
-              </a:tr>
-              <a:tr h="475488">
-                <a:tc>
-                  <a:txBody>
-                    <a:bodyPr/>
-                    <a:lstStyle/>
-                    <a:p>
-                      <a:pPr indent="0" marL="0">
-                        <a:buNone/>
-                      </a:pPr>
-                      <a:r>
-                        <a:rPr lang="en-US" sz="1250" dirty="0">
-                          <a:solidFill>
-                            <a:srgbClr val="1E293B"/>
-                          </a:solidFill>
-                          <a:latin typeface="Arial" pitchFamily="34" charset="0"/>
-                          <a:ea typeface="Arial" pitchFamily="34" charset="-122"/>
-                          <a:cs typeface="Arial" pitchFamily="34" charset="-120"/>
-                        </a:rPr>
-                        <a:t>О — Осуществимая</a:t>
-                      </a:r>
-                      <a:endParaRPr lang="en-US" sz="1250" dirty="0">
-                        <a:latin typeface="Arial" charset="0"/>
-                        <a:ea typeface="Arial" charset="0"/>
-                        <a:cs typeface="Arial" charset="0"/>
-                      </a:endParaRPr>
-                    </a:p>
-                  </a:txBody>
-                  <a:tcPr marL="91440" marR="91440" marT="45720" marB="45720" anchor="ctr">
-                    <a:lnL w="6350" cap="flat" cmpd="sng" algn="ctr">
-                      <a:solidFill>
-                        <a:srgbClr val="D8DEE6"/>
-                      </a:solidFill>
-                      <a:prstDash val="solid"/>
-                      <a:round/>
-                      <a:headEnd type="none" w="med" len="med"/>
-                      <a:tailEnd type="none" w="med" len="med"/>
-                    </a:lnL>
-                    <a:lnR w="6350" cap="flat" cmpd="sng" algn="ctr">
-                      <a:solidFill>
-                        <a:srgbClr val="D8DEE6"/>
-                      </a:solidFill>
-                      <a:prstDash val="solid"/>
-                      <a:round/>
-                      <a:headEnd type="none" w="med" len="med"/>
-                      <a:tailEnd type="none" w="med" len="med"/>
-                    </a:lnR>
-                    <a:lnT w="6350" cap="flat" cmpd="sng" algn="ctr">
-                      <a:solidFill>
-                        <a:srgbClr val="D8DEE6"/>
-                      </a:solidFill>
-                      <a:prstDash val="solid"/>
-                      <a:round/>
-                      <a:headEnd type="none" w="med" len="med"/>
-                      <a:tailEnd type="none" w="med" len="med"/>
-                    </a:lnT>
-                    <a:lnB w="6350" cap="flat" cmpd="sng" algn="ctr">
-                      <a:solidFill>
-                        <a:srgbClr val="D8DEE6"/>
-                      </a:solidFill>
-                      <a:prstDash val="solid"/>
-                      <a:round/>
-                      <a:headEnd type="none" w="med" len="med"/>
-                      <a:tailEnd type="none" w="med" len="med"/>
-                    </a:lnB>
-                  </a:tcPr>
-                </a:tc>
-                <a:tc>
-                  <a:txBody>
-                    <a:bodyPr/>
-                    <a:lstStyle/>
-                    <a:p>
-                      <a:pPr indent="0" marL="0">
-                        <a:buNone/>
-                      </a:pPr>
-                      <a:r>
-                        <a:rPr lang="en-US" sz="1250" dirty="0">
-                          <a:solidFill>
-                            <a:srgbClr val="1E293B"/>
-                          </a:solidFill>
-                          <a:latin typeface="Arial" pitchFamily="34" charset="0"/>
-                          <a:ea typeface="Arial" pitchFamily="34" charset="-122"/>
-                          <a:cs typeface="Arial" pitchFamily="34" charset="-120"/>
-                        </a:rPr>
-                        <a:t>Ресурсный лимит: реально силами 3–4 человек (слайд 6)</a:t>
-                      </a:r>
-                      <a:endParaRPr lang="en-US" sz="1250" dirty="0">
-                        <a:latin typeface="Arial" charset="0"/>
-                        <a:ea typeface="Arial" charset="0"/>
-                        <a:cs typeface="Arial" charset="0"/>
-                      </a:endParaRPr>
-                    </a:p>
-                  </a:txBody>
-                  <a:tcPr marL="91440" marR="91440" marT="45720" marB="45720" anchor="ctr">
-                    <a:lnL w="6350" cap="flat" cmpd="sng" algn="ctr">
-                      <a:solidFill>
-                        <a:srgbClr val="D8DEE6"/>
-                      </a:solidFill>
-                      <a:prstDash val="solid"/>
-                      <a:round/>
-                      <a:headEnd type="none" w="med" len="med"/>
-                      <a:tailEnd type="none" w="med" len="med"/>
-                    </a:lnL>
-                    <a:lnR w="6350" cap="flat" cmpd="sng" algn="ctr">
-                      <a:solidFill>
-                        <a:srgbClr val="D8DEE6"/>
-                      </a:solidFill>
-                      <a:prstDash val="solid"/>
-                      <a:round/>
-                      <a:headEnd type="none" w="med" len="med"/>
-                      <a:tailEnd type="none" w="med" len="med"/>
-                    </a:lnR>
-                    <a:lnT w="6350" cap="flat" cmpd="sng" algn="ctr">
-                      <a:solidFill>
-                        <a:srgbClr val="D8DEE6"/>
-                      </a:solidFill>
-                      <a:prstDash val="solid"/>
-                      <a:round/>
-                      <a:headEnd type="none" w="med" len="med"/>
-                      <a:tailEnd type="none" w="med" len="med"/>
-                    </a:lnT>
-                    <a:lnB w="6350" cap="flat" cmpd="sng" algn="ctr">
-                      <a:solidFill>
-                        <a:srgbClr val="D8DEE6"/>
-                      </a:solidFill>
-                      <a:prstDash val="solid"/>
-                      <a:round/>
-                      <a:headEnd type="none" w="med" len="med"/>
-                      <a:tailEnd type="none" w="med" len="med"/>
-                    </a:lnB>
-                  </a:tcPr>
-                </a:tc>
-                <a:tc>
-                  <a:txBody>
-                    <a:bodyPr/>
-                    <a:lstStyle/>
-                    <a:p>
-                      <a:pPr indent="0" marL="0">
-                        <a:buNone/>
-                      </a:pPr>
-                      <a:r>
-                        <a:rPr lang="en-US" sz="1250" dirty="0">
-                          <a:solidFill>
-                            <a:srgbClr val="1E293B"/>
-                          </a:solidFill>
-                          <a:latin typeface="Arial" pitchFamily="34" charset="0"/>
-                          <a:ea typeface="Arial" pitchFamily="34" charset="-122"/>
-                          <a:cs typeface="Arial" pitchFamily="34" charset="-120"/>
-                        </a:rPr>
-                        <a:t>A</a:t>
-                      </a:r>
-                      <a:endParaRPr lang="en-US" sz="1250" dirty="0">
-                        <a:latin typeface="Arial" charset="0"/>
-                        <a:ea typeface="Arial" charset="0"/>
-                        <a:cs typeface="Arial" charset="0"/>
-                      </a:endParaRPr>
-                    </a:p>
-                  </a:txBody>
-                  <a:tcPr marL="91440" marR="91440" marT="45720" marB="45720" anchor="ctr">
-                    <a:lnL w="6350" cap="flat" cmpd="sng" algn="ctr">
-                      <a:solidFill>
-                        <a:srgbClr val="D8DEE6"/>
-                      </a:solidFill>
-                      <a:prstDash val="solid"/>
-                      <a:round/>
-                      <a:headEnd type="none" w="med" len="med"/>
-                      <a:tailEnd type="none" w="med" len="med"/>
-                    </a:lnL>
-                    <a:lnR w="6350" cap="flat" cmpd="sng" algn="ctr">
-                      <a:solidFill>
-                        <a:srgbClr val="D8DEE6"/>
-                      </a:solidFill>
-                      <a:prstDash val="solid"/>
-                      <a:round/>
-                      <a:headEnd type="none" w="med" len="med"/>
-                      <a:tailEnd type="none" w="med" len="med"/>
-                    </a:lnR>
-                    <a:lnT w="6350" cap="flat" cmpd="sng" algn="ctr">
-                      <a:solidFill>
-                        <a:srgbClr val="D8DEE6"/>
-                      </a:solidFill>
-                      <a:prstDash val="solid"/>
-                      <a:round/>
-                      <a:headEnd type="none" w="med" len="med"/>
-                      <a:tailEnd type="none" w="med" len="med"/>
-                    </a:lnT>
-                    <a:lnB w="6350" cap="flat" cmpd="sng" algn="ctr">
-                      <a:solidFill>
-                        <a:srgbClr val="D8DEE6"/>
-                      </a:solidFill>
-                      <a:prstDash val="solid"/>
-                      <a:round/>
-                      <a:headEnd type="none" w="med" len="med"/>
-                      <a:tailEnd type="none" w="med" len="med"/>
-                    </a:lnB>
-                  </a:tcPr>
-                </a:tc>
               </a:tr>
             </a:tbl>
           </a:graphicData>
         </a:graphic>
       </p:graphicFrame>
+      <p:sp>
+        <p:nvSpPr>
+          <p:cNvPr id="6" name="Shape 3"/>
+          <p:cNvSpPr/>
+          <p:nvPr/>
+        </p:nvSpPr>
+        <p:spPr>
+          <a:xfrm>
+            <a:off x="502920" y="3657600"/>
+            <a:ext cx="8138160" cy="914400"/>
+          </a:xfrm>
+          <a:prstGeom prst="roundRect">
+            <a:avLst>
+              <a:gd name="adj" fmla="val 5000"/>
+            </a:avLst>
+          </a:prstGeom>
+          <a:solidFill>
+            <a:srgbClr val="1E4270"/>
+          </a:solidFill>
+          <a:ln w="9525">
+            <a:solidFill>
+              <a:srgbClr val="D8DEE6"/>
+            </a:solidFill>
+            <a:prstDash val="solid"/>
+          </a:ln>
+        </p:spPr>
+      </p:sp>
+      <p:sp>
+        <p:nvSpPr>
+          <p:cNvPr id="7" name="Text 4"/>
+          <p:cNvSpPr txBox="1"/>
+          <p:nvPr/>
+        </p:nvSpPr>
+        <p:spPr>
+          <a:xfrm>
+            <a:off x="777240" y="3803904"/>
+            <a:ext cx="7589520" cy="640080"/>
+          </a:xfrm>
+          <a:prstGeom prst="rect">
+            <a:avLst/>
+          </a:prstGeom>
+          <a:noFill/>
+          <a:ln/>
+        </p:spPr>
+        <p:txBody>
+          <a:bodyPr wrap="square" lIns="0" tIns="0" rIns="0" bIns="0" rtlCol="0" anchor="ctr"/>
+          <a:lstStyle/>
+          <a:p>
+            <a:pPr indent="0" marL="0">
+              <a:lnSpc>
+                <a:spcPts val="2000"/>
+              </a:lnSpc>
+              <a:buNone/>
+            </a:pPr>
+            <a:r>
+              <a:rPr lang="en-US" sz="1300" dirty="0">
+                <a:solidFill>
+                  <a:srgbClr val="FFFFFF"/>
+                </a:solidFill>
+                <a:latin typeface="Arial" pitchFamily="34" charset="0"/>
+                <a:ea typeface="Arial" pitchFamily="34" charset="-122"/>
+                <a:cs typeface="Arial" pitchFamily="34" charset="-120"/>
+              </a:rPr>
+              <a:t>Максимум 8 баллов. Выбираем концепт с большей суммой.   ·   Равенство — решает капитан.</a:t>
+            </a:r>
+            <a:endParaRPr lang="en-US" sz="1300" dirty="0"/>
+          </a:p>
+          <a:p>
+            <a:pPr indent="0" marL="0">
+              <a:lnSpc>
+                <a:spcPts val="2000"/>
+              </a:lnSpc>
+              <a:buNone/>
+            </a:pPr>
+            <a:r>
+              <a:rPr lang="en-US" sz="1300" dirty="0">
+                <a:solidFill>
+                  <a:srgbClr val="FFFFFF"/>
+                </a:solidFill>
+                <a:latin typeface="Arial" pitchFamily="34" charset="0"/>
+                <a:ea typeface="Arial" pitchFamily="34" charset="-122"/>
+                <a:cs typeface="Arial" pitchFamily="34" charset="-120"/>
+              </a:rPr>
+              <a:t>Жёсткое правило: концепт с нулём по «реализуемости» не выбирается, даже если сумма больше.</a:t>
+            </a:r>
+            <a:endParaRPr lang="en-US" sz="1300" dirty="0"/>
+          </a:p>
+        </p:txBody>
+      </p:sp>
+    </p:spTree>
+  </p:cSld>
+  <p:clrMapOvr>
+    <a:masterClrMapping/>
+  </p:clrMapOvr>
+</p:sld>
+</file>
+
+<file path=ppt/slides/slide8.xml><?xml version="1.0" encoding="utf-8"?>
+<p:sld xmlns:a="http://schemas.openxmlformats.org/drawingml/2006/main" xmlns:r="http://schemas.openxmlformats.org/officeDocument/2006/relationships" xmlns:p="http://schemas.openxmlformats.org/presentationml/2006/main">
+  <p:cSld name="Slide 8">
+    <p:bg>
+      <p:bgPr>
+        <a:solidFill>
+          <a:srgbClr val="1E4270"/>
+        </a:solidFill>
+      </p:bgPr>
+    </p:bg>
+    <p:spTree>
+      <p:nvGrpSpPr>
+        <p:cNvPr id="1" name=""/>
+        <p:cNvGrpSpPr/>
+        <p:nvPr/>
+      </p:nvGrpSpPr>
+      <p:grpSpPr>
+        <a:xfrm>
+          <a:off x="0" y="0"/>
+          <a:ext cx="0" cy="0"/>
+          <a:chOff x="0" y="0"/>
+          <a:chExt cx="0" cy="0"/>
+        </a:xfrm>
+      </p:grpSpPr>
+      <p:sp>
+        <p:nvSpPr>
+          <p:cNvPr id="2" name="Text 0"/>
+          <p:cNvSpPr txBox="1"/>
+          <p:nvPr/>
+        </p:nvSpPr>
+        <p:spPr>
+          <a:xfrm>
+            <a:off x="7543800" y="4736592"/>
+            <a:ext cx="1097280" cy="256032"/>
+          </a:xfrm>
+          <a:prstGeom prst="rect">
+            <a:avLst/>
+          </a:prstGeom>
+          <a:noFill/>
+          <a:ln/>
+        </p:spPr>
+        <p:txBody>
+          <a:bodyPr wrap="square" lIns="0" tIns="0" rIns="0" bIns="0" rtlCol="0" anchor="ctr"/>
+          <a:lstStyle/>
+          <a:p>
+            <a:pPr algn="r" indent="0" marL="0">
+              <a:buNone/>
+            </a:pPr>
+            <a:r>
+              <a:rPr lang="en-US" sz="1000" dirty="0">
+                <a:solidFill>
+                  <a:srgbClr val="8FA6BE"/>
+                </a:solidFill>
+                <a:latin typeface="Arial" pitchFamily="34" charset="0"/>
+                <a:ea typeface="Arial" pitchFamily="34" charset="-122"/>
+                <a:cs typeface="Arial" pitchFamily="34" charset="-120"/>
+              </a:rPr>
+              <a:t>8 / 14</a:t>
+            </a:r>
+            <a:endParaRPr lang="en-US" sz="1000" dirty="0"/>
+          </a:p>
+        </p:txBody>
+      </p:sp>
+      <p:sp>
+        <p:nvSpPr>
+          <p:cNvPr id="3" name="Text 1"/>
+          <p:cNvSpPr txBox="1"/>
+          <p:nvPr/>
+        </p:nvSpPr>
+        <p:spPr>
+          <a:xfrm>
+            <a:off x="502920" y="182880"/>
+            <a:ext cx="8138160" cy="219456"/>
+          </a:xfrm>
+          <a:prstGeom prst="rect">
+            <a:avLst/>
+          </a:prstGeom>
+          <a:noFill/>
+          <a:ln/>
+        </p:spPr>
+        <p:txBody>
+          <a:bodyPr wrap="square" lIns="0" tIns="0" rIns="0" bIns="0" rtlCol="0" anchor="ctr"/>
+          <a:lstStyle/>
+          <a:p>
+            <a:pPr indent="0" marL="0">
+              <a:buNone/>
+            </a:pPr>
+            <a:r>
+              <a:rPr lang="en-US" sz="1100" spc="150" kern="0" dirty="0">
+                <a:solidFill>
+                  <a:srgbClr val="B9CBDE"/>
+                </a:solidFill>
+                <a:latin typeface="Arial" pitchFamily="34" charset="0"/>
+                <a:ea typeface="Arial" pitchFamily="34" charset="-122"/>
+                <a:cs typeface="Arial" pitchFamily="34" charset="-120"/>
+              </a:rPr>
+              <a:t>ИНСТРУМЕНТ ФОРМУЛИРОВКИ ЦЕЛИ</a:t>
+            </a:r>
+            <a:endParaRPr lang="en-US" sz="1100" dirty="0"/>
+          </a:p>
+        </p:txBody>
+      </p:sp>
+      <p:sp>
+        <p:nvSpPr>
+          <p:cNvPr id="4" name="Text 2"/>
+          <p:cNvSpPr txBox="1"/>
+          <p:nvPr/>
+        </p:nvSpPr>
+        <p:spPr>
+          <a:xfrm>
+            <a:off x="502920" y="868680"/>
+            <a:ext cx="8138160" cy="365760"/>
+          </a:xfrm>
+          <a:prstGeom prst="rect">
+            <a:avLst/>
+          </a:prstGeom>
+          <a:noFill/>
+          <a:ln/>
+        </p:spPr>
+        <p:txBody>
+          <a:bodyPr wrap="square" lIns="0" tIns="0" rIns="0" bIns="0" rtlCol="0" anchor="ctr"/>
+          <a:lstStyle/>
+          <a:p>
+            <a:pPr indent="0" marL="0">
+              <a:buNone/>
+            </a:pPr>
+            <a:r>
+              <a:rPr lang="en-US" sz="1800" dirty="0">
+                <a:solidFill>
+                  <a:srgbClr val="DCE6F0"/>
+                </a:solidFill>
+                <a:latin typeface="Arial" pitchFamily="34" charset="0"/>
+                <a:ea typeface="Arial" pitchFamily="34" charset="-122"/>
+                <a:cs typeface="Arial" pitchFamily="34" charset="-120"/>
+              </a:rPr>
+              <a:t>Цель формулируется по</a:t>
+            </a:r>
+            <a:endParaRPr lang="en-US" sz="1800" dirty="0"/>
+          </a:p>
+        </p:txBody>
+      </p:sp>
+      <p:sp>
+        <p:nvSpPr>
+          <p:cNvPr id="5" name="Text 3"/>
+          <p:cNvSpPr txBox="1"/>
+          <p:nvPr/>
+        </p:nvSpPr>
+        <p:spPr>
+          <a:xfrm>
+            <a:off x="502920" y="1207008"/>
+            <a:ext cx="8138160" cy="914400"/>
+          </a:xfrm>
+          <a:prstGeom prst="rect">
+            <a:avLst/>
+          </a:prstGeom>
+          <a:noFill/>
+          <a:ln/>
+        </p:spPr>
+        <p:txBody>
+          <a:bodyPr wrap="square" lIns="0" tIns="0" rIns="0" bIns="0" rtlCol="0" anchor="ctr"/>
+          <a:lstStyle/>
+          <a:p>
+            <a:pPr indent="0" marL="0">
+              <a:buNone/>
+            </a:pPr>
+            <a:r>
+              <a:rPr lang="en-US" sz="5800" b="1" spc="600" kern="0" dirty="0">
+                <a:solidFill>
+                  <a:srgbClr val="FFFFFF"/>
+                </a:solidFill>
+                <a:latin typeface="Arial" pitchFamily="34" charset="0"/>
+                <a:ea typeface="Arial" pitchFamily="34" charset="-122"/>
+                <a:cs typeface="Arial" pitchFamily="34" charset="-120"/>
+              </a:rPr>
+              <a:t>SMART</a:t>
+            </a:r>
+            <a:endParaRPr lang="en-US" sz="5800" dirty="0"/>
+          </a:p>
+        </p:txBody>
+      </p:sp>
+      <p:sp>
+        <p:nvSpPr>
+          <p:cNvPr id="6" name="Text 4"/>
+          <p:cNvSpPr txBox="1"/>
+          <p:nvPr/>
+        </p:nvSpPr>
+        <p:spPr>
+          <a:xfrm>
+            <a:off x="502920" y="2212848"/>
+            <a:ext cx="8138160" cy="292608"/>
+          </a:xfrm>
+          <a:prstGeom prst="rect">
+            <a:avLst/>
+          </a:prstGeom>
+          <a:noFill/>
+          <a:ln/>
+        </p:spPr>
+        <p:txBody>
+          <a:bodyPr wrap="square" lIns="0" tIns="0" rIns="0" bIns="0" rtlCol="0" anchor="ctr"/>
+          <a:lstStyle/>
+          <a:p>
+            <a:pPr indent="0" marL="0">
+              <a:buNone/>
+            </a:pPr>
+            <a:r>
+              <a:rPr lang="en-US" sz="1500" dirty="0">
+                <a:solidFill>
+                  <a:srgbClr val="DCE6F0"/>
+                </a:solidFill>
+                <a:latin typeface="Arial" pitchFamily="34" charset="0"/>
+                <a:ea typeface="Arial" pitchFamily="34" charset="-122"/>
+                <a:cs typeface="Arial" pitchFamily="34" charset="-120"/>
+              </a:rPr>
+              <a:t>Specific · Measurable · Achievable · Relevant · Time-bound</a:t>
+            </a:r>
+            <a:endParaRPr lang="en-US" sz="1500" dirty="0"/>
+          </a:p>
+        </p:txBody>
+      </p:sp>
+      <p:sp>
+        <p:nvSpPr>
+          <p:cNvPr id="7" name="Text 5"/>
+          <p:cNvSpPr txBox="1"/>
+          <p:nvPr/>
+        </p:nvSpPr>
+        <p:spPr>
+          <a:xfrm>
+            <a:off x="502920" y="2542032"/>
+            <a:ext cx="8138160" cy="292608"/>
+          </a:xfrm>
+          <a:prstGeom prst="rect">
+            <a:avLst/>
+          </a:prstGeom>
+          <a:noFill/>
+          <a:ln/>
+        </p:spPr>
+        <p:txBody>
+          <a:bodyPr wrap="square" lIns="0" tIns="0" rIns="0" bIns="0" rtlCol="0" anchor="ctr"/>
+          <a:lstStyle/>
+          <a:p>
+            <a:pPr indent="0" marL="0">
+              <a:buNone/>
+            </a:pPr>
+            <a:r>
+              <a:rPr lang="en-US" sz="1250" dirty="0">
+                <a:solidFill>
+                  <a:srgbClr val="B9CBDE"/>
+                </a:solidFill>
+                <a:latin typeface="Arial" pitchFamily="34" charset="0"/>
+                <a:ea typeface="Arial" pitchFamily="34" charset="-122"/>
+                <a:cs typeface="Arial" pitchFamily="34" charset="-120"/>
+              </a:rPr>
+              <a:t>Международный термин: встретится в заявках на гранты, в техзаданиях и в резюме. Знать нужно именно его.</a:t>
+            </a:r>
+            <a:endParaRPr lang="en-US" sz="1250" dirty="0"/>
+          </a:p>
+        </p:txBody>
+      </p:sp>
+      <p:sp>
+        <p:nvSpPr>
+          <p:cNvPr id="8" name="Shape 6"/>
+          <p:cNvSpPr/>
+          <p:nvPr/>
+        </p:nvSpPr>
+        <p:spPr>
+          <a:xfrm>
+            <a:off x="502920" y="3017520"/>
+            <a:ext cx="8138160" cy="1325880"/>
+          </a:xfrm>
+          <a:prstGeom prst="roundRect">
+            <a:avLst>
+              <a:gd name="adj" fmla="val 3448"/>
+            </a:avLst>
+          </a:prstGeom>
+          <a:solidFill>
+            <a:srgbClr val="2C567F"/>
+          </a:solidFill>
+          <a:ln w="9525">
+            <a:solidFill>
+              <a:srgbClr val="D8DEE6"/>
+            </a:solidFill>
+            <a:prstDash val="solid"/>
+          </a:ln>
+        </p:spPr>
+      </p:sp>
+      <p:sp>
+        <p:nvSpPr>
+          <p:cNvPr id="9" name="Text 7"/>
+          <p:cNvSpPr txBox="1"/>
+          <p:nvPr/>
+        </p:nvSpPr>
+        <p:spPr>
+          <a:xfrm>
+            <a:off x="777240" y="3154680"/>
+            <a:ext cx="7589520" cy="274320"/>
+          </a:xfrm>
+          <a:prstGeom prst="rect">
+            <a:avLst/>
+          </a:prstGeom>
+          <a:noFill/>
+          <a:ln/>
+        </p:spPr>
+        <p:txBody>
+          <a:bodyPr wrap="square" lIns="0" tIns="0" rIns="0" bIns="0" rtlCol="0" anchor="ctr"/>
+          <a:lstStyle/>
+          <a:p>
+            <a:pPr indent="0" marL="0">
+              <a:buNone/>
+            </a:pPr>
+            <a:r>
+              <a:rPr lang="en-US" sz="1400" b="1" dirty="0">
+                <a:solidFill>
+                  <a:srgbClr val="FFFFFF"/>
+                </a:solidFill>
+                <a:latin typeface="Arial" pitchFamily="34" charset="0"/>
+                <a:ea typeface="Arial" pitchFamily="34" charset="-122"/>
+                <a:cs typeface="Arial" pitchFamily="34" charset="-120"/>
+              </a:rPr>
+              <a:t>Запасной вариант для памяти — ЧИСТО</a:t>
+            </a:r>
+            <a:endParaRPr lang="en-US" sz="1400" dirty="0"/>
+          </a:p>
+        </p:txBody>
+      </p:sp>
+      <p:sp>
+        <p:nvSpPr>
+          <p:cNvPr id="10" name="Text 8"/>
+          <p:cNvSpPr txBox="1"/>
+          <p:nvPr/>
+        </p:nvSpPr>
+        <p:spPr>
+          <a:xfrm>
+            <a:off x="777240" y="3474720"/>
+            <a:ext cx="7589520" cy="731520"/>
+          </a:xfrm>
+          <a:prstGeom prst="rect">
+            <a:avLst/>
+          </a:prstGeom>
+          <a:noFill/>
+          <a:ln/>
+        </p:spPr>
+        <p:txBody>
+          <a:bodyPr wrap="square" lIns="0" tIns="0" rIns="0" bIns="0" rtlCol="0" anchor="ctr"/>
+          <a:lstStyle/>
+          <a:p>
+            <a:pPr indent="0" marL="0">
+              <a:lnSpc>
+                <a:spcPts val="1800"/>
+              </a:lnSpc>
+              <a:buNone/>
+            </a:pPr>
+            <a:r>
+              <a:rPr lang="en-US" sz="1250" dirty="0">
+                <a:solidFill>
+                  <a:srgbClr val="DCE6F0"/>
+                </a:solidFill>
+                <a:latin typeface="Arial" pitchFamily="34" charset="0"/>
+                <a:ea typeface="Arial" pitchFamily="34" charset="-122"/>
+                <a:cs typeface="Arial" pitchFamily="34" charset="-120"/>
+              </a:rPr>
+              <a:t>Те же пять проверок русскими словами: Чёткая · Измеримая · Со сроком · Толковая · Осуществимая. Порядок букв другой — это не важно, важно, что сделаны все пять.</a:t>
+            </a:r>
+            <a:endParaRPr lang="en-US" sz="1250" dirty="0"/>
+          </a:p>
+        </p:txBody>
+      </p:sp>
     </p:spTree>
   </p:cSld>
   <p:clrMapOvr>
@@ -8349,6 +10916,45 @@
         </p:nvSpPr>
         <p:spPr>
           <a:xfrm>
+            <a:off x="7543800" y="4736592"/>
+            <a:ext cx="1097280" cy="256032"/>
+          </a:xfrm>
+          <a:prstGeom prst="rect">
+            <a:avLst/>
+          </a:prstGeom>
+          <a:noFill/>
+          <a:ln/>
+        </p:spPr>
+        <p:txBody>
+          <a:bodyPr wrap="square" lIns="0" tIns="0" rIns="0" bIns="0" rtlCol="0" anchor="ctr"/>
+          <a:lstStyle/>
+          <a:p>
+            <a:pPr algn="r" indent="0" marL="0">
+              <a:buNone/>
+            </a:pPr>
+            <a:r>
+              <a:rPr lang="en-US" sz="1000" dirty="0">
+                <a:solidFill>
+                  <a:srgbClr val="64748B"/>
+                </a:solidFill>
+                <a:latin typeface="Arial" pitchFamily="34" charset="0"/>
+                <a:ea typeface="Arial" pitchFamily="34" charset="-122"/>
+                <a:cs typeface="Arial" pitchFamily="34" charset="-120"/>
+              </a:rPr>
+              <a:t>9 / 14</a:t>
+            </a:r>
+            <a:endParaRPr lang="en-US" sz="1000" dirty="0"/>
+          </a:p>
+        </p:txBody>
+      </p:sp>
+      <p:sp>
+        <p:nvSpPr>
+          <p:cNvPr id="3" name="Text 1"/>
+          <p:cNvSpPr txBox="1"/>
+          <p:nvPr/>
+        </p:nvSpPr>
+        <p:spPr>
+          <a:xfrm>
             <a:off x="502920" y="182880"/>
             <a:ext cx="8138160" cy="219456"/>
           </a:xfrm>
@@ -8374,7 +10980,7 @@
                 <a:ea typeface="Arial" pitchFamily="34" charset="-122"/>
                 <a:cs typeface="Arial" pitchFamily="34" charset="-120"/>
               </a:rPr>
-              <a:t>РАЗБОР НА ДОСКЕ</a:t>
+              <a:t>ИНСТРУМЕНТ, НЕ ПОВТОР</a:t>
             </a:r>
             <a:endParaRPr lang="en-US" sz="1100" dirty="0"/>
           </a:p>
@@ -8382,14 +10988,14 @@
       </p:sp>
       <p:sp>
         <p:nvSpPr>
-          <p:cNvPr id="3" name="Text 1"/>
+          <p:cNvPr id="4" name="Text 2"/>
           <p:cNvSpPr txBox="1"/>
           <p:nvPr/>
         </p:nvSpPr>
         <p:spPr>
           <a:xfrm>
-            <a:off x="502920" y="384048"/>
-            <a:ext cx="8138160" cy="502920"/>
+            <a:off x="502920" y="365760"/>
+            <a:ext cx="8138160" cy="640080"/>
           </a:xfrm>
           <a:prstGeom prst="rect">
             <a:avLst/>
@@ -8405,7 +11011,7 @@
               <a:buNone/>
             </a:pPr>
             <a:r>
-              <a:rPr lang="en-US" sz="2400" b="1" dirty="0">
+              <a:rPr lang="en-US" sz="2700" b="1" dirty="0">
                 <a:solidFill>
                   <a:srgbClr val="005AAA"/>
                 </a:solidFill>
@@ -8413,48 +11019,9 @@
                 <a:ea typeface="Arial" pitchFamily="34" charset="-122"/>
                 <a:cs typeface="Arial" pitchFamily="34" charset="-120"/>
               </a:rPr>
-              <a:t>Без числа не ЧИСТО</a:t>
+              <a:t>Что проверяет каждая буква</a:t>
             </a:r>
-            <a:endParaRPr lang="en-US" sz="2400" dirty="0"/>
-          </a:p>
-        </p:txBody>
-      </p:sp>
-      <p:sp>
-        <p:nvSpPr>
-          <p:cNvPr id="4" name="Text 2"/>
-          <p:cNvSpPr txBox="1"/>
-          <p:nvPr/>
-        </p:nvSpPr>
-        <p:spPr>
-          <a:xfrm>
-            <a:off x="502920" y="914400"/>
-            <a:ext cx="8138160" cy="274320"/>
-          </a:xfrm>
-          <a:prstGeom prst="rect">
-            <a:avLst/>
-          </a:prstGeom>
-          <a:noFill/>
-          <a:ln/>
-        </p:spPr>
-        <p:txBody>
-          <a:bodyPr wrap="square" lIns="0" tIns="0" rIns="0" bIns="0" rtlCol="0" anchor="ctr"/>
-          <a:lstStyle/>
-          <a:p>
-            <a:pPr indent="0" marL="0">
-              <a:buNone/>
-            </a:pPr>
-            <a:r>
-              <a:rPr lang="en-US" sz="1300" i="1" dirty="0">
-                <a:solidFill>
-                  <a:srgbClr val="64748B"/>
-                </a:solidFill>
-                <a:latin typeface="Arial" pitchFamily="34" charset="0"/>
-                <a:ea typeface="Arial" pitchFamily="34" charset="-122"/>
-                <a:cs typeface="Arial" pitchFamily="34" charset="-120"/>
-              </a:rPr>
-              <a:t>Тот же пример: умный горшок для растений — правый столбец дописываем вместе</a:t>
-            </a:r>
-            <a:endParaRPr lang="en-US" sz="1300" dirty="0"/>
+            <a:endParaRPr lang="en-US" sz="2700" dirty="0"/>
           </a:p>
         </p:txBody>
       </p:sp>
@@ -8473,7 +11040,7 @@
           </p:nvPr>
         </p:nvGraphicFramePr>
         <p:xfrm>
-          <a:off x="502920" y="1280160"/>
+          <a:off x="502920" y="1325880"/>
           <a:ext cx="8138160" cy="914400"/>
         </p:xfrm>
         <a:graphic>
@@ -8481,11 +11048,11 @@
             <a:tbl>
               <a:tblPr/>
               <a:tblGrid>
-                <a:gridCol w="1005840"/>
-                <a:gridCol w="3200400"/>
-                <a:gridCol w="4023360"/>
+                <a:gridCol w="2011680"/>
+                <a:gridCol w="4114800"/>
+                <a:gridCol w="2011680"/>
               </a:tblGrid>
-              <a:tr h="566928">
+              <a:tr h="502920">
                 <a:tc>
                   <a:txBody>
                     <a:bodyPr/>
@@ -8495,7 +11062,7 @@
                         <a:buNone/>
                       </a:pPr>
                       <a:r>
-                        <a:rPr lang="en-US" sz="1200" b="1" dirty="0">
+                        <a:rPr lang="en-US" sz="1250" b="1" dirty="0">
                           <a:solidFill>
                             <a:srgbClr val="FFFFFF"/>
                           </a:solidFill>
@@ -8503,9 +11070,9 @@
                           <a:ea typeface="Arial" pitchFamily="34" charset="-122"/>
                           <a:cs typeface="Arial" pitchFamily="34" charset="-120"/>
                         </a:rPr>
-                        <a:t>Буква</a:t>
+                        <a:t>SMART</a:t>
                       </a:r>
-                      <a:endParaRPr lang="en-US" sz="1200" dirty="0">
+                      <a:endParaRPr lang="en-US" sz="1250" dirty="0">
                         <a:latin typeface="Arial" charset="0"/>
                         <a:ea typeface="Arial" charset="0"/>
                         <a:cs typeface="Arial" charset="0"/>
@@ -8563,7 +11130,7 @@
                         <a:buNone/>
                       </a:pPr>
                       <a:r>
-                        <a:rPr lang="en-US" sz="1200" b="1" dirty="0">
+                        <a:rPr lang="en-US" sz="1250" b="1" dirty="0">
                           <a:solidFill>
                             <a:srgbClr val="FFFFFF"/>
                           </a:solidFill>
@@ -8571,9 +11138,9 @@
                           <a:ea typeface="Arial" pitchFamily="34" charset="-122"/>
                           <a:cs typeface="Arial" pitchFamily="34" charset="-120"/>
                         </a:rPr>
-                        <a:t>Как звучит наивно</a:t>
+                        <a:t>Что проверяет</a:t>
                       </a:r>
-                      <a:endParaRPr lang="en-US" sz="1200" dirty="0">
+                      <a:endParaRPr lang="en-US" sz="1250" dirty="0">
                         <a:latin typeface="Arial" charset="0"/>
                         <a:ea typeface="Arial" charset="0"/>
                         <a:cs typeface="Arial" charset="0"/>
@@ -8627,11 +11194,11 @@
                     <a:bodyPr/>
                     <a:lstStyle/>
                     <a:p>
-                      <a:pPr indent="0" marL="0">
+                      <a:pPr algn="ctr" indent="0" marL="0">
                         <a:buNone/>
                       </a:pPr>
                       <a:r>
-                        <a:rPr lang="en-US" sz="1200" b="1" dirty="0">
+                        <a:rPr lang="en-US" sz="1250" b="1" dirty="0">
                           <a:solidFill>
                             <a:srgbClr val="FFFFFF"/>
                           </a:solidFill>
@@ -8639,9 +11206,9 @@
                           <a:ea typeface="Arial" pitchFamily="34" charset="-122"/>
                           <a:cs typeface="Arial" pitchFamily="34" charset="-120"/>
                         </a:rPr>
-                        <a:t>Дописываем на доске</a:t>
+                        <a:t>ЧИСТО</a:t>
                       </a:r>
-                      <a:endParaRPr lang="en-US" sz="1200" dirty="0">
+                      <a:endParaRPr lang="en-US" sz="1250" dirty="0">
                         <a:latin typeface="Arial" charset="0"/>
                         <a:ea typeface="Arial" charset="0"/>
                         <a:cs typeface="Arial" charset="0"/>
@@ -8691,7 +11258,7 @@
                   </a:tcPr>
                 </a:tc>
               </a:tr>
-              <a:tr h="566928">
+              <a:tr h="502920">
                 <a:tc>
                   <a:txBody>
                     <a:bodyPr/>
@@ -8701,7 +11268,7 @@
                         <a:buNone/>
                       </a:pPr>
                       <a:r>
-                        <a:rPr lang="en-US" sz="1200" dirty="0">
+                        <a:rPr lang="en-US" sz="1250" dirty="0">
                           <a:solidFill>
                             <a:srgbClr val="1E293B"/>
                           </a:solidFill>
@@ -8709,9 +11276,9 @@
                           <a:ea typeface="Arial" pitchFamily="34" charset="-122"/>
                           <a:cs typeface="Arial" pitchFamily="34" charset="-120"/>
                         </a:rPr>
-                        <a:t>Ч</a:t>
+                        <a:t>S — Specific</a:t>
                       </a:r>
-                      <a:endParaRPr lang="en-US" sz="1200" dirty="0">
+                      <a:endParaRPr lang="en-US" sz="1250" dirty="0">
                         <a:latin typeface="Arial" charset="0"/>
                         <a:ea typeface="Arial" charset="0"/>
                         <a:cs typeface="Arial" charset="0"/>
@@ -8766,7 +11333,7 @@
                         <a:buNone/>
                       </a:pPr>
                       <a:r>
-                        <a:rPr lang="en-US" sz="1200" dirty="0">
+                        <a:rPr lang="en-US" sz="1250" dirty="0">
                           <a:solidFill>
                             <a:srgbClr val="1E293B"/>
                           </a:solidFill>
@@ -8774,130 +11341,9 @@
                           <a:ea typeface="Arial" pitchFamily="34" charset="-122"/>
                           <a:cs typeface="Arial" pitchFamily="34" charset="-120"/>
                         </a:rPr>
-                        <a:t>«Сделать умный горшок»</a:t>
+                        <a:t>Образ результата, а не процесс: что именно должно появиться</a:t>
                       </a:r>
-                      <a:endParaRPr lang="en-US" sz="1200" dirty="0">
-                        <a:latin typeface="Arial" charset="0"/>
-                        <a:ea typeface="Arial" charset="0"/>
-                        <a:cs typeface="Arial" charset="0"/>
-                      </a:endParaRPr>
-                    </a:p>
-                  </a:txBody>
-                  <a:tcPr marL="91440" marR="91440" marT="45720" marB="45720" anchor="ctr">
-                    <a:lnL w="6350" cap="flat" cmpd="sng" algn="ctr">
-                      <a:solidFill>
-                        <a:srgbClr val="D8DEE6"/>
-                      </a:solidFill>
-                      <a:prstDash val="solid"/>
-                      <a:round/>
-                      <a:headEnd type="none" w="med" len="med"/>
-                      <a:tailEnd type="none" w="med" len="med"/>
-                    </a:lnL>
-                    <a:lnR w="6350" cap="flat" cmpd="sng" algn="ctr">
-                      <a:solidFill>
-                        <a:srgbClr val="D8DEE6"/>
-                      </a:solidFill>
-                      <a:prstDash val="solid"/>
-                      <a:round/>
-                      <a:headEnd type="none" w="med" len="med"/>
-                      <a:tailEnd type="none" w="med" len="med"/>
-                    </a:lnR>
-                    <a:lnT w="6350" cap="flat" cmpd="sng" algn="ctr">
-                      <a:solidFill>
-                        <a:srgbClr val="D8DEE6"/>
-                      </a:solidFill>
-                      <a:prstDash val="solid"/>
-                      <a:round/>
-                      <a:headEnd type="none" w="med" len="med"/>
-                      <a:tailEnd type="none" w="med" len="med"/>
-                    </a:lnT>
-                    <a:lnB w="6350" cap="flat" cmpd="sng" algn="ctr">
-                      <a:solidFill>
-                        <a:srgbClr val="D8DEE6"/>
-                      </a:solidFill>
-                      <a:prstDash val="solid"/>
-                      <a:round/>
-                      <a:headEnd type="none" w="med" len="med"/>
-                      <a:tailEnd type="none" w="med" len="med"/>
-                    </a:lnB>
-                  </a:tcPr>
-                </a:tc>
-                <a:tc>
-                  <a:txBody>
-                    <a:bodyPr/>
-                    <a:lstStyle/>
-                    <a:p>
-                      <a:pPr indent="0" marL="0">
-                        <a:buNone/>
-                      </a:pPr>
-                      <a:endParaRPr lang="en-US" sz="1200" dirty="0">
-                        <a:latin typeface="Arial" charset="0"/>
-                        <a:ea typeface="Arial" charset="0"/>
-                        <a:cs typeface="Arial" charset="0"/>
-                      </a:endParaRPr>
-                    </a:p>
-                  </a:txBody>
-                  <a:tcPr marL="91440" marR="91440" marT="45720" marB="45720" anchor="ctr">
-                    <a:lnL w="6350" cap="flat" cmpd="sng" algn="ctr">
-                      <a:solidFill>
-                        <a:srgbClr val="D8DEE6"/>
-                      </a:solidFill>
-                      <a:prstDash val="solid"/>
-                      <a:round/>
-                      <a:headEnd type="none" w="med" len="med"/>
-                      <a:tailEnd type="none" w="med" len="med"/>
-                    </a:lnL>
-                    <a:lnR w="6350" cap="flat" cmpd="sng" algn="ctr">
-                      <a:solidFill>
-                        <a:srgbClr val="D8DEE6"/>
-                      </a:solidFill>
-                      <a:prstDash val="solid"/>
-                      <a:round/>
-                      <a:headEnd type="none" w="med" len="med"/>
-                      <a:tailEnd type="none" w="med" len="med"/>
-                    </a:lnR>
-                    <a:lnT w="6350" cap="flat" cmpd="sng" algn="ctr">
-                      <a:solidFill>
-                        <a:srgbClr val="D8DEE6"/>
-                      </a:solidFill>
-                      <a:prstDash val="solid"/>
-                      <a:round/>
-                      <a:headEnd type="none" w="med" len="med"/>
-                      <a:tailEnd type="none" w="med" len="med"/>
-                    </a:lnT>
-                    <a:lnB w="6350" cap="flat" cmpd="sng" algn="ctr">
-                      <a:solidFill>
-                        <a:srgbClr val="D8DEE6"/>
-                      </a:solidFill>
-                      <a:prstDash val="solid"/>
-                      <a:round/>
-                      <a:headEnd type="none" w="med" len="med"/>
-                      <a:tailEnd type="none" w="med" len="med"/>
-                    </a:lnB>
-                  </a:tcPr>
-                </a:tc>
-              </a:tr>
-              <a:tr h="566928">
-                <a:tc>
-                  <a:txBody>
-                    <a:bodyPr/>
-                    <a:lstStyle/>
-                    <a:p>
-                      <a:pPr indent="0" marL="0">
-                        <a:buNone/>
-                      </a:pPr>
-                      <a:r>
-                        <a:rPr lang="en-US" sz="1200" dirty="0">
-                          <a:solidFill>
-                            <a:srgbClr val="1E293B"/>
-                          </a:solidFill>
-                          <a:latin typeface="Arial" pitchFamily="34" charset="0"/>
-                          <a:ea typeface="Arial" pitchFamily="34" charset="-122"/>
-                          <a:cs typeface="Arial" pitchFamily="34" charset="-120"/>
-                        </a:rPr>
-                        <a:t>И</a:t>
-                      </a:r>
-                      <a:endParaRPr lang="en-US" sz="1200" dirty="0">
+                      <a:endParaRPr lang="en-US" sz="1250" dirty="0">
                         <a:latin typeface="Arial" charset="0"/>
                         <a:ea typeface="Arial" charset="0"/>
                         <a:cs typeface="Arial" charset="0"/>
@@ -8952,7 +11398,7 @@
                         <a:buNone/>
                       </a:pPr>
                       <a:r>
-                        <a:rPr lang="en-US" sz="1200" dirty="0">
+                        <a:rPr lang="en-US" sz="1250" dirty="0">
                           <a:solidFill>
                             <a:srgbClr val="1E293B"/>
                           </a:solidFill>
@@ -8960,9 +11406,9 @@
                           <a:ea typeface="Arial" pitchFamily="34" charset="-122"/>
                           <a:cs typeface="Arial" pitchFamily="34" charset="-120"/>
                         </a:rPr>
-                        <a:t>«Чтобы удобно было»</a:t>
+                        <a:t>Ч — Чёткая</a:t>
                       </a:r>
-                      <a:endParaRPr lang="en-US" sz="1200" dirty="0">
+                      <a:endParaRPr lang="en-US" sz="1250" dirty="0">
                         <a:latin typeface="Arial" charset="0"/>
                         <a:ea typeface="Arial" charset="0"/>
                         <a:cs typeface="Arial" charset="0"/>
@@ -9008,62 +11454,8 @@
                     </a:lnB>
                   </a:tcPr>
                 </a:tc>
-                <a:tc>
-                  <a:txBody>
-                    <a:bodyPr/>
-                    <a:lstStyle/>
-                    <a:p>
-                      <a:pPr indent="0" marL="0">
-                        <a:buNone/>
-                      </a:pPr>
-                      <a:endParaRPr lang="en-US" sz="1200" dirty="0">
-                        <a:latin typeface="Arial" charset="0"/>
-                        <a:ea typeface="Arial" charset="0"/>
-                        <a:cs typeface="Arial" charset="0"/>
-                      </a:endParaRPr>
-                    </a:p>
-                  </a:txBody>
-                  <a:tcPr marL="91440" marR="91440" marT="45720" marB="45720" anchor="ctr">
-                    <a:lnL w="6350" cap="flat" cmpd="sng" algn="ctr">
-                      <a:solidFill>
-                        <a:srgbClr val="D8DEE6"/>
-                      </a:solidFill>
-                      <a:prstDash val="solid"/>
-                      <a:round/>
-                      <a:headEnd type="none" w="med" len="med"/>
-                      <a:tailEnd type="none" w="med" len="med"/>
-                    </a:lnL>
-                    <a:lnR w="6350" cap="flat" cmpd="sng" algn="ctr">
-                      <a:solidFill>
-                        <a:srgbClr val="D8DEE6"/>
-                      </a:solidFill>
-                      <a:prstDash val="solid"/>
-                      <a:round/>
-                      <a:headEnd type="none" w="med" len="med"/>
-                      <a:tailEnd type="none" w="med" len="med"/>
-                    </a:lnR>
-                    <a:lnT w="6350" cap="flat" cmpd="sng" algn="ctr">
-                      <a:solidFill>
-                        <a:srgbClr val="D8DEE6"/>
-                      </a:solidFill>
-                      <a:prstDash val="solid"/>
-                      <a:round/>
-                      <a:headEnd type="none" w="med" len="med"/>
-                      <a:tailEnd type="none" w="med" len="med"/>
-                    </a:lnT>
-                    <a:lnB w="6350" cap="flat" cmpd="sng" algn="ctr">
-                      <a:solidFill>
-                        <a:srgbClr val="D8DEE6"/>
-                      </a:solidFill>
-                      <a:prstDash val="solid"/>
-                      <a:round/>
-                      <a:headEnd type="none" w="med" len="med"/>
-                      <a:tailEnd type="none" w="med" len="med"/>
-                    </a:lnB>
-                  </a:tcPr>
-                </a:tc>
               </a:tr>
-              <a:tr h="566928">
+              <a:tr h="502920">
                 <a:tc>
                   <a:txBody>
                     <a:bodyPr/>
@@ -9073,7 +11465,7 @@
                         <a:buNone/>
                       </a:pPr>
                       <a:r>
-                        <a:rPr lang="en-US" sz="1200" dirty="0">
+                        <a:rPr lang="en-US" sz="1250" dirty="0">
                           <a:solidFill>
                             <a:srgbClr val="1E293B"/>
                           </a:solidFill>
@@ -9081,9 +11473,9 @@
                           <a:ea typeface="Arial" pitchFamily="34" charset="-122"/>
                           <a:cs typeface="Arial" pitchFamily="34" charset="-120"/>
                         </a:rPr>
-                        <a:t>Т / О</a:t>
+                        <a:t>M — Measurable</a:t>
                       </a:r>
-                      <a:endParaRPr lang="en-US" sz="1200" dirty="0">
+                      <a:endParaRPr lang="en-US" sz="1250" dirty="0">
                         <a:latin typeface="Arial" charset="0"/>
                         <a:ea typeface="Arial" charset="0"/>
                         <a:cs typeface="Arial" charset="0"/>
@@ -9138,7 +11530,7 @@
                         <a:buNone/>
                       </a:pPr>
                       <a:r>
-                        <a:rPr lang="en-US" sz="1200" dirty="0">
+                        <a:rPr lang="en-US" sz="1250" dirty="0">
                           <a:solidFill>
                             <a:srgbClr val="1E293B"/>
                           </a:solidFill>
@@ -9146,130 +11538,9 @@
                           <a:ea typeface="Arial" pitchFamily="34" charset="-122"/>
                           <a:cs typeface="Arial" pitchFamily="34" charset="-120"/>
                         </a:rPr>
-                        <a:t>не проверяются вовсе</a:t>
+                        <a:t>Проверяется числом, а не словом «хорошо»</a:t>
                       </a:r>
-                      <a:endParaRPr lang="en-US" sz="1200" dirty="0">
-                        <a:latin typeface="Arial" charset="0"/>
-                        <a:ea typeface="Arial" charset="0"/>
-                        <a:cs typeface="Arial" charset="0"/>
-                      </a:endParaRPr>
-                    </a:p>
-                  </a:txBody>
-                  <a:tcPr marL="91440" marR="91440" marT="45720" marB="45720" anchor="ctr">
-                    <a:lnL w="6350" cap="flat" cmpd="sng" algn="ctr">
-                      <a:solidFill>
-                        <a:srgbClr val="D8DEE6"/>
-                      </a:solidFill>
-                      <a:prstDash val="solid"/>
-                      <a:round/>
-                      <a:headEnd type="none" w="med" len="med"/>
-                      <a:tailEnd type="none" w="med" len="med"/>
-                    </a:lnL>
-                    <a:lnR w="6350" cap="flat" cmpd="sng" algn="ctr">
-                      <a:solidFill>
-                        <a:srgbClr val="D8DEE6"/>
-                      </a:solidFill>
-                      <a:prstDash val="solid"/>
-                      <a:round/>
-                      <a:headEnd type="none" w="med" len="med"/>
-                      <a:tailEnd type="none" w="med" len="med"/>
-                    </a:lnR>
-                    <a:lnT w="6350" cap="flat" cmpd="sng" algn="ctr">
-                      <a:solidFill>
-                        <a:srgbClr val="D8DEE6"/>
-                      </a:solidFill>
-                      <a:prstDash val="solid"/>
-                      <a:round/>
-                      <a:headEnd type="none" w="med" len="med"/>
-                      <a:tailEnd type="none" w="med" len="med"/>
-                    </a:lnT>
-                    <a:lnB w="6350" cap="flat" cmpd="sng" algn="ctr">
-                      <a:solidFill>
-                        <a:srgbClr val="D8DEE6"/>
-                      </a:solidFill>
-                      <a:prstDash val="solid"/>
-                      <a:round/>
-                      <a:headEnd type="none" w="med" len="med"/>
-                      <a:tailEnd type="none" w="med" len="med"/>
-                    </a:lnB>
-                  </a:tcPr>
-                </a:tc>
-                <a:tc>
-                  <a:txBody>
-                    <a:bodyPr/>
-                    <a:lstStyle/>
-                    <a:p>
-                      <a:pPr indent="0" marL="0">
-                        <a:buNone/>
-                      </a:pPr>
-                      <a:endParaRPr lang="en-US" sz="1200" dirty="0">
-                        <a:latin typeface="Arial" charset="0"/>
-                        <a:ea typeface="Arial" charset="0"/>
-                        <a:cs typeface="Arial" charset="0"/>
-                      </a:endParaRPr>
-                    </a:p>
-                  </a:txBody>
-                  <a:tcPr marL="91440" marR="91440" marT="45720" marB="45720" anchor="ctr">
-                    <a:lnL w="6350" cap="flat" cmpd="sng" algn="ctr">
-                      <a:solidFill>
-                        <a:srgbClr val="D8DEE6"/>
-                      </a:solidFill>
-                      <a:prstDash val="solid"/>
-                      <a:round/>
-                      <a:headEnd type="none" w="med" len="med"/>
-                      <a:tailEnd type="none" w="med" len="med"/>
-                    </a:lnL>
-                    <a:lnR w="6350" cap="flat" cmpd="sng" algn="ctr">
-                      <a:solidFill>
-                        <a:srgbClr val="D8DEE6"/>
-                      </a:solidFill>
-                      <a:prstDash val="solid"/>
-                      <a:round/>
-                      <a:headEnd type="none" w="med" len="med"/>
-                      <a:tailEnd type="none" w="med" len="med"/>
-                    </a:lnR>
-                    <a:lnT w="6350" cap="flat" cmpd="sng" algn="ctr">
-                      <a:solidFill>
-                        <a:srgbClr val="D8DEE6"/>
-                      </a:solidFill>
-                      <a:prstDash val="solid"/>
-                      <a:round/>
-                      <a:headEnd type="none" w="med" len="med"/>
-                      <a:tailEnd type="none" w="med" len="med"/>
-                    </a:lnT>
-                    <a:lnB w="6350" cap="flat" cmpd="sng" algn="ctr">
-                      <a:solidFill>
-                        <a:srgbClr val="D8DEE6"/>
-                      </a:solidFill>
-                      <a:prstDash val="solid"/>
-                      <a:round/>
-                      <a:headEnd type="none" w="med" len="med"/>
-                      <a:tailEnd type="none" w="med" len="med"/>
-                    </a:lnB>
-                  </a:tcPr>
-                </a:tc>
-              </a:tr>
-              <a:tr h="566928">
-                <a:tc>
-                  <a:txBody>
-                    <a:bodyPr/>
-                    <a:lstStyle/>
-                    <a:p>
-                      <a:pPr indent="0" marL="0">
-                        <a:buNone/>
-                      </a:pPr>
-                      <a:r>
-                        <a:rPr lang="en-US" sz="1200" dirty="0">
-                          <a:solidFill>
-                            <a:srgbClr val="1E293B"/>
-                          </a:solidFill>
-                          <a:latin typeface="Arial" pitchFamily="34" charset="0"/>
-                          <a:ea typeface="Arial" pitchFamily="34" charset="-122"/>
-                          <a:cs typeface="Arial" pitchFamily="34" charset="-120"/>
-                        </a:rPr>
-                        <a:t>С</a:t>
-                      </a:r>
-                      <a:endParaRPr lang="en-US" sz="1200" dirty="0">
+                      <a:endParaRPr lang="en-US" sz="1250" dirty="0">
                         <a:latin typeface="Arial" charset="0"/>
                         <a:ea typeface="Arial" charset="0"/>
                         <a:cs typeface="Arial" charset="0"/>
@@ -9324,7 +11595,7 @@
                         <a:buNone/>
                       </a:pPr>
                       <a:r>
-                        <a:rPr lang="en-US" sz="1200" dirty="0">
+                        <a:rPr lang="en-US" sz="1250" dirty="0">
                           <a:solidFill>
                             <a:srgbClr val="1E293B"/>
                           </a:solidFill>
@@ -9332,9 +11603,76 @@
                           <a:ea typeface="Arial" pitchFamily="34" charset="-122"/>
                           <a:cs typeface="Arial" pitchFamily="34" charset="-120"/>
                         </a:rPr>
-                        <a:t>«В течение семестра»</a:t>
+                        <a:t>И — Измеримая</a:t>
                       </a:r>
-                      <a:endParaRPr lang="en-US" sz="1200" dirty="0">
+                      <a:endParaRPr lang="en-US" sz="1250" dirty="0">
+                        <a:latin typeface="Arial" charset="0"/>
+                        <a:ea typeface="Arial" charset="0"/>
+                        <a:cs typeface="Arial" charset="0"/>
+                      </a:endParaRPr>
+                    </a:p>
+                  </a:txBody>
+                  <a:tcPr marL="91440" marR="91440" marT="45720" marB="45720" anchor="ctr">
+                    <a:lnL w="6350" cap="flat" cmpd="sng" algn="ctr">
+                      <a:solidFill>
+                        <a:srgbClr val="D8DEE6"/>
+                      </a:solidFill>
+                      <a:prstDash val="solid"/>
+                      <a:round/>
+                      <a:headEnd type="none" w="med" len="med"/>
+                      <a:tailEnd type="none" w="med" len="med"/>
+                    </a:lnL>
+                    <a:lnR w="6350" cap="flat" cmpd="sng" algn="ctr">
+                      <a:solidFill>
+                        <a:srgbClr val="D8DEE6"/>
+                      </a:solidFill>
+                      <a:prstDash val="solid"/>
+                      <a:round/>
+                      <a:headEnd type="none" w="med" len="med"/>
+                      <a:tailEnd type="none" w="med" len="med"/>
+                    </a:lnR>
+                    <a:lnT w="6350" cap="flat" cmpd="sng" algn="ctr">
+                      <a:solidFill>
+                        <a:srgbClr val="D8DEE6"/>
+                      </a:solidFill>
+                      <a:prstDash val="solid"/>
+                      <a:round/>
+                      <a:headEnd type="none" w="med" len="med"/>
+                      <a:tailEnd type="none" w="med" len="med"/>
+                    </a:lnT>
+                    <a:lnB w="6350" cap="flat" cmpd="sng" algn="ctr">
+                      <a:solidFill>
+                        <a:srgbClr val="D8DEE6"/>
+                      </a:solidFill>
+                      <a:prstDash val="solid"/>
+                      <a:round/>
+                      <a:headEnd type="none" w="med" len="med"/>
+                      <a:tailEnd type="none" w="med" len="med"/>
+                    </a:lnB>
+                  </a:tcPr>
+                </a:tc>
+              </a:tr>
+              <a:tr h="502920">
+                <a:tc>
+                  <a:txBody>
+                    <a:bodyPr/>
+                    <a:lstStyle/>
+                    <a:p>
+                      <a:pPr indent="0" marL="0">
+                        <a:buNone/>
+                      </a:pPr>
+                      <a:r>
+                        <a:rPr lang="en-US" sz="1250" dirty="0">
+                          <a:solidFill>
+                            <a:srgbClr val="1E293B"/>
+                          </a:solidFill>
+                          <a:latin typeface="Arial" pitchFamily="34" charset="0"/>
+                          <a:ea typeface="Arial" pitchFamily="34" charset="-122"/>
+                          <a:cs typeface="Arial" pitchFamily="34" charset="-120"/>
+                        </a:rPr>
+                        <a:t>A — Achievable</a:t>
+                      </a:r>
+                      <a:endParaRPr lang="en-US" sz="1250" dirty="0">
                         <a:latin typeface="Arial" charset="0"/>
                         <a:ea typeface="Arial" charset="0"/>
                         <a:cs typeface="Arial" charset="0"/>
@@ -9388,7 +11726,18 @@
                       <a:pPr indent="0" marL="0">
                         <a:buNone/>
                       </a:pPr>
-                      <a:endParaRPr lang="en-US" sz="1200" dirty="0">
+                      <a:r>
+                        <a:rPr lang="en-US" sz="1250" dirty="0">
+                          <a:solidFill>
+                            <a:srgbClr val="1E293B"/>
+                          </a:solidFill>
+                          <a:latin typeface="Arial" pitchFamily="34" charset="0"/>
+                          <a:ea typeface="Arial" pitchFamily="34" charset="-122"/>
+                          <a:cs typeface="Arial" pitchFamily="34" charset="-120"/>
+                        </a:rPr>
+                        <a:t>Ресурсный лимит: реально силами 3–4 человек</a:t>
+                      </a:r>
+                      <a:endParaRPr lang="en-US" sz="1250" dirty="0">
                         <a:latin typeface="Arial" charset="0"/>
                         <a:ea typeface="Arial" charset="0"/>
                         <a:cs typeface="Arial" charset="0"/>
@@ -9434,6 +11783,465 @@
                     </a:lnB>
                   </a:tcPr>
                 </a:tc>
+                <a:tc>
+                  <a:txBody>
+                    <a:bodyPr/>
+                    <a:lstStyle/>
+                    <a:p>
+                      <a:pPr indent="0" marL="0">
+                        <a:buNone/>
+                      </a:pPr>
+                      <a:r>
+                        <a:rPr lang="en-US" sz="1250" dirty="0">
+                          <a:solidFill>
+                            <a:srgbClr val="1E293B"/>
+                          </a:solidFill>
+                          <a:latin typeface="Arial" pitchFamily="34" charset="0"/>
+                          <a:ea typeface="Arial" pitchFamily="34" charset="-122"/>
+                          <a:cs typeface="Arial" pitchFamily="34" charset="-120"/>
+                        </a:rPr>
+                        <a:t>О — Осуществимая</a:t>
+                      </a:r>
+                      <a:endParaRPr lang="en-US" sz="1250" dirty="0">
+                        <a:latin typeface="Arial" charset="0"/>
+                        <a:ea typeface="Arial" charset="0"/>
+                        <a:cs typeface="Arial" charset="0"/>
+                      </a:endParaRPr>
+                    </a:p>
+                  </a:txBody>
+                  <a:tcPr marL="91440" marR="91440" marT="45720" marB="45720" anchor="ctr">
+                    <a:lnL w="6350" cap="flat" cmpd="sng" algn="ctr">
+                      <a:solidFill>
+                        <a:srgbClr val="D8DEE6"/>
+                      </a:solidFill>
+                      <a:prstDash val="solid"/>
+                      <a:round/>
+                      <a:headEnd type="none" w="med" len="med"/>
+                      <a:tailEnd type="none" w="med" len="med"/>
+                    </a:lnL>
+                    <a:lnR w="6350" cap="flat" cmpd="sng" algn="ctr">
+                      <a:solidFill>
+                        <a:srgbClr val="D8DEE6"/>
+                      </a:solidFill>
+                      <a:prstDash val="solid"/>
+                      <a:round/>
+                      <a:headEnd type="none" w="med" len="med"/>
+                      <a:tailEnd type="none" w="med" len="med"/>
+                    </a:lnR>
+                    <a:lnT w="6350" cap="flat" cmpd="sng" algn="ctr">
+                      <a:solidFill>
+                        <a:srgbClr val="D8DEE6"/>
+                      </a:solidFill>
+                      <a:prstDash val="solid"/>
+                      <a:round/>
+                      <a:headEnd type="none" w="med" len="med"/>
+                      <a:tailEnd type="none" w="med" len="med"/>
+                    </a:lnT>
+                    <a:lnB w="6350" cap="flat" cmpd="sng" algn="ctr">
+                      <a:solidFill>
+                        <a:srgbClr val="D8DEE6"/>
+                      </a:solidFill>
+                      <a:prstDash val="solid"/>
+                      <a:round/>
+                      <a:headEnd type="none" w="med" len="med"/>
+                      <a:tailEnd type="none" w="med" len="med"/>
+                    </a:lnB>
+                  </a:tcPr>
+                </a:tc>
+              </a:tr>
+              <a:tr h="502920">
+                <a:tc>
+                  <a:txBody>
+                    <a:bodyPr/>
+                    <a:lstStyle/>
+                    <a:p>
+                      <a:pPr indent="0" marL="0">
+                        <a:buNone/>
+                      </a:pPr>
+                      <a:r>
+                        <a:rPr lang="en-US" sz="1250" dirty="0">
+                          <a:solidFill>
+                            <a:srgbClr val="1E293B"/>
+                          </a:solidFill>
+                          <a:latin typeface="Arial" pitchFamily="34" charset="0"/>
+                          <a:ea typeface="Arial" pitchFamily="34" charset="-122"/>
+                          <a:cs typeface="Arial" pitchFamily="34" charset="-120"/>
+                        </a:rPr>
+                        <a:t>R — Relevant</a:t>
+                      </a:r>
+                      <a:endParaRPr lang="en-US" sz="1250" dirty="0">
+                        <a:latin typeface="Arial" charset="0"/>
+                        <a:ea typeface="Arial" charset="0"/>
+                        <a:cs typeface="Arial" charset="0"/>
+                      </a:endParaRPr>
+                    </a:p>
+                  </a:txBody>
+                  <a:tcPr marL="91440" marR="91440" marT="45720" marB="45720" anchor="ctr">
+                    <a:lnL w="6350" cap="flat" cmpd="sng" algn="ctr">
+                      <a:solidFill>
+                        <a:srgbClr val="D8DEE6"/>
+                      </a:solidFill>
+                      <a:prstDash val="solid"/>
+                      <a:round/>
+                      <a:headEnd type="none" w="med" len="med"/>
+                      <a:tailEnd type="none" w="med" len="med"/>
+                    </a:lnL>
+                    <a:lnR w="6350" cap="flat" cmpd="sng" algn="ctr">
+                      <a:solidFill>
+                        <a:srgbClr val="D8DEE6"/>
+                      </a:solidFill>
+                      <a:prstDash val="solid"/>
+                      <a:round/>
+                      <a:headEnd type="none" w="med" len="med"/>
+                      <a:tailEnd type="none" w="med" len="med"/>
+                    </a:lnR>
+                    <a:lnT w="6350" cap="flat" cmpd="sng" algn="ctr">
+                      <a:solidFill>
+                        <a:srgbClr val="D8DEE6"/>
+                      </a:solidFill>
+                      <a:prstDash val="solid"/>
+                      <a:round/>
+                      <a:headEnd type="none" w="med" len="med"/>
+                      <a:tailEnd type="none" w="med" len="med"/>
+                    </a:lnT>
+                    <a:lnB w="6350" cap="flat" cmpd="sng" algn="ctr">
+                      <a:solidFill>
+                        <a:srgbClr val="D8DEE6"/>
+                      </a:solidFill>
+                      <a:prstDash val="solid"/>
+                      <a:round/>
+                      <a:headEnd type="none" w="med" len="med"/>
+                      <a:tailEnd type="none" w="med" len="med"/>
+                    </a:lnB>
+                  </a:tcPr>
+                </a:tc>
+                <a:tc>
+                  <a:txBody>
+                    <a:bodyPr/>
+                    <a:lstStyle/>
+                    <a:p>
+                      <a:pPr indent="0" marL="0">
+                        <a:buNone/>
+                      </a:pPr>
+                      <a:r>
+                        <a:rPr lang="en-US" sz="1250" dirty="0">
+                          <a:solidFill>
+                            <a:srgbClr val="1E293B"/>
+                          </a:solidFill>
+                          <a:latin typeface="Arial" pitchFamily="34" charset="0"/>
+                          <a:ea typeface="Arial" pitchFamily="34" charset="-122"/>
+                          <a:cs typeface="Arial" pitchFamily="34" charset="-120"/>
+                        </a:rPr>
+                        <a:t>Решает проблему из ценностного предложения</a:t>
+                      </a:r>
+                      <a:endParaRPr lang="en-US" sz="1250" dirty="0">
+                        <a:latin typeface="Arial" charset="0"/>
+                        <a:ea typeface="Arial" charset="0"/>
+                        <a:cs typeface="Arial" charset="0"/>
+                      </a:endParaRPr>
+                    </a:p>
+                  </a:txBody>
+                  <a:tcPr marL="91440" marR="91440" marT="45720" marB="45720" anchor="ctr">
+                    <a:lnL w="6350" cap="flat" cmpd="sng" algn="ctr">
+                      <a:solidFill>
+                        <a:srgbClr val="D8DEE6"/>
+                      </a:solidFill>
+                      <a:prstDash val="solid"/>
+                      <a:round/>
+                      <a:headEnd type="none" w="med" len="med"/>
+                      <a:tailEnd type="none" w="med" len="med"/>
+                    </a:lnL>
+                    <a:lnR w="6350" cap="flat" cmpd="sng" algn="ctr">
+                      <a:solidFill>
+                        <a:srgbClr val="D8DEE6"/>
+                      </a:solidFill>
+                      <a:prstDash val="solid"/>
+                      <a:round/>
+                      <a:headEnd type="none" w="med" len="med"/>
+                      <a:tailEnd type="none" w="med" len="med"/>
+                    </a:lnR>
+                    <a:lnT w="6350" cap="flat" cmpd="sng" algn="ctr">
+                      <a:solidFill>
+                        <a:srgbClr val="D8DEE6"/>
+                      </a:solidFill>
+                      <a:prstDash val="solid"/>
+                      <a:round/>
+                      <a:headEnd type="none" w="med" len="med"/>
+                      <a:tailEnd type="none" w="med" len="med"/>
+                    </a:lnT>
+                    <a:lnB w="6350" cap="flat" cmpd="sng" algn="ctr">
+                      <a:solidFill>
+                        <a:srgbClr val="D8DEE6"/>
+                      </a:solidFill>
+                      <a:prstDash val="solid"/>
+                      <a:round/>
+                      <a:headEnd type="none" w="med" len="med"/>
+                      <a:tailEnd type="none" w="med" len="med"/>
+                    </a:lnB>
+                  </a:tcPr>
+                </a:tc>
+                <a:tc>
+                  <a:txBody>
+                    <a:bodyPr/>
+                    <a:lstStyle/>
+                    <a:p>
+                      <a:pPr indent="0" marL="0">
+                        <a:buNone/>
+                      </a:pPr>
+                      <a:r>
+                        <a:rPr lang="en-US" sz="1250" dirty="0">
+                          <a:solidFill>
+                            <a:srgbClr val="1E293B"/>
+                          </a:solidFill>
+                          <a:latin typeface="Arial" pitchFamily="34" charset="0"/>
+                          <a:ea typeface="Arial" pitchFamily="34" charset="-122"/>
+                          <a:cs typeface="Arial" pitchFamily="34" charset="-120"/>
+                        </a:rPr>
+                        <a:t>Т — Толковая</a:t>
+                      </a:r>
+                      <a:endParaRPr lang="en-US" sz="1250" dirty="0">
+                        <a:latin typeface="Arial" charset="0"/>
+                        <a:ea typeface="Arial" charset="0"/>
+                        <a:cs typeface="Arial" charset="0"/>
+                      </a:endParaRPr>
+                    </a:p>
+                  </a:txBody>
+                  <a:tcPr marL="91440" marR="91440" marT="45720" marB="45720" anchor="ctr">
+                    <a:lnL w="6350" cap="flat" cmpd="sng" algn="ctr">
+                      <a:solidFill>
+                        <a:srgbClr val="D8DEE6"/>
+                      </a:solidFill>
+                      <a:prstDash val="solid"/>
+                      <a:round/>
+                      <a:headEnd type="none" w="med" len="med"/>
+                      <a:tailEnd type="none" w="med" len="med"/>
+                    </a:lnL>
+                    <a:lnR w="6350" cap="flat" cmpd="sng" algn="ctr">
+                      <a:solidFill>
+                        <a:srgbClr val="D8DEE6"/>
+                      </a:solidFill>
+                      <a:prstDash val="solid"/>
+                      <a:round/>
+                      <a:headEnd type="none" w="med" len="med"/>
+                      <a:tailEnd type="none" w="med" len="med"/>
+                    </a:lnR>
+                    <a:lnT w="6350" cap="flat" cmpd="sng" algn="ctr">
+                      <a:solidFill>
+                        <a:srgbClr val="D8DEE6"/>
+                      </a:solidFill>
+                      <a:prstDash val="solid"/>
+                      <a:round/>
+                      <a:headEnd type="none" w="med" len="med"/>
+                      <a:tailEnd type="none" w="med" len="med"/>
+                    </a:lnT>
+                    <a:lnB w="6350" cap="flat" cmpd="sng" algn="ctr">
+                      <a:solidFill>
+                        <a:srgbClr val="D8DEE6"/>
+                      </a:solidFill>
+                      <a:prstDash val="solid"/>
+                      <a:round/>
+                      <a:headEnd type="none" w="med" len="med"/>
+                      <a:tailEnd type="none" w="med" len="med"/>
+                    </a:lnB>
+                  </a:tcPr>
+                </a:tc>
+              </a:tr>
+              <a:tr h="502920">
+                <a:tc>
+                  <a:txBody>
+                    <a:bodyPr/>
+                    <a:lstStyle/>
+                    <a:p>
+                      <a:pPr indent="0" marL="0">
+                        <a:buNone/>
+                      </a:pPr>
+                      <a:r>
+                        <a:rPr lang="en-US" sz="1250" dirty="0">
+                          <a:solidFill>
+                            <a:srgbClr val="1E293B"/>
+                          </a:solidFill>
+                          <a:latin typeface="Arial" pitchFamily="34" charset="0"/>
+                          <a:ea typeface="Arial" pitchFamily="34" charset="-122"/>
+                          <a:cs typeface="Arial" pitchFamily="34" charset="-120"/>
+                        </a:rPr>
+                        <a:t>T — Time-bound</a:t>
+                      </a:r>
+                      <a:endParaRPr lang="en-US" sz="1250" dirty="0">
+                        <a:latin typeface="Arial" charset="0"/>
+                        <a:ea typeface="Arial" charset="0"/>
+                        <a:cs typeface="Arial" charset="0"/>
+                      </a:endParaRPr>
+                    </a:p>
+                  </a:txBody>
+                  <a:tcPr marL="91440" marR="91440" marT="45720" marB="45720" anchor="ctr">
+                    <a:lnL w="6350" cap="flat" cmpd="sng" algn="ctr">
+                      <a:solidFill>
+                        <a:srgbClr val="D8DEE6"/>
+                      </a:solidFill>
+                      <a:prstDash val="solid"/>
+                      <a:round/>
+                      <a:headEnd type="none" w="med" len="med"/>
+                      <a:tailEnd type="none" w="med" len="med"/>
+                    </a:lnL>
+                    <a:lnR w="6350" cap="flat" cmpd="sng" algn="ctr">
+                      <a:solidFill>
+                        <a:srgbClr val="D8DEE6"/>
+                      </a:solidFill>
+                      <a:prstDash val="solid"/>
+                      <a:round/>
+                      <a:headEnd type="none" w="med" len="med"/>
+                      <a:tailEnd type="none" w="med" len="med"/>
+                    </a:lnR>
+                    <a:lnT w="6350" cap="flat" cmpd="sng" algn="ctr">
+                      <a:solidFill>
+                        <a:srgbClr val="D8DEE6"/>
+                      </a:solidFill>
+                      <a:prstDash val="solid"/>
+                      <a:round/>
+                      <a:headEnd type="none" w="med" len="med"/>
+                      <a:tailEnd type="none" w="med" len="med"/>
+                    </a:lnT>
+                    <a:lnB w="6350" cap="flat" cmpd="sng" algn="ctr">
+                      <a:solidFill>
+                        <a:srgbClr val="D8DEE6"/>
+                      </a:solidFill>
+                      <a:prstDash val="solid"/>
+                      <a:round/>
+                      <a:headEnd type="none" w="med" len="med"/>
+                      <a:tailEnd type="none" w="med" len="med"/>
+                    </a:lnB>
+                  </a:tcPr>
+                </a:tc>
+                <a:tc>
+                  <a:txBody>
+                    <a:bodyPr/>
+                    <a:lstStyle/>
+                    <a:p>
+                      <a:pPr indent="0" marL="0">
+                        <a:buNone/>
+                      </a:pPr>
+                      <a:r>
+                        <a:rPr lang="en-US" sz="1250" dirty="0">
+                          <a:solidFill>
+                            <a:srgbClr val="1E293B"/>
+                          </a:solidFill>
+                          <a:latin typeface="Arial" pitchFamily="34" charset="0"/>
+                          <a:ea typeface="Arial" pitchFamily="34" charset="-122"/>
+                          <a:cs typeface="Arial" pitchFamily="34" charset="-120"/>
+                        </a:rPr>
+                        <a:t>Конкретная дата: чекпоинт 21.11 или защита 26.12</a:t>
+                      </a:r>
+                      <a:endParaRPr lang="en-US" sz="1250" dirty="0">
+                        <a:latin typeface="Arial" charset="0"/>
+                        <a:ea typeface="Arial" charset="0"/>
+                        <a:cs typeface="Arial" charset="0"/>
+                      </a:endParaRPr>
+                    </a:p>
+                  </a:txBody>
+                  <a:tcPr marL="91440" marR="91440" marT="45720" marB="45720" anchor="ctr">
+                    <a:lnL w="6350" cap="flat" cmpd="sng" algn="ctr">
+                      <a:solidFill>
+                        <a:srgbClr val="D8DEE6"/>
+                      </a:solidFill>
+                      <a:prstDash val="solid"/>
+                      <a:round/>
+                      <a:headEnd type="none" w="med" len="med"/>
+                      <a:tailEnd type="none" w="med" len="med"/>
+                    </a:lnL>
+                    <a:lnR w="6350" cap="flat" cmpd="sng" algn="ctr">
+                      <a:solidFill>
+                        <a:srgbClr val="D8DEE6"/>
+                      </a:solidFill>
+                      <a:prstDash val="solid"/>
+                      <a:round/>
+                      <a:headEnd type="none" w="med" len="med"/>
+                      <a:tailEnd type="none" w="med" len="med"/>
+                    </a:lnR>
+                    <a:lnT w="6350" cap="flat" cmpd="sng" algn="ctr">
+                      <a:solidFill>
+                        <a:srgbClr val="D8DEE6"/>
+                      </a:solidFill>
+                      <a:prstDash val="solid"/>
+                      <a:round/>
+                      <a:headEnd type="none" w="med" len="med"/>
+                      <a:tailEnd type="none" w="med" len="med"/>
+                    </a:lnT>
+                    <a:lnB w="6350" cap="flat" cmpd="sng" algn="ctr">
+                      <a:solidFill>
+                        <a:srgbClr val="D8DEE6"/>
+                      </a:solidFill>
+                      <a:prstDash val="solid"/>
+                      <a:round/>
+                      <a:headEnd type="none" w="med" len="med"/>
+                      <a:tailEnd type="none" w="med" len="med"/>
+                    </a:lnB>
+                  </a:tcPr>
+                </a:tc>
+                <a:tc>
+                  <a:txBody>
+                    <a:bodyPr/>
+                    <a:lstStyle/>
+                    <a:p>
+                      <a:pPr indent="0" marL="0">
+                        <a:buNone/>
+                      </a:pPr>
+                      <a:r>
+                        <a:rPr lang="en-US" sz="1250" dirty="0">
+                          <a:solidFill>
+                            <a:srgbClr val="1E293B"/>
+                          </a:solidFill>
+                          <a:latin typeface="Arial" pitchFamily="34" charset="0"/>
+                          <a:ea typeface="Arial" pitchFamily="34" charset="-122"/>
+                          <a:cs typeface="Arial" pitchFamily="34" charset="-120"/>
+                        </a:rPr>
+                        <a:t>С — Со сроком</a:t>
+                      </a:r>
+                      <a:endParaRPr lang="en-US" sz="1250" dirty="0">
+                        <a:latin typeface="Arial" charset="0"/>
+                        <a:ea typeface="Arial" charset="0"/>
+                        <a:cs typeface="Arial" charset="0"/>
+                      </a:endParaRPr>
+                    </a:p>
+                  </a:txBody>
+                  <a:tcPr marL="91440" marR="91440" marT="45720" marB="45720" anchor="ctr">
+                    <a:lnL w="6350" cap="flat" cmpd="sng" algn="ctr">
+                      <a:solidFill>
+                        <a:srgbClr val="D8DEE6"/>
+                      </a:solidFill>
+                      <a:prstDash val="solid"/>
+                      <a:round/>
+                      <a:headEnd type="none" w="med" len="med"/>
+                      <a:tailEnd type="none" w="med" len="med"/>
+                    </a:lnL>
+                    <a:lnR w="6350" cap="flat" cmpd="sng" algn="ctr">
+                      <a:solidFill>
+                        <a:srgbClr val="D8DEE6"/>
+                      </a:solidFill>
+                      <a:prstDash val="solid"/>
+                      <a:round/>
+                      <a:headEnd type="none" w="med" len="med"/>
+                      <a:tailEnd type="none" w="med" len="med"/>
+                    </a:lnR>
+                    <a:lnT w="6350" cap="flat" cmpd="sng" algn="ctr">
+                      <a:solidFill>
+                        <a:srgbClr val="D8DEE6"/>
+                      </a:solidFill>
+                      <a:prstDash val="solid"/>
+                      <a:round/>
+                      <a:headEnd type="none" w="med" len="med"/>
+                      <a:tailEnd type="none" w="med" len="med"/>
+                    </a:lnT>
+                    <a:lnB w="6350" cap="flat" cmpd="sng" algn="ctr">
+                      <a:solidFill>
+                        <a:srgbClr val="D8DEE6"/>
+                      </a:solidFill>
+                      <a:prstDash val="solid"/>
+                      <a:round/>
+                      <a:headEnd type="none" w="med" len="med"/>
+                      <a:tailEnd type="none" w="med" len="med"/>
+                    </a:lnB>
+                  </a:tcPr>
+                </a:tc>
               </a:tr>
             </a:tbl>
           </a:graphicData>
@@ -9441,41 +12249,14 @@
       </p:graphicFrame>
       <p:sp>
         <p:nvSpPr>
-          <p:cNvPr id="6" name="Shape 3"/>
-          <p:cNvSpPr/>
+          <p:cNvPr id="6" name="Text 3"/>
+          <p:cNvSpPr txBox="1"/>
           <p:nvPr/>
         </p:nvSpPr>
         <p:spPr>
           <a:xfrm>
-            <a:off x="502920" y="3794760"/>
-            <a:ext cx="8138160" cy="731520"/>
-          </a:xfrm>
-          <a:prstGeom prst="roundRect">
-            <a:avLst>
-              <a:gd name="adj" fmla="val 6250"/>
-            </a:avLst>
-          </a:prstGeom>
-          <a:solidFill>
-            <a:srgbClr val="F5F7FA"/>
-          </a:solidFill>
-          <a:ln w="9525">
-            <a:solidFill>
-              <a:srgbClr val="D8DEE6"/>
-            </a:solidFill>
-            <a:prstDash val="solid"/>
-          </a:ln>
-        </p:spPr>
-      </p:sp>
-      <p:sp>
-        <p:nvSpPr>
-          <p:cNvPr id="7" name="Text 4"/>
-          <p:cNvSpPr txBox="1"/>
-          <p:nvPr/>
-        </p:nvSpPr>
-        <p:spPr>
-          <a:xfrm>
-            <a:off x="731520" y="3977640"/>
-            <a:ext cx="7680960" cy="411480"/>
+            <a:off x="502920" y="4160520"/>
+            <a:ext cx="8138160" cy="548640"/>
           </a:xfrm>
           <a:prstGeom prst="rect">
             <a:avLst/>
@@ -9491,7 +12272,7 @@
               <a:buNone/>
             </a:pPr>
             <a:r>
-              <a:rPr lang="en-US" sz="1250" i="1" dirty="0">
+              <a:rPr lang="en-US" sz="1200" i="1" dirty="0">
                 <a:solidFill>
                   <a:srgbClr val="64748B"/>
                 </a:solidFill>
@@ -9499,9 +12280,9 @@
                 <a:ea typeface="Arial" pitchFamily="34" charset="-122"/>
                 <a:cs typeface="Arial" pitchFamily="34" charset="-120"/>
               </a:rPr>
-              <a:t>Итоговая фраза — собираем из строк справа: «К [дата] мы получим [измеримый результат], проверяемый [способ проверки]»</a:t>
+              <a:t>💡 Оба столбца про одно и то же. Пишем SMART, вспоминаем по ЧИСТО.</a:t>
             </a:r>
-            <a:endParaRPr lang="en-US" sz="1250" dirty="0"/>
+            <a:endParaRPr lang="en-US" sz="1200" dirty="0"/>
           </a:p>
         </p:txBody>
       </p:sp>

--- a/zanyatiya/Zanyatie_02_Praktika1_Slaydy.pptx
+++ b/zanyatiya/Zanyatie_02_Praktika1_Slaydy.pptx
@@ -19,9 +19,10 @@
     <p:sldId id="267" r:id="rId13"/>
     <p:sldId id="268" r:id="rId14"/>
     <p:sldId id="269" r:id="rId15"/>
+    <p:sldId id="270" r:id="rId16"/>
   </p:sldIdLst>
   <p:notesMasterIdLst>
-    <p:notesMasterId r:id="rId16"/>
+    <p:notesMasterId r:id="rId17"/>
   </p:notesMasterIdLst>
   <p:sldSz cx="12192000" cy="6858000"/>
   <p:notesSz cx="6858000" cy="12192000"/>
@@ -603,7 +604,7 @@
           <a:p>
             <a:r>
               <a:rPr lang="en-US" dirty="0"/>
-              <a:t>Правый столбец пустой намеренно. На каждую строку — вопрос в зал. Число в букве M обязательно, даже приблизительное.</a:t>
+              <a:t/>
             </a:r>
             <a:endParaRPr lang="en-US" dirty="0"/>
           </a:p>
@@ -691,7 +692,7 @@
           <a:p>
             <a:r>
               <a:rPr lang="en-US" dirty="0"/>
-              <a:t>Показывать только ПОСЛЕ разбора на доске — это сверка, а не подсказка.</a:t>
+              <a:t>Правый столбец пустой намеренно. На каждую строку — вопрос в зал. Число в букве M обязательно, даже приблизительное.</a:t>
             </a:r>
             <a:endParaRPr lang="en-US" dirty="0"/>
           </a:p>
@@ -779,7 +780,7 @@
           <a:p>
             <a:r>
               <a:rPr lang="en-US" dirty="0"/>
-              <a:t>Не сокращать. Единственный блок, дающий итоговый артефакт занятия.</a:t>
+              <a:t>Показывать только ПОСЛЕ разбора на доске — это сверка, а не подсказка.</a:t>
             </a:r>
             <a:endParaRPr lang="en-US" dirty="0"/>
           </a:p>
@@ -867,7 +868,7 @@
           <a:p>
             <a:r>
               <a:rPr lang="en-US" dirty="0"/>
-              <a:t>Пять минут на поиск, пять на устный разбор в паре.</a:t>
+              <a:t>Не сокращать. Единственный блок, дающий итоговый артефакт занятия.</a:t>
             </a:r>
             <a:endParaRPr lang="en-US" dirty="0"/>
           </a:p>
@@ -955,7 +956,7 @@
           <a:p>
             <a:r>
               <a:rPr lang="en-US" dirty="0"/>
-              <a:t>Продиктовать и убедиться, что записали.</a:t>
+              <a:t>Пять минут на поиск, пять на устный разбор в паре.</a:t>
             </a:r>
             <a:endParaRPr lang="en-US" dirty="0"/>
           </a:p>
@@ -997,6 +998,94 @@
 </p:notes>
 </file>
 
+<file path=ppt/notesSlides/notesSlide15.xml><?xml version="1.0" encoding="utf-8"?>
+<p:notes xmlns:a="http://schemas.openxmlformats.org/drawingml/2006/main" xmlns:r="http://schemas.openxmlformats.org/officeDocument/2006/relationships" xmlns:p="http://schemas.openxmlformats.org/presentationml/2006/main">
+  <p:cSld>
+    <p:spTree>
+      <p:nvGrpSpPr>
+        <p:cNvPr id="1" name=""/>
+        <p:cNvGrpSpPr/>
+        <p:nvPr/>
+      </p:nvGrpSpPr>
+      <p:grpSpPr>
+        <a:xfrm>
+          <a:off x="0" y="0"/>
+          <a:ext cx="0" cy="0"/>
+          <a:chOff x="0" y="0"/>
+          <a:chExt cx="0" cy="0"/>
+        </a:xfrm>
+      </p:grpSpPr>
+      <p:sp>
+        <p:nvSpPr>
+          <p:cNvPr id="2" name="Slide Image Placeholder 1"/>
+          <p:cNvSpPr>
+            <a:spLocks noGrp="1" noRot="1" noChangeAspect="1"/>
+          </p:cNvSpPr>
+          <p:nvPr>
+            <p:ph type="sldImg"/>
+          </p:nvPr>
+        </p:nvSpPr>
+        <p:spPr/>
+      </p:sp>
+      <p:sp>
+        <p:nvSpPr>
+          <p:cNvPr id="3" name="Notes Placeholder 2"/>
+          <p:cNvSpPr>
+            <a:spLocks noGrp="1"/>
+          </p:cNvSpPr>
+          <p:nvPr>
+            <p:ph type="body" idx="1"/>
+          </p:nvPr>
+        </p:nvSpPr>
+        <p:spPr/>
+        <p:txBody>
+          <a:bodyPr/>
+          <a:lstStyle/>
+          <a:p>
+            <a:r>
+              <a:rPr lang="en-US" dirty="0"/>
+              <a:t>Продиктовать и убедиться, что записали.</a:t>
+            </a:r>
+            <a:endParaRPr lang="en-US" dirty="0"/>
+          </a:p>
+        </p:txBody>
+      </p:sp>
+      <p:sp>
+        <p:nvSpPr>
+          <p:cNvPr id="4" name="Slide Number Placeholder 3"/>
+          <p:cNvSpPr>
+            <a:spLocks noGrp="1"/>
+          </p:cNvSpPr>
+          <p:nvPr>
+            <p:ph type="sldNum" sz="quarter" idx="10"/>
+          </p:nvPr>
+        </p:nvSpPr>
+        <p:spPr/>
+        <p:txBody>
+          <a:bodyPr/>
+          <a:lstStyle/>
+          <a:p>
+            <a:fld id="{F7021451-1387-4CA6-816F-3879F97B5CBC}" type="slidenum">
+              <a:rPr lang="en-US"/>
+              <a:t>15</a:t>
+            </a:fld>
+            <a:endParaRPr lang="en-US"/>
+          </a:p>
+        </p:txBody>
+      </p:sp>
+    </p:spTree>
+    <p:extLst>
+      <p:ext uri="{BB962C8B-B14F-4D97-AF65-F5344CB8AC3E}">
+        <p14:creationId xmlns:p14="http://schemas.microsoft.com/office/powerpoint/2010/main" val="1024086991"/>
+      </p:ext>
+    </p:extLst>
+  </p:cSld>
+  <p:clrMapOvr>
+    <a:masterClrMapping/>
+  </p:clrMapOvr>
+</p:notes>
+</file>
+
 <file path=ppt/notesSlides/notesSlide2.xml><?xml version="1.0" encoding="utf-8"?>
 <p:notes xmlns:a="http://schemas.openxmlformats.org/drawingml/2006/main" xmlns:r="http://schemas.openxmlformats.org/officeDocument/2006/relationships" xmlns:p="http://schemas.openxmlformats.org/presentationml/2006/main">
   <p:cSld>
@@ -1219,7 +1308,7 @@
           <a:p>
             <a:r>
               <a:rPr lang="en-US" dirty="0"/>
-              <a:t>Таблица намеренно пустая. Порядок: «для кого» и «в отличие от чего» первыми — задают рамку; «что делаем» и «выгода» последними. Записывать ровно то, что говорит зал, и править на глазах. Тот же пример вернётся при разборе SMART.</a:t>
+              <a:t/>
             </a:r>
             <a:endParaRPr lang="en-US" dirty="0"/>
           </a:p>
@@ -1307,7 +1396,7 @@
           <a:p>
             <a:r>
               <a:rPr lang="en-US" dirty="0"/>
-              <a:t/>
+              <a:t>Таблица намеренно пустая. Порядок: «для кого» и «в отличие от чего» первыми — задают рамку; «что делаем» и «выгода» последними. Записывать ровно то, что говорит зал, и править на глазах. Тот же пример вернётся при разборе SMART.</a:t>
             </a:r>
             <a:endParaRPr lang="en-US" dirty="0"/>
           </a:p>
@@ -2206,6 +2295,45 @@
 <file path=ppt/slides/slide14.xml><?xml version="1.0" encoding="utf-8"?>
 <p:sld xmlns:a="http://schemas.openxmlformats.org/drawingml/2006/main" xmlns:r="http://schemas.openxmlformats.org/officeDocument/2006/relationships" xmlns:p="http://schemas.openxmlformats.org/presentationml/2006/main">
   <p:cSld name="Slide 14">
+    <p:bg>
+      <p:bgPr>
+        <a:blipFill dpi="0" rotWithShape="1">
+          <a:blip r:embed="rId1">
+            <a:lum/>
+          </a:blip>
+          <a:srcRect/>
+          <a:stretch>
+            <a:fillRect/>
+          </a:stretch>
+        </a:blipFill>
+        <a:effectLst/>
+      </p:bgPr>
+    </p:bg>
+    <p:spTree>
+      <p:nvGrpSpPr>
+        <p:cNvPr id="1" name=""/>
+        <p:cNvGrpSpPr/>
+        <p:nvPr/>
+      </p:nvGrpSpPr>
+      <p:grpSpPr>
+        <a:xfrm>
+          <a:off x="0" y="0"/>
+          <a:ext cx="0" cy="0"/>
+          <a:chOff x="0" y="0"/>
+          <a:chExt cx="0" cy="0"/>
+        </a:xfrm>
+      </p:grpSpPr>
+    </p:spTree>
+  </p:cSld>
+  <p:clrMapOvr>
+    <a:masterClrMapping/>
+  </p:clrMapOvr>
+</p:sld>
+</file>
+
+<file path=ppt/slides/slide15.xml><?xml version="1.0" encoding="utf-8"?>
+<p:sld xmlns:a="http://schemas.openxmlformats.org/drawingml/2006/main" xmlns:r="http://schemas.openxmlformats.org/officeDocument/2006/relationships" xmlns:p="http://schemas.openxmlformats.org/presentationml/2006/main">
+  <p:cSld name="Slide 15">
     <p:bg>
       <p:bgPr>
         <a:blipFill dpi="0" rotWithShape="1">
